--- a/soutenance/Soutenance_Corrosion_BATOUMBI.pptx
+++ b/soutenance/Soutenance_Corrosion_BATOUMBI.pptx
@@ -3540,7 +3540,25 @@
                 </a:solidFill>
                 <a:latin typeface="Calibri"/>
               </a:rPr>
-              <a:t>Sous la supervision de   </a:t>
+              <a:t>Sous l'encadrement de   </a:t>
+            </a:r>
+            <a:r>
+              <a:rPr sz="1500" b="1" i="0">
+                <a:solidFill>
+                  <a:srgbClr val="FFFFFF"/>
+                </a:solidFill>
+                <a:latin typeface="Calibri"/>
+              </a:rPr>
+              <a:t>M. FEZEU</a:t>
+            </a:r>
+            <a:r>
+              <a:rPr sz="1300" b="0" i="0">
+                <a:solidFill>
+                  <a:srgbClr val="6B7A82"/>
+                </a:solidFill>
+                <a:latin typeface="Calibri"/>
+              </a:rPr>
+              <a:t>      ·      Supervision   </a:t>
             </a:r>
             <a:r>
               <a:rPr sz="1500" b="1" i="0">
@@ -5893,14 +5911,14 @@
                 </a:solidFill>
                 <a:latin typeface="Georgia"/>
               </a:rPr>
-              <a:t>Jumeau numérique : prédire puis confirmer</a:t>
+              <a:t>Jumeau numérique : prédire, confirmer, apprendre des écarts</a:t>
             </a:r>
           </a:p>
         </p:txBody>
       </p:sp>
       <p:pic>
         <p:nvPicPr>
-          <p:cNvPr id="6" name="Picture 5" descr="fig_simulateur_run21_nonparam.png"/>
+          <p:cNvPr id="6" name="Picture 5" descr="fig_iii3_band_scorecard.png"/>
           <p:cNvPicPr>
             <a:picLocks noChangeAspect="1"/>
           </p:cNvPicPr>
@@ -5914,8 +5932,8 @@
         </p:blipFill>
         <p:spPr>
           <a:xfrm>
-            <a:off x="6355080" y="2343150"/>
-            <a:ext cx="5257800" cy="3086100"/>
+            <a:off x="6355080" y="2707165"/>
+            <a:ext cx="5257800" cy="2083749"/>
           </a:xfrm>
           <a:prstGeom prst="rect">
             <a:avLst/>
@@ -5931,7 +5949,7 @@
         <p:spPr>
           <a:xfrm>
             <a:off x="868680" y="2057400"/>
-            <a:ext cx="5303520" cy="1463040"/>
+            <a:ext cx="5303520" cy="1280160"/>
           </a:xfrm>
           <a:prstGeom prst="rect">
             <a:avLst/>
@@ -5962,7 +5980,7 @@
                 </a:solidFill>
                 <a:latin typeface="Calibri"/>
               </a:rPr>
-              <a:t>Un jumeau numérique calibré sur les essais réels génère une </a:t>
+              <a:t>Un jumeau calibré sur les essais réels génère une </a:t>
             </a:r>
             <a:r>
               <a:rPr sz="1400" b="1" i="0">
@@ -5980,29 +5998,25 @@
                 </a:solidFill>
                 <a:latin typeface="Calibri"/>
               </a:rPr>
-              <a:t>.</a:t>
-            </a:r>
-          </a:p>
-          <a:p>
-            <a:pPr algn="l">
-              <a:lnSpc>
-                <a:spcPct val="112000"/>
-              </a:lnSpc>
-              <a:spcBef>
-                <a:spcPts val="0"/>
-              </a:spcBef>
-              <a:spcAft>
-                <a:spcPts val="600"/>
-              </a:spcAft>
-            </a:pPr>
-            <a:r>
-              <a:rPr sz="1450" b="1" i="0">
+              <a:t> — l'un des </a:t>
+            </a:r>
+            <a:r>
+              <a:rPr sz="1400" b="1" i="0">
+                <a:solidFill>
+                  <a:srgbClr val="2C7A7B"/>
+                </a:solidFill>
+                <a:latin typeface="Calibri"/>
+              </a:rPr>
+              <a:t>trois estimateurs</a:t>
+            </a:r>
+            <a:r>
+              <a:rPr sz="1400" b="0" i="0">
                 <a:solidFill>
                   <a:srgbClr val="202B31"/>
                 </a:solidFill>
                 <a:latin typeface="Calibri"/>
               </a:rPr>
-              <a:t>Test « prédire-puis-confirmer » sur Run #21 :</a:t>
+              <a:t> confrontés en live (physique · XGBoost · jumeau).</a:t>
             </a:r>
           </a:p>
         </p:txBody>
@@ -6015,8 +6029,8 @@
         </p:nvSpPr>
         <p:spPr>
           <a:xfrm>
-            <a:off x="868680" y="3566160"/>
-            <a:ext cx="5303520" cy="1325880"/>
+            <a:off x="868680" y="3383280"/>
+            <a:ext cx="5303520" cy="1463040"/>
           </a:xfrm>
           <a:prstGeom prst="roundRect">
             <a:avLst/>
@@ -6061,8 +6075,8 @@
         </p:nvSpPr>
         <p:spPr>
           <a:xfrm>
-            <a:off x="1143000" y="3749039"/>
-            <a:ext cx="4846320" cy="1005840"/>
+            <a:off x="1143000" y="3547872"/>
+            <a:ext cx="4892040" cy="1143000"/>
           </a:xfrm>
           <a:prstGeom prst="rect">
             <a:avLst/>
@@ -6077,13 +6091,35 @@
           <a:p>
             <a:pPr algn="l">
               <a:lnSpc>
-                <a:spcPct val="115000"/>
-              </a:lnSpc>
-              <a:spcBef>
-                <a:spcPts val="0"/>
-              </a:spcBef>
-              <a:spcAft>
-                <a:spcPts val="700"/>
+                <a:spcPct val="112000"/>
+              </a:lnSpc>
+              <a:spcBef>
+                <a:spcPts val="0"/>
+              </a:spcBef>
+              <a:spcAft>
+                <a:spcPts val="400"/>
+              </a:spcAft>
+            </a:pPr>
+            <a:r>
+              <a:rPr sz="1300" b="1" i="0">
+                <a:solidFill>
+                  <a:srgbClr val="CADDDC"/>
+                </a:solidFill>
+                <a:latin typeface="Calibri"/>
+              </a:rPr>
+              <a:t>Deux tests « prédire-puis-confirmer » :</a:t>
+            </a:r>
+          </a:p>
+          <a:p>
+            <a:pPr algn="l">
+              <a:lnSpc>
+                <a:spcPct val="112000"/>
+              </a:lnSpc>
+              <a:spcBef>
+                <a:spcPts val="0"/>
+              </a:spcBef>
+              <a:spcAft>
+                <a:spcPts val="400"/>
               </a:spcAft>
             </a:pPr>
             <a:r>
@@ -6093,28 +6129,37 @@
                 </a:solidFill>
                 <a:latin typeface="Calibri"/>
               </a:rPr>
-              <a:t>Prédit avant l'essai : </a:t>
-            </a:r>
-            <a:r>
-              <a:rPr sz="1600" b="1" i="0">
+              <a:t>Run #21 : </a:t>
+            </a:r>
+            <a:r>
+              <a:rPr sz="1500" b="1" i="0">
                 <a:solidFill>
                   <a:srgbClr val="FFFFFF"/>
                 </a:solidFill>
                 <a:latin typeface="Georgia"/>
               </a:rPr>
-              <a:t>13 – 20,5 h</a:t>
+              <a:t>13,1 h</a:t>
+            </a:r>
+            <a:r>
+              <a:rPr sz="1250" b="1" i="0">
+                <a:solidFill>
+                  <a:srgbClr val="2C7A7B"/>
+                </a:solidFill>
+                <a:latin typeface="Calibri"/>
+              </a:rPr>
+              <a:t>   ✓ dans la bande</a:t>
             </a:r>
           </a:p>
           <a:p>
             <a:pPr algn="l">
               <a:lnSpc>
-                <a:spcPct val="115000"/>
-              </a:lnSpc>
-              <a:spcBef>
-                <a:spcPts val="0"/>
-              </a:spcBef>
-              <a:spcAft>
-                <a:spcPts val="700"/>
+                <a:spcPct val="112000"/>
+              </a:lnSpc>
+              <a:spcBef>
+                <a:spcPts val="0"/>
+              </a:spcBef>
+              <a:spcAft>
+                <a:spcPts val="400"/>
               </a:spcAft>
             </a:pPr>
             <a:r>
@@ -6124,25 +6169,25 @@
                 </a:solidFill>
                 <a:latin typeface="Calibri"/>
               </a:rPr>
-              <a:t>Rupture observée : </a:t>
-            </a:r>
-            <a:r>
-              <a:rPr sz="1600" b="1" i="0">
+              <a:t>Run #22 : </a:t>
+            </a:r>
+            <a:r>
+              <a:rPr sz="1500" b="1" i="0">
                 <a:solidFill>
                   <a:srgbClr val="C9601A"/>
                 </a:solidFill>
                 <a:latin typeface="Georgia"/>
               </a:rPr>
-              <a:t>13,1 h</a:t>
-            </a:r>
-            <a:r>
-              <a:rPr sz="1350" b="0" i="0">
-                <a:solidFill>
-                  <a:srgbClr val="FFFFFF"/>
-                </a:solidFill>
-                <a:latin typeface="Calibri"/>
-              </a:rPr>
-              <a:t>  ✓ dans la bande</a:t>
+              <a:t>11,95 h</a:t>
+            </a:r>
+            <a:r>
+              <a:rPr sz="1250" b="1" i="0">
+                <a:solidFill>
+                  <a:srgbClr val="C9601A"/>
+                </a:solidFill>
+                <a:latin typeface="Calibri"/>
+              </a:rPr>
+              <a:t>   ✗ en deçà (le plus rapide)</a:t>
             </a:r>
           </a:p>
         </p:txBody>
@@ -6155,8 +6200,8 @@
         </p:nvSpPr>
         <p:spPr>
           <a:xfrm>
-            <a:off x="868680" y="5166360"/>
-            <a:ext cx="5303520" cy="914400"/>
+            <a:off x="868680" y="5029200"/>
+            <a:ext cx="5303520" cy="1005840"/>
           </a:xfrm>
           <a:prstGeom prst="rect">
             <a:avLst/>
@@ -6171,7 +6216,7 @@
           <a:p>
             <a:pPr algn="l">
               <a:lnSpc>
-                <a:spcPct val="112000"/>
+                <a:spcPct val="108000"/>
               </a:lnSpc>
               <a:spcBef>
                 <a:spcPts val="0"/>
@@ -6181,31 +6226,67 @@
               </a:spcAft>
             </a:pPr>
             <a:r>
-              <a:rPr sz="1300" b="0" i="0">
+              <a:rPr sz="1250" b="0" i="0">
                 <a:solidFill>
                   <a:srgbClr val="202B31"/>
                 </a:solidFill>
                 <a:latin typeface="Calibri"/>
               </a:rPr>
-              <a:t>Enseignement : on ne prédit bien qu'une morphologie déjà observée </a:t>
-            </a:r>
-            <a:r>
-              <a:rPr sz="1300" b="1" i="0">
+              <a:t>Le jumeau </a:t>
+            </a:r>
+            <a:r>
+              <a:rPr sz="1250" b="1" i="0">
                 <a:solidFill>
                   <a:srgbClr val="C9601A"/>
                 </a:solidFill>
                 <a:latin typeface="Calibri"/>
               </a:rPr>
-              <a:t>≥ 2 fois</a:t>
-            </a:r>
-            <a:r>
-              <a:rPr sz="1300" b="0" i="0">
+              <a:t>interpole</a:t>
+            </a:r>
+            <a:r>
+              <a:rPr sz="1250" b="0" i="0">
                 <a:solidFill>
                   <a:srgbClr val="202B31"/>
                 </a:solidFill>
                 <a:latin typeface="Calibri"/>
               </a:rPr>
-              <a:t> — ce qui quantifie le besoin de répétition.</a:t>
+              <a:t> entre morphologies vues, il n'</a:t>
+            </a:r>
+            <a:r>
+              <a:rPr sz="1250" b="1" i="0">
+                <a:solidFill>
+                  <a:srgbClr val="C9601A"/>
+                </a:solidFill>
+                <a:latin typeface="Calibri"/>
+              </a:rPr>
+              <a:t>extrapole</a:t>
+            </a:r>
+            <a:r>
+              <a:rPr sz="1250" b="0" i="0">
+                <a:solidFill>
+                  <a:srgbClr val="202B31"/>
+                </a:solidFill>
+                <a:latin typeface="Calibri"/>
+              </a:rPr>
+              <a:t> pas. La prédictibilité tient à la répétition au sein d'une </a:t>
+            </a:r>
+            <a:r>
+              <a:rPr sz="1250" b="1" i="0">
+                <a:solidFill>
+                  <a:srgbClr val="2C7A7B"/>
+                </a:solidFill>
+                <a:latin typeface="Calibri"/>
+              </a:rPr>
+              <a:t>même morphologie</a:t>
+            </a:r>
+            <a:r>
+              <a:rPr sz="1250" b="0" i="0">
+                <a:solidFill>
+                  <a:srgbClr val="202B31"/>
+                </a:solidFill>
+                <a:latin typeface="Calibri"/>
+              </a:rPr>
+              <a:t>, pas au simple nombre d'essais.</a:t>
             </a:r>
           </a:p>
         </p:txBody>
@@ -14767,13 +14848,13 @@
           <a:p>
             <a:pPr algn="l">
               <a:lnSpc>
-                <a:spcPct val="110000"/>
-              </a:lnSpc>
-              <a:spcBef>
-                <a:spcPts val="0"/>
-              </a:spcBef>
-              <a:spcAft>
-                <a:spcPts val="1000"/>
+                <a:spcPct val="108000"/>
+              </a:lnSpc>
+              <a:spcBef>
+                <a:spcPts val="0"/>
+              </a:spcBef>
+              <a:spcAft>
+                <a:spcPts val="700"/>
               </a:spcAft>
             </a:pPr>
             <a:r>
@@ -14807,13 +14888,13 @@
           <a:p>
             <a:pPr algn="l">
               <a:lnSpc>
-                <a:spcPct val="110000"/>
-              </a:lnSpc>
-              <a:spcBef>
-                <a:spcPts val="0"/>
-              </a:spcBef>
-              <a:spcAft>
-                <a:spcPts val="1000"/>
+                <a:spcPct val="108000"/>
+              </a:lnSpc>
+              <a:spcBef>
+                <a:spcPts val="0"/>
+              </a:spcBef>
+              <a:spcAft>
+                <a:spcPts val="700"/>
               </a:spcAft>
             </a:pPr>
             <a:r>
@@ -14838,13 +14919,13 @@
           <a:p>
             <a:pPr algn="l">
               <a:lnSpc>
-                <a:spcPct val="110000"/>
-              </a:lnSpc>
-              <a:spcBef>
-                <a:spcPts val="0"/>
-              </a:spcBef>
-              <a:spcAft>
-                <a:spcPts val="1000"/>
+                <a:spcPct val="108000"/>
+              </a:lnSpc>
+              <a:spcBef>
+                <a:spcPts val="0"/>
+              </a:spcBef>
+              <a:spcAft>
+                <a:spcPts val="700"/>
               </a:spcAft>
             </a:pPr>
             <a:r>
@@ -14869,13 +14950,13 @@
           <a:p>
             <a:pPr algn="l">
               <a:lnSpc>
-                <a:spcPct val="110000"/>
-              </a:lnSpc>
-              <a:spcBef>
-                <a:spcPts val="0"/>
-              </a:spcBef>
-              <a:spcAft>
-                <a:spcPts val="1000"/>
+                <a:spcPct val="108000"/>
+              </a:lnSpc>
+              <a:spcBef>
+                <a:spcPts val="0"/>
+              </a:spcBef>
+              <a:spcAft>
+                <a:spcPts val="700"/>
               </a:spcAft>
             </a:pPr>
             <a:r>
@@ -14900,13 +14981,13 @@
           <a:p>
             <a:pPr algn="l">
               <a:lnSpc>
-                <a:spcPct val="110000"/>
-              </a:lnSpc>
-              <a:spcBef>
-                <a:spcPts val="0"/>
-              </a:spcBef>
-              <a:spcAft>
-                <a:spcPts val="1000"/>
+                <a:spcPct val="108000"/>
+              </a:lnSpc>
+              <a:spcBef>
+                <a:spcPts val="0"/>
+              </a:spcBef>
+              <a:spcAft>
+                <a:spcPts val="700"/>
               </a:spcAft>
             </a:pPr>
             <a:r>
@@ -14916,6 +14997,37 @@
                 </a:solidFill>
                 <a:latin typeface="Georgia"/>
               </a:rPr>
+              <a:t>Étalonnage — </a:t>
+            </a:r>
+            <a:r>
+              <a:rPr sz="1300" b="0" i="0">
+                <a:solidFill>
+                  <a:srgbClr val="202B31"/>
+                </a:solidFill>
+                <a:latin typeface="Calibri"/>
+              </a:rPr>
+              <a:t>par substitution sur résistances étalons ; un étalon de 4,7 Ω, lu 4,5–4,8 Ω, confirme la justesse (écart ≤ 4 %).</a:t>
+            </a:r>
+          </a:p>
+          <a:p>
+            <a:pPr algn="l">
+              <a:lnSpc>
+                <a:spcPct val="108000"/>
+              </a:lnSpc>
+              <a:spcBef>
+                <a:spcPts val="0"/>
+              </a:spcBef>
+              <a:spcAft>
+                <a:spcPts val="700"/>
+              </a:spcAft>
+            </a:pPr>
+            <a:r>
+              <a:rPr sz="1400" b="1" i="0">
+                <a:solidFill>
+                  <a:srgbClr val="202B31"/>
+                </a:solidFill>
+                <a:latin typeface="Georgia"/>
+              </a:rPr>
               <a:t>Température — </a:t>
             </a:r>
             <a:r>
@@ -14925,7 +15037,7 @@
                 </a:solidFill>
                 <a:latin typeface="Calibri"/>
               </a:rPr>
-              <a:t>DS18B20 protégé (tube + huile) pour un couplage thermique fiable ; cadence 30 s.</a:t>
+              <a:t>DS18B20 protégé (tube + huile) ; cadence 30 s.</a:t>
             </a:r>
           </a:p>
         </p:txBody>
@@ -15924,7 +16036,7 @@
       </p:sp>
       <p:pic>
         <p:nvPicPr>
-          <p:cNvPr id="6" name="Picture 5" descr="fig_iii3_r2_runs.png"/>
+          <p:cNvPr id="6" name="Picture 5" descr="fig_iii3_loro_evolution.png"/>
           <p:cNvPicPr>
             <a:picLocks noChangeAspect="1"/>
           </p:cNvPicPr>
@@ -15938,8 +16050,8 @@
         </p:blipFill>
         <p:spPr>
           <a:xfrm>
-            <a:off x="6446520" y="2792002"/>
-            <a:ext cx="5166360" cy="2554155"/>
+            <a:off x="6446520" y="2464736"/>
+            <a:ext cx="5166360" cy="3162966"/>
           </a:xfrm>
           <a:prstGeom prst="rect">
             <a:avLst/>
@@ -16041,7 +16153,7 @@
                 </a:solidFill>
                 <a:latin typeface="Calibri"/>
               </a:rPr>
-              <a:t>  (moy. LORO)</a:t>
+              <a:t>  (LORO actuel)</a:t>
             </a:r>
           </a:p>
         </p:txBody>
@@ -16086,7 +16198,7 @@
                 </a:solidFill>
                 <a:latin typeface="Calibri"/>
               </a:rPr>
-              <a:t>Run #12 : +0,50   ·   Run #16 : +0,07   —   bat les baselines</a:t>
+              <a:t>depuis −1,77 (couverture nulle)   —   bat les baselines</a:t>
             </a:r>
           </a:p>
         </p:txBody>
@@ -16115,23 +16227,63 @@
           <a:p>
             <a:pPr algn="l">
               <a:lnSpc>
-                <a:spcPct val="112000"/>
-              </a:lnSpc>
-              <a:spcBef>
-                <a:spcPts val="0"/>
-              </a:spcBef>
-              <a:spcAft>
-                <a:spcPts val="800"/>
-              </a:spcAft>
-            </a:pPr>
-            <a:r>
-              <a:rPr sz="1400" b="0" i="0">
+                <a:spcPct val="110000"/>
+              </a:lnSpc>
+              <a:spcBef>
+                <a:spcPts val="0"/>
+              </a:spcBef>
+              <a:spcAft>
+                <a:spcPts val="700"/>
+              </a:spcAft>
+            </a:pPr>
+            <a:r>
+              <a:rPr sz="1350" b="0" i="0">
                 <a:solidFill>
                   <a:srgbClr val="202B31"/>
                 </a:solidFill>
                 <a:latin typeface="Calibri"/>
               </a:rPr>
-              <a:t>Le résultat marquant n'est pas la valeur, mais sa </a:t>
+              <a:t>Une trajectoire, pas un point — couvrir et </a:t>
+            </a:r>
+            <a:r>
+              <a:rPr sz="1350" b="1" i="0">
+                <a:solidFill>
+                  <a:srgbClr val="2C7A7B"/>
+                </a:solidFill>
+                <a:latin typeface="Calibri"/>
+              </a:rPr>
+              <a:t>répéter</a:t>
+            </a:r>
+            <a:r>
+              <a:rPr sz="1350" b="0" i="0">
+                <a:solidFill>
+                  <a:srgbClr val="202B31"/>
+                </a:solidFill>
+                <a:latin typeface="Calibri"/>
+              </a:rPr>
+              <a:t> les conditions 30 °C a fait passer le LORO de −1,77 à +0,29.</a:t>
+            </a:r>
+          </a:p>
+          <a:p>
+            <a:pPr algn="l">
+              <a:lnSpc>
+                <a:spcPct val="110000"/>
+              </a:lnSpc>
+              <a:spcBef>
+                <a:spcPts val="0"/>
+              </a:spcBef>
+              <a:spcAft>
+                <a:spcPts val="700"/>
+              </a:spcAft>
+            </a:pPr>
+            <a:r>
+              <a:rPr sz="1350" b="0" i="0">
+                <a:solidFill>
+                  <a:srgbClr val="202B31"/>
+                </a:solidFill>
+                <a:latin typeface="Calibri"/>
+              </a:rPr>
+              <a:t>L'apport n'est pas la valeur mais la </a:t>
             </a:r>
             <a:r>
               <a:rPr sz="1400" b="1" i="0">
@@ -16143,93 +16295,53 @@
               <a:t>structure</a:t>
             </a:r>
             <a:r>
-              <a:rPr sz="1400" b="0" i="0">
+              <a:rPr sz="1350" b="0" i="0">
                 <a:solidFill>
                   <a:srgbClr val="202B31"/>
                 </a:solidFill>
                 <a:latin typeface="Calibri"/>
               </a:rPr>
-              <a:t> :</a:t>
+              <a:t> du R² : positif si conditions couvertes et répétées, négatif sinon.</a:t>
             </a:r>
           </a:p>
           <a:p>
             <a:pPr algn="l">
               <a:lnSpc>
-                <a:spcPct val="112000"/>
-              </a:lnSpc>
-              <a:spcBef>
-                <a:spcPts val="0"/>
-              </a:spcBef>
-              <a:spcAft>
-                <a:spcPts val="800"/>
-              </a:spcAft>
-            </a:pPr>
-            <a:r>
-              <a:rPr sz="1350" b="0" i="0">
+                <a:spcPct val="110000"/>
+              </a:lnSpc>
+              <a:spcBef>
+                <a:spcPts val="0"/>
+              </a:spcBef>
+              <a:spcAft>
+                <a:spcPts val="700"/>
+              </a:spcAft>
+            </a:pPr>
+            <a:r>
+              <a:rPr sz="1250" b="0" i="0">
                 <a:solidFill>
                   <a:srgbClr val="202B31"/>
                 </a:solidFill>
                 <a:latin typeface="Calibri"/>
               </a:rPr>
-              <a:t>positif là où les conditions du run testé sont </a:t>
-            </a:r>
-            <a:r>
-              <a:rPr sz="1350" b="1" i="0">
-                <a:solidFill>
-                  <a:srgbClr val="2C7A7B"/>
-                </a:solidFill>
-                <a:latin typeface="Calibri"/>
-              </a:rPr>
-              <a:t>couvertes et répétées</a:t>
-            </a:r>
-            <a:r>
-              <a:rPr sz="1350" b="0" i="0">
+              <a:t>Ajouter une morphologie non appariée le ramène à ≈ +0,20 — métrique encore </a:t>
+            </a:r>
+            <a:r>
+              <a:rPr sz="1250" b="1" i="0">
+                <a:solidFill>
+                  <a:srgbClr val="C9601A"/>
+                </a:solidFill>
+                <a:latin typeface="Calibri"/>
+              </a:rPr>
+              <a:t>bruitée</a:t>
+            </a:r>
+            <a:r>
+              <a:rPr sz="1250" b="0" i="0">
                 <a:solidFill>
                   <a:srgbClr val="202B31"/>
                 </a:solidFill>
                 <a:latin typeface="Calibri"/>
               </a:rPr>
-              <a:t>, négatif sinon.</a:t>
-            </a:r>
-          </a:p>
-          <a:p>
-            <a:pPr algn="l">
-              <a:lnSpc>
-                <a:spcPct val="112000"/>
-              </a:lnSpc>
-              <a:spcBef>
-                <a:spcPts val="0"/>
-              </a:spcBef>
-              <a:spcAft>
-                <a:spcPts val="800"/>
-              </a:spcAft>
-            </a:pPr>
-            <a:r>
-              <a:rPr sz="1350" b="0" i="0">
-                <a:solidFill>
-                  <a:srgbClr val="202B31"/>
-                </a:solidFill>
-                <a:latin typeface="Calibri"/>
-              </a:rPr>
-              <a:t>Ce n'est pas le volume brut qui compte, mais la </a:t>
-            </a:r>
-            <a:r>
-              <a:rPr sz="1350" b="1" i="0">
-                <a:solidFill>
-                  <a:srgbClr val="202B31"/>
-                </a:solidFill>
-                <a:latin typeface="Calibri"/>
-              </a:rPr>
-              <a:t>répétabilité des conditions</a:t>
-            </a:r>
-            <a:r>
-              <a:rPr sz="1350" b="0" i="0">
-                <a:solidFill>
-                  <a:srgbClr val="202B31"/>
-                </a:solidFill>
-                <a:latin typeface="Calibri"/>
-              </a:rPr>
-              <a:t>.</a:t>
+              <a:t> (peu d'essais).</a:t>
             </a:r>
           </a:p>
         </p:txBody>

--- a/soutenance/Soutenance_Corrosion_BATOUMBI.pptx
+++ b/soutenance/Soutenance_Corrosion_BATOUMBI.pptx
@@ -3276,7 +3276,7 @@
                 </a:solidFill>
                 <a:latin typeface="Calibri"/>
               </a:rPr>
-              <a:t>RÉPUBLIQUE DU CAMEROUN  ·  ESTL LA SALLE — GÉNIE INDUSTRIEL &amp; MAINTENANCE</a:t>
+              <a:t>RÉPUBLIQUE DU CAMEROUN  ·  ESTL LA SALLE, GÉNIE INDUSTRIEL &amp; MAINTENANCE</a:t>
             </a:r>
           </a:p>
         </p:txBody>
@@ -3321,7 +3321,7 @@
                 </a:solidFill>
                 <a:latin typeface="Calibri"/>
               </a:rPr>
-              <a:t>Mémoire de Master 2 — Maintenance Industrielle et Productique</a:t>
+              <a:t>Mémoire de Master 2, Maintenance Industrielle et Productique</a:t>
             </a:r>
           </a:p>
         </p:txBody>
@@ -3763,7 +3763,7 @@
                 </a:solidFill>
                 <a:latin typeface="Calibri"/>
               </a:rPr>
-              <a:t>RÉSULTATS — OS3</a:t>
+              <a:t>RÉSULTATS, OS3</a:t>
             </a:r>
           </a:p>
         </p:txBody>
@@ -4033,7 +4033,7 @@
                 </a:solidFill>
                 <a:latin typeface="Calibri"/>
               </a:rPr>
-              <a:t>Run #15 — </a:t>
+              <a:t>Run #15, </a:t>
             </a:r>
             <a:r>
               <a:rPr sz="1250" b="0" i="0">
@@ -4131,7 +4131,7 @@
                 </a:solidFill>
                 <a:latin typeface="Calibri"/>
               </a:rPr>
-              <a:t>Run #17 — </a:t>
+              <a:t>Run #17, </a:t>
             </a:r>
             <a:r>
               <a:rPr sz="1250" b="0" i="0">
@@ -4937,7 +4937,7 @@
                 </a:solidFill>
                 <a:latin typeface="Calibri"/>
               </a:rPr>
-              <a:t>RÉSULTATS — OS4</a:t>
+              <a:t>RÉSULTATS, OS4</a:t>
             </a:r>
           </a:p>
         </p:txBody>
@@ -5085,7 +5085,7 @@
                 </a:solidFill>
                 <a:latin typeface="Calibri"/>
               </a:rPr>
-              <a:t> (CR, RUL, régime, section) est généré et tracé — sans appel externe.</a:t>
+              <a:t> (CR, RUL, régime, section) est généré et tracé, sans appel externe.</a:t>
             </a:r>
           </a:p>
         </p:txBody>
@@ -5445,7 +5445,7 @@
                 </a:solidFill>
                 <a:latin typeface="Calibri"/>
               </a:rPr>
-              <a:t>coût de licence nul — accessible aux PME africaines</a:t>
+              <a:t>coût de licence nul, accessible aux PME africaines</a:t>
             </a:r>
           </a:p>
         </p:txBody>
@@ -5998,7 +5998,7 @@
                 </a:solidFill>
                 <a:latin typeface="Calibri"/>
               </a:rPr>
-              <a:t> — l'un des </a:t>
+              <a:t>, l'un des </a:t>
             </a:r>
             <a:r>
               <a:rPr sz="1400" b="1" i="0">
@@ -6707,7 +6707,7 @@
                 </a:solidFill>
                 <a:latin typeface="Georgia"/>
               </a:rPr>
-              <a:t>Matériau  —  </a:t>
+              <a:t>Matériau ,  </a:t>
             </a:r>
             <a:r>
               <a:rPr sz="1350" b="0" i="0">
@@ -6851,7 +6851,7 @@
                 </a:solidFill>
                 <a:latin typeface="Georgia"/>
               </a:rPr>
-              <a:t>Effet acide-shunt  —  </a:t>
+              <a:t>Effet acide-shunt ,  </a:t>
             </a:r>
             <a:r>
               <a:rPr sz="1350" b="0" i="0">
@@ -6860,7 +6860,7 @@
                 </a:solidFill>
                 <a:latin typeface="Calibri"/>
               </a:rPr>
-              <a:t>en HCl concentré, l'électrolyte shunte la mesure — d'où l'emploi d'un fil fin.</a:t>
+              <a:t>en HCl concentré, l'électrolyte shunte la mesure, d'où l'emploi d'un fil fin.</a:t>
             </a:r>
           </a:p>
         </p:txBody>
@@ -6995,7 +6995,7 @@
                 </a:solidFill>
                 <a:latin typeface="Georgia"/>
               </a:rPr>
-              <a:t>Jeu de données  —  </a:t>
+              <a:t>Jeu de données ,  </a:t>
             </a:r>
             <a:r>
               <a:rPr sz="1350" b="0" i="0">
@@ -7139,7 +7139,7 @@
                 </a:solidFill>
                 <a:latin typeface="Georgia"/>
               </a:rPr>
-              <a:t>Couverture thermique  —  </a:t>
+              <a:t>Couverture thermique ,  </a:t>
             </a:r>
             <a:r>
               <a:rPr sz="1350" b="0" i="0">
@@ -7599,7 +7599,7 @@
                 </a:solidFill>
                 <a:latin typeface="Calibri"/>
               </a:rPr>
-              <a:t>La fiabilité du ML se lit dans la STRUCTURE du R² (positif si conditions couvertes et répétées) — rarement explicité dans la littérature.</a:t>
+              <a:t>La fiabilité du ML se lit dans la STRUCTURE du R² (positif si conditions couvertes et répétées), rarement explicité dans la littérature.</a:t>
             </a:r>
           </a:p>
         </p:txBody>
@@ -8343,7 +8343,7 @@
                 </a:solidFill>
                 <a:latin typeface="Georgia"/>
               </a:rPr>
-              <a:t>OS1 — </a:t>
+              <a:t>OS1, </a:t>
             </a:r>
             <a:r>
               <a:rPr sz="1400" b="0" i="0">
@@ -8450,7 +8450,7 @@
                 </a:solidFill>
                 <a:latin typeface="Georgia"/>
               </a:rPr>
-              <a:t>OS2 — </a:t>
+              <a:t>OS2, </a:t>
             </a:r>
             <a:r>
               <a:rPr sz="1400" b="0" i="0">
@@ -8459,7 +8459,7 @@
                 </a:solidFill>
                 <a:latin typeface="Calibri"/>
               </a:rPr>
-              <a:t>XGBoost prédit le CR et surpasse les baselines — sous condition de couverture.</a:t>
+              <a:t>XGBoost prédit le CR et surpasse les baselines, sous condition de couverture.</a:t>
             </a:r>
           </a:p>
         </p:txBody>
@@ -8557,7 +8557,7 @@
                 </a:solidFill>
                 <a:latin typeface="Georgia"/>
               </a:rPr>
-              <a:t>OS3 — </a:t>
+              <a:t>OS3, </a:t>
             </a:r>
             <a:r>
               <a:rPr sz="1400" b="0" i="0">
@@ -8664,7 +8664,7 @@
                 </a:solidFill>
                 <a:latin typeface="Georgia"/>
               </a:rPr>
-              <a:t>OS4 — </a:t>
+              <a:t>OS4, </a:t>
             </a:r>
             <a:r>
               <a:rPr sz="1400" b="0" i="0">
@@ -8718,7 +8718,7 @@
                 </a:solidFill>
                 <a:latin typeface="Calibri"/>
               </a:rPr>
-              <a:t>Objectifs partiellement atteints et en voie de consolidation — </a:t>
+              <a:t>Objectifs partiellement atteints et en voie de consolidation, </a:t>
             </a:r>
             <a:r>
               <a:rPr sz="1450" b="0" i="1">
@@ -9124,7 +9124,7 @@
                 </a:solidFill>
                 <a:latin typeface="Calibri"/>
               </a:rPr>
-              <a:t>Master 2 — Maintenance Industrielle et Productique  ·  ESTL La Salle  ·  2025–2026</a:t>
+              <a:t>Master 2, Maintenance Industrielle et Productique  ·  ESTL La Salle  ·  2025–2026</a:t>
             </a:r>
           </a:p>
         </p:txBody>
@@ -11432,7 +11432,7 @@
                 </a:solidFill>
                 <a:latin typeface="Georgia"/>
               </a:rPr>
-              <a:t>Pas de corrélation — </a:t>
+              <a:t>Pas de corrélation, </a:t>
             </a:r>
             <a:r>
               <a:rPr sz="1350" b="0" i="0">
@@ -11530,7 +11530,7 @@
                 </a:solidFill>
                 <a:latin typeface="Georgia"/>
               </a:rPr>
-              <a:t>Pas de RUL — </a:t>
+              <a:t>Pas de RUL, </a:t>
             </a:r>
             <a:r>
               <a:rPr sz="1350" b="0" i="0">
@@ -11628,7 +11628,7 @@
                 </a:solidFill>
                 <a:latin typeface="Georgia"/>
               </a:rPr>
-              <a:t>Boucle non prédictive — </a:t>
+              <a:t>Boucle non prédictive, </a:t>
             </a:r>
             <a:r>
               <a:rPr sz="1350" b="0" i="0">
@@ -11817,7 +11817,7 @@
                 </a:solidFill>
                 <a:latin typeface="Calibri"/>
               </a:rPr>
-              <a:t>Dans quelle mesure un système intégré — sonde ER instrumentée (ESP32/HX711/DS18B20), modèle XGBoost à double sortie CR + RUL en protocole </a:t>
+              <a:t>Dans quelle mesure un système intégré, sonde ER instrumentée (ESP32/HX711/DS18B20), modèle XGBoost à double sortie CR + RUL en protocole </a:t>
             </a:r>
             <a:r>
               <a:rPr sz="1450" b="0" i="1">
@@ -11835,7 +11835,7 @@
                 </a:solidFill>
                 <a:latin typeface="Calibri"/>
               </a:rPr>
-              <a:t>, et boucle décision → action — permet-il d'opérer la transition I3.0 → 4.0, transposable à COTCO comme aux PME industrielles africaines ?</a:t>
+              <a:t>, et boucle décision → action, permet-il d'opérer la transition I3.0 → 4.0, transposable à COTCO comme aux PME industrielles africaines ?</a:t>
             </a:r>
           </a:p>
         </p:txBody>
@@ -14750,7 +14750,7 @@
                 </a:solidFill>
                 <a:latin typeface="Calibri"/>
               </a:rPr>
-              <a:t>OS1 — DÉTECTION</a:t>
+              <a:t>OS1, DÉTECTION</a:t>
             </a:r>
           </a:p>
         </p:txBody>
@@ -14864,7 +14864,7 @@
                 </a:solidFill>
                 <a:latin typeface="Georgia"/>
               </a:rPr>
-              <a:t>Principe — </a:t>
+              <a:t>Principe, </a:t>
             </a:r>
             <a:r>
               <a:rPr sz="1300" b="0" i="0">
@@ -14904,7 +14904,7 @@
                 </a:solidFill>
                 <a:latin typeface="Georgia"/>
               </a:rPr>
-              <a:t>Montage retenu — </a:t>
+              <a:t>Montage retenu, </a:t>
             </a:r>
             <a:r>
               <a:rPr sz="1300" b="0" i="0">
@@ -14935,7 +14935,7 @@
                 </a:solidFill>
                 <a:latin typeface="Georgia"/>
               </a:rPr>
-              <a:t>Pont de Wheatstone abandonné — </a:t>
+              <a:t>Pont de Wheatstone abandonné, </a:t>
             </a:r>
             <a:r>
               <a:rPr sz="1300" b="0" i="0">
@@ -14966,7 +14966,7 @@
                 </a:solidFill>
                 <a:latin typeface="Georgia"/>
               </a:rPr>
-              <a:t>Valeurs justifiées — </a:t>
+              <a:t>Valeurs justifiées, </a:t>
             </a:r>
             <a:r>
               <a:rPr sz="1300" b="0" i="0">
@@ -14997,7 +14997,7 @@
                 </a:solidFill>
                 <a:latin typeface="Georgia"/>
               </a:rPr>
-              <a:t>Étalonnage — </a:t>
+              <a:t>Étalonnage, </a:t>
             </a:r>
             <a:r>
               <a:rPr sz="1300" b="0" i="0">
@@ -15028,7 +15028,7 @@
                 </a:solidFill>
                 <a:latin typeface="Georgia"/>
               </a:rPr>
-              <a:t>Température — </a:t>
+              <a:t>Température, </a:t>
             </a:r>
             <a:r>
               <a:rPr sz="1300" b="0" i="0">
@@ -15278,7 +15278,7 @@
                 </a:solidFill>
                 <a:latin typeface="Calibri"/>
               </a:rPr>
-              <a:t>OS2 — PRONOSTIC</a:t>
+              <a:t>OS2, PRONOSTIC</a:t>
             </a:r>
           </a:p>
         </p:txBody>
@@ -15984,7 +15984,7 @@
                 </a:solidFill>
                 <a:latin typeface="Calibri"/>
               </a:rPr>
-              <a:t>RÉSULTATS — OS2</a:t>
+              <a:t>RÉSULTATS, OS2</a:t>
             </a:r>
           </a:p>
         </p:txBody>
@@ -16029,7 +16029,7 @@
                 </a:solidFill>
                 <a:latin typeface="Georgia"/>
               </a:rPr>
-              <a:t>Le modèle généralise — là où les conditions sont couvertes</a:t>
+              <a:t>Le modèle généralise, là où les conditions sont couvertes</a:t>
             </a:r>
           </a:p>
         </p:txBody>
@@ -16198,7 +16198,7 @@
                 </a:solidFill>
                 <a:latin typeface="Calibri"/>
               </a:rPr>
-              <a:t>depuis −1,77 (couverture nulle)   —   bat les baselines</a:t>
+              <a:t>depuis −1,77 (couverture nulle), bat les baselines</a:t>
             </a:r>
           </a:p>
         </p:txBody>
@@ -16243,7 +16243,7 @@
                 </a:solidFill>
                 <a:latin typeface="Calibri"/>
               </a:rPr>
-              <a:t>Une trajectoire, pas un point — couvrir et </a:t>
+              <a:t>Une trajectoire, pas un point, couvrir et </a:t>
             </a:r>
             <a:r>
               <a:rPr sz="1350" b="1" i="0">
@@ -16323,7 +16323,7 @@
                 </a:solidFill>
                 <a:latin typeface="Calibri"/>
               </a:rPr>
-              <a:t>Ajouter une morphologie non appariée le ramène à ≈ +0,20 — métrique encore </a:t>
+              <a:t>Ajouter une morphologie non appariée le ramène à ≈ +0,20, métrique encore </a:t>
             </a:r>
             <a:r>
               <a:rPr sz="1250" b="1" i="0">

--- a/soutenance/Soutenance_Corrosion_BATOUMBI.pptx
+++ b/soutenance/Soutenance_Corrosion_BATOUMBI.pptx
@@ -3763,7 +3763,7 @@
                 </a:solidFill>
                 <a:latin typeface="Calibri"/>
               </a:rPr>
-              <a:t>RÉSULTATS, OS3</a:t>
+              <a:t>RÉSULTATS · OS3</a:t>
             </a:r>
           </a:p>
         </p:txBody>
@@ -4033,7 +4033,7 @@
                 </a:solidFill>
                 <a:latin typeface="Calibri"/>
               </a:rPr>
-              <a:t>Run #15, </a:t>
+              <a:t>Run #15 : </a:t>
             </a:r>
             <a:r>
               <a:rPr sz="1250" b="0" i="0">
@@ -4131,7 +4131,7 @@
                 </a:solidFill>
                 <a:latin typeface="Calibri"/>
               </a:rPr>
-              <a:t>Run #17, </a:t>
+              <a:t>Run #17 : </a:t>
             </a:r>
             <a:r>
               <a:rPr sz="1250" b="0" i="0">
@@ -4937,7 +4937,7 @@
                 </a:solidFill>
                 <a:latin typeface="Calibri"/>
               </a:rPr>
-              <a:t>RÉSULTATS, OS4</a:t>
+              <a:t>RÉSULTATS · OS4</a:t>
             </a:r>
           </a:p>
         </p:txBody>
@@ -6707,7 +6707,7 @@
                 </a:solidFill>
                 <a:latin typeface="Georgia"/>
               </a:rPr>
-              <a:t>Matériau ,  </a:t>
+              <a:t>Matériau : </a:t>
             </a:r>
             <a:r>
               <a:rPr sz="1350" b="0" i="0">
@@ -6851,7 +6851,7 @@
                 </a:solidFill>
                 <a:latin typeface="Georgia"/>
               </a:rPr>
-              <a:t>Effet acide-shunt ,  </a:t>
+              <a:t>Effet acide-shunt : </a:t>
             </a:r>
             <a:r>
               <a:rPr sz="1350" b="0" i="0">
@@ -6995,7 +6995,7 @@
                 </a:solidFill>
                 <a:latin typeface="Georgia"/>
               </a:rPr>
-              <a:t>Jeu de données ,  </a:t>
+              <a:t>Jeu de données : </a:t>
             </a:r>
             <a:r>
               <a:rPr sz="1350" b="0" i="0">
@@ -7139,7 +7139,7 @@
                 </a:solidFill>
                 <a:latin typeface="Georgia"/>
               </a:rPr>
-              <a:t>Couverture thermique ,  </a:t>
+              <a:t>Couverture thermique : </a:t>
             </a:r>
             <a:r>
               <a:rPr sz="1350" b="0" i="0">
@@ -8343,7 +8343,7 @@
                 </a:solidFill>
                 <a:latin typeface="Georgia"/>
               </a:rPr>
-              <a:t>OS1, </a:t>
+              <a:t>OS1 : </a:t>
             </a:r>
             <a:r>
               <a:rPr sz="1400" b="0" i="0">
@@ -8450,7 +8450,7 @@
                 </a:solidFill>
                 <a:latin typeface="Georgia"/>
               </a:rPr>
-              <a:t>OS2, </a:t>
+              <a:t>OS2 : </a:t>
             </a:r>
             <a:r>
               <a:rPr sz="1400" b="0" i="0">
@@ -8557,7 +8557,7 @@
                 </a:solidFill>
                 <a:latin typeface="Georgia"/>
               </a:rPr>
-              <a:t>OS3, </a:t>
+              <a:t>OS3 : </a:t>
             </a:r>
             <a:r>
               <a:rPr sz="1400" b="0" i="0">
@@ -8664,7 +8664,7 @@
                 </a:solidFill>
                 <a:latin typeface="Georgia"/>
               </a:rPr>
-              <a:t>OS4, </a:t>
+              <a:t>OS4 : </a:t>
             </a:r>
             <a:r>
               <a:rPr sz="1400" b="0" i="0">
@@ -8718,7 +8718,7 @@
                 </a:solidFill>
                 <a:latin typeface="Calibri"/>
               </a:rPr>
-              <a:t>Objectifs partiellement atteints et en voie de consolidation, </a:t>
+              <a:t>Objectifs partiellement atteints, en cours de consolidation. </a:t>
             </a:r>
             <a:r>
               <a:rPr sz="1450" b="0" i="1">
@@ -8727,7 +8727,7 @@
                 </a:solidFill>
                 <a:latin typeface="Calibri"/>
               </a:rPr>
-              <a:t>un prototype doublement transposable, de la mesure à la décision.</a:t>
+              <a:t>Mais un prototype qui va de la mesure à la décision, transposable des deux côtés.</a:t>
             </a:r>
           </a:p>
         </p:txBody>
@@ -11039,7 +11039,7 @@
                 </a:solidFill>
                 <a:latin typeface="Calibri"/>
               </a:rPr>
-              <a:t>→ C'est précisément la transition </a:t>
+              <a:t>C'est la transition </a:t>
             </a:r>
             <a:r>
               <a:rPr sz="1450" b="1" i="0">
@@ -11048,7 +11048,7 @@
                 </a:solidFill>
                 <a:latin typeface="Calibri"/>
               </a:rPr>
-              <a:t>Industrie 3.0 → Industrie 4.0</a:t>
+              <a:t>Industrie 3.0 → 4.0</a:t>
             </a:r>
             <a:r>
               <a:rPr sz="1450" b="1" i="0">
@@ -11057,7 +11057,7 @@
                 </a:solidFill>
                 <a:latin typeface="Calibri"/>
               </a:rPr>
-              <a:t> que ce travail propose d'opérer, à coût maîtrisé.</a:t>
+              <a:t> que ce travail engage, à coût maîtrisé.</a:t>
             </a:r>
           </a:p>
         </p:txBody>
@@ -11432,7 +11432,7 @@
                 </a:solidFill>
                 <a:latin typeface="Georgia"/>
               </a:rPr>
-              <a:t>Pas de corrélation, </a:t>
+              <a:t>Pas de corrélation : </a:t>
             </a:r>
             <a:r>
               <a:rPr sz="1350" b="0" i="0">
@@ -11530,7 +11530,7 @@
                 </a:solidFill>
                 <a:latin typeface="Georgia"/>
               </a:rPr>
-              <a:t>Pas de RUL, </a:t>
+              <a:t>Pas de RUL : </a:t>
             </a:r>
             <a:r>
               <a:rPr sz="1350" b="0" i="0">
@@ -11628,7 +11628,7 @@
                 </a:solidFill>
                 <a:latin typeface="Georgia"/>
               </a:rPr>
-              <a:t>Boucle non prédictive, </a:t>
+              <a:t>Boucle non prédictive : </a:t>
             </a:r>
             <a:r>
               <a:rPr sz="1350" b="0" i="0">
@@ -14750,7 +14750,7 @@
                 </a:solidFill>
                 <a:latin typeface="Calibri"/>
               </a:rPr>
-              <a:t>OS1, DÉTECTION</a:t>
+              <a:t>OS1 · DÉTECTION</a:t>
             </a:r>
           </a:p>
         </p:txBody>
@@ -15278,7 +15278,7 @@
                 </a:solidFill>
                 <a:latin typeface="Calibri"/>
               </a:rPr>
-              <a:t>OS2, PRONOSTIC</a:t>
+              <a:t>OS2 · PRONOSTIC</a:t>
             </a:r>
           </a:p>
         </p:txBody>
@@ -15984,7 +15984,7 @@
                 </a:solidFill>
                 <a:latin typeface="Calibri"/>
               </a:rPr>
-              <a:t>RÉSULTATS, OS2</a:t>
+              <a:t>RÉSULTATS · OS2</a:t>
             </a:r>
           </a:p>
         </p:txBody>
@@ -16198,7 +16198,7 @@
                 </a:solidFill>
                 <a:latin typeface="Calibri"/>
               </a:rPr>
-              <a:t>depuis −1,77 (couverture nulle), bat les baselines</a:t>
+              <a:t>depuis −1,77 (couverture nulle) · bat les références</a:t>
             </a:r>
           </a:p>
         </p:txBody>
@@ -16243,7 +16243,7 @@
                 </a:solidFill>
                 <a:latin typeface="Calibri"/>
               </a:rPr>
-              <a:t>Une trajectoire, pas un point, couvrir et </a:t>
+              <a:t>Une trajectoire, pas un point : couvrir et </a:t>
             </a:r>
             <a:r>
               <a:rPr sz="1350" b="1" i="0">

--- a/soutenance/Soutenance_Corrosion_BATOUMBI.pptx
+++ b/soutenance/Soutenance_Corrosion_BATOUMBI.pptx
@@ -22,6 +22,8 @@
     <p:sldId id="270" r:id="rId21"/>
     <p:sldId id="271" r:id="rId22"/>
     <p:sldId id="272" r:id="rId23"/>
+    <p:sldId id="273" r:id="rId24"/>
+    <p:sldId id="274" r:id="rId25"/>
   </p:sldIdLst>
   <p:sldSz cx="12191695" cy="6858000" type="screen4x3"/>
   <p:notesSz cx="6858000" cy="9144000"/>
@@ -3763,7 +3765,7 @@
                 </a:solidFill>
                 <a:latin typeface="Calibri"/>
               </a:rPr>
-              <a:t>RÉSULTATS · OS3</a:t>
+              <a:t>OS2 · VALIDATION</a:t>
             </a:r>
           </a:p>
         </p:txBody>
@@ -3808,14 +3810,14 @@
                 </a:solidFill>
                 <a:latin typeface="Georgia"/>
               </a:rPr>
-              <a:t>Température dominante &amp; deux contre-exemples instructifs</a:t>
+              <a:t>D'où vient le R² moyen de +0,29 ?</a:t>
             </a:r>
           </a:p>
         </p:txBody>
       </p:sp>
       <p:pic>
         <p:nvPicPr>
-          <p:cNvPr id="6" name="Picture 5" descr="fig_iii4_contrexemples.png"/>
+          <p:cNvPr id="6" name="Picture 5" descr="fig_loro_mecanique.png"/>
           <p:cNvPicPr>
             <a:picLocks noChangeAspect="1"/>
           </p:cNvPicPr>
@@ -3829,8 +3831,8 @@
         </p:blipFill>
         <p:spPr>
           <a:xfrm>
-            <a:off x="6446520" y="2706863"/>
-            <a:ext cx="5166360" cy="2724432"/>
+            <a:off x="747848" y="1920240"/>
+            <a:ext cx="10711542" cy="3566160"/>
           </a:xfrm>
           <a:prstGeom prst="rect">
             <a:avLst/>
@@ -3845,8 +3847,8 @@
         </p:nvSpPr>
         <p:spPr>
           <a:xfrm>
-            <a:off x="868680" y="2148840"/>
-            <a:ext cx="5349240" cy="1371600"/>
+            <a:off x="868680" y="5623560"/>
+            <a:ext cx="10424160" cy="731520"/>
           </a:xfrm>
           <a:prstGeom prst="rect">
             <a:avLst/>
@@ -3861,45 +3863,41 @@
           <a:p>
             <a:pPr algn="l">
               <a:lnSpc>
-                <a:spcPct val="110000"/>
-              </a:lnSpc>
-              <a:spcBef>
-                <a:spcPts val="0"/>
-              </a:spcBef>
-              <a:spcAft>
-                <a:spcPts val="500"/>
-              </a:spcAft>
-            </a:pPr>
-            <a:r>
-              <a:rPr sz="1500" b="1" i="0">
+                <a:spcPct val="112000"/>
+              </a:lnSpc>
+              <a:spcBef>
+                <a:spcPts val="0"/>
+              </a:spcBef>
+              <a:spcAft>
+                <a:spcPts val="400"/>
+              </a:spcAft>
+            </a:pPr>
+            <a:r>
+              <a:rPr sz="1400" b="0" i="0">
                 <a:solidFill>
                   <a:srgbClr val="202B31"/>
                 </a:solidFill>
-                <a:latin typeface="Georgia"/>
-              </a:rPr>
-              <a:t>La température est la variable dominante</a:t>
-            </a:r>
-          </a:p>
-          <a:p>
-            <a:pPr algn="l">
-              <a:lnSpc>
-                <a:spcPct val="110000"/>
-              </a:lnSpc>
-              <a:spcBef>
-                <a:spcPts val="0"/>
-              </a:spcBef>
-              <a:spcAft>
-                <a:spcPts val="500"/>
-              </a:spcAft>
-            </a:pPr>
-            <a:r>
-              <a:rPr sz="1300" b="0" i="0">
+                <a:latin typeface="Calibri"/>
+              </a:rPr>
+              <a:t>Un pli par essai de la série 30 °C, et </a:t>
+            </a:r>
+            <a:r>
+              <a:rPr sz="1400" b="1" i="0">
+                <a:solidFill>
+                  <a:srgbClr val="C9601A"/>
+                </a:solidFill>
+                <a:latin typeface="Calibri"/>
+              </a:rPr>
+              <a:t>le modèle ne voit jamais l'essai qu'il doit prédire</a:t>
+            </a:r>
+            <a:r>
+              <a:rPr sz="1400" b="0" i="0">
                 <a:solidFill>
                   <a:srgbClr val="202B31"/>
                 </a:solidFill>
                 <a:latin typeface="Calibri"/>
               </a:rPr>
-              <a:t>(Arrhenius : la vitesse de corrosion croît exponentiellement avec T).</a:t>
+              <a:t>. Le +0,29 est simplement la moyenne des deux R² obtenus.</a:t>
             </a:r>
           </a:p>
         </p:txBody>
@@ -3912,8 +3910,8 @@
         </p:nvSpPr>
         <p:spPr>
           <a:xfrm>
-            <a:off x="868680" y="3246120"/>
-            <a:ext cx="5349240" cy="365760"/>
+            <a:off x="457200" y="6437376"/>
+            <a:ext cx="8229600" cy="320040"/>
           </a:xfrm>
           <a:prstGeom prst="rect">
             <a:avLst/>
@@ -3938,71 +3936,27 @@
               </a:spcAft>
             </a:pPr>
             <a:r>
-              <a:rPr sz="1400" b="1" i="0">
-                <a:solidFill>
-                  <a:srgbClr val="202B31"/>
-                </a:solidFill>
-                <a:latin typeface="Calibri"/>
-              </a:rPr>
-              <a:t>Deux essais imprédictibles = deux facteurs isolés :</a:t>
-            </a:r>
-          </a:p>
-        </p:txBody>
-      </p:sp>
-      <p:sp>
-        <p:nvSpPr>
-          <p:cNvPr id="9" name="Oval 8"/>
-          <p:cNvSpPr/>
-          <p:nvPr/>
-        </p:nvSpPr>
-        <p:spPr>
-          <a:xfrm>
-            <a:off x="868680" y="3785615"/>
-            <a:ext cx="182880" cy="182880"/>
-          </a:xfrm>
-          <a:prstGeom prst="ellipse">
-            <a:avLst/>
-          </a:prstGeom>
-          <a:solidFill>
-            <a:srgbClr val="C9601A"/>
-          </a:solidFill>
-          <a:ln>
-            <a:noFill/>
-          </a:ln>
-          <a:effectLst/>
-        </p:spPr>
-        <p:style>
-          <a:lnRef idx="1">
-            <a:schemeClr val="accent1"/>
-          </a:lnRef>
-          <a:fillRef idx="3">
-            <a:schemeClr val="accent1"/>
-          </a:fillRef>
-          <a:effectRef idx="2">
-            <a:schemeClr val="accent1"/>
-          </a:effectRef>
-          <a:fontRef idx="minor">
-            <a:schemeClr val="lt1"/>
-          </a:fontRef>
-        </p:style>
-        <p:txBody>
-          <a:bodyPr rtlCol="0" anchor="ctr"/>
-          <a:lstStyle/>
-          <a:p>
-            <a:pPr algn="ctr"/>
-          </a:p>
-        </p:txBody>
-      </p:sp>
-      <p:sp>
-        <p:nvSpPr>
-          <p:cNvPr id="10" name="TextBox 9"/>
+              <a:rPr sz="900" b="0" i="0">
+                <a:solidFill>
+                  <a:srgbClr val="6B7A82"/>
+                </a:solidFill>
+                <a:latin typeface="Calibri"/>
+              </a:rPr>
+              <a:t>Maintenance prédictive de la corrosion  ·  ESTL La Salle  ·  2025–2026</a:t>
+            </a:r>
+          </a:p>
+        </p:txBody>
+      </p:sp>
+      <p:sp>
+        <p:nvSpPr>
+          <p:cNvPr id="9" name="TextBox 8"/>
           <p:cNvSpPr txBox="1"/>
           <p:nvPr/>
         </p:nvSpPr>
         <p:spPr>
           <a:xfrm>
-            <a:off x="1170432" y="3749039"/>
-            <a:ext cx="5029200" cy="502920"/>
+            <a:off x="10424160" y="6437376"/>
+            <a:ext cx="1325880" cy="320040"/>
           </a:xfrm>
           <a:prstGeom prst="rect">
             <a:avLst/>
@@ -4015,9 +3969,9 @@
           </a:bodyPr>
           <a:lstStyle/>
           <a:p>
-            <a:pPr algn="l">
-              <a:lnSpc>
-                <a:spcPct val="105000"/>
+            <a:pPr algn="r">
+              <a:lnSpc>
+                <a:spcPct val="100000"/>
               </a:lnSpc>
               <a:spcBef>
                 <a:spcPts val="0"/>
@@ -4027,273 +3981,13 @@
               </a:spcAft>
             </a:pPr>
             <a:r>
-              <a:rPr sz="1350" b="1" i="0">
-                <a:solidFill>
-                  <a:srgbClr val="202B31"/>
-                </a:solidFill>
-                <a:latin typeface="Calibri"/>
-              </a:rPr>
-              <a:t>Run #15 : </a:t>
-            </a:r>
-            <a:r>
-              <a:rPr sz="1250" b="0" i="0">
-                <a:solidFill>
-                  <a:srgbClr val="202B31"/>
-                </a:solidFill>
-                <a:latin typeface="Calibri"/>
-              </a:rPr>
-              <a:t>régulation thermique dérivante (31 → 28 °C)</a:t>
-            </a:r>
-          </a:p>
-        </p:txBody>
-      </p:sp>
-      <p:sp>
-        <p:nvSpPr>
-          <p:cNvPr id="11" name="Oval 10"/>
-          <p:cNvSpPr/>
-          <p:nvPr/>
-        </p:nvSpPr>
-        <p:spPr>
-          <a:xfrm>
-            <a:off x="868680" y="4334255"/>
-            <a:ext cx="182880" cy="182880"/>
-          </a:xfrm>
-          <a:prstGeom prst="ellipse">
-            <a:avLst/>
-          </a:prstGeom>
-          <a:solidFill>
-            <a:srgbClr val="C9601A"/>
-          </a:solidFill>
-          <a:ln>
-            <a:noFill/>
-          </a:ln>
-          <a:effectLst/>
-        </p:spPr>
-        <p:style>
-          <a:lnRef idx="1">
-            <a:schemeClr val="accent1"/>
-          </a:lnRef>
-          <a:fillRef idx="3">
-            <a:schemeClr val="accent1"/>
-          </a:fillRef>
-          <a:effectRef idx="2">
-            <a:schemeClr val="accent1"/>
-          </a:effectRef>
-          <a:fontRef idx="minor">
-            <a:schemeClr val="lt1"/>
-          </a:fontRef>
-        </p:style>
-        <p:txBody>
-          <a:bodyPr rtlCol="0" anchor="ctr"/>
-          <a:lstStyle/>
-          <a:p>
-            <a:pPr algn="ctr"/>
-          </a:p>
-        </p:txBody>
-      </p:sp>
-      <p:sp>
-        <p:nvSpPr>
-          <p:cNvPr id="12" name="TextBox 11"/>
-          <p:cNvSpPr txBox="1"/>
-          <p:nvPr/>
-        </p:nvSpPr>
-        <p:spPr>
-          <a:xfrm>
-            <a:off x="1170432" y="4297679"/>
-            <a:ext cx="5029200" cy="502920"/>
-          </a:xfrm>
-          <a:prstGeom prst="rect">
-            <a:avLst/>
-          </a:prstGeom>
-          <a:noFill/>
-        </p:spPr>
-        <p:txBody>
-          <a:bodyPr wrap="square" anchor="t" lIns="0" rIns="0" tIns="0" bIns="0">
-            <a:spAutoFit/>
-          </a:bodyPr>
-          <a:lstStyle/>
-          <a:p>
-            <a:pPr algn="l">
-              <a:lnSpc>
-                <a:spcPct val="105000"/>
-              </a:lnSpc>
-              <a:spcBef>
-                <a:spcPts val="0"/>
-              </a:spcBef>
-              <a:spcAft>
-                <a:spcPts val="400"/>
-              </a:spcAft>
-            </a:pPr>
-            <a:r>
-              <a:rPr sz="1350" b="1" i="0">
-                <a:solidFill>
-                  <a:srgbClr val="202B31"/>
-                </a:solidFill>
-                <a:latin typeface="Calibri"/>
-              </a:rPr>
-              <a:t>Run #17 : </a:t>
-            </a:r>
-            <a:r>
-              <a:rPr sz="1250" b="0" i="0">
-                <a:solidFill>
-                  <a:srgbClr val="202B31"/>
-                </a:solidFill>
-                <a:latin typeface="Calibri"/>
-              </a:rPr>
-              <a:t>concentration d'acide (HCl évaporé avant immersion)</a:t>
-            </a:r>
-          </a:p>
-        </p:txBody>
-      </p:sp>
-      <p:sp>
-        <p:nvSpPr>
-          <p:cNvPr id="13" name="TextBox 12"/>
-          <p:cNvSpPr txBox="1"/>
-          <p:nvPr/>
-        </p:nvSpPr>
-        <p:spPr>
-          <a:xfrm>
-            <a:off x="868680" y="4983480"/>
-            <a:ext cx="5349240" cy="914400"/>
-          </a:xfrm>
-          <a:prstGeom prst="rect">
-            <a:avLst/>
-          </a:prstGeom>
-          <a:noFill/>
-        </p:spPr>
-        <p:txBody>
-          <a:bodyPr wrap="square" anchor="t" lIns="0" rIns="0" tIns="0" bIns="0">
-            <a:spAutoFit/>
-          </a:bodyPr>
-          <a:lstStyle/>
-          <a:p>
-            <a:pPr algn="l">
-              <a:lnSpc>
-                <a:spcPct val="110000"/>
-              </a:lnSpc>
-              <a:spcBef>
-                <a:spcPts val="0"/>
-              </a:spcBef>
-              <a:spcAft>
-                <a:spcPts val="400"/>
-              </a:spcAft>
-            </a:pPr>
-            <a:r>
-              <a:rPr sz="1350" b="1" i="0">
-                <a:solidFill>
-                  <a:srgbClr val="202B31"/>
-                </a:solidFill>
-                <a:latin typeface="Calibri"/>
-              </a:rPr>
-              <a:t>→ La fiabilité exige le contrôle </a:t>
-            </a:r>
-            <a:r>
-              <a:rPr sz="1350" b="1" i="0">
+              <a:rPr sz="1000" b="1" i="0">
                 <a:solidFill>
                   <a:srgbClr val="C9601A"/>
                 </a:solidFill>
                 <a:latin typeface="Calibri"/>
               </a:rPr>
-              <a:t>simultané</a:t>
-            </a:r>
-            <a:r>
-              <a:rPr sz="1350" b="1" i="0">
-                <a:solidFill>
-                  <a:srgbClr val="202B31"/>
-                </a:solidFill>
-                <a:latin typeface="Calibri"/>
-              </a:rPr>
-              <a:t> de tous les facteurs, pas seulement la température.</a:t>
-            </a:r>
-          </a:p>
-        </p:txBody>
-      </p:sp>
-      <p:sp>
-        <p:nvSpPr>
-          <p:cNvPr id="14" name="TextBox 13"/>
-          <p:cNvSpPr txBox="1"/>
-          <p:nvPr/>
-        </p:nvSpPr>
-        <p:spPr>
-          <a:xfrm>
-            <a:off x="457200" y="6437376"/>
-            <a:ext cx="8229600" cy="320040"/>
-          </a:xfrm>
-          <a:prstGeom prst="rect">
-            <a:avLst/>
-          </a:prstGeom>
-          <a:noFill/>
-        </p:spPr>
-        <p:txBody>
-          <a:bodyPr wrap="square" anchor="t" lIns="0" rIns="0" tIns="0" bIns="0">
-            <a:spAutoFit/>
-          </a:bodyPr>
-          <a:lstStyle/>
-          <a:p>
-            <a:pPr algn="l">
-              <a:lnSpc>
-                <a:spcPct val="100000"/>
-              </a:lnSpc>
-              <a:spcBef>
-                <a:spcPts val="0"/>
-              </a:spcBef>
-              <a:spcAft>
-                <a:spcPts val="400"/>
-              </a:spcAft>
-            </a:pPr>
-            <a:r>
-              <a:rPr sz="900" b="0" i="0">
-                <a:solidFill>
-                  <a:srgbClr val="6B7A82"/>
-                </a:solidFill>
-                <a:latin typeface="Calibri"/>
-              </a:rPr>
-              <a:t>Maintenance prédictive de la corrosion  ·  ESTL La Salle  ·  2025–2026</a:t>
-            </a:r>
-          </a:p>
-        </p:txBody>
-      </p:sp>
-      <p:sp>
-        <p:nvSpPr>
-          <p:cNvPr id="15" name="TextBox 14"/>
-          <p:cNvSpPr txBox="1"/>
-          <p:nvPr/>
-        </p:nvSpPr>
-        <p:spPr>
-          <a:xfrm>
-            <a:off x="10424160" y="6437376"/>
-            <a:ext cx="1325880" cy="320040"/>
-          </a:xfrm>
-          <a:prstGeom prst="rect">
-            <a:avLst/>
-          </a:prstGeom>
-          <a:noFill/>
-        </p:spPr>
-        <p:txBody>
-          <a:bodyPr wrap="square" anchor="t" lIns="0" rIns="0" tIns="0" bIns="0">
-            <a:spAutoFit/>
-          </a:bodyPr>
-          <a:lstStyle/>
-          <a:p>
-            <a:pPr algn="r">
-              <a:lnSpc>
-                <a:spcPct val="100000"/>
-              </a:lnSpc>
-              <a:spcBef>
-                <a:spcPts val="0"/>
-              </a:spcBef>
-              <a:spcAft>
-                <a:spcPts val="400"/>
-              </a:spcAft>
-            </a:pPr>
-            <a:r>
-              <a:rPr sz="1000" b="1" i="0">
-                <a:solidFill>
-                  <a:srgbClr val="C9601A"/>
-                </a:solidFill>
-                <a:latin typeface="Calibri"/>
-              </a:rPr>
-              <a:t>10 / 17</a:t>
+              <a:t>10 / 19</a:t>
             </a:r>
           </a:p>
         </p:txBody>
@@ -4444,7 +4138,7 @@
                 </a:solidFill>
                 <a:latin typeface="Calibri"/>
               </a:rPr>
-              <a:t>COMPRÉHENSION PHYSIQUE</a:t>
+              <a:t>RÉSULTATS · OS2</a:t>
             </a:r>
           </a:p>
         </p:txBody>
@@ -4489,14 +4183,14 @@
                 </a:solidFill>
                 <a:latin typeface="Georgia"/>
               </a:rPr>
-              <a:t>Emballement &amp; rupture : une divergence géométrique</a:t>
+              <a:t>Le modèle généralise, là où les conditions sont couvertes</a:t>
             </a:r>
           </a:p>
         </p:txBody>
       </p:sp>
       <p:pic>
         <p:nvPicPr>
-          <p:cNvPr id="6" name="Picture 5" descr="fig_iii4_emballement.png"/>
+          <p:cNvPr id="6" name="Picture 5" descr="fig_iii3_loro_evolution.png"/>
           <p:cNvPicPr>
             <a:picLocks noChangeAspect="1"/>
           </p:cNvPicPr>
@@ -4510,8 +4204,8 @@
         </p:blipFill>
         <p:spPr>
           <a:xfrm>
-            <a:off x="6400800" y="2495887"/>
-            <a:ext cx="5212080" cy="3146385"/>
+            <a:off x="6446520" y="2464736"/>
+            <a:ext cx="5166360" cy="3162966"/>
           </a:xfrm>
           <a:prstGeom prst="rect">
             <a:avLst/>
@@ -4520,14 +4214,60 @@
       </p:pic>
       <p:sp>
         <p:nvSpPr>
-          <p:cNvPr id="7" name="TextBox 6"/>
+          <p:cNvPr id="7" name="Rounded Rectangle 6"/>
+          <p:cNvSpPr/>
+          <p:nvPr/>
+        </p:nvSpPr>
+        <p:spPr>
+          <a:xfrm>
+            <a:off x="868680" y="2148840"/>
+            <a:ext cx="5303520" cy="1371600"/>
+          </a:xfrm>
+          <a:prstGeom prst="roundRect">
+            <a:avLst/>
+          </a:prstGeom>
+          <a:solidFill>
+            <a:srgbClr val="FFFFFF"/>
+          </a:solidFill>
+          <a:ln w="12700">
+            <a:solidFill>
+              <a:srgbClr val="E3DED4"/>
+            </a:solidFill>
+          </a:ln>
+          <a:effectLst/>
+        </p:spPr>
+        <p:style>
+          <a:lnRef idx="1">
+            <a:schemeClr val="accent1"/>
+          </a:lnRef>
+          <a:fillRef idx="3">
+            <a:schemeClr val="accent1"/>
+          </a:fillRef>
+          <a:effectRef idx="2">
+            <a:schemeClr val="accent1"/>
+          </a:effectRef>
+          <a:fontRef idx="minor">
+            <a:schemeClr val="lt1"/>
+          </a:fontRef>
+        </p:style>
+        <p:txBody>
+          <a:bodyPr rtlCol="0" anchor="ctr"/>
+          <a:lstStyle/>
+          <a:p>
+            <a:pPr algn="ctr"/>
+          </a:p>
+        </p:txBody>
+      </p:sp>
+      <p:sp>
+        <p:nvSpPr>
+          <p:cNvPr id="8" name="TextBox 7"/>
           <p:cNvSpPr txBox="1"/>
           <p:nvPr/>
         </p:nvSpPr>
         <p:spPr>
           <a:xfrm>
-            <a:off x="868680" y="2148840"/>
-            <a:ext cx="5349240" cy="4023360"/>
+            <a:off x="1097280" y="2286000"/>
+            <a:ext cx="4937760" cy="457200"/>
           </a:xfrm>
           <a:prstGeom prst="rect">
             <a:avLst/>
@@ -4542,175 +4282,46 @@
           <a:p>
             <a:pPr algn="l">
               <a:lnSpc>
-                <a:spcPct val="113000"/>
-              </a:lnSpc>
-              <a:spcBef>
-                <a:spcPts val="0"/>
-              </a:spcBef>
-              <a:spcAft>
-                <a:spcPts val="1100"/>
-              </a:spcAft>
-            </a:pPr>
-            <a:r>
-              <a:rPr sz="1400" b="0" i="0">
-                <a:solidFill>
-                  <a:srgbClr val="202B31"/>
-                </a:solidFill>
-                <a:latin typeface="Calibri"/>
-              </a:rPr>
-              <a:t>La section varie en r², donc </a:t>
-            </a:r>
-            <a:r>
-              <a:rPr sz="1500" b="1" i="1">
-                <a:solidFill>
-                  <a:srgbClr val="C9601A"/>
+                <a:spcPct val="100000"/>
+              </a:lnSpc>
+              <a:spcBef>
+                <a:spcPts val="0"/>
+              </a:spcBef>
+              <a:spcAft>
+                <a:spcPts val="400"/>
+              </a:spcAft>
+            </a:pPr>
+            <a:r>
+              <a:rPr sz="3800" b="1" i="0">
+                <a:solidFill>
+                  <a:srgbClr val="16252E"/>
                 </a:solidFill>
                 <a:latin typeface="Georgia"/>
               </a:rPr>
-              <a:t>R s'emballe en 1/r³</a:t>
-            </a:r>
-            <a:r>
-              <a:rPr sz="1400" b="0" i="0">
-                <a:solidFill>
-                  <a:srgbClr val="202B31"/>
-                </a:solidFill>
-                <a:latin typeface="Calibri"/>
-              </a:rPr>
-              <a:t>.</a:t>
-            </a:r>
-          </a:p>
-          <a:p>
-            <a:pPr algn="l">
-              <a:lnSpc>
-                <a:spcPct val="113000"/>
-              </a:lnSpc>
-              <a:spcBef>
-                <a:spcPts val="0"/>
-              </a:spcBef>
-              <a:spcAft>
-                <a:spcPts val="1100"/>
-              </a:spcAft>
-            </a:pPr>
-            <a:r>
-              <a:rPr sz="1350" b="0" i="0">
-                <a:solidFill>
-                  <a:srgbClr val="202B31"/>
-                </a:solidFill>
-                <a:latin typeface="Calibri"/>
-              </a:rPr>
-              <a:t>La </a:t>
-            </a:r>
-            <a:r>
-              <a:rPr sz="1350" b="1" i="0">
-                <a:solidFill>
-                  <a:srgbClr val="202B31"/>
-                </a:solidFill>
-                <a:latin typeface="Calibri"/>
-              </a:rPr>
-              <a:t>rupture mécanique coïncide avec le début de l'emballement</a:t>
-            </a:r>
-            <a:r>
-              <a:rPr sz="1350" b="0" i="0">
-                <a:solidFill>
-                  <a:srgbClr val="202B31"/>
-                </a:solidFill>
-                <a:latin typeface="Calibri"/>
-              </a:rPr>
-              <a:t> : « section → 0 » = explosion de R ET perte de tenue.</a:t>
-            </a:r>
-          </a:p>
-          <a:p>
-            <a:pPr algn="l">
-              <a:lnSpc>
-                <a:spcPct val="113000"/>
-              </a:lnSpc>
-              <a:spcBef>
-                <a:spcPts val="0"/>
-              </a:spcBef>
-              <a:spcAft>
-                <a:spcPts val="1100"/>
-              </a:spcAft>
-            </a:pPr>
-            <a:r>
-              <a:rPr sz="1350" b="0" i="0">
-                <a:solidFill>
-                  <a:srgbClr val="202B31"/>
-                </a:solidFill>
-                <a:latin typeface="Calibri"/>
-              </a:rPr>
-              <a:t>Après rupture, </a:t>
-            </a:r>
-            <a:r>
-              <a:rPr sz="1350" b="1" i="0">
-                <a:solidFill>
-                  <a:srgbClr val="2C7A7B"/>
-                </a:solidFill>
-                <a:latin typeface="Calibri"/>
-              </a:rPr>
-              <a:t>la conduction résiduelle</a:t>
-            </a:r>
-            <a:r>
-              <a:rPr sz="1350" b="0" i="0">
-                <a:solidFill>
-                  <a:srgbClr val="202B31"/>
-                </a:solidFill>
-                <a:latin typeface="Calibri"/>
-              </a:rPr>
-              <a:t> (électrolyte HCl + dernier filament) maintient une résistance croissante jusqu'au circuit ouvert.</a:t>
-            </a:r>
-          </a:p>
-          <a:p>
-            <a:pPr algn="l">
-              <a:lnSpc>
-                <a:spcPct val="113000"/>
-              </a:lnSpc>
-              <a:spcBef>
-                <a:spcPts val="0"/>
-              </a:spcBef>
-              <a:spcAft>
-                <a:spcPts val="1100"/>
-              </a:spcAft>
-            </a:pPr>
-            <a:r>
-              <a:rPr sz="1350" b="0" i="0">
-                <a:solidFill>
-                  <a:srgbClr val="202B31"/>
-                </a:solidFill>
-                <a:latin typeface="Calibri"/>
-              </a:rPr>
-              <a:t>Cette portion terminale est </a:t>
-            </a:r>
-            <a:r>
-              <a:rPr sz="1350" b="1" i="0">
-                <a:solidFill>
-                  <a:srgbClr val="C9601A"/>
-                </a:solidFill>
-                <a:latin typeface="Calibri"/>
-              </a:rPr>
-              <a:t>électrolytique, non métallique</a:t>
-            </a:r>
-            <a:r>
-              <a:rPr sz="1350" b="0" i="0">
-                <a:solidFill>
-                  <a:srgbClr val="202B31"/>
-                </a:solidFill>
-                <a:latin typeface="Calibri"/>
-              </a:rPr>
-              <a:t> : tronquée et exclue de l'apprentissage.</a:t>
-            </a:r>
-          </a:p>
-        </p:txBody>
-      </p:sp>
-      <p:sp>
-        <p:nvSpPr>
-          <p:cNvPr id="8" name="TextBox 7"/>
+              <a:t>R² = +0,29</a:t>
+            </a:r>
+            <a:r>
+              <a:rPr sz="1300" b="0" i="0">
+                <a:solidFill>
+                  <a:srgbClr val="6B7A82"/>
+                </a:solidFill>
+                <a:latin typeface="Calibri"/>
+              </a:rPr>
+              <a:t>  (LORO actuel)</a:t>
+            </a:r>
+          </a:p>
+        </p:txBody>
+      </p:sp>
+      <p:sp>
+        <p:nvSpPr>
+          <p:cNvPr id="9" name="TextBox 8"/>
           <p:cNvSpPr txBox="1"/>
           <p:nvPr/>
         </p:nvSpPr>
         <p:spPr>
           <a:xfrm>
-            <a:off x="457200" y="6437376"/>
-            <a:ext cx="8229600" cy="320040"/>
+            <a:off x="1097280" y="3154680"/>
+            <a:ext cx="4937760" cy="365760"/>
           </a:xfrm>
           <a:prstGeom prst="rect">
             <a:avLst/>
@@ -4735,27 +4346,27 @@
               </a:spcAft>
             </a:pPr>
             <a:r>
-              <a:rPr sz="900" b="0" i="0">
-                <a:solidFill>
-                  <a:srgbClr val="6B7A82"/>
-                </a:solidFill>
-                <a:latin typeface="Calibri"/>
-              </a:rPr>
-              <a:t>Maintenance prédictive de la corrosion  ·  ESTL La Salle  ·  2025–2026</a:t>
-            </a:r>
-          </a:p>
-        </p:txBody>
-      </p:sp>
-      <p:sp>
-        <p:nvSpPr>
-          <p:cNvPr id="9" name="TextBox 8"/>
+              <a:rPr sz="1250" b="1" i="0">
+                <a:solidFill>
+                  <a:srgbClr val="C9601A"/>
+                </a:solidFill>
+                <a:latin typeface="Calibri"/>
+              </a:rPr>
+              <a:t>depuis −1,77 (couverture nulle) · bat les références</a:t>
+            </a:r>
+          </a:p>
+        </p:txBody>
+      </p:sp>
+      <p:sp>
+        <p:nvSpPr>
+          <p:cNvPr id="10" name="TextBox 9"/>
           <p:cNvSpPr txBox="1"/>
           <p:nvPr/>
         </p:nvSpPr>
         <p:spPr>
           <a:xfrm>
-            <a:off x="10424160" y="6437376"/>
-            <a:ext cx="1325880" cy="320040"/>
+            <a:off x="868680" y="3794760"/>
+            <a:ext cx="5349240" cy="2194560"/>
           </a:xfrm>
           <a:prstGeom prst="rect">
             <a:avLst/>
@@ -4768,6 +4379,194 @@
           </a:bodyPr>
           <a:lstStyle/>
           <a:p>
+            <a:pPr algn="l">
+              <a:lnSpc>
+                <a:spcPct val="110000"/>
+              </a:lnSpc>
+              <a:spcBef>
+                <a:spcPts val="0"/>
+              </a:spcBef>
+              <a:spcAft>
+                <a:spcPts val="700"/>
+              </a:spcAft>
+            </a:pPr>
+            <a:r>
+              <a:rPr sz="1350" b="0" i="0">
+                <a:solidFill>
+                  <a:srgbClr val="202B31"/>
+                </a:solidFill>
+                <a:latin typeface="Calibri"/>
+              </a:rPr>
+              <a:t>Une trajectoire, pas un point : couvrir et </a:t>
+            </a:r>
+            <a:r>
+              <a:rPr sz="1350" b="1" i="0">
+                <a:solidFill>
+                  <a:srgbClr val="2C7A7B"/>
+                </a:solidFill>
+                <a:latin typeface="Calibri"/>
+              </a:rPr>
+              <a:t>répéter</a:t>
+            </a:r>
+            <a:r>
+              <a:rPr sz="1350" b="0" i="0">
+                <a:solidFill>
+                  <a:srgbClr val="202B31"/>
+                </a:solidFill>
+                <a:latin typeface="Calibri"/>
+              </a:rPr>
+              <a:t> les conditions 30 °C a fait passer le LORO de −1,77 à +0,29.</a:t>
+            </a:r>
+          </a:p>
+          <a:p>
+            <a:pPr algn="l">
+              <a:lnSpc>
+                <a:spcPct val="110000"/>
+              </a:lnSpc>
+              <a:spcBef>
+                <a:spcPts val="0"/>
+              </a:spcBef>
+              <a:spcAft>
+                <a:spcPts val="700"/>
+              </a:spcAft>
+            </a:pPr>
+            <a:r>
+              <a:rPr sz="1350" b="0" i="0">
+                <a:solidFill>
+                  <a:srgbClr val="202B31"/>
+                </a:solidFill>
+                <a:latin typeface="Calibri"/>
+              </a:rPr>
+              <a:t>L'apport n'est pas la valeur mais la </a:t>
+            </a:r>
+            <a:r>
+              <a:rPr sz="1400" b="1" i="0">
+                <a:solidFill>
+                  <a:srgbClr val="C9601A"/>
+                </a:solidFill>
+                <a:latin typeface="Georgia"/>
+              </a:rPr>
+              <a:t>structure</a:t>
+            </a:r>
+            <a:r>
+              <a:rPr sz="1350" b="0" i="0">
+                <a:solidFill>
+                  <a:srgbClr val="202B31"/>
+                </a:solidFill>
+                <a:latin typeface="Calibri"/>
+              </a:rPr>
+              <a:t> du R² : positif si conditions couvertes et répétées, négatif sinon.</a:t>
+            </a:r>
+          </a:p>
+          <a:p>
+            <a:pPr algn="l">
+              <a:lnSpc>
+                <a:spcPct val="110000"/>
+              </a:lnSpc>
+              <a:spcBef>
+                <a:spcPts val="0"/>
+              </a:spcBef>
+              <a:spcAft>
+                <a:spcPts val="700"/>
+              </a:spcAft>
+            </a:pPr>
+            <a:r>
+              <a:rPr sz="1250" b="0" i="0">
+                <a:solidFill>
+                  <a:srgbClr val="202B31"/>
+                </a:solidFill>
+                <a:latin typeface="Calibri"/>
+              </a:rPr>
+              <a:t>Ajouter une morphologie non appariée le ramène à ≈ +0,20, métrique encore </a:t>
+            </a:r>
+            <a:r>
+              <a:rPr sz="1250" b="1" i="0">
+                <a:solidFill>
+                  <a:srgbClr val="C9601A"/>
+                </a:solidFill>
+                <a:latin typeface="Calibri"/>
+              </a:rPr>
+              <a:t>bruitée</a:t>
+            </a:r>
+            <a:r>
+              <a:rPr sz="1250" b="0" i="0">
+                <a:solidFill>
+                  <a:srgbClr val="202B31"/>
+                </a:solidFill>
+                <a:latin typeface="Calibri"/>
+              </a:rPr>
+              <a:t> (peu d'essais).</a:t>
+            </a:r>
+          </a:p>
+        </p:txBody>
+      </p:sp>
+      <p:sp>
+        <p:nvSpPr>
+          <p:cNvPr id="11" name="TextBox 10"/>
+          <p:cNvSpPr txBox="1"/>
+          <p:nvPr/>
+        </p:nvSpPr>
+        <p:spPr>
+          <a:xfrm>
+            <a:off x="457200" y="6437376"/>
+            <a:ext cx="8229600" cy="320040"/>
+          </a:xfrm>
+          <a:prstGeom prst="rect">
+            <a:avLst/>
+          </a:prstGeom>
+          <a:noFill/>
+        </p:spPr>
+        <p:txBody>
+          <a:bodyPr wrap="square" anchor="t" lIns="0" rIns="0" tIns="0" bIns="0">
+            <a:spAutoFit/>
+          </a:bodyPr>
+          <a:lstStyle/>
+          <a:p>
+            <a:pPr algn="l">
+              <a:lnSpc>
+                <a:spcPct val="100000"/>
+              </a:lnSpc>
+              <a:spcBef>
+                <a:spcPts val="0"/>
+              </a:spcBef>
+              <a:spcAft>
+                <a:spcPts val="400"/>
+              </a:spcAft>
+            </a:pPr>
+            <a:r>
+              <a:rPr sz="900" b="0" i="0">
+                <a:solidFill>
+                  <a:srgbClr val="6B7A82"/>
+                </a:solidFill>
+                <a:latin typeface="Calibri"/>
+              </a:rPr>
+              <a:t>Maintenance prédictive de la corrosion  ·  ESTL La Salle  ·  2025–2026</a:t>
+            </a:r>
+          </a:p>
+        </p:txBody>
+      </p:sp>
+      <p:sp>
+        <p:nvSpPr>
+          <p:cNvPr id="12" name="TextBox 11"/>
+          <p:cNvSpPr txBox="1"/>
+          <p:nvPr/>
+        </p:nvSpPr>
+        <p:spPr>
+          <a:xfrm>
+            <a:off x="10424160" y="6437376"/>
+            <a:ext cx="1325880" cy="320040"/>
+          </a:xfrm>
+          <a:prstGeom prst="rect">
+            <a:avLst/>
+          </a:prstGeom>
+          <a:noFill/>
+        </p:spPr>
+        <p:txBody>
+          <a:bodyPr wrap="square" anchor="t" lIns="0" rIns="0" tIns="0" bIns="0">
+            <a:spAutoFit/>
+          </a:bodyPr>
+          <a:lstStyle/>
+          <a:p>
             <a:pPr algn="r">
               <a:lnSpc>
                 <a:spcPct val="100000"/>
@@ -4786,7 +4585,7 @@
                 </a:solidFill>
                 <a:latin typeface="Calibri"/>
               </a:rPr>
-              <a:t>11 / 17</a:t>
+              <a:t>11 / 19</a:t>
             </a:r>
           </a:p>
         </p:txBody>
@@ -4937,7 +4736,7 @@
                 </a:solidFill>
                 <a:latin typeface="Calibri"/>
               </a:rPr>
-              <a:t>RÉSULTATS · OS4</a:t>
+              <a:t>RÉSULTATS · OS3</a:t>
             </a:r>
           </a:p>
         </p:txBody>
@@ -4982,21 +4781,45 @@
                 </a:solidFill>
                 <a:latin typeface="Georgia"/>
               </a:rPr>
-              <a:t>Boucle décision → action : un module GMAO maison</a:t>
-            </a:r>
-          </a:p>
-        </p:txBody>
-      </p:sp>
-      <p:sp>
-        <p:nvSpPr>
-          <p:cNvPr id="6" name="TextBox 5"/>
+              <a:t>Température dominante &amp; deux contre-exemples instructifs</a:t>
+            </a:r>
+          </a:p>
+        </p:txBody>
+      </p:sp>
+      <p:pic>
+        <p:nvPicPr>
+          <p:cNvPr id="6" name="Picture 5" descr="fig_iii4_contrexemples.png"/>
+          <p:cNvPicPr>
+            <a:picLocks noChangeAspect="1"/>
+          </p:cNvPicPr>
+          <p:nvPr/>
+        </p:nvPicPr>
+        <p:blipFill>
+          <a:blip r:embed="rId2"/>
+          <a:stretch>
+            <a:fillRect/>
+          </a:stretch>
+        </p:blipFill>
+        <p:spPr>
+          <a:xfrm>
+            <a:off x="6446520" y="2706863"/>
+            <a:ext cx="5166360" cy="2724432"/>
+          </a:xfrm>
+          <a:prstGeom prst="rect">
+            <a:avLst/>
+          </a:prstGeom>
+        </p:spPr>
+      </p:pic>
+      <p:sp>
+        <p:nvSpPr>
+          <p:cNvPr id="7" name="TextBox 6"/>
           <p:cNvSpPr txBox="1"/>
           <p:nvPr/>
         </p:nvSpPr>
         <p:spPr>
           <a:xfrm>
             <a:off x="868680" y="2148840"/>
-            <a:ext cx="10424160" cy="1371600"/>
+            <a:ext cx="5349240" cy="1371600"/>
           </a:xfrm>
           <a:prstGeom prst="rect">
             <a:avLst/>
@@ -5011,106 +4834,113 @@
           <a:p>
             <a:pPr algn="l">
               <a:lnSpc>
-                <a:spcPct val="112000"/>
-              </a:lnSpc>
-              <a:spcBef>
-                <a:spcPts val="0"/>
-              </a:spcBef>
-              <a:spcAft>
-                <a:spcPts val="800"/>
-              </a:spcAft>
-            </a:pPr>
-            <a:r>
-              <a:rPr sz="1400" b="0" i="0">
+                <a:spcPct val="110000"/>
+              </a:lnSpc>
+              <a:spcBef>
+                <a:spcPts val="0"/>
+              </a:spcBef>
+              <a:spcAft>
+                <a:spcPts val="500"/>
+              </a:spcAft>
+            </a:pPr>
+            <a:r>
+              <a:rPr sz="1500" b="1" i="0">
                 <a:solidFill>
                   <a:srgbClr val="202B31"/>
                 </a:solidFill>
-                <a:latin typeface="Calibri"/>
-              </a:rPr>
-              <a:t>Aucun CMMS open-source (GLPI, OpenMaint, Snipe-IT…) n'offre d'API exploitable en version gratuite.</a:t>
+                <a:latin typeface="Georgia"/>
+              </a:rPr>
+              <a:t>La température est la variable dominante</a:t>
             </a:r>
           </a:p>
           <a:p>
             <a:pPr algn="l">
               <a:lnSpc>
-                <a:spcPct val="112000"/>
-              </a:lnSpc>
-              <a:spcBef>
-                <a:spcPts val="0"/>
-              </a:spcBef>
-              <a:spcAft>
-                <a:spcPts val="800"/>
+                <a:spcPct val="110000"/>
+              </a:lnSpc>
+              <a:spcBef>
+                <a:spcPts val="0"/>
+              </a:spcBef>
+              <a:spcAft>
+                <a:spcPts val="500"/>
+              </a:spcAft>
+            </a:pPr>
+            <a:r>
+              <a:rPr sz="1300" b="0" i="0">
+                <a:solidFill>
+                  <a:srgbClr val="202B31"/>
+                </a:solidFill>
+                <a:latin typeface="Calibri"/>
+              </a:rPr>
+              <a:t>(Arrhenius : la vitesse de corrosion croît exponentiellement avec T).</a:t>
+            </a:r>
+          </a:p>
+        </p:txBody>
+      </p:sp>
+      <p:sp>
+        <p:nvSpPr>
+          <p:cNvPr id="8" name="TextBox 7"/>
+          <p:cNvSpPr txBox="1"/>
+          <p:nvPr/>
+        </p:nvSpPr>
+        <p:spPr>
+          <a:xfrm>
+            <a:off x="868680" y="3246120"/>
+            <a:ext cx="5349240" cy="365760"/>
+          </a:xfrm>
+          <a:prstGeom prst="rect">
+            <a:avLst/>
+          </a:prstGeom>
+          <a:noFill/>
+        </p:spPr>
+        <p:txBody>
+          <a:bodyPr wrap="square" anchor="t" lIns="0" rIns="0" tIns="0" bIns="0">
+            <a:spAutoFit/>
+          </a:bodyPr>
+          <a:lstStyle/>
+          <a:p>
+            <a:pPr algn="l">
+              <a:lnSpc>
+                <a:spcPct val="100000"/>
+              </a:lnSpc>
+              <a:spcBef>
+                <a:spcPts val="0"/>
+              </a:spcBef>
+              <a:spcAft>
+                <a:spcPts val="400"/>
               </a:spcAft>
             </a:pPr>
             <a:r>
               <a:rPr sz="1400" b="1" i="0">
                 <a:solidFill>
-                  <a:srgbClr val="C9601A"/>
-                </a:solidFill>
-                <a:latin typeface="Calibri"/>
-              </a:rPr>
-              <a:t>→ </a:t>
-            </a:r>
-            <a:r>
-              <a:rPr sz="1450" b="1" i="0">
-                <a:solidFill>
                   <a:srgbClr val="202B31"/>
                 </a:solidFill>
-                <a:latin typeface="Georgia"/>
-              </a:rPr>
-              <a:t>Module GMAO maison</a:t>
-            </a:r>
-            <a:r>
-              <a:rPr sz="1400" b="0" i="0">
-                <a:solidFill>
-                  <a:srgbClr val="202B31"/>
-                </a:solidFill>
-                <a:latin typeface="Calibri"/>
-              </a:rPr>
-              <a:t> intégré à Streamlit + Supabase : à chaque alerte, un </a:t>
-            </a:r>
-            <a:r>
-              <a:rPr sz="1400" b="1" i="0">
-                <a:solidFill>
-                  <a:srgbClr val="C9601A"/>
-                </a:solidFill>
-                <a:latin typeface="Calibri"/>
-              </a:rPr>
-              <a:t>ordre de travail enrichi</a:t>
-            </a:r>
-            <a:r>
-              <a:rPr sz="1400" b="0" i="0">
-                <a:solidFill>
-                  <a:srgbClr val="202B31"/>
-                </a:solidFill>
-                <a:latin typeface="Calibri"/>
-              </a:rPr>
-              <a:t> (CR, RUL, régime, section) est généré et tracé, sans appel externe.</a:t>
-            </a:r>
-          </a:p>
-        </p:txBody>
-      </p:sp>
-      <p:sp>
-        <p:nvSpPr>
-          <p:cNvPr id="7" name="Rounded Rectangle 6"/>
+                <a:latin typeface="Calibri"/>
+              </a:rPr>
+              <a:t>Deux essais imprédictibles = deux facteurs isolés :</a:t>
+            </a:r>
+          </a:p>
+        </p:txBody>
+      </p:sp>
+      <p:sp>
+        <p:nvSpPr>
+          <p:cNvPr id="9" name="Oval 8"/>
           <p:cNvSpPr/>
           <p:nvPr/>
         </p:nvSpPr>
         <p:spPr>
           <a:xfrm>
-            <a:off x="868680" y="3840480"/>
-            <a:ext cx="3419856" cy="2057400"/>
-          </a:xfrm>
-          <a:prstGeom prst="roundRect">
+            <a:off x="868680" y="3785615"/>
+            <a:ext cx="182880" cy="182880"/>
+          </a:xfrm>
+          <a:prstGeom prst="ellipse">
             <a:avLst/>
           </a:prstGeom>
           <a:solidFill>
-            <a:srgbClr val="FFFFFF"/>
+            <a:srgbClr val="C9601A"/>
           </a:solidFill>
-          <a:ln w="12700">
-            <a:solidFill>
-              <a:srgbClr val="E3DED4"/>
-            </a:solidFill>
+          <a:ln>
+            <a:noFill/>
           </a:ln>
           <a:effectLst/>
         </p:spPr>
@@ -5138,20 +4968,74 @@
       </p:sp>
       <p:sp>
         <p:nvSpPr>
-          <p:cNvPr id="8" name="Rounded Rectangle 7"/>
+          <p:cNvPr id="10" name="TextBox 9"/>
+          <p:cNvSpPr txBox="1"/>
+          <p:nvPr/>
+        </p:nvSpPr>
+        <p:spPr>
+          <a:xfrm>
+            <a:off x="1170432" y="3749039"/>
+            <a:ext cx="5029200" cy="502920"/>
+          </a:xfrm>
+          <a:prstGeom prst="rect">
+            <a:avLst/>
+          </a:prstGeom>
+          <a:noFill/>
+        </p:spPr>
+        <p:txBody>
+          <a:bodyPr wrap="square" anchor="t" lIns="0" rIns="0" tIns="0" bIns="0">
+            <a:spAutoFit/>
+          </a:bodyPr>
+          <a:lstStyle/>
+          <a:p>
+            <a:pPr algn="l">
+              <a:lnSpc>
+                <a:spcPct val="105000"/>
+              </a:lnSpc>
+              <a:spcBef>
+                <a:spcPts val="0"/>
+              </a:spcBef>
+              <a:spcAft>
+                <a:spcPts val="400"/>
+              </a:spcAft>
+            </a:pPr>
+            <a:r>
+              <a:rPr sz="1350" b="1" i="0">
+                <a:solidFill>
+                  <a:srgbClr val="202B31"/>
+                </a:solidFill>
+                <a:latin typeface="Calibri"/>
+              </a:rPr>
+              <a:t>Run #15 : </a:t>
+            </a:r>
+            <a:r>
+              <a:rPr sz="1250" b="0" i="0">
+                <a:solidFill>
+                  <a:srgbClr val="202B31"/>
+                </a:solidFill>
+                <a:latin typeface="Calibri"/>
+              </a:rPr>
+              <a:t>régulation thermique dérivante (31 → 28 °C)</a:t>
+            </a:r>
+          </a:p>
+        </p:txBody>
+      </p:sp>
+      <p:sp>
+        <p:nvSpPr>
+          <p:cNvPr id="11" name="Oval 10"/>
           <p:cNvSpPr/>
           <p:nvPr/>
         </p:nvSpPr>
         <p:spPr>
           <a:xfrm>
-            <a:off x="868680" y="3840480"/>
-            <a:ext cx="3419856" cy="109728"/>
-          </a:xfrm>
-          <a:prstGeom prst="roundRect">
+            <a:off x="868680" y="4334255"/>
+            <a:ext cx="182880" cy="182880"/>
+          </a:xfrm>
+          <a:prstGeom prst="ellipse">
             <a:avLst/>
           </a:prstGeom>
           <a:solidFill>
-            <a:srgbClr val="2C7A7B"/>
+            <a:srgbClr val="C9601A"/>
           </a:solidFill>
           <a:ln>
             <a:noFill/>
@@ -5182,14 +5066,14 @@
       </p:sp>
       <p:sp>
         <p:nvSpPr>
-          <p:cNvPr id="9" name="TextBox 8"/>
+          <p:cNvPr id="12" name="TextBox 11"/>
           <p:cNvSpPr txBox="1"/>
           <p:nvPr/>
         </p:nvSpPr>
         <p:spPr>
           <a:xfrm>
-            <a:off x="1124712" y="4114800"/>
-            <a:ext cx="2926080" cy="640080"/>
+            <a:off x="1170432" y="4297679"/>
+            <a:ext cx="5029200" cy="502920"/>
           </a:xfrm>
           <a:prstGeom prst="rect">
             <a:avLst/>
@@ -5204,7 +5088,7 @@
           <a:p>
             <a:pPr algn="l">
               <a:lnSpc>
-                <a:spcPct val="100000"/>
+                <a:spcPct val="105000"/>
               </a:lnSpc>
               <a:spcBef>
                 <a:spcPts val="0"/>
@@ -5214,27 +5098,36 @@
               </a:spcAft>
             </a:pPr>
             <a:r>
-              <a:rPr sz="2300" b="1" i="0">
-                <a:solidFill>
-                  <a:srgbClr val="16252E"/>
-                </a:solidFill>
-                <a:latin typeface="Georgia"/>
-              </a:rPr>
-              <a:t>MTBF · MTTR</a:t>
-            </a:r>
-          </a:p>
-        </p:txBody>
-      </p:sp>
-      <p:sp>
-        <p:nvSpPr>
-          <p:cNvPr id="10" name="TextBox 9"/>
+              <a:rPr sz="1350" b="1" i="0">
+                <a:solidFill>
+                  <a:srgbClr val="202B31"/>
+                </a:solidFill>
+                <a:latin typeface="Calibri"/>
+              </a:rPr>
+              <a:t>Run #17 : </a:t>
+            </a:r>
+            <a:r>
+              <a:rPr sz="1250" b="0" i="0">
+                <a:solidFill>
+                  <a:srgbClr val="202B31"/>
+                </a:solidFill>
+                <a:latin typeface="Calibri"/>
+              </a:rPr>
+              <a:t>concentration d'acide (HCl évaporé avant immersion)</a:t>
+            </a:r>
+          </a:p>
+        </p:txBody>
+      </p:sp>
+      <p:sp>
+        <p:nvSpPr>
+          <p:cNvPr id="13" name="TextBox 12"/>
           <p:cNvSpPr txBox="1"/>
           <p:nvPr/>
         </p:nvSpPr>
         <p:spPr>
           <a:xfrm>
-            <a:off x="1124712" y="4892040"/>
-            <a:ext cx="2926080" cy="914400"/>
+            <a:off x="868680" y="4983480"/>
+            <a:ext cx="5349240" cy="914400"/>
           </a:xfrm>
           <a:prstGeom prst="rect">
             <a:avLst/>
@@ -5249,7 +5142,7 @@
           <a:p>
             <a:pPr algn="l">
               <a:lnSpc>
-                <a:spcPct val="112000"/>
+                <a:spcPct val="110000"/>
               </a:lnSpc>
               <a:spcBef>
                 <a:spcPts val="0"/>
@@ -5259,117 +5152,45 @@
               </a:spcAft>
             </a:pPr>
             <a:r>
-              <a:rPr sz="1300" b="0" i="0">
-                <a:solidFill>
-                  <a:srgbClr val="6B7A82"/>
-                </a:solidFill>
-                <a:latin typeface="Calibri"/>
-              </a:rPr>
-              <a:t>indicateurs de maintenance calculés sur l'historique des OT</a:t>
-            </a:r>
-          </a:p>
-        </p:txBody>
-      </p:sp>
-      <p:sp>
-        <p:nvSpPr>
-          <p:cNvPr id="11" name="Rounded Rectangle 10"/>
-          <p:cNvSpPr/>
-          <p:nvPr/>
-        </p:nvSpPr>
-        <p:spPr>
-          <a:xfrm>
-            <a:off x="4462272" y="3840480"/>
-            <a:ext cx="3419856" cy="2057400"/>
-          </a:xfrm>
-          <a:prstGeom prst="roundRect">
-            <a:avLst/>
-          </a:prstGeom>
-          <a:solidFill>
-            <a:srgbClr val="FFFFFF"/>
-          </a:solidFill>
-          <a:ln w="12700">
-            <a:solidFill>
-              <a:srgbClr val="E3DED4"/>
-            </a:solidFill>
-          </a:ln>
-          <a:effectLst/>
-        </p:spPr>
-        <p:style>
-          <a:lnRef idx="1">
-            <a:schemeClr val="accent1"/>
-          </a:lnRef>
-          <a:fillRef idx="3">
-            <a:schemeClr val="accent1"/>
-          </a:fillRef>
-          <a:effectRef idx="2">
-            <a:schemeClr val="accent1"/>
-          </a:effectRef>
-          <a:fontRef idx="minor">
-            <a:schemeClr val="lt1"/>
-          </a:fontRef>
-        </p:style>
-        <p:txBody>
-          <a:bodyPr rtlCol="0" anchor="ctr"/>
-          <a:lstStyle/>
-          <a:p>
-            <a:pPr algn="ctr"/>
-          </a:p>
-        </p:txBody>
-      </p:sp>
-      <p:sp>
-        <p:nvSpPr>
-          <p:cNvPr id="12" name="Rounded Rectangle 11"/>
-          <p:cNvSpPr/>
-          <p:nvPr/>
-        </p:nvSpPr>
-        <p:spPr>
-          <a:xfrm>
-            <a:off x="4462272" y="3840480"/>
-            <a:ext cx="3419856" cy="109728"/>
-          </a:xfrm>
-          <a:prstGeom prst="roundRect">
-            <a:avLst/>
-          </a:prstGeom>
-          <a:solidFill>
-            <a:srgbClr val="2C7A7B"/>
-          </a:solidFill>
-          <a:ln>
-            <a:noFill/>
-          </a:ln>
-          <a:effectLst/>
-        </p:spPr>
-        <p:style>
-          <a:lnRef idx="1">
-            <a:schemeClr val="accent1"/>
-          </a:lnRef>
-          <a:fillRef idx="3">
-            <a:schemeClr val="accent1"/>
-          </a:fillRef>
-          <a:effectRef idx="2">
-            <a:schemeClr val="accent1"/>
-          </a:effectRef>
-          <a:fontRef idx="minor">
-            <a:schemeClr val="lt1"/>
-          </a:fontRef>
-        </p:style>
-        <p:txBody>
-          <a:bodyPr rtlCol="0" anchor="ctr"/>
-          <a:lstStyle/>
-          <a:p>
-            <a:pPr algn="ctr"/>
-          </a:p>
-        </p:txBody>
-      </p:sp>
-      <p:sp>
-        <p:nvSpPr>
-          <p:cNvPr id="13" name="TextBox 12"/>
+              <a:rPr sz="1350" b="1" i="0">
+                <a:solidFill>
+                  <a:srgbClr val="202B31"/>
+                </a:solidFill>
+                <a:latin typeface="Calibri"/>
+              </a:rPr>
+              <a:t>→ La fiabilité exige le contrôle </a:t>
+            </a:r>
+            <a:r>
+              <a:rPr sz="1350" b="1" i="0">
+                <a:solidFill>
+                  <a:srgbClr val="C9601A"/>
+                </a:solidFill>
+                <a:latin typeface="Calibri"/>
+              </a:rPr>
+              <a:t>simultané</a:t>
+            </a:r>
+            <a:r>
+              <a:rPr sz="1350" b="1" i="0">
+                <a:solidFill>
+                  <a:srgbClr val="202B31"/>
+                </a:solidFill>
+                <a:latin typeface="Calibri"/>
+              </a:rPr>
+              <a:t> de tous les facteurs, pas seulement la température.</a:t>
+            </a:r>
+          </a:p>
+        </p:txBody>
+      </p:sp>
+      <p:sp>
+        <p:nvSpPr>
+          <p:cNvPr id="14" name="TextBox 13"/>
           <p:cNvSpPr txBox="1"/>
           <p:nvPr/>
         </p:nvSpPr>
         <p:spPr>
           <a:xfrm>
-            <a:off x="4718304" y="4114800"/>
-            <a:ext cx="2926080" cy="640080"/>
+            <a:off x="457200" y="6437376"/>
+            <a:ext cx="8229600" cy="320040"/>
           </a:xfrm>
           <a:prstGeom prst="rect">
             <a:avLst/>
@@ -5394,27 +5215,27 @@
               </a:spcAft>
             </a:pPr>
             <a:r>
-              <a:rPr sz="2300" b="1" i="0">
-                <a:solidFill>
-                  <a:srgbClr val="16252E"/>
-                </a:solidFill>
-                <a:latin typeface="Georgia"/>
-              </a:rPr>
-              <a:t>Gratuit</a:t>
-            </a:r>
-          </a:p>
-        </p:txBody>
-      </p:sp>
-      <p:sp>
-        <p:nvSpPr>
-          <p:cNvPr id="14" name="TextBox 13"/>
+              <a:rPr sz="900" b="0" i="0">
+                <a:solidFill>
+                  <a:srgbClr val="6B7A82"/>
+                </a:solidFill>
+                <a:latin typeface="Calibri"/>
+              </a:rPr>
+              <a:t>Maintenance prédictive de la corrosion  ·  ESTL La Salle  ·  2025–2026</a:t>
+            </a:r>
+          </a:p>
+        </p:txBody>
+      </p:sp>
+      <p:sp>
+        <p:nvSpPr>
+          <p:cNvPr id="15" name="TextBox 14"/>
           <p:cNvSpPr txBox="1"/>
           <p:nvPr/>
         </p:nvSpPr>
         <p:spPr>
           <a:xfrm>
-            <a:off x="4718304" y="4892040"/>
-            <a:ext cx="2926080" cy="914400"/>
+            <a:off x="10424160" y="6437376"/>
+            <a:ext cx="1325880" cy="320040"/>
           </a:xfrm>
           <a:prstGeom prst="rect">
             <a:avLst/>
@@ -5427,9 +5248,9 @@
           </a:bodyPr>
           <a:lstStyle/>
           <a:p>
-            <a:pPr algn="l">
-              <a:lnSpc>
-                <a:spcPct val="112000"/>
+            <a:pPr algn="r">
+              <a:lnSpc>
+                <a:spcPct val="100000"/>
               </a:lnSpc>
               <a:spcBef>
                 <a:spcPts val="0"/>
@@ -5439,283 +5260,13 @@
               </a:spcAft>
             </a:pPr>
             <a:r>
-              <a:rPr sz="1300" b="0" i="0">
-                <a:solidFill>
-                  <a:srgbClr val="6B7A82"/>
-                </a:solidFill>
-                <a:latin typeface="Calibri"/>
-              </a:rPr>
-              <a:t>coût de licence nul, accessible aux PME africaines</a:t>
-            </a:r>
-          </a:p>
-        </p:txBody>
-      </p:sp>
-      <p:sp>
-        <p:nvSpPr>
-          <p:cNvPr id="15" name="Rounded Rectangle 14"/>
-          <p:cNvSpPr/>
-          <p:nvPr/>
-        </p:nvSpPr>
-        <p:spPr>
-          <a:xfrm>
-            <a:off x="8055864" y="3840480"/>
-            <a:ext cx="3419856" cy="2057400"/>
-          </a:xfrm>
-          <a:prstGeom prst="roundRect">
-            <a:avLst/>
-          </a:prstGeom>
-          <a:solidFill>
-            <a:srgbClr val="FFFFFF"/>
-          </a:solidFill>
-          <a:ln w="12700">
-            <a:solidFill>
-              <a:srgbClr val="E3DED4"/>
-            </a:solidFill>
-          </a:ln>
-          <a:effectLst/>
-        </p:spPr>
-        <p:style>
-          <a:lnRef idx="1">
-            <a:schemeClr val="accent1"/>
-          </a:lnRef>
-          <a:fillRef idx="3">
-            <a:schemeClr val="accent1"/>
-          </a:fillRef>
-          <a:effectRef idx="2">
-            <a:schemeClr val="accent1"/>
-          </a:effectRef>
-          <a:fontRef idx="minor">
-            <a:schemeClr val="lt1"/>
-          </a:fontRef>
-        </p:style>
-        <p:txBody>
-          <a:bodyPr rtlCol="0" anchor="ctr"/>
-          <a:lstStyle/>
-          <a:p>
-            <a:pPr algn="ctr"/>
-          </a:p>
-        </p:txBody>
-      </p:sp>
-      <p:sp>
-        <p:nvSpPr>
-          <p:cNvPr id="16" name="Rounded Rectangle 15"/>
-          <p:cNvSpPr/>
-          <p:nvPr/>
-        </p:nvSpPr>
-        <p:spPr>
-          <a:xfrm>
-            <a:off x="8055864" y="3840480"/>
-            <a:ext cx="3419856" cy="109728"/>
-          </a:xfrm>
-          <a:prstGeom prst="roundRect">
-            <a:avLst/>
-          </a:prstGeom>
-          <a:solidFill>
-            <a:srgbClr val="2C7A7B"/>
-          </a:solidFill>
-          <a:ln>
-            <a:noFill/>
-          </a:ln>
-          <a:effectLst/>
-        </p:spPr>
-        <p:style>
-          <a:lnRef idx="1">
-            <a:schemeClr val="accent1"/>
-          </a:lnRef>
-          <a:fillRef idx="3">
-            <a:schemeClr val="accent1"/>
-          </a:fillRef>
-          <a:effectRef idx="2">
-            <a:schemeClr val="accent1"/>
-          </a:effectRef>
-          <a:fontRef idx="minor">
-            <a:schemeClr val="lt1"/>
-          </a:fontRef>
-        </p:style>
-        <p:txBody>
-          <a:bodyPr rtlCol="0" anchor="ctr"/>
-          <a:lstStyle/>
-          <a:p>
-            <a:pPr algn="ctr"/>
-          </a:p>
-        </p:txBody>
-      </p:sp>
-      <p:sp>
-        <p:nvSpPr>
-          <p:cNvPr id="17" name="TextBox 16"/>
-          <p:cNvSpPr txBox="1"/>
-          <p:nvPr/>
-        </p:nvSpPr>
-        <p:spPr>
-          <a:xfrm>
-            <a:off x="8311896" y="4114800"/>
-            <a:ext cx="2926080" cy="640080"/>
-          </a:xfrm>
-          <a:prstGeom prst="rect">
-            <a:avLst/>
-          </a:prstGeom>
-          <a:noFill/>
-        </p:spPr>
-        <p:txBody>
-          <a:bodyPr wrap="square" anchor="t" lIns="0" rIns="0" tIns="0" bIns="0">
-            <a:spAutoFit/>
-          </a:bodyPr>
-          <a:lstStyle/>
-          <a:p>
-            <a:pPr algn="l">
-              <a:lnSpc>
-                <a:spcPct val="100000"/>
-              </a:lnSpc>
-              <a:spcBef>
-                <a:spcPts val="0"/>
-              </a:spcBef>
-              <a:spcAft>
-                <a:spcPts val="400"/>
-              </a:spcAft>
-            </a:pPr>
-            <a:r>
-              <a:rPr sz="2300" b="1" i="0">
-                <a:solidFill>
-                  <a:srgbClr val="16252E"/>
-                </a:solidFill>
-                <a:latin typeface="Georgia"/>
-              </a:rPr>
-              <a:t>Transposable</a:t>
-            </a:r>
-          </a:p>
-        </p:txBody>
-      </p:sp>
-      <p:sp>
-        <p:nvSpPr>
-          <p:cNvPr id="18" name="TextBox 17"/>
-          <p:cNvSpPr txBox="1"/>
-          <p:nvPr/>
-        </p:nvSpPr>
-        <p:spPr>
-          <a:xfrm>
-            <a:off x="8311896" y="4892040"/>
-            <a:ext cx="2926080" cy="914400"/>
-          </a:xfrm>
-          <a:prstGeom prst="rect">
-            <a:avLst/>
-          </a:prstGeom>
-          <a:noFill/>
-        </p:spPr>
-        <p:txBody>
-          <a:bodyPr wrap="square" anchor="t" lIns="0" rIns="0" tIns="0" bIns="0">
-            <a:spAutoFit/>
-          </a:bodyPr>
-          <a:lstStyle/>
-          <a:p>
-            <a:pPr algn="l">
-              <a:lnSpc>
-                <a:spcPct val="112000"/>
-              </a:lnSpc>
-              <a:spcBef>
-                <a:spcPts val="0"/>
-              </a:spcBef>
-              <a:spcAft>
-                <a:spcPts val="400"/>
-              </a:spcAft>
-            </a:pPr>
-            <a:r>
-              <a:rPr sz="1300" b="0" i="0">
-                <a:solidFill>
-                  <a:srgbClr val="6B7A82"/>
-                </a:solidFill>
-                <a:latin typeface="Calibri"/>
-              </a:rPr>
-              <a:t>même mapping reportable sur un CMMS open-source</a:t>
-            </a:r>
-          </a:p>
-        </p:txBody>
-      </p:sp>
-      <p:sp>
-        <p:nvSpPr>
-          <p:cNvPr id="19" name="TextBox 18"/>
-          <p:cNvSpPr txBox="1"/>
-          <p:nvPr/>
-        </p:nvSpPr>
-        <p:spPr>
-          <a:xfrm>
-            <a:off x="457200" y="6437376"/>
-            <a:ext cx="8229600" cy="320040"/>
-          </a:xfrm>
-          <a:prstGeom prst="rect">
-            <a:avLst/>
-          </a:prstGeom>
-          <a:noFill/>
-        </p:spPr>
-        <p:txBody>
-          <a:bodyPr wrap="square" anchor="t" lIns="0" rIns="0" tIns="0" bIns="0">
-            <a:spAutoFit/>
-          </a:bodyPr>
-          <a:lstStyle/>
-          <a:p>
-            <a:pPr algn="l">
-              <a:lnSpc>
-                <a:spcPct val="100000"/>
-              </a:lnSpc>
-              <a:spcBef>
-                <a:spcPts val="0"/>
-              </a:spcBef>
-              <a:spcAft>
-                <a:spcPts val="400"/>
-              </a:spcAft>
-            </a:pPr>
-            <a:r>
-              <a:rPr sz="900" b="0" i="0">
-                <a:solidFill>
-                  <a:srgbClr val="6B7A82"/>
-                </a:solidFill>
-                <a:latin typeface="Calibri"/>
-              </a:rPr>
-              <a:t>Maintenance prédictive de la corrosion  ·  ESTL La Salle  ·  2025–2026</a:t>
-            </a:r>
-          </a:p>
-        </p:txBody>
-      </p:sp>
-      <p:sp>
-        <p:nvSpPr>
-          <p:cNvPr id="20" name="TextBox 19"/>
-          <p:cNvSpPr txBox="1"/>
-          <p:nvPr/>
-        </p:nvSpPr>
-        <p:spPr>
-          <a:xfrm>
-            <a:off x="10424160" y="6437376"/>
-            <a:ext cx="1325880" cy="320040"/>
-          </a:xfrm>
-          <a:prstGeom prst="rect">
-            <a:avLst/>
-          </a:prstGeom>
-          <a:noFill/>
-        </p:spPr>
-        <p:txBody>
-          <a:bodyPr wrap="square" anchor="t" lIns="0" rIns="0" tIns="0" bIns="0">
-            <a:spAutoFit/>
-          </a:bodyPr>
-          <a:lstStyle/>
-          <a:p>
-            <a:pPr algn="r">
-              <a:lnSpc>
-                <a:spcPct val="100000"/>
-              </a:lnSpc>
-              <a:spcBef>
-                <a:spcPts val="0"/>
-              </a:spcBef>
-              <a:spcAft>
-                <a:spcPts val="400"/>
-              </a:spcAft>
-            </a:pPr>
-            <a:r>
               <a:rPr sz="1000" b="1" i="0">
                 <a:solidFill>
                   <a:srgbClr val="C9601A"/>
                 </a:solidFill>
                 <a:latin typeface="Calibri"/>
               </a:rPr>
-              <a:t>12 / 17</a:t>
+              <a:t>12 / 19</a:t>
             </a:r>
           </a:p>
         </p:txBody>
@@ -5866,7 +5417,7 @@
                 </a:solidFill>
                 <a:latin typeface="Calibri"/>
               </a:rPr>
-              <a:t>PERSPECTIVE</a:t>
+              <a:t>COMPRÉHENSION PHYSIQUE</a:t>
             </a:r>
           </a:p>
         </p:txBody>
@@ -5911,14 +5462,14 @@
                 </a:solidFill>
                 <a:latin typeface="Georgia"/>
               </a:rPr>
-              <a:t>Jumeau numérique : prédire, confirmer, apprendre des écarts</a:t>
+              <a:t>Emballement &amp; rupture : une divergence géométrique</a:t>
             </a:r>
           </a:p>
         </p:txBody>
       </p:sp>
       <p:pic>
         <p:nvPicPr>
-          <p:cNvPr id="6" name="Picture 5" descr="fig_iii3_band_scorecard.png"/>
+          <p:cNvPr id="6" name="Picture 5" descr="fig_iii4_emballement.png"/>
           <p:cNvPicPr>
             <a:picLocks noChangeAspect="1"/>
           </p:cNvPicPr>
@@ -5932,8 +5483,8 @@
         </p:blipFill>
         <p:spPr>
           <a:xfrm>
-            <a:off x="6355080" y="2707165"/>
-            <a:ext cx="5257800" cy="2083749"/>
+            <a:off x="6400800" y="2495887"/>
+            <a:ext cx="5212080" cy="3146385"/>
           </a:xfrm>
           <a:prstGeom prst="rect">
             <a:avLst/>
@@ -5948,8 +5499,8 @@
         </p:nvSpPr>
         <p:spPr>
           <a:xfrm>
-            <a:off x="868680" y="2057400"/>
-            <a:ext cx="5303520" cy="1280160"/>
+            <a:off x="868680" y="2148840"/>
+            <a:ext cx="5349240" cy="4023360"/>
           </a:xfrm>
           <a:prstGeom prst="rect">
             <a:avLst/>
@@ -5964,13 +5515,13 @@
           <a:p>
             <a:pPr algn="l">
               <a:lnSpc>
-                <a:spcPct val="112000"/>
-              </a:lnSpc>
-              <a:spcBef>
-                <a:spcPts val="0"/>
-              </a:spcBef>
-              <a:spcAft>
-                <a:spcPts val="600"/>
+                <a:spcPct val="113000"/>
+              </a:lnSpc>
+              <a:spcBef>
+                <a:spcPts val="0"/>
+              </a:spcBef>
+              <a:spcAft>
+                <a:spcPts val="1100"/>
               </a:spcAft>
             </a:pPr>
             <a:r>
@@ -5980,16 +5531,16 @@
                 </a:solidFill>
                 <a:latin typeface="Calibri"/>
               </a:rPr>
-              <a:t>Un jumeau calibré sur les essais réels génère une </a:t>
-            </a:r>
-            <a:r>
-              <a:rPr sz="1400" b="1" i="0">
+              <a:t>La section varie en r², donc </a:t>
+            </a:r>
+            <a:r>
+              <a:rPr sz="1500" b="1" i="1">
                 <a:solidFill>
                   <a:srgbClr val="C9601A"/>
                 </a:solidFill>
                 <a:latin typeface="Georgia"/>
               </a:rPr>
-              <a:t>bande prédictive de durée de vie</a:t>
+              <a:t>R s'emballe en 1/r³</a:t>
             </a:r>
             <a:r>
               <a:rPr sz="1400" b="0" i="0">
@@ -5998,85 +5549,141 @@
                 </a:solidFill>
                 <a:latin typeface="Calibri"/>
               </a:rPr>
-              <a:t>, l'un des </a:t>
-            </a:r>
-            <a:r>
-              <a:rPr sz="1400" b="1" i="0">
+              <a:t>.</a:t>
+            </a:r>
+          </a:p>
+          <a:p>
+            <a:pPr algn="l">
+              <a:lnSpc>
+                <a:spcPct val="113000"/>
+              </a:lnSpc>
+              <a:spcBef>
+                <a:spcPts val="0"/>
+              </a:spcBef>
+              <a:spcAft>
+                <a:spcPts val="1100"/>
+              </a:spcAft>
+            </a:pPr>
+            <a:r>
+              <a:rPr sz="1350" b="0" i="0">
+                <a:solidFill>
+                  <a:srgbClr val="202B31"/>
+                </a:solidFill>
+                <a:latin typeface="Calibri"/>
+              </a:rPr>
+              <a:t>La </a:t>
+            </a:r>
+            <a:r>
+              <a:rPr sz="1350" b="1" i="0">
+                <a:solidFill>
+                  <a:srgbClr val="202B31"/>
+                </a:solidFill>
+                <a:latin typeface="Calibri"/>
+              </a:rPr>
+              <a:t>rupture mécanique coïncide avec le début de l'emballement</a:t>
+            </a:r>
+            <a:r>
+              <a:rPr sz="1350" b="0" i="0">
+                <a:solidFill>
+                  <a:srgbClr val="202B31"/>
+                </a:solidFill>
+                <a:latin typeface="Calibri"/>
+              </a:rPr>
+              <a:t> : « section → 0 » = explosion de R ET perte de tenue.</a:t>
+            </a:r>
+          </a:p>
+          <a:p>
+            <a:pPr algn="l">
+              <a:lnSpc>
+                <a:spcPct val="113000"/>
+              </a:lnSpc>
+              <a:spcBef>
+                <a:spcPts val="0"/>
+              </a:spcBef>
+              <a:spcAft>
+                <a:spcPts val="1100"/>
+              </a:spcAft>
+            </a:pPr>
+            <a:r>
+              <a:rPr sz="1350" b="0" i="0">
+                <a:solidFill>
+                  <a:srgbClr val="202B31"/>
+                </a:solidFill>
+                <a:latin typeface="Calibri"/>
+              </a:rPr>
+              <a:t>Après rupture, </a:t>
+            </a:r>
+            <a:r>
+              <a:rPr sz="1350" b="1" i="0">
                 <a:solidFill>
                   <a:srgbClr val="2C7A7B"/>
                 </a:solidFill>
                 <a:latin typeface="Calibri"/>
               </a:rPr>
-              <a:t>trois estimateurs</a:t>
-            </a:r>
-            <a:r>
-              <a:rPr sz="1400" b="0" i="0">
+              <a:t>la conduction résiduelle</a:t>
+            </a:r>
+            <a:r>
+              <a:rPr sz="1350" b="0" i="0">
                 <a:solidFill>
                   <a:srgbClr val="202B31"/>
                 </a:solidFill>
                 <a:latin typeface="Calibri"/>
               </a:rPr>
-              <a:t> confrontés en live (physique · XGBoost · jumeau).</a:t>
-            </a:r>
-          </a:p>
-        </p:txBody>
-      </p:sp>
-      <p:sp>
-        <p:nvSpPr>
-          <p:cNvPr id="8" name="Rounded Rectangle 7"/>
-          <p:cNvSpPr/>
-          <p:nvPr/>
-        </p:nvSpPr>
-        <p:spPr>
-          <a:xfrm>
-            <a:off x="868680" y="3383280"/>
-            <a:ext cx="5303520" cy="1463040"/>
-          </a:xfrm>
-          <a:prstGeom prst="roundRect">
-            <a:avLst/>
-          </a:prstGeom>
-          <a:solidFill>
-            <a:srgbClr val="16252E"/>
-          </a:solidFill>
-          <a:ln w="12700">
-            <a:solidFill>
-              <a:srgbClr val="16252E"/>
-            </a:solidFill>
-          </a:ln>
-          <a:effectLst/>
-        </p:spPr>
-        <p:style>
-          <a:lnRef idx="1">
-            <a:schemeClr val="accent1"/>
-          </a:lnRef>
-          <a:fillRef idx="3">
-            <a:schemeClr val="accent1"/>
-          </a:fillRef>
-          <a:effectRef idx="2">
-            <a:schemeClr val="accent1"/>
-          </a:effectRef>
-          <a:fontRef idx="minor">
-            <a:schemeClr val="lt1"/>
-          </a:fontRef>
-        </p:style>
-        <p:txBody>
-          <a:bodyPr rtlCol="0" anchor="ctr"/>
-          <a:lstStyle/>
-          <a:p>
-            <a:pPr algn="ctr"/>
-          </a:p>
-        </p:txBody>
-      </p:sp>
-      <p:sp>
-        <p:nvSpPr>
-          <p:cNvPr id="9" name="TextBox 8"/>
+              <a:t> (électrolyte HCl + dernier filament) maintient une résistance croissante jusqu'au circuit ouvert.</a:t>
+            </a:r>
+          </a:p>
+          <a:p>
+            <a:pPr algn="l">
+              <a:lnSpc>
+                <a:spcPct val="113000"/>
+              </a:lnSpc>
+              <a:spcBef>
+                <a:spcPts val="0"/>
+              </a:spcBef>
+              <a:spcAft>
+                <a:spcPts val="1100"/>
+              </a:spcAft>
+            </a:pPr>
+            <a:r>
+              <a:rPr sz="1350" b="0" i="0">
+                <a:solidFill>
+                  <a:srgbClr val="202B31"/>
+                </a:solidFill>
+                <a:latin typeface="Calibri"/>
+              </a:rPr>
+              <a:t>Cette portion terminale est </a:t>
+            </a:r>
+            <a:r>
+              <a:rPr sz="1350" b="1" i="0">
+                <a:solidFill>
+                  <a:srgbClr val="C9601A"/>
+                </a:solidFill>
+                <a:latin typeface="Calibri"/>
+              </a:rPr>
+              <a:t>électrolytique, non métallique</a:t>
+            </a:r>
+            <a:r>
+              <a:rPr sz="1350" b="0" i="0">
+                <a:solidFill>
+                  <a:srgbClr val="202B31"/>
+                </a:solidFill>
+                <a:latin typeface="Calibri"/>
+              </a:rPr>
+              <a:t> : tronquée et exclue de l'apprentissage.</a:t>
+            </a:r>
+          </a:p>
+        </p:txBody>
+      </p:sp>
+      <p:sp>
+        <p:nvSpPr>
+          <p:cNvPr id="8" name="TextBox 7"/>
           <p:cNvSpPr txBox="1"/>
           <p:nvPr/>
         </p:nvSpPr>
         <p:spPr>
           <a:xfrm>
-            <a:off x="1143000" y="3547872"/>
-            <a:ext cx="4892040" cy="1143000"/>
+            <a:off x="457200" y="6437376"/>
+            <a:ext cx="8229600" cy="320040"/>
           </a:xfrm>
           <a:prstGeom prst="rect">
             <a:avLst/>
@@ -6091,7 +5698,7 @@
           <a:p>
             <a:pPr algn="l">
               <a:lnSpc>
-                <a:spcPct val="112000"/>
+                <a:spcPct val="100000"/>
               </a:lnSpc>
               <a:spcBef>
                 <a:spcPts val="0"/>
@@ -6101,107 +5708,27 @@
               </a:spcAft>
             </a:pPr>
             <a:r>
-              <a:rPr sz="1300" b="1" i="0">
-                <a:solidFill>
-                  <a:srgbClr val="CADDDC"/>
-                </a:solidFill>
-                <a:latin typeface="Calibri"/>
-              </a:rPr>
-              <a:t>Deux tests « prédire-puis-confirmer » :</a:t>
-            </a:r>
-          </a:p>
-          <a:p>
-            <a:pPr algn="l">
-              <a:lnSpc>
-                <a:spcPct val="112000"/>
-              </a:lnSpc>
-              <a:spcBef>
-                <a:spcPts val="0"/>
-              </a:spcBef>
-              <a:spcAft>
-                <a:spcPts val="400"/>
-              </a:spcAft>
-            </a:pPr>
-            <a:r>
-              <a:rPr sz="1350" b="0" i="0">
-                <a:solidFill>
-                  <a:srgbClr val="CADDDC"/>
-                </a:solidFill>
-                <a:latin typeface="Calibri"/>
-              </a:rPr>
-              <a:t>Run #21 : </a:t>
-            </a:r>
-            <a:r>
-              <a:rPr sz="1500" b="1" i="0">
-                <a:solidFill>
-                  <a:srgbClr val="FFFFFF"/>
-                </a:solidFill>
-                <a:latin typeface="Georgia"/>
-              </a:rPr>
-              <a:t>13,1 h</a:t>
-            </a:r>
-            <a:r>
-              <a:rPr sz="1250" b="1" i="0">
-                <a:solidFill>
-                  <a:srgbClr val="2C7A7B"/>
-                </a:solidFill>
-                <a:latin typeface="Calibri"/>
-              </a:rPr>
-              <a:t>   ✓ dans la bande</a:t>
-            </a:r>
-          </a:p>
-          <a:p>
-            <a:pPr algn="l">
-              <a:lnSpc>
-                <a:spcPct val="112000"/>
-              </a:lnSpc>
-              <a:spcBef>
-                <a:spcPts val="0"/>
-              </a:spcBef>
-              <a:spcAft>
-                <a:spcPts val="400"/>
-              </a:spcAft>
-            </a:pPr>
-            <a:r>
-              <a:rPr sz="1350" b="0" i="0">
-                <a:solidFill>
-                  <a:srgbClr val="CADDDC"/>
-                </a:solidFill>
-                <a:latin typeface="Calibri"/>
-              </a:rPr>
-              <a:t>Run #22 : </a:t>
-            </a:r>
-            <a:r>
-              <a:rPr sz="1500" b="1" i="0">
-                <a:solidFill>
-                  <a:srgbClr val="C9601A"/>
-                </a:solidFill>
-                <a:latin typeface="Georgia"/>
-              </a:rPr>
-              <a:t>11,95 h</a:t>
-            </a:r>
-            <a:r>
-              <a:rPr sz="1250" b="1" i="0">
-                <a:solidFill>
-                  <a:srgbClr val="C9601A"/>
-                </a:solidFill>
-                <a:latin typeface="Calibri"/>
-              </a:rPr>
-              <a:t>   ✗ en deçà (le plus rapide)</a:t>
-            </a:r>
-          </a:p>
-        </p:txBody>
-      </p:sp>
-      <p:sp>
-        <p:nvSpPr>
-          <p:cNvPr id="10" name="TextBox 9"/>
+              <a:rPr sz="900" b="0" i="0">
+                <a:solidFill>
+                  <a:srgbClr val="6B7A82"/>
+                </a:solidFill>
+                <a:latin typeface="Calibri"/>
+              </a:rPr>
+              <a:t>Maintenance prédictive de la corrosion  ·  ESTL La Salle  ·  2025–2026</a:t>
+            </a:r>
+          </a:p>
+        </p:txBody>
+      </p:sp>
+      <p:sp>
+        <p:nvSpPr>
+          <p:cNvPr id="9" name="TextBox 8"/>
           <p:cNvSpPr txBox="1"/>
           <p:nvPr/>
         </p:nvSpPr>
         <p:spPr>
           <a:xfrm>
-            <a:off x="868680" y="5029200"/>
-            <a:ext cx="5303520" cy="1005840"/>
+            <a:off x="10424160" y="6437376"/>
+            <a:ext cx="1325880" cy="320040"/>
           </a:xfrm>
           <a:prstGeom prst="rect">
             <a:avLst/>
@@ -6214,9 +5741,9 @@
           </a:bodyPr>
           <a:lstStyle/>
           <a:p>
-            <a:pPr algn="l">
-              <a:lnSpc>
-                <a:spcPct val="108000"/>
+            <a:pPr algn="r">
+              <a:lnSpc>
+                <a:spcPct val="100000"/>
               </a:lnSpc>
               <a:spcBef>
                 <a:spcPts val="0"/>
@@ -6226,157 +5753,13 @@
               </a:spcAft>
             </a:pPr>
             <a:r>
-              <a:rPr sz="1250" b="0" i="0">
-                <a:solidFill>
-                  <a:srgbClr val="202B31"/>
-                </a:solidFill>
-                <a:latin typeface="Calibri"/>
-              </a:rPr>
-              <a:t>Le jumeau </a:t>
-            </a:r>
-            <a:r>
-              <a:rPr sz="1250" b="1" i="0">
+              <a:rPr sz="1000" b="1" i="0">
                 <a:solidFill>
                   <a:srgbClr val="C9601A"/>
                 </a:solidFill>
                 <a:latin typeface="Calibri"/>
               </a:rPr>
-              <a:t>interpole</a:t>
-            </a:r>
-            <a:r>
-              <a:rPr sz="1250" b="0" i="0">
-                <a:solidFill>
-                  <a:srgbClr val="202B31"/>
-                </a:solidFill>
-                <a:latin typeface="Calibri"/>
-              </a:rPr>
-              <a:t> entre morphologies vues, il n'</a:t>
-            </a:r>
-            <a:r>
-              <a:rPr sz="1250" b="1" i="0">
-                <a:solidFill>
-                  <a:srgbClr val="C9601A"/>
-                </a:solidFill>
-                <a:latin typeface="Calibri"/>
-              </a:rPr>
-              <a:t>extrapole</a:t>
-            </a:r>
-            <a:r>
-              <a:rPr sz="1250" b="0" i="0">
-                <a:solidFill>
-                  <a:srgbClr val="202B31"/>
-                </a:solidFill>
-                <a:latin typeface="Calibri"/>
-              </a:rPr>
-              <a:t> pas. La prédictibilité tient à la répétition au sein d'une </a:t>
-            </a:r>
-            <a:r>
-              <a:rPr sz="1250" b="1" i="0">
-                <a:solidFill>
-                  <a:srgbClr val="2C7A7B"/>
-                </a:solidFill>
-                <a:latin typeface="Calibri"/>
-              </a:rPr>
-              <a:t>même morphologie</a:t>
-            </a:r>
-            <a:r>
-              <a:rPr sz="1250" b="0" i="0">
-                <a:solidFill>
-                  <a:srgbClr val="202B31"/>
-                </a:solidFill>
-                <a:latin typeface="Calibri"/>
-              </a:rPr>
-              <a:t>, pas au simple nombre d'essais.</a:t>
-            </a:r>
-          </a:p>
-        </p:txBody>
-      </p:sp>
-      <p:sp>
-        <p:nvSpPr>
-          <p:cNvPr id="11" name="TextBox 10"/>
-          <p:cNvSpPr txBox="1"/>
-          <p:nvPr/>
-        </p:nvSpPr>
-        <p:spPr>
-          <a:xfrm>
-            <a:off x="457200" y="6437376"/>
-            <a:ext cx="8229600" cy="320040"/>
-          </a:xfrm>
-          <a:prstGeom prst="rect">
-            <a:avLst/>
-          </a:prstGeom>
-          <a:noFill/>
-        </p:spPr>
-        <p:txBody>
-          <a:bodyPr wrap="square" anchor="t" lIns="0" rIns="0" tIns="0" bIns="0">
-            <a:spAutoFit/>
-          </a:bodyPr>
-          <a:lstStyle/>
-          <a:p>
-            <a:pPr algn="l">
-              <a:lnSpc>
-                <a:spcPct val="100000"/>
-              </a:lnSpc>
-              <a:spcBef>
-                <a:spcPts val="0"/>
-              </a:spcBef>
-              <a:spcAft>
-                <a:spcPts val="400"/>
-              </a:spcAft>
-            </a:pPr>
-            <a:r>
-              <a:rPr sz="900" b="0" i="0">
-                <a:solidFill>
-                  <a:srgbClr val="6B7A82"/>
-                </a:solidFill>
-                <a:latin typeface="Calibri"/>
-              </a:rPr>
-              <a:t>Maintenance prédictive de la corrosion  ·  ESTL La Salle  ·  2025–2026</a:t>
-            </a:r>
-          </a:p>
-        </p:txBody>
-      </p:sp>
-      <p:sp>
-        <p:nvSpPr>
-          <p:cNvPr id="12" name="TextBox 11"/>
-          <p:cNvSpPr txBox="1"/>
-          <p:nvPr/>
-        </p:nvSpPr>
-        <p:spPr>
-          <a:xfrm>
-            <a:off x="10424160" y="6437376"/>
-            <a:ext cx="1325880" cy="320040"/>
-          </a:xfrm>
-          <a:prstGeom prst="rect">
-            <a:avLst/>
-          </a:prstGeom>
-          <a:noFill/>
-        </p:spPr>
-        <p:txBody>
-          <a:bodyPr wrap="square" anchor="t" lIns="0" rIns="0" tIns="0" bIns="0">
-            <a:spAutoFit/>
-          </a:bodyPr>
-          <a:lstStyle/>
-          <a:p>
-            <a:pPr algn="r">
-              <a:lnSpc>
-                <a:spcPct val="100000"/>
-              </a:lnSpc>
-              <a:spcBef>
-                <a:spcPts val="0"/>
-              </a:spcBef>
-              <a:spcAft>
-                <a:spcPts val="400"/>
-              </a:spcAft>
-            </a:pPr>
-            <a:r>
-              <a:rPr sz="1000" b="1" i="0">
-                <a:solidFill>
-                  <a:srgbClr val="C9601A"/>
-                </a:solidFill>
-                <a:latin typeface="Calibri"/>
-              </a:rPr>
-              <a:t>13 / 17</a:t>
+              <a:t>13 / 19</a:t>
             </a:r>
           </a:p>
         </p:txBody>
@@ -6523,11 +5906,11 @@
             <a:r>
               <a:rPr sz="1250" b="1" i="0">
                 <a:solidFill>
-                  <a:srgbClr val="C9601A"/>
-                </a:solidFill>
-                <a:latin typeface="Calibri"/>
-              </a:rPr>
-              <a:t>DISCUSSION</a:t>
+                  <a:srgbClr val="2C7A7B"/>
+                </a:solidFill>
+                <a:latin typeface="Calibri"/>
+              </a:rPr>
+              <a:t>RÉSULTATS · OS4</a:t>
             </a:r>
           </a:p>
         </p:txBody>
@@ -6572,21 +5955,124 @@
                 </a:solidFill>
                 <a:latin typeface="Georgia"/>
               </a:rPr>
-              <a:t>Limites assumées d'une preuve de concept</a:t>
-            </a:r>
-          </a:p>
-        </p:txBody>
-      </p:sp>
-      <p:sp>
-        <p:nvSpPr>
-          <p:cNvPr id="6" name="Rounded Rectangle 5"/>
+              <a:t>Boucle décision → action : un module GMAO maison</a:t>
+            </a:r>
+          </a:p>
+        </p:txBody>
+      </p:sp>
+      <p:sp>
+        <p:nvSpPr>
+          <p:cNvPr id="6" name="TextBox 5"/>
+          <p:cNvSpPr txBox="1"/>
+          <p:nvPr/>
+        </p:nvSpPr>
+        <p:spPr>
+          <a:xfrm>
+            <a:off x="868680" y="2148840"/>
+            <a:ext cx="10424160" cy="1371600"/>
+          </a:xfrm>
+          <a:prstGeom prst="rect">
+            <a:avLst/>
+          </a:prstGeom>
+          <a:noFill/>
+        </p:spPr>
+        <p:txBody>
+          <a:bodyPr wrap="square" anchor="t" lIns="0" rIns="0" tIns="0" bIns="0">
+            <a:spAutoFit/>
+          </a:bodyPr>
+          <a:lstStyle/>
+          <a:p>
+            <a:pPr algn="l">
+              <a:lnSpc>
+                <a:spcPct val="112000"/>
+              </a:lnSpc>
+              <a:spcBef>
+                <a:spcPts val="0"/>
+              </a:spcBef>
+              <a:spcAft>
+                <a:spcPts val="800"/>
+              </a:spcAft>
+            </a:pPr>
+            <a:r>
+              <a:rPr sz="1400" b="0" i="0">
+                <a:solidFill>
+                  <a:srgbClr val="202B31"/>
+                </a:solidFill>
+                <a:latin typeface="Calibri"/>
+              </a:rPr>
+              <a:t>Aucun CMMS open-source (GLPI, OpenMaint, Snipe-IT…) n'offre d'API exploitable en version gratuite.</a:t>
+            </a:r>
+          </a:p>
+          <a:p>
+            <a:pPr algn="l">
+              <a:lnSpc>
+                <a:spcPct val="112000"/>
+              </a:lnSpc>
+              <a:spcBef>
+                <a:spcPts val="0"/>
+              </a:spcBef>
+              <a:spcAft>
+                <a:spcPts val="800"/>
+              </a:spcAft>
+            </a:pPr>
+            <a:r>
+              <a:rPr sz="1400" b="1" i="0">
+                <a:solidFill>
+                  <a:srgbClr val="C9601A"/>
+                </a:solidFill>
+                <a:latin typeface="Calibri"/>
+              </a:rPr>
+              <a:t>→ </a:t>
+            </a:r>
+            <a:r>
+              <a:rPr sz="1450" b="1" i="0">
+                <a:solidFill>
+                  <a:srgbClr val="202B31"/>
+                </a:solidFill>
+                <a:latin typeface="Georgia"/>
+              </a:rPr>
+              <a:t>Module GMAO maison</a:t>
+            </a:r>
+            <a:r>
+              <a:rPr sz="1400" b="0" i="0">
+                <a:solidFill>
+                  <a:srgbClr val="202B31"/>
+                </a:solidFill>
+                <a:latin typeface="Calibri"/>
+              </a:rPr>
+              <a:t> intégré à Streamlit + Supabase : à chaque alerte, un </a:t>
+            </a:r>
+            <a:r>
+              <a:rPr sz="1400" b="1" i="0">
+                <a:solidFill>
+                  <a:srgbClr val="C9601A"/>
+                </a:solidFill>
+                <a:latin typeface="Calibri"/>
+              </a:rPr>
+              <a:t>ordre de travail enrichi</a:t>
+            </a:r>
+            <a:r>
+              <a:rPr sz="1400" b="0" i="0">
+                <a:solidFill>
+                  <a:srgbClr val="202B31"/>
+                </a:solidFill>
+                <a:latin typeface="Calibri"/>
+              </a:rPr>
+              <a:t> (CR, RUL, régime, section) est généré et tracé, sans appel externe.</a:t>
+            </a:r>
+          </a:p>
+        </p:txBody>
+      </p:sp>
+      <p:sp>
+        <p:nvSpPr>
+          <p:cNvPr id="7" name="Rounded Rectangle 6"/>
           <p:cNvSpPr/>
           <p:nvPr/>
         </p:nvSpPr>
         <p:spPr>
           <a:xfrm>
-            <a:off x="868680" y="2103120"/>
-            <a:ext cx="10469880" cy="841248"/>
+            <a:off x="868680" y="3840480"/>
+            <a:ext cx="3419856" cy="2057400"/>
           </a:xfrm>
           <a:prstGeom prst="roundRect">
             <a:avLst/>
@@ -6625,20 +6111,20 @@
       </p:sp>
       <p:sp>
         <p:nvSpPr>
-          <p:cNvPr id="7" name="Rounded Rectangle 6"/>
+          <p:cNvPr id="8" name="Rounded Rectangle 7"/>
           <p:cNvSpPr/>
           <p:nvPr/>
         </p:nvSpPr>
         <p:spPr>
           <a:xfrm>
-            <a:off x="868680" y="2103120"/>
-            <a:ext cx="128016" cy="841248"/>
+            <a:off x="868680" y="3840480"/>
+            <a:ext cx="3419856" cy="109728"/>
           </a:xfrm>
           <a:prstGeom prst="roundRect">
             <a:avLst/>
           </a:prstGeom>
           <a:solidFill>
-            <a:srgbClr val="C9601A"/>
+            <a:srgbClr val="2C7A7B"/>
           </a:solidFill>
           <a:ln>
             <a:noFill/>
@@ -6669,14 +6155,14 @@
       </p:sp>
       <p:sp>
         <p:nvSpPr>
-          <p:cNvPr id="8" name="TextBox 7"/>
+          <p:cNvPr id="9" name="TextBox 8"/>
           <p:cNvSpPr txBox="1"/>
           <p:nvPr/>
         </p:nvSpPr>
         <p:spPr>
           <a:xfrm>
-            <a:off x="1234440" y="2103120"/>
-            <a:ext cx="9875520" cy="841248"/>
+            <a:off x="1124712" y="4114800"/>
+            <a:ext cx="2926080" cy="640080"/>
           </a:xfrm>
           <a:prstGeom prst="rect">
             <a:avLst/>
@@ -6684,14 +6170,14 @@
           <a:noFill/>
         </p:spPr>
         <p:txBody>
-          <a:bodyPr wrap="square" anchor="ctr" lIns="0" rIns="0" tIns="0" bIns="0">
+          <a:bodyPr wrap="square" anchor="t" lIns="0" rIns="0" tIns="0" bIns="0">
             <a:spAutoFit/>
           </a:bodyPr>
           <a:lstStyle/>
           <a:p>
             <a:pPr algn="l">
               <a:lnSpc>
-                <a:spcPct val="105000"/>
+                <a:spcPct val="100000"/>
               </a:lnSpc>
               <a:spcBef>
                 <a:spcPts val="0"/>
@@ -6701,36 +6187,72 @@
               </a:spcAft>
             </a:pPr>
             <a:r>
-              <a:rPr sz="1500" b="1" i="0">
-                <a:solidFill>
-                  <a:srgbClr val="202B31"/>
+              <a:rPr sz="2300" b="1" i="0">
+                <a:solidFill>
+                  <a:srgbClr val="16252E"/>
                 </a:solidFill>
                 <a:latin typeface="Georgia"/>
               </a:rPr>
-              <a:t>Matériau : </a:t>
-            </a:r>
-            <a:r>
-              <a:rPr sz="1350" b="0" i="0">
-                <a:solidFill>
-                  <a:srgbClr val="202B31"/>
-                </a:solidFill>
-                <a:latin typeface="Calibri"/>
-              </a:rPr>
-              <a:t>fil de fer ≠ acier API 5L : les valeurs absolues de CR ne sont pas directement transposables.</a:t>
-            </a:r>
-          </a:p>
-        </p:txBody>
-      </p:sp>
-      <p:sp>
-        <p:nvSpPr>
-          <p:cNvPr id="9" name="Rounded Rectangle 8"/>
+              <a:t>MTBF · MTTR</a:t>
+            </a:r>
+          </a:p>
+        </p:txBody>
+      </p:sp>
+      <p:sp>
+        <p:nvSpPr>
+          <p:cNvPr id="10" name="TextBox 9"/>
+          <p:cNvSpPr txBox="1"/>
+          <p:nvPr/>
+        </p:nvSpPr>
+        <p:spPr>
+          <a:xfrm>
+            <a:off x="1124712" y="4892040"/>
+            <a:ext cx="2926080" cy="914400"/>
+          </a:xfrm>
+          <a:prstGeom prst="rect">
+            <a:avLst/>
+          </a:prstGeom>
+          <a:noFill/>
+        </p:spPr>
+        <p:txBody>
+          <a:bodyPr wrap="square" anchor="t" lIns="0" rIns="0" tIns="0" bIns="0">
+            <a:spAutoFit/>
+          </a:bodyPr>
+          <a:lstStyle/>
+          <a:p>
+            <a:pPr algn="l">
+              <a:lnSpc>
+                <a:spcPct val="112000"/>
+              </a:lnSpc>
+              <a:spcBef>
+                <a:spcPts val="0"/>
+              </a:spcBef>
+              <a:spcAft>
+                <a:spcPts val="400"/>
+              </a:spcAft>
+            </a:pPr>
+            <a:r>
+              <a:rPr sz="1300" b="0" i="0">
+                <a:solidFill>
+                  <a:srgbClr val="6B7A82"/>
+                </a:solidFill>
+                <a:latin typeface="Calibri"/>
+              </a:rPr>
+              <a:t>indicateurs de maintenance calculés sur l'historique des OT</a:t>
+            </a:r>
+          </a:p>
+        </p:txBody>
+      </p:sp>
+      <p:sp>
+        <p:nvSpPr>
+          <p:cNvPr id="11" name="Rounded Rectangle 10"/>
           <p:cNvSpPr/>
           <p:nvPr/>
         </p:nvSpPr>
         <p:spPr>
           <a:xfrm>
-            <a:off x="868680" y="3035808"/>
-            <a:ext cx="10469880" cy="841248"/>
+            <a:off x="4462272" y="3840480"/>
+            <a:ext cx="3419856" cy="2057400"/>
           </a:xfrm>
           <a:prstGeom prst="roundRect">
             <a:avLst/>
@@ -6769,20 +6291,20 @@
       </p:sp>
       <p:sp>
         <p:nvSpPr>
-          <p:cNvPr id="10" name="Rounded Rectangle 9"/>
+          <p:cNvPr id="12" name="Rounded Rectangle 11"/>
           <p:cNvSpPr/>
           <p:nvPr/>
         </p:nvSpPr>
         <p:spPr>
           <a:xfrm>
-            <a:off x="868680" y="3035808"/>
-            <a:ext cx="128016" cy="841248"/>
+            <a:off x="4462272" y="3840480"/>
+            <a:ext cx="3419856" cy="109728"/>
           </a:xfrm>
           <a:prstGeom prst="roundRect">
             <a:avLst/>
           </a:prstGeom>
           <a:solidFill>
-            <a:srgbClr val="C9601A"/>
+            <a:srgbClr val="2C7A7B"/>
           </a:solidFill>
           <a:ln>
             <a:noFill/>
@@ -6813,14 +6335,14 @@
       </p:sp>
       <p:sp>
         <p:nvSpPr>
-          <p:cNvPr id="11" name="TextBox 10"/>
+          <p:cNvPr id="13" name="TextBox 12"/>
           <p:cNvSpPr txBox="1"/>
           <p:nvPr/>
         </p:nvSpPr>
         <p:spPr>
           <a:xfrm>
-            <a:off x="1234440" y="3035808"/>
-            <a:ext cx="9875520" cy="841248"/>
+            <a:off x="4718304" y="4114800"/>
+            <a:ext cx="2926080" cy="640080"/>
           </a:xfrm>
           <a:prstGeom prst="rect">
             <a:avLst/>
@@ -6828,14 +6350,14 @@
           <a:noFill/>
         </p:spPr>
         <p:txBody>
-          <a:bodyPr wrap="square" anchor="ctr" lIns="0" rIns="0" tIns="0" bIns="0">
+          <a:bodyPr wrap="square" anchor="t" lIns="0" rIns="0" tIns="0" bIns="0">
             <a:spAutoFit/>
           </a:bodyPr>
           <a:lstStyle/>
           <a:p>
             <a:pPr algn="l">
               <a:lnSpc>
-                <a:spcPct val="105000"/>
+                <a:spcPct val="100000"/>
               </a:lnSpc>
               <a:spcBef>
                 <a:spcPts val="0"/>
@@ -6845,36 +6367,72 @@
               </a:spcAft>
             </a:pPr>
             <a:r>
-              <a:rPr sz="1500" b="1" i="0">
-                <a:solidFill>
-                  <a:srgbClr val="202B31"/>
+              <a:rPr sz="2300" b="1" i="0">
+                <a:solidFill>
+                  <a:srgbClr val="16252E"/>
                 </a:solidFill>
                 <a:latin typeface="Georgia"/>
               </a:rPr>
-              <a:t>Effet acide-shunt : </a:t>
-            </a:r>
-            <a:r>
-              <a:rPr sz="1350" b="0" i="0">
-                <a:solidFill>
-                  <a:srgbClr val="202B31"/>
-                </a:solidFill>
-                <a:latin typeface="Calibri"/>
-              </a:rPr>
-              <a:t>en HCl concentré, l'électrolyte shunte la mesure, d'où l'emploi d'un fil fin.</a:t>
-            </a:r>
-          </a:p>
-        </p:txBody>
-      </p:sp>
-      <p:sp>
-        <p:nvSpPr>
-          <p:cNvPr id="12" name="Rounded Rectangle 11"/>
+              <a:t>Gratuit</a:t>
+            </a:r>
+          </a:p>
+        </p:txBody>
+      </p:sp>
+      <p:sp>
+        <p:nvSpPr>
+          <p:cNvPr id="14" name="TextBox 13"/>
+          <p:cNvSpPr txBox="1"/>
+          <p:nvPr/>
+        </p:nvSpPr>
+        <p:spPr>
+          <a:xfrm>
+            <a:off x="4718304" y="4892040"/>
+            <a:ext cx="2926080" cy="914400"/>
+          </a:xfrm>
+          <a:prstGeom prst="rect">
+            <a:avLst/>
+          </a:prstGeom>
+          <a:noFill/>
+        </p:spPr>
+        <p:txBody>
+          <a:bodyPr wrap="square" anchor="t" lIns="0" rIns="0" tIns="0" bIns="0">
+            <a:spAutoFit/>
+          </a:bodyPr>
+          <a:lstStyle/>
+          <a:p>
+            <a:pPr algn="l">
+              <a:lnSpc>
+                <a:spcPct val="112000"/>
+              </a:lnSpc>
+              <a:spcBef>
+                <a:spcPts val="0"/>
+              </a:spcBef>
+              <a:spcAft>
+                <a:spcPts val="400"/>
+              </a:spcAft>
+            </a:pPr>
+            <a:r>
+              <a:rPr sz="1300" b="0" i="0">
+                <a:solidFill>
+                  <a:srgbClr val="6B7A82"/>
+                </a:solidFill>
+                <a:latin typeface="Calibri"/>
+              </a:rPr>
+              <a:t>coût de licence nul, accessible aux PME africaines</a:t>
+            </a:r>
+          </a:p>
+        </p:txBody>
+      </p:sp>
+      <p:sp>
+        <p:nvSpPr>
+          <p:cNvPr id="15" name="Rounded Rectangle 14"/>
           <p:cNvSpPr/>
           <p:nvPr/>
         </p:nvSpPr>
         <p:spPr>
           <a:xfrm>
-            <a:off x="868680" y="3968496"/>
-            <a:ext cx="10469880" cy="841248"/>
+            <a:off x="8055864" y="3840480"/>
+            <a:ext cx="3419856" cy="2057400"/>
           </a:xfrm>
           <a:prstGeom prst="roundRect">
             <a:avLst/>
@@ -6913,20 +6471,20 @@
       </p:sp>
       <p:sp>
         <p:nvSpPr>
-          <p:cNvPr id="13" name="Rounded Rectangle 12"/>
+          <p:cNvPr id="16" name="Rounded Rectangle 15"/>
           <p:cNvSpPr/>
           <p:nvPr/>
         </p:nvSpPr>
         <p:spPr>
           <a:xfrm>
-            <a:off x="868680" y="3968496"/>
-            <a:ext cx="128016" cy="841248"/>
+            <a:off x="8055864" y="3840480"/>
+            <a:ext cx="3419856" cy="109728"/>
           </a:xfrm>
           <a:prstGeom prst="roundRect">
             <a:avLst/>
           </a:prstGeom>
           <a:solidFill>
-            <a:srgbClr val="C9601A"/>
+            <a:srgbClr val="2C7A7B"/>
           </a:solidFill>
           <a:ln>
             <a:noFill/>
@@ -6957,212 +6515,14 @@
       </p:sp>
       <p:sp>
         <p:nvSpPr>
-          <p:cNvPr id="14" name="TextBox 13"/>
-          <p:cNvSpPr txBox="1"/>
-          <p:nvPr/>
-        </p:nvSpPr>
-        <p:spPr>
-          <a:xfrm>
-            <a:off x="1234440" y="3968496"/>
-            <a:ext cx="9875520" cy="841248"/>
-          </a:xfrm>
-          <a:prstGeom prst="rect">
-            <a:avLst/>
-          </a:prstGeom>
-          <a:noFill/>
-        </p:spPr>
-        <p:txBody>
-          <a:bodyPr wrap="square" anchor="ctr" lIns="0" rIns="0" tIns="0" bIns="0">
-            <a:spAutoFit/>
-          </a:bodyPr>
-          <a:lstStyle/>
-          <a:p>
-            <a:pPr algn="l">
-              <a:lnSpc>
-                <a:spcPct val="105000"/>
-              </a:lnSpc>
-              <a:spcBef>
-                <a:spcPts val="0"/>
-              </a:spcBef>
-              <a:spcAft>
-                <a:spcPts val="400"/>
-              </a:spcAft>
-            </a:pPr>
-            <a:r>
-              <a:rPr sz="1500" b="1" i="0">
-                <a:solidFill>
-                  <a:srgbClr val="202B31"/>
-                </a:solidFill>
-                <a:latin typeface="Georgia"/>
-              </a:rPr>
-              <a:t>Jeu de données : </a:t>
-            </a:r>
-            <a:r>
-              <a:rPr sz="1350" b="0" i="0">
-                <a:solidFill>
-                  <a:srgbClr val="202B31"/>
-                </a:solidFill>
-                <a:latin typeface="Calibri"/>
-              </a:rPr>
-              <a:t>peu d'essais : métriques bruitées, en cours de consolidation.</a:t>
-            </a:r>
-          </a:p>
-        </p:txBody>
-      </p:sp>
-      <p:sp>
-        <p:nvSpPr>
-          <p:cNvPr id="15" name="Rounded Rectangle 14"/>
-          <p:cNvSpPr/>
-          <p:nvPr/>
-        </p:nvSpPr>
-        <p:spPr>
-          <a:xfrm>
-            <a:off x="868680" y="4901183"/>
-            <a:ext cx="10469880" cy="841248"/>
-          </a:xfrm>
-          <a:prstGeom prst="roundRect">
-            <a:avLst/>
-          </a:prstGeom>
-          <a:solidFill>
-            <a:srgbClr val="FFFFFF"/>
-          </a:solidFill>
-          <a:ln w="12700">
-            <a:solidFill>
-              <a:srgbClr val="E3DED4"/>
-            </a:solidFill>
-          </a:ln>
-          <a:effectLst/>
-        </p:spPr>
-        <p:style>
-          <a:lnRef idx="1">
-            <a:schemeClr val="accent1"/>
-          </a:lnRef>
-          <a:fillRef idx="3">
-            <a:schemeClr val="accent1"/>
-          </a:fillRef>
-          <a:effectRef idx="2">
-            <a:schemeClr val="accent1"/>
-          </a:effectRef>
-          <a:fontRef idx="minor">
-            <a:schemeClr val="lt1"/>
-          </a:fontRef>
-        </p:style>
-        <p:txBody>
-          <a:bodyPr rtlCol="0" anchor="ctr"/>
-          <a:lstStyle/>
-          <a:p>
-            <a:pPr algn="ctr"/>
-          </a:p>
-        </p:txBody>
-      </p:sp>
-      <p:sp>
-        <p:nvSpPr>
-          <p:cNvPr id="16" name="Rounded Rectangle 15"/>
-          <p:cNvSpPr/>
-          <p:nvPr/>
-        </p:nvSpPr>
-        <p:spPr>
-          <a:xfrm>
-            <a:off x="868680" y="4901183"/>
-            <a:ext cx="128016" cy="841248"/>
-          </a:xfrm>
-          <a:prstGeom prst="roundRect">
-            <a:avLst/>
-          </a:prstGeom>
-          <a:solidFill>
-            <a:srgbClr val="C9601A"/>
-          </a:solidFill>
-          <a:ln>
-            <a:noFill/>
-          </a:ln>
-          <a:effectLst/>
-        </p:spPr>
-        <p:style>
-          <a:lnRef idx="1">
-            <a:schemeClr val="accent1"/>
-          </a:lnRef>
-          <a:fillRef idx="3">
-            <a:schemeClr val="accent1"/>
-          </a:fillRef>
-          <a:effectRef idx="2">
-            <a:schemeClr val="accent1"/>
-          </a:effectRef>
-          <a:fontRef idx="minor">
-            <a:schemeClr val="lt1"/>
-          </a:fontRef>
-        </p:style>
-        <p:txBody>
-          <a:bodyPr rtlCol="0" anchor="ctr"/>
-          <a:lstStyle/>
-          <a:p>
-            <a:pPr algn="ctr"/>
-          </a:p>
-        </p:txBody>
-      </p:sp>
-      <p:sp>
-        <p:nvSpPr>
           <p:cNvPr id="17" name="TextBox 16"/>
           <p:cNvSpPr txBox="1"/>
           <p:nvPr/>
         </p:nvSpPr>
         <p:spPr>
           <a:xfrm>
-            <a:off x="1234440" y="4901183"/>
-            <a:ext cx="9875520" cy="841248"/>
-          </a:xfrm>
-          <a:prstGeom prst="rect">
-            <a:avLst/>
-          </a:prstGeom>
-          <a:noFill/>
-        </p:spPr>
-        <p:txBody>
-          <a:bodyPr wrap="square" anchor="ctr" lIns="0" rIns="0" tIns="0" bIns="0">
-            <a:spAutoFit/>
-          </a:bodyPr>
-          <a:lstStyle/>
-          <a:p>
-            <a:pPr algn="l">
-              <a:lnSpc>
-                <a:spcPct val="105000"/>
-              </a:lnSpc>
-              <a:spcBef>
-                <a:spcPts val="0"/>
-              </a:spcBef>
-              <a:spcAft>
-                <a:spcPts val="400"/>
-              </a:spcAft>
-            </a:pPr>
-            <a:r>
-              <a:rPr sz="1500" b="1" i="0">
-                <a:solidFill>
-                  <a:srgbClr val="202B31"/>
-                </a:solidFill>
-                <a:latin typeface="Georgia"/>
-              </a:rPr>
-              <a:t>Couverture thermique : </a:t>
-            </a:r>
-            <a:r>
-              <a:rPr sz="1350" b="0" i="0">
-                <a:solidFill>
-                  <a:srgbClr val="202B31"/>
-                </a:solidFill>
-                <a:latin typeface="Calibri"/>
-              </a:rPr>
-              <a:t>une seule plage (~30 °C) répétée ; ~32 °C encore représentée par un seul essai.</a:t>
-            </a:r>
-          </a:p>
-        </p:txBody>
-      </p:sp>
-      <p:sp>
-        <p:nvSpPr>
-          <p:cNvPr id="18" name="TextBox 17"/>
-          <p:cNvSpPr txBox="1"/>
-          <p:nvPr/>
-        </p:nvSpPr>
-        <p:spPr>
-          <a:xfrm>
-            <a:off x="868680" y="5943600"/>
-            <a:ext cx="10424160" cy="411480"/>
+            <a:off x="8311896" y="4114800"/>
+            <a:ext cx="2926080" cy="640080"/>
           </a:xfrm>
           <a:prstGeom prst="rect">
             <a:avLst/>
@@ -7187,27 +6547,27 @@
               </a:spcAft>
             </a:pPr>
             <a:r>
-              <a:rPr sz="1350" b="1" i="1">
-                <a:solidFill>
-                  <a:srgbClr val="2C7A7B"/>
-                </a:solidFill>
-                <a:latin typeface="Calibri"/>
-              </a:rPr>
-              <a:t>Ces limites ne sont pas intrinsèques à la méthode : elles définissent les conditions du passage à l'échelle.</a:t>
-            </a:r>
-          </a:p>
-        </p:txBody>
-      </p:sp>
-      <p:sp>
-        <p:nvSpPr>
-          <p:cNvPr id="19" name="TextBox 18"/>
+              <a:rPr sz="2300" b="1" i="0">
+                <a:solidFill>
+                  <a:srgbClr val="16252E"/>
+                </a:solidFill>
+                <a:latin typeface="Georgia"/>
+              </a:rPr>
+              <a:t>Transposable</a:t>
+            </a:r>
+          </a:p>
+        </p:txBody>
+      </p:sp>
+      <p:sp>
+        <p:nvSpPr>
+          <p:cNvPr id="18" name="TextBox 17"/>
           <p:cNvSpPr txBox="1"/>
           <p:nvPr/>
         </p:nvSpPr>
         <p:spPr>
           <a:xfrm>
-            <a:off x="457200" y="6437376"/>
-            <a:ext cx="8229600" cy="320040"/>
+            <a:off x="8311896" y="4892040"/>
+            <a:ext cx="2926080" cy="914400"/>
           </a:xfrm>
           <a:prstGeom prst="rect">
             <a:avLst/>
@@ -7222,7 +6582,7 @@
           <a:p>
             <a:pPr algn="l">
               <a:lnSpc>
-                <a:spcPct val="100000"/>
+                <a:spcPct val="112000"/>
               </a:lnSpc>
               <a:spcBef>
                 <a:spcPts val="0"/>
@@ -7232,27 +6592,27 @@
               </a:spcAft>
             </a:pPr>
             <a:r>
-              <a:rPr sz="900" b="0" i="0">
+              <a:rPr sz="1300" b="0" i="0">
                 <a:solidFill>
                   <a:srgbClr val="6B7A82"/>
                 </a:solidFill>
                 <a:latin typeface="Calibri"/>
               </a:rPr>
-              <a:t>Maintenance prédictive de la corrosion  ·  ESTL La Salle  ·  2025–2026</a:t>
-            </a:r>
-          </a:p>
-        </p:txBody>
-      </p:sp>
-      <p:sp>
-        <p:nvSpPr>
-          <p:cNvPr id="20" name="TextBox 19"/>
+              <a:t>même mapping reportable sur un CMMS open-source</a:t>
+            </a:r>
+          </a:p>
+        </p:txBody>
+      </p:sp>
+      <p:sp>
+        <p:nvSpPr>
+          <p:cNvPr id="19" name="TextBox 18"/>
           <p:cNvSpPr txBox="1"/>
           <p:nvPr/>
         </p:nvSpPr>
         <p:spPr>
           <a:xfrm>
-            <a:off x="10424160" y="6437376"/>
-            <a:ext cx="1325880" cy="320040"/>
+            <a:off x="457200" y="6437376"/>
+            <a:ext cx="8229600" cy="320040"/>
           </a:xfrm>
           <a:prstGeom prst="rect">
             <a:avLst/>
@@ -7265,6 +6625,51 @@
           </a:bodyPr>
           <a:lstStyle/>
           <a:p>
+            <a:pPr algn="l">
+              <a:lnSpc>
+                <a:spcPct val="100000"/>
+              </a:lnSpc>
+              <a:spcBef>
+                <a:spcPts val="0"/>
+              </a:spcBef>
+              <a:spcAft>
+                <a:spcPts val="400"/>
+              </a:spcAft>
+            </a:pPr>
+            <a:r>
+              <a:rPr sz="900" b="0" i="0">
+                <a:solidFill>
+                  <a:srgbClr val="6B7A82"/>
+                </a:solidFill>
+                <a:latin typeface="Calibri"/>
+              </a:rPr>
+              <a:t>Maintenance prédictive de la corrosion  ·  ESTL La Salle  ·  2025–2026</a:t>
+            </a:r>
+          </a:p>
+        </p:txBody>
+      </p:sp>
+      <p:sp>
+        <p:nvSpPr>
+          <p:cNvPr id="20" name="TextBox 19"/>
+          <p:cNvSpPr txBox="1"/>
+          <p:nvPr/>
+        </p:nvSpPr>
+        <p:spPr>
+          <a:xfrm>
+            <a:off x="10424160" y="6437376"/>
+            <a:ext cx="1325880" cy="320040"/>
+          </a:xfrm>
+          <a:prstGeom prst="rect">
+            <a:avLst/>
+          </a:prstGeom>
+          <a:noFill/>
+        </p:spPr>
+        <p:txBody>
+          <a:bodyPr wrap="square" anchor="t" lIns="0" rIns="0" tIns="0" bIns="0">
+            <a:spAutoFit/>
+          </a:bodyPr>
+          <a:lstStyle/>
+          <a:p>
             <a:pPr algn="r">
               <a:lnSpc>
                 <a:spcPct val="100000"/>
@@ -7283,7 +6688,7 @@
                 </a:solidFill>
                 <a:latin typeface="Calibri"/>
               </a:rPr>
-              <a:t>14 / 17</a:t>
+              <a:t>14 / 19</a:t>
             </a:r>
           </a:p>
         </p:txBody>
@@ -7434,7 +6839,7 @@
                 </a:solidFill>
                 <a:latin typeface="Calibri"/>
               </a:rPr>
-              <a:t>APPORTS DU TRAVAIL</a:t>
+              <a:t>PERSPECTIVE</a:t>
             </a:r>
           </a:p>
         </p:txBody>
@@ -7479,30 +6884,137 @@
                 </a:solidFill>
                 <a:latin typeface="Georgia"/>
               </a:rPr>
-              <a:t>Ce que cette étude apporte</a:t>
-            </a:r>
-          </a:p>
-        </p:txBody>
-      </p:sp>
-      <p:sp>
-        <p:nvSpPr>
-          <p:cNvPr id="6" name="Oval 5"/>
+              <a:t>Jumeau numérique : prédire, confirmer, apprendre des écarts</a:t>
+            </a:r>
+          </a:p>
+        </p:txBody>
+      </p:sp>
+      <p:pic>
+        <p:nvPicPr>
+          <p:cNvPr id="6" name="Picture 5" descr="fig_iii3_band_scorecard.png"/>
+          <p:cNvPicPr>
+            <a:picLocks noChangeAspect="1"/>
+          </p:cNvPicPr>
+          <p:nvPr/>
+        </p:nvPicPr>
+        <p:blipFill>
+          <a:blip r:embed="rId2"/>
+          <a:stretch>
+            <a:fillRect/>
+          </a:stretch>
+        </p:blipFill>
+        <p:spPr>
+          <a:xfrm>
+            <a:off x="6355080" y="2707165"/>
+            <a:ext cx="5257800" cy="2083749"/>
+          </a:xfrm>
+          <a:prstGeom prst="rect">
+            <a:avLst/>
+          </a:prstGeom>
+        </p:spPr>
+      </p:pic>
+      <p:sp>
+        <p:nvSpPr>
+          <p:cNvPr id="7" name="TextBox 6"/>
+          <p:cNvSpPr txBox="1"/>
+          <p:nvPr/>
+        </p:nvSpPr>
+        <p:spPr>
+          <a:xfrm>
+            <a:off x="868680" y="2057400"/>
+            <a:ext cx="5303520" cy="1280160"/>
+          </a:xfrm>
+          <a:prstGeom prst="rect">
+            <a:avLst/>
+          </a:prstGeom>
+          <a:noFill/>
+        </p:spPr>
+        <p:txBody>
+          <a:bodyPr wrap="square" anchor="t" lIns="0" rIns="0" tIns="0" bIns="0">
+            <a:spAutoFit/>
+          </a:bodyPr>
+          <a:lstStyle/>
+          <a:p>
+            <a:pPr algn="l">
+              <a:lnSpc>
+                <a:spcPct val="112000"/>
+              </a:lnSpc>
+              <a:spcBef>
+                <a:spcPts val="0"/>
+              </a:spcBef>
+              <a:spcAft>
+                <a:spcPts val="600"/>
+              </a:spcAft>
+            </a:pPr>
+            <a:r>
+              <a:rPr sz="1400" b="0" i="0">
+                <a:solidFill>
+                  <a:srgbClr val="202B31"/>
+                </a:solidFill>
+                <a:latin typeface="Calibri"/>
+              </a:rPr>
+              <a:t>Un jumeau calibré sur les essais réels génère une </a:t>
+            </a:r>
+            <a:r>
+              <a:rPr sz="1400" b="1" i="0">
+                <a:solidFill>
+                  <a:srgbClr val="C9601A"/>
+                </a:solidFill>
+                <a:latin typeface="Georgia"/>
+              </a:rPr>
+              <a:t>bande prédictive de durée de vie</a:t>
+            </a:r>
+            <a:r>
+              <a:rPr sz="1400" b="0" i="0">
+                <a:solidFill>
+                  <a:srgbClr val="202B31"/>
+                </a:solidFill>
+                <a:latin typeface="Calibri"/>
+              </a:rPr>
+              <a:t>, l'un des </a:t>
+            </a:r>
+            <a:r>
+              <a:rPr sz="1400" b="1" i="0">
+                <a:solidFill>
+                  <a:srgbClr val="2C7A7B"/>
+                </a:solidFill>
+                <a:latin typeface="Calibri"/>
+              </a:rPr>
+              <a:t>trois estimateurs</a:t>
+            </a:r>
+            <a:r>
+              <a:rPr sz="1400" b="0" i="0">
+                <a:solidFill>
+                  <a:srgbClr val="202B31"/>
+                </a:solidFill>
+                <a:latin typeface="Calibri"/>
+              </a:rPr>
+              <a:t> confrontés en live (physique · XGBoost · jumeau).</a:t>
+            </a:r>
+          </a:p>
+        </p:txBody>
+      </p:sp>
+      <p:sp>
+        <p:nvSpPr>
+          <p:cNvPr id="8" name="Rounded Rectangle 7"/>
           <p:cNvSpPr/>
           <p:nvPr/>
         </p:nvSpPr>
         <p:spPr>
           <a:xfrm>
-            <a:off x="868680" y="2221992"/>
-            <a:ext cx="502920" cy="502920"/>
-          </a:xfrm>
-          <a:prstGeom prst="ellipse">
+            <a:off x="868680" y="3383280"/>
+            <a:ext cx="5303520" cy="1463040"/>
+          </a:xfrm>
+          <a:prstGeom prst="roundRect">
             <a:avLst/>
           </a:prstGeom>
           <a:solidFill>
-            <a:srgbClr val="2C7A7B"/>
+            <a:srgbClr val="16252E"/>
           </a:solidFill>
-          <a:ln>
-            <a:noFill/>
+          <a:ln w="12700">
+            <a:solidFill>
+              <a:srgbClr val="16252E"/>
+            </a:solidFill>
           </a:ln>
           <a:effectLst/>
         </p:spPr>
@@ -7521,32 +7033,23 @@
           </a:fontRef>
         </p:style>
         <p:txBody>
-          <a:bodyPr rtlCol="0" anchor="ctr" wrap="none" lIns="0" rIns="0" tIns="0" bIns="0"/>
+          <a:bodyPr rtlCol="0" anchor="ctr"/>
           <a:lstStyle/>
           <a:p>
             <a:pPr algn="ctr"/>
-            <a:r>
-              <a:rPr sz="1600" b="1">
-                <a:solidFill>
-                  <a:srgbClr val="FFFFFF"/>
-                </a:solidFill>
-                <a:latin typeface="Georgia"/>
-              </a:rPr>
-              <a:t>1</a:t>
-            </a:r>
-          </a:p>
-        </p:txBody>
-      </p:sp>
-      <p:sp>
-        <p:nvSpPr>
-          <p:cNvPr id="7" name="TextBox 6"/>
+          </a:p>
+        </p:txBody>
+      </p:sp>
+      <p:sp>
+        <p:nvSpPr>
+          <p:cNvPr id="9" name="TextBox 8"/>
           <p:cNvSpPr txBox="1"/>
           <p:nvPr/>
         </p:nvSpPr>
         <p:spPr>
           <a:xfrm>
-            <a:off x="1554480" y="2148840"/>
-            <a:ext cx="9784080" cy="914400"/>
+            <a:off x="1143000" y="3547872"/>
+            <a:ext cx="4892040" cy="1143000"/>
           </a:xfrm>
           <a:prstGeom prst="rect">
             <a:avLst/>
@@ -7561,112 +7064,117 @@
           <a:p>
             <a:pPr algn="l">
               <a:lnSpc>
-                <a:spcPct val="108000"/>
-              </a:lnSpc>
-              <a:spcBef>
-                <a:spcPts val="0"/>
-              </a:spcBef>
-              <a:spcAft>
-                <a:spcPts val="300"/>
-              </a:spcAft>
-            </a:pPr>
-            <a:r>
-              <a:rPr sz="1600" b="1" i="0">
-                <a:solidFill>
-                  <a:srgbClr val="202B31"/>
+                <a:spcPct val="112000"/>
+              </a:lnSpc>
+              <a:spcBef>
+                <a:spcPts val="0"/>
+              </a:spcBef>
+              <a:spcAft>
+                <a:spcPts val="400"/>
+              </a:spcAft>
+            </a:pPr>
+            <a:r>
+              <a:rPr sz="1300" b="1" i="0">
+                <a:solidFill>
+                  <a:srgbClr val="CADDDC"/>
+                </a:solidFill>
+                <a:latin typeface="Calibri"/>
+              </a:rPr>
+              <a:t>Deux tests « prédire-puis-confirmer » :</a:t>
+            </a:r>
+          </a:p>
+          <a:p>
+            <a:pPr algn="l">
+              <a:lnSpc>
+                <a:spcPct val="112000"/>
+              </a:lnSpc>
+              <a:spcBef>
+                <a:spcPts val="0"/>
+              </a:spcBef>
+              <a:spcAft>
+                <a:spcPts val="400"/>
+              </a:spcAft>
+            </a:pPr>
+            <a:r>
+              <a:rPr sz="1350" b="0" i="0">
+                <a:solidFill>
+                  <a:srgbClr val="CADDDC"/>
+                </a:solidFill>
+                <a:latin typeface="Calibri"/>
+              </a:rPr>
+              <a:t>Run #21 : </a:t>
+            </a:r>
+            <a:r>
+              <a:rPr sz="1500" b="1" i="0">
+                <a:solidFill>
+                  <a:srgbClr val="FFFFFF"/>
                 </a:solidFill>
                 <a:latin typeface="Georgia"/>
               </a:rPr>
-              <a:t>Apport méthodologique</a:t>
+              <a:t>13,1 h</a:t>
+            </a:r>
+            <a:r>
+              <a:rPr sz="1250" b="1" i="0">
+                <a:solidFill>
+                  <a:srgbClr val="2C7A7B"/>
+                </a:solidFill>
+                <a:latin typeface="Calibri"/>
+              </a:rPr>
+              <a:t>   ✓ dans la bande</a:t>
             </a:r>
           </a:p>
           <a:p>
             <a:pPr algn="l">
               <a:lnSpc>
-                <a:spcPct val="108000"/>
-              </a:lnSpc>
-              <a:spcBef>
-                <a:spcPts val="0"/>
-              </a:spcBef>
-              <a:spcAft>
-                <a:spcPts val="300"/>
-              </a:spcAft>
-            </a:pPr>
-            <a:r>
-              <a:rPr sz="1300" b="0" i="0">
-                <a:solidFill>
-                  <a:srgbClr val="202B31"/>
-                </a:solidFill>
-                <a:latin typeface="Calibri"/>
-              </a:rPr>
-              <a:t>La fiabilité du ML se lit dans la STRUCTURE du R² (positif si conditions couvertes et répétées), rarement explicité dans la littérature.</a:t>
-            </a:r>
-          </a:p>
-        </p:txBody>
-      </p:sp>
-      <p:sp>
-        <p:nvSpPr>
-          <p:cNvPr id="8" name="Oval 7"/>
-          <p:cNvSpPr/>
-          <p:nvPr/>
-        </p:nvSpPr>
-        <p:spPr>
-          <a:xfrm>
-            <a:off x="868680" y="3209544"/>
-            <a:ext cx="502920" cy="502920"/>
-          </a:xfrm>
-          <a:prstGeom prst="ellipse">
-            <a:avLst/>
-          </a:prstGeom>
-          <a:solidFill>
-            <a:srgbClr val="2C7A7B"/>
-          </a:solidFill>
-          <a:ln>
-            <a:noFill/>
-          </a:ln>
-          <a:effectLst/>
-        </p:spPr>
-        <p:style>
-          <a:lnRef idx="1">
-            <a:schemeClr val="accent1"/>
-          </a:lnRef>
-          <a:fillRef idx="3">
-            <a:schemeClr val="accent1"/>
-          </a:fillRef>
-          <a:effectRef idx="2">
-            <a:schemeClr val="accent1"/>
-          </a:effectRef>
-          <a:fontRef idx="minor">
-            <a:schemeClr val="lt1"/>
-          </a:fontRef>
-        </p:style>
-        <p:txBody>
-          <a:bodyPr rtlCol="0" anchor="ctr" wrap="none" lIns="0" rIns="0" tIns="0" bIns="0"/>
-          <a:lstStyle/>
-          <a:p>
-            <a:pPr algn="ctr"/>
-            <a:r>
-              <a:rPr sz="1600" b="1">
-                <a:solidFill>
-                  <a:srgbClr val="FFFFFF"/>
+                <a:spcPct val="112000"/>
+              </a:lnSpc>
+              <a:spcBef>
+                <a:spcPts val="0"/>
+              </a:spcBef>
+              <a:spcAft>
+                <a:spcPts val="400"/>
+              </a:spcAft>
+            </a:pPr>
+            <a:r>
+              <a:rPr sz="1350" b="0" i="0">
+                <a:solidFill>
+                  <a:srgbClr val="CADDDC"/>
+                </a:solidFill>
+                <a:latin typeface="Calibri"/>
+              </a:rPr>
+              <a:t>Run #22 : </a:t>
+            </a:r>
+            <a:r>
+              <a:rPr sz="1500" b="1" i="0">
+                <a:solidFill>
+                  <a:srgbClr val="C9601A"/>
                 </a:solidFill>
                 <a:latin typeface="Georgia"/>
               </a:rPr>
-              <a:t>2</a:t>
-            </a:r>
-          </a:p>
-        </p:txBody>
-      </p:sp>
-      <p:sp>
-        <p:nvSpPr>
-          <p:cNvPr id="9" name="TextBox 8"/>
+              <a:t>11,95 h</a:t>
+            </a:r>
+            <a:r>
+              <a:rPr sz="1250" b="1" i="0">
+                <a:solidFill>
+                  <a:srgbClr val="C9601A"/>
+                </a:solidFill>
+                <a:latin typeface="Calibri"/>
+              </a:rPr>
+              <a:t>   ✗ en deçà (le plus rapide)</a:t>
+            </a:r>
+          </a:p>
+        </p:txBody>
+      </p:sp>
+      <p:sp>
+        <p:nvSpPr>
+          <p:cNvPr id="10" name="TextBox 9"/>
           <p:cNvSpPr txBox="1"/>
           <p:nvPr/>
         </p:nvSpPr>
         <p:spPr>
           <a:xfrm>
-            <a:off x="1554480" y="3136392"/>
-            <a:ext cx="9784080" cy="914400"/>
+            <a:off x="868680" y="5029200"/>
+            <a:ext cx="5303520" cy="1005840"/>
           </a:xfrm>
           <a:prstGeom prst="rect">
             <a:avLst/>
@@ -7687,92 +7195,71 @@
                 <a:spcPts val="0"/>
               </a:spcBef>
               <a:spcAft>
-                <a:spcPts val="300"/>
-              </a:spcAft>
-            </a:pPr>
-            <a:r>
-              <a:rPr sz="1600" b="1" i="0">
+                <a:spcPts val="400"/>
+              </a:spcAft>
+            </a:pPr>
+            <a:r>
+              <a:rPr sz="1250" b="0" i="0">
                 <a:solidFill>
                   <a:srgbClr val="202B31"/>
                 </a:solidFill>
-                <a:latin typeface="Georgia"/>
-              </a:rPr>
-              <a:t>Chaîne complète low-cost</a:t>
-            </a:r>
-          </a:p>
-          <a:p>
-            <a:pPr algn="l">
-              <a:lnSpc>
-                <a:spcPct val="108000"/>
-              </a:lnSpc>
-              <a:spcBef>
-                <a:spcPts val="0"/>
-              </a:spcBef>
-              <a:spcAft>
-                <a:spcPts val="300"/>
-              </a:spcAft>
-            </a:pPr>
-            <a:r>
-              <a:rPr sz="1300" b="0" i="0">
+                <a:latin typeface="Calibri"/>
+              </a:rPr>
+              <a:t>Le jumeau </a:t>
+            </a:r>
+            <a:r>
+              <a:rPr sz="1250" b="1" i="0">
+                <a:solidFill>
+                  <a:srgbClr val="C9601A"/>
+                </a:solidFill>
+                <a:latin typeface="Calibri"/>
+              </a:rPr>
+              <a:t>interpole</a:t>
+            </a:r>
+            <a:r>
+              <a:rPr sz="1250" b="0" i="0">
                 <a:solidFill>
                   <a:srgbClr val="202B31"/>
                 </a:solidFill>
                 <a:latin typeface="Calibri"/>
               </a:rPr>
-              <a:t>De la mesure à l'ordre de travail, en matériel accessible localement (~50 000 FCFA) et logiciels open-source.</a:t>
-            </a:r>
-          </a:p>
-        </p:txBody>
-      </p:sp>
-      <p:sp>
-        <p:nvSpPr>
-          <p:cNvPr id="10" name="Oval 9"/>
-          <p:cNvSpPr/>
-          <p:nvPr/>
-        </p:nvSpPr>
-        <p:spPr>
-          <a:xfrm>
-            <a:off x="868680" y="4197096"/>
-            <a:ext cx="502920" cy="502920"/>
-          </a:xfrm>
-          <a:prstGeom prst="ellipse">
-            <a:avLst/>
-          </a:prstGeom>
-          <a:solidFill>
-            <a:srgbClr val="2C7A7B"/>
-          </a:solidFill>
-          <a:ln>
-            <a:noFill/>
-          </a:ln>
-          <a:effectLst/>
-        </p:spPr>
-        <p:style>
-          <a:lnRef idx="1">
-            <a:schemeClr val="accent1"/>
-          </a:lnRef>
-          <a:fillRef idx="3">
-            <a:schemeClr val="accent1"/>
-          </a:fillRef>
-          <a:effectRef idx="2">
-            <a:schemeClr val="accent1"/>
-          </a:effectRef>
-          <a:fontRef idx="minor">
-            <a:schemeClr val="lt1"/>
-          </a:fontRef>
-        </p:style>
-        <p:txBody>
-          <a:bodyPr rtlCol="0" anchor="ctr" wrap="none" lIns="0" rIns="0" tIns="0" bIns="0"/>
-          <a:lstStyle/>
-          <a:p>
-            <a:pPr algn="ctr"/>
-            <a:r>
-              <a:rPr sz="1600" b="1">
-                <a:solidFill>
-                  <a:srgbClr val="FFFFFF"/>
-                </a:solidFill>
-                <a:latin typeface="Georgia"/>
-              </a:rPr>
-              <a:t>3</a:t>
+              <a:t> entre morphologies vues, il n'</a:t>
+            </a:r>
+            <a:r>
+              <a:rPr sz="1250" b="1" i="0">
+                <a:solidFill>
+                  <a:srgbClr val="C9601A"/>
+                </a:solidFill>
+                <a:latin typeface="Calibri"/>
+              </a:rPr>
+              <a:t>extrapole</a:t>
+            </a:r>
+            <a:r>
+              <a:rPr sz="1250" b="0" i="0">
+                <a:solidFill>
+                  <a:srgbClr val="202B31"/>
+                </a:solidFill>
+                <a:latin typeface="Calibri"/>
+              </a:rPr>
+              <a:t> pas. La prédictibilité tient à la répétition au sein d'une </a:t>
+            </a:r>
+            <a:r>
+              <a:rPr sz="1250" b="1" i="0">
+                <a:solidFill>
+                  <a:srgbClr val="2C7A7B"/>
+                </a:solidFill>
+                <a:latin typeface="Calibri"/>
+              </a:rPr>
+              <a:t>même morphologie</a:t>
+            </a:r>
+            <a:r>
+              <a:rPr sz="1250" b="0" i="0">
+                <a:solidFill>
+                  <a:srgbClr val="202B31"/>
+                </a:solidFill>
+                <a:latin typeface="Calibri"/>
+              </a:rPr>
+              <a:t>, pas au simple nombre d'essais.</a:t>
             </a:r>
           </a:p>
         </p:txBody>
@@ -7785,8 +7272,8 @@
         </p:nvSpPr>
         <p:spPr>
           <a:xfrm>
-            <a:off x="1554480" y="4123944"/>
-            <a:ext cx="9784080" cy="914400"/>
+            <a:off x="457200" y="6437376"/>
+            <a:ext cx="8229600" cy="320040"/>
           </a:xfrm>
           <a:prstGeom prst="rect">
             <a:avLst/>
@@ -7801,112 +7288,37 @@
           <a:p>
             <a:pPr algn="l">
               <a:lnSpc>
-                <a:spcPct val="108000"/>
-              </a:lnSpc>
-              <a:spcBef>
-                <a:spcPts val="0"/>
-              </a:spcBef>
-              <a:spcAft>
-                <a:spcPts val="300"/>
-              </a:spcAft>
-            </a:pPr>
-            <a:r>
-              <a:rPr sz="1600" b="1" i="0">
-                <a:solidFill>
-                  <a:srgbClr val="202B31"/>
-                </a:solidFill>
-                <a:latin typeface="Georgia"/>
-              </a:rPr>
-              <a:t>Double transposabilité</a:t>
-            </a:r>
-          </a:p>
-          <a:p>
-            <a:pPr algn="l">
-              <a:lnSpc>
-                <a:spcPct val="108000"/>
-              </a:lnSpc>
-              <a:spcBef>
-                <a:spcPts val="0"/>
-              </a:spcBef>
-              <a:spcAft>
-                <a:spcPts val="300"/>
-              </a:spcAft>
-            </a:pPr>
-            <a:r>
-              <a:rPr sz="1300" b="0" i="0">
-                <a:solidFill>
-                  <a:srgbClr val="202B31"/>
-                </a:solidFill>
-                <a:latin typeface="Calibri"/>
-              </a:rPr>
-              <a:t>Saut I3.0 → 4.0 essentiellement logiciel chez COTCO ; déploiement autonome pour les PME africaines.</a:t>
-            </a:r>
-          </a:p>
-        </p:txBody>
-      </p:sp>
-      <p:sp>
-        <p:nvSpPr>
-          <p:cNvPr id="12" name="Oval 11"/>
-          <p:cNvSpPr/>
-          <p:nvPr/>
-        </p:nvSpPr>
-        <p:spPr>
-          <a:xfrm>
-            <a:off x="868680" y="5184648"/>
-            <a:ext cx="502920" cy="502920"/>
-          </a:xfrm>
-          <a:prstGeom prst="ellipse">
-            <a:avLst/>
-          </a:prstGeom>
-          <a:solidFill>
-            <a:srgbClr val="2C7A7B"/>
-          </a:solidFill>
-          <a:ln>
-            <a:noFill/>
-          </a:ln>
-          <a:effectLst/>
-        </p:spPr>
-        <p:style>
-          <a:lnRef idx="1">
-            <a:schemeClr val="accent1"/>
-          </a:lnRef>
-          <a:fillRef idx="3">
-            <a:schemeClr val="accent1"/>
-          </a:fillRef>
-          <a:effectRef idx="2">
-            <a:schemeClr val="accent1"/>
-          </a:effectRef>
-          <a:fontRef idx="minor">
-            <a:schemeClr val="lt1"/>
-          </a:fontRef>
-        </p:style>
-        <p:txBody>
-          <a:bodyPr rtlCol="0" anchor="ctr" wrap="none" lIns="0" rIns="0" tIns="0" bIns="0"/>
-          <a:lstStyle/>
-          <a:p>
-            <a:pPr algn="ctr"/>
-            <a:r>
-              <a:rPr sz="1600" b="1">
-                <a:solidFill>
-                  <a:srgbClr val="FFFFFF"/>
-                </a:solidFill>
-                <a:latin typeface="Georgia"/>
-              </a:rPr>
-              <a:t>4</a:t>
-            </a:r>
-          </a:p>
-        </p:txBody>
-      </p:sp>
-      <p:sp>
-        <p:nvSpPr>
-          <p:cNvPr id="13" name="TextBox 12"/>
+                <a:spcPct val="100000"/>
+              </a:lnSpc>
+              <a:spcBef>
+                <a:spcPts val="0"/>
+              </a:spcBef>
+              <a:spcAft>
+                <a:spcPts val="400"/>
+              </a:spcAft>
+            </a:pPr>
+            <a:r>
+              <a:rPr sz="900" b="0" i="0">
+                <a:solidFill>
+                  <a:srgbClr val="6B7A82"/>
+                </a:solidFill>
+                <a:latin typeface="Calibri"/>
+              </a:rPr>
+              <a:t>Maintenance prédictive de la corrosion  ·  ESTL La Salle  ·  2025–2026</a:t>
+            </a:r>
+          </a:p>
+        </p:txBody>
+      </p:sp>
+      <p:sp>
+        <p:nvSpPr>
+          <p:cNvPr id="12" name="TextBox 11"/>
           <p:cNvSpPr txBox="1"/>
           <p:nvPr/>
         </p:nvSpPr>
         <p:spPr>
           <a:xfrm>
-            <a:off x="1554480" y="5111496"/>
-            <a:ext cx="9784080" cy="914400"/>
+            <a:off x="10424160" y="6437376"/>
+            <a:ext cx="1325880" cy="320040"/>
           </a:xfrm>
           <a:prstGeom prst="rect">
             <a:avLst/>
@@ -7919,74 +7331,7 @@
           </a:bodyPr>
           <a:lstStyle/>
           <a:p>
-            <a:pPr algn="l">
-              <a:lnSpc>
-                <a:spcPct val="108000"/>
-              </a:lnSpc>
-              <a:spcBef>
-                <a:spcPts val="0"/>
-              </a:spcBef>
-              <a:spcAft>
-                <a:spcPts val="300"/>
-              </a:spcAft>
-            </a:pPr>
-            <a:r>
-              <a:rPr sz="1600" b="1" i="0">
-                <a:solidFill>
-                  <a:srgbClr val="202B31"/>
-                </a:solidFill>
-                <a:latin typeface="Georgia"/>
-              </a:rPr>
-              <a:t>Rigueur &amp; traçabilité</a:t>
-            </a:r>
-          </a:p>
-          <a:p>
-            <a:pPr algn="l">
-              <a:lnSpc>
-                <a:spcPct val="108000"/>
-              </a:lnSpc>
-              <a:spcBef>
-                <a:spcPts val="0"/>
-              </a:spcBef>
-              <a:spcAft>
-                <a:spcPts val="300"/>
-              </a:spcAft>
-            </a:pPr>
-            <a:r>
-              <a:rPr sz="1300" b="0" i="0">
-                <a:solidFill>
-                  <a:srgbClr val="202B31"/>
-                </a:solidFill>
-                <a:latin typeface="Calibri"/>
-              </a:rPr>
-              <a:t>Chaque donnée, seuil et décision adossé à une source (norme, référence, loi physique).</a:t>
-            </a:r>
-          </a:p>
-        </p:txBody>
-      </p:sp>
-      <p:sp>
-        <p:nvSpPr>
-          <p:cNvPr id="14" name="TextBox 13"/>
-          <p:cNvSpPr txBox="1"/>
-          <p:nvPr/>
-        </p:nvSpPr>
-        <p:spPr>
-          <a:xfrm>
-            <a:off x="457200" y="6437376"/>
-            <a:ext cx="8229600" cy="320040"/>
-          </a:xfrm>
-          <a:prstGeom prst="rect">
-            <a:avLst/>
-          </a:prstGeom>
-          <a:noFill/>
-        </p:spPr>
-        <p:txBody>
-          <a:bodyPr wrap="square" anchor="t" lIns="0" rIns="0" tIns="0" bIns="0">
-            <a:spAutoFit/>
-          </a:bodyPr>
-          <a:lstStyle/>
-          <a:p>
-            <a:pPr algn="l">
+            <a:pPr algn="r">
               <a:lnSpc>
                 <a:spcPct val="100000"/>
               </a:lnSpc>
@@ -7998,58 +7343,13 @@
               </a:spcAft>
             </a:pPr>
             <a:r>
-              <a:rPr sz="900" b="0" i="0">
-                <a:solidFill>
-                  <a:srgbClr val="6B7A82"/>
-                </a:solidFill>
-                <a:latin typeface="Calibri"/>
-              </a:rPr>
-              <a:t>Maintenance prédictive de la corrosion  ·  ESTL La Salle  ·  2025–2026</a:t>
-            </a:r>
-          </a:p>
-        </p:txBody>
-      </p:sp>
-      <p:sp>
-        <p:nvSpPr>
-          <p:cNvPr id="15" name="TextBox 14"/>
-          <p:cNvSpPr txBox="1"/>
-          <p:nvPr/>
-        </p:nvSpPr>
-        <p:spPr>
-          <a:xfrm>
-            <a:off x="10424160" y="6437376"/>
-            <a:ext cx="1325880" cy="320040"/>
-          </a:xfrm>
-          <a:prstGeom prst="rect">
-            <a:avLst/>
-          </a:prstGeom>
-          <a:noFill/>
-        </p:spPr>
-        <p:txBody>
-          <a:bodyPr wrap="square" anchor="t" lIns="0" rIns="0" tIns="0" bIns="0">
-            <a:spAutoFit/>
-          </a:bodyPr>
-          <a:lstStyle/>
-          <a:p>
-            <a:pPr algn="r">
-              <a:lnSpc>
-                <a:spcPct val="100000"/>
-              </a:lnSpc>
-              <a:spcBef>
-                <a:spcPts val="0"/>
-              </a:spcBef>
-              <a:spcAft>
-                <a:spcPts val="400"/>
-              </a:spcAft>
-            </a:pPr>
-            <a:r>
               <a:rPr sz="1000" b="1" i="0">
                 <a:solidFill>
                   <a:srgbClr val="C9601A"/>
                 </a:solidFill>
                 <a:latin typeface="Calibri"/>
               </a:rPr>
-              <a:t>15 / 17</a:t>
+              <a:t>15 / 19</a:t>
             </a:r>
           </a:p>
         </p:txBody>
@@ -8087,7 +7387,7 @@
             <a:avLst/>
           </a:prstGeom>
           <a:solidFill>
-            <a:srgbClr val="16252E"/>
+            <a:srgbClr val="F5F3EF"/>
           </a:solidFill>
           <a:ln>
             <a:noFill/>
@@ -8125,7 +7425,7 @@
         <p:spPr>
           <a:xfrm>
             <a:off x="0" y="0"/>
-            <a:ext cx="256032" cy="6858000"/>
+            <a:ext cx="155448" cy="6858000"/>
           </a:xfrm>
           <a:prstGeom prst="rect">
             <a:avLst/>
@@ -8168,8 +7468,8 @@
         </p:nvSpPr>
         <p:spPr>
           <a:xfrm>
-            <a:off x="868680" y="603504"/>
-            <a:ext cx="10058400" cy="365760"/>
+            <a:off x="841248" y="475488"/>
+            <a:ext cx="10515600" cy="320040"/>
           </a:xfrm>
           <a:prstGeom prst="rect">
             <a:avLst/>
@@ -8194,13 +7494,13 @@
               </a:spcAft>
             </a:pPr>
             <a:r>
-              <a:rPr sz="1300" b="1" i="0">
+              <a:rPr sz="1250" b="1" i="0">
                 <a:solidFill>
                   <a:srgbClr val="C9601A"/>
                 </a:solidFill>
                 <a:latin typeface="Calibri"/>
               </a:rPr>
-              <a:t>CONCLUSION</a:t>
+              <a:t>DISCUSSION</a:t>
             </a:r>
           </a:p>
         </p:txBody>
@@ -8213,8 +7513,8 @@
         </p:nvSpPr>
         <p:spPr>
           <a:xfrm>
-            <a:off x="841248" y="1024128"/>
-            <a:ext cx="10607040" cy="914400"/>
+            <a:off x="822960" y="786384"/>
+            <a:ext cx="10698480" cy="1188720"/>
           </a:xfrm>
           <a:prstGeom prst="rect">
             <a:avLst/>
@@ -8241,27 +7541,73 @@
             <a:r>
               <a:rPr sz="3100" b="1" i="0">
                 <a:solidFill>
-                  <a:srgbClr val="FFFFFF"/>
+                  <a:srgbClr val="202B31"/>
                 </a:solidFill>
                 <a:latin typeface="Georgia"/>
               </a:rPr>
-              <a:t>Une brique fondatrice, validée et reproductible</a:t>
-            </a:r>
-          </a:p>
-        </p:txBody>
-      </p:sp>
-      <p:sp>
-        <p:nvSpPr>
-          <p:cNvPr id="6" name="Oval 5"/>
+              <a:t>Limites assumées d'une preuve de concept</a:t>
+            </a:r>
+          </a:p>
+        </p:txBody>
+      </p:sp>
+      <p:sp>
+        <p:nvSpPr>
+          <p:cNvPr id="6" name="Rounded Rectangle 5"/>
           <p:cNvSpPr/>
           <p:nvPr/>
         </p:nvSpPr>
         <p:spPr>
           <a:xfrm>
-            <a:off x="886968" y="2103120"/>
-            <a:ext cx="548640" cy="548640"/>
-          </a:xfrm>
-          <a:prstGeom prst="ellipse">
+            <a:off x="868680" y="2103120"/>
+            <a:ext cx="10469880" cy="841248"/>
+          </a:xfrm>
+          <a:prstGeom prst="roundRect">
+            <a:avLst/>
+          </a:prstGeom>
+          <a:solidFill>
+            <a:srgbClr val="FFFFFF"/>
+          </a:solidFill>
+          <a:ln w="12700">
+            <a:solidFill>
+              <a:srgbClr val="E3DED4"/>
+            </a:solidFill>
+          </a:ln>
+          <a:effectLst/>
+        </p:spPr>
+        <p:style>
+          <a:lnRef idx="1">
+            <a:schemeClr val="accent1"/>
+          </a:lnRef>
+          <a:fillRef idx="3">
+            <a:schemeClr val="accent1"/>
+          </a:fillRef>
+          <a:effectRef idx="2">
+            <a:schemeClr val="accent1"/>
+          </a:effectRef>
+          <a:fontRef idx="minor">
+            <a:schemeClr val="lt1"/>
+          </a:fontRef>
+        </p:style>
+        <p:txBody>
+          <a:bodyPr rtlCol="0" anchor="ctr"/>
+          <a:lstStyle/>
+          <a:p>
+            <a:pPr algn="ctr"/>
+          </a:p>
+        </p:txBody>
+      </p:sp>
+      <p:sp>
+        <p:nvSpPr>
+          <p:cNvPr id="7" name="Rounded Rectangle 6"/>
+          <p:cNvSpPr/>
+          <p:nvPr/>
+        </p:nvSpPr>
+        <p:spPr>
+          <a:xfrm>
+            <a:off x="868680" y="2103120"/>
+            <a:ext cx="128016" cy="841248"/>
+          </a:xfrm>
+          <a:prstGeom prst="roundRect">
             <a:avLst/>
           </a:prstGeom>
           <a:solidFill>
@@ -8287,32 +7633,23 @@
           </a:fontRef>
         </p:style>
         <p:txBody>
-          <a:bodyPr rtlCol="0" anchor="ctr" wrap="none" lIns="0" rIns="0" tIns="0" bIns="0"/>
+          <a:bodyPr rtlCol="0" anchor="ctr"/>
           <a:lstStyle/>
           <a:p>
             <a:pPr algn="ctr"/>
-            <a:r>
-              <a:rPr sz="1700" b="1">
-                <a:solidFill>
-                  <a:srgbClr val="FFFFFF"/>
-                </a:solidFill>
-                <a:latin typeface="Georgia"/>
-              </a:rPr>
-              <a:t>1</a:t>
-            </a:r>
-          </a:p>
-        </p:txBody>
-      </p:sp>
-      <p:sp>
-        <p:nvSpPr>
-          <p:cNvPr id="7" name="TextBox 6"/>
+          </a:p>
+        </p:txBody>
+      </p:sp>
+      <p:sp>
+        <p:nvSpPr>
+          <p:cNvPr id="8" name="TextBox 7"/>
           <p:cNvSpPr txBox="1"/>
           <p:nvPr/>
         </p:nvSpPr>
         <p:spPr>
           <a:xfrm>
-            <a:off x="1645920" y="2121408"/>
-            <a:ext cx="9692640" cy="548640"/>
+            <a:off x="1234440" y="2103120"/>
+            <a:ext cx="9875520" cy="841248"/>
           </a:xfrm>
           <a:prstGeom prst="rect">
             <a:avLst/>
@@ -8320,7 +7657,7 @@
           <a:noFill/>
         </p:spPr>
         <p:txBody>
-          <a:bodyPr wrap="square" anchor="t" lIns="0" rIns="0" tIns="0" bIns="0">
+          <a:bodyPr wrap="square" anchor="ctr" lIns="0" rIns="0" tIns="0" bIns="0">
             <a:spAutoFit/>
           </a:bodyPr>
           <a:lstStyle/>
@@ -8339,36 +7676,82 @@
             <a:r>
               <a:rPr sz="1500" b="1" i="0">
                 <a:solidFill>
-                  <a:srgbClr val="C9601A"/>
+                  <a:srgbClr val="202B31"/>
                 </a:solidFill>
                 <a:latin typeface="Georgia"/>
               </a:rPr>
-              <a:t>OS1 : </a:t>
-            </a:r>
-            <a:r>
-              <a:rPr sz="1400" b="0" i="0">
-                <a:solidFill>
-                  <a:srgbClr val="CADDDC"/>
-                </a:solidFill>
-                <a:latin typeface="Calibri"/>
-              </a:rPr>
-              <a:t>chaîne d'acquisition ER fonctionnelle, suivi d'essais run-to-failure complets.</a:t>
-            </a:r>
-          </a:p>
-        </p:txBody>
-      </p:sp>
-      <p:sp>
-        <p:nvSpPr>
-          <p:cNvPr id="8" name="Oval 7"/>
+              <a:t>Matériau : </a:t>
+            </a:r>
+            <a:r>
+              <a:rPr sz="1350" b="0" i="0">
+                <a:solidFill>
+                  <a:srgbClr val="202B31"/>
+                </a:solidFill>
+                <a:latin typeface="Calibri"/>
+              </a:rPr>
+              <a:t>fil de fer ≠ acier API 5L : les valeurs absolues de CR ne sont pas directement transposables.</a:t>
+            </a:r>
+          </a:p>
+        </p:txBody>
+      </p:sp>
+      <p:sp>
+        <p:nvSpPr>
+          <p:cNvPr id="9" name="Rounded Rectangle 8"/>
           <p:cNvSpPr/>
           <p:nvPr/>
         </p:nvSpPr>
         <p:spPr>
           <a:xfrm>
-            <a:off x="886968" y="2816352"/>
-            <a:ext cx="548640" cy="548640"/>
-          </a:xfrm>
-          <a:prstGeom prst="ellipse">
+            <a:off x="868680" y="3035808"/>
+            <a:ext cx="10469880" cy="841248"/>
+          </a:xfrm>
+          <a:prstGeom prst="roundRect">
+            <a:avLst/>
+          </a:prstGeom>
+          <a:solidFill>
+            <a:srgbClr val="FFFFFF"/>
+          </a:solidFill>
+          <a:ln w="12700">
+            <a:solidFill>
+              <a:srgbClr val="E3DED4"/>
+            </a:solidFill>
+          </a:ln>
+          <a:effectLst/>
+        </p:spPr>
+        <p:style>
+          <a:lnRef idx="1">
+            <a:schemeClr val="accent1"/>
+          </a:lnRef>
+          <a:fillRef idx="3">
+            <a:schemeClr val="accent1"/>
+          </a:fillRef>
+          <a:effectRef idx="2">
+            <a:schemeClr val="accent1"/>
+          </a:effectRef>
+          <a:fontRef idx="minor">
+            <a:schemeClr val="lt1"/>
+          </a:fontRef>
+        </p:style>
+        <p:txBody>
+          <a:bodyPr rtlCol="0" anchor="ctr"/>
+          <a:lstStyle/>
+          <a:p>
+            <a:pPr algn="ctr"/>
+          </a:p>
+        </p:txBody>
+      </p:sp>
+      <p:sp>
+        <p:nvSpPr>
+          <p:cNvPr id="10" name="Rounded Rectangle 9"/>
+          <p:cNvSpPr/>
+          <p:nvPr/>
+        </p:nvSpPr>
+        <p:spPr>
+          <a:xfrm>
+            <a:off x="868680" y="3035808"/>
+            <a:ext cx="128016" cy="841248"/>
+          </a:xfrm>
+          <a:prstGeom prst="roundRect">
             <a:avLst/>
           </a:prstGeom>
           <a:solidFill>
@@ -8394,32 +7777,23 @@
           </a:fontRef>
         </p:style>
         <p:txBody>
-          <a:bodyPr rtlCol="0" anchor="ctr" wrap="none" lIns="0" rIns="0" tIns="0" bIns="0"/>
+          <a:bodyPr rtlCol="0" anchor="ctr"/>
           <a:lstStyle/>
           <a:p>
             <a:pPr algn="ctr"/>
-            <a:r>
-              <a:rPr sz="1700" b="1">
-                <a:solidFill>
-                  <a:srgbClr val="FFFFFF"/>
-                </a:solidFill>
-                <a:latin typeface="Georgia"/>
-              </a:rPr>
-              <a:t>2</a:t>
-            </a:r>
-          </a:p>
-        </p:txBody>
-      </p:sp>
-      <p:sp>
-        <p:nvSpPr>
-          <p:cNvPr id="9" name="TextBox 8"/>
+          </a:p>
+        </p:txBody>
+      </p:sp>
+      <p:sp>
+        <p:nvSpPr>
+          <p:cNvPr id="11" name="TextBox 10"/>
           <p:cNvSpPr txBox="1"/>
           <p:nvPr/>
         </p:nvSpPr>
         <p:spPr>
           <a:xfrm>
-            <a:off x="1645920" y="2834640"/>
-            <a:ext cx="9692640" cy="548640"/>
+            <a:off x="1234440" y="3035808"/>
+            <a:ext cx="9875520" cy="841248"/>
           </a:xfrm>
           <a:prstGeom prst="rect">
             <a:avLst/>
@@ -8427,7 +7801,7 @@
           <a:noFill/>
         </p:spPr>
         <p:txBody>
-          <a:bodyPr wrap="square" anchor="t" lIns="0" rIns="0" tIns="0" bIns="0">
+          <a:bodyPr wrap="square" anchor="ctr" lIns="0" rIns="0" tIns="0" bIns="0">
             <a:spAutoFit/>
           </a:bodyPr>
           <a:lstStyle/>
@@ -8446,36 +7820,82 @@
             <a:r>
               <a:rPr sz="1500" b="1" i="0">
                 <a:solidFill>
-                  <a:srgbClr val="C9601A"/>
+                  <a:srgbClr val="202B31"/>
                 </a:solidFill>
                 <a:latin typeface="Georgia"/>
               </a:rPr>
-              <a:t>OS2 : </a:t>
-            </a:r>
-            <a:r>
-              <a:rPr sz="1400" b="0" i="0">
-                <a:solidFill>
-                  <a:srgbClr val="CADDDC"/>
-                </a:solidFill>
-                <a:latin typeface="Calibri"/>
-              </a:rPr>
-              <a:t>XGBoost prédit le CR et surpasse les baselines, sous condition de couverture.</a:t>
-            </a:r>
-          </a:p>
-        </p:txBody>
-      </p:sp>
-      <p:sp>
-        <p:nvSpPr>
-          <p:cNvPr id="10" name="Oval 9"/>
+              <a:t>Effet acide-shunt : </a:t>
+            </a:r>
+            <a:r>
+              <a:rPr sz="1350" b="0" i="0">
+                <a:solidFill>
+                  <a:srgbClr val="202B31"/>
+                </a:solidFill>
+                <a:latin typeface="Calibri"/>
+              </a:rPr>
+              <a:t>en HCl concentré, l'électrolyte shunte la mesure, d'où l'emploi d'un fil fin.</a:t>
+            </a:r>
+          </a:p>
+        </p:txBody>
+      </p:sp>
+      <p:sp>
+        <p:nvSpPr>
+          <p:cNvPr id="12" name="Rounded Rectangle 11"/>
           <p:cNvSpPr/>
           <p:nvPr/>
         </p:nvSpPr>
         <p:spPr>
           <a:xfrm>
-            <a:off x="886968" y="3529584"/>
-            <a:ext cx="548640" cy="548640"/>
-          </a:xfrm>
-          <a:prstGeom prst="ellipse">
+            <a:off x="868680" y="3968496"/>
+            <a:ext cx="10469880" cy="841248"/>
+          </a:xfrm>
+          <a:prstGeom prst="roundRect">
+            <a:avLst/>
+          </a:prstGeom>
+          <a:solidFill>
+            <a:srgbClr val="FFFFFF"/>
+          </a:solidFill>
+          <a:ln w="12700">
+            <a:solidFill>
+              <a:srgbClr val="E3DED4"/>
+            </a:solidFill>
+          </a:ln>
+          <a:effectLst/>
+        </p:spPr>
+        <p:style>
+          <a:lnRef idx="1">
+            <a:schemeClr val="accent1"/>
+          </a:lnRef>
+          <a:fillRef idx="3">
+            <a:schemeClr val="accent1"/>
+          </a:fillRef>
+          <a:effectRef idx="2">
+            <a:schemeClr val="accent1"/>
+          </a:effectRef>
+          <a:fontRef idx="minor">
+            <a:schemeClr val="lt1"/>
+          </a:fontRef>
+        </p:style>
+        <p:txBody>
+          <a:bodyPr rtlCol="0" anchor="ctr"/>
+          <a:lstStyle/>
+          <a:p>
+            <a:pPr algn="ctr"/>
+          </a:p>
+        </p:txBody>
+      </p:sp>
+      <p:sp>
+        <p:nvSpPr>
+          <p:cNvPr id="13" name="Rounded Rectangle 12"/>
+          <p:cNvSpPr/>
+          <p:nvPr/>
+        </p:nvSpPr>
+        <p:spPr>
+          <a:xfrm>
+            <a:off x="868680" y="3968496"/>
+            <a:ext cx="128016" cy="841248"/>
+          </a:xfrm>
+          <a:prstGeom prst="roundRect">
             <a:avLst/>
           </a:prstGeom>
           <a:solidFill>
@@ -8501,32 +7921,23 @@
           </a:fontRef>
         </p:style>
         <p:txBody>
-          <a:bodyPr rtlCol="0" anchor="ctr" wrap="none" lIns="0" rIns="0" tIns="0" bIns="0"/>
+          <a:bodyPr rtlCol="0" anchor="ctr"/>
           <a:lstStyle/>
           <a:p>
             <a:pPr algn="ctr"/>
-            <a:r>
-              <a:rPr sz="1700" b="1">
-                <a:solidFill>
-                  <a:srgbClr val="FFFFFF"/>
-                </a:solidFill>
-                <a:latin typeface="Georgia"/>
-              </a:rPr>
-              <a:t>3</a:t>
-            </a:r>
-          </a:p>
-        </p:txBody>
-      </p:sp>
-      <p:sp>
-        <p:nvSpPr>
-          <p:cNvPr id="11" name="TextBox 10"/>
+          </a:p>
+        </p:txBody>
+      </p:sp>
+      <p:sp>
+        <p:nvSpPr>
+          <p:cNvPr id="14" name="TextBox 13"/>
           <p:cNvSpPr txBox="1"/>
           <p:nvPr/>
         </p:nvSpPr>
         <p:spPr>
           <a:xfrm>
-            <a:off x="1645920" y="3547872"/>
-            <a:ext cx="9692640" cy="548640"/>
+            <a:off x="1234440" y="3968496"/>
+            <a:ext cx="9875520" cy="841248"/>
           </a:xfrm>
           <a:prstGeom prst="rect">
             <a:avLst/>
@@ -8534,7 +7945,7 @@
           <a:noFill/>
         </p:spPr>
         <p:txBody>
-          <a:bodyPr wrap="square" anchor="t" lIns="0" rIns="0" tIns="0" bIns="0">
+          <a:bodyPr wrap="square" anchor="ctr" lIns="0" rIns="0" tIns="0" bIns="0">
             <a:spAutoFit/>
           </a:bodyPr>
           <a:lstStyle/>
@@ -8553,36 +7964,82 @@
             <a:r>
               <a:rPr sz="1500" b="1" i="0">
                 <a:solidFill>
-                  <a:srgbClr val="C9601A"/>
+                  <a:srgbClr val="202B31"/>
                 </a:solidFill>
                 <a:latin typeface="Georgia"/>
               </a:rPr>
-              <a:t>OS3 : </a:t>
-            </a:r>
-            <a:r>
-              <a:rPr sz="1400" b="0" i="0">
-                <a:solidFill>
-                  <a:srgbClr val="CADDDC"/>
-                </a:solidFill>
-                <a:latin typeface="Calibri"/>
-              </a:rPr>
-              <a:t>température dominante ; la répétabilité des conditions fait la fiabilité.</a:t>
-            </a:r>
-          </a:p>
-        </p:txBody>
-      </p:sp>
-      <p:sp>
-        <p:nvSpPr>
-          <p:cNvPr id="12" name="Oval 11"/>
+              <a:t>Jeu de données : </a:t>
+            </a:r>
+            <a:r>
+              <a:rPr sz="1350" b="0" i="0">
+                <a:solidFill>
+                  <a:srgbClr val="202B31"/>
+                </a:solidFill>
+                <a:latin typeface="Calibri"/>
+              </a:rPr>
+              <a:t>peu d'essais : métriques bruitées, en cours de consolidation.</a:t>
+            </a:r>
+          </a:p>
+        </p:txBody>
+      </p:sp>
+      <p:sp>
+        <p:nvSpPr>
+          <p:cNvPr id="15" name="Rounded Rectangle 14"/>
           <p:cNvSpPr/>
           <p:nvPr/>
         </p:nvSpPr>
         <p:spPr>
           <a:xfrm>
-            <a:off x="886968" y="4242816"/>
-            <a:ext cx="548640" cy="548640"/>
-          </a:xfrm>
-          <a:prstGeom prst="ellipse">
+            <a:off x="868680" y="4901183"/>
+            <a:ext cx="10469880" cy="841248"/>
+          </a:xfrm>
+          <a:prstGeom prst="roundRect">
+            <a:avLst/>
+          </a:prstGeom>
+          <a:solidFill>
+            <a:srgbClr val="FFFFFF"/>
+          </a:solidFill>
+          <a:ln w="12700">
+            <a:solidFill>
+              <a:srgbClr val="E3DED4"/>
+            </a:solidFill>
+          </a:ln>
+          <a:effectLst/>
+        </p:spPr>
+        <p:style>
+          <a:lnRef idx="1">
+            <a:schemeClr val="accent1"/>
+          </a:lnRef>
+          <a:fillRef idx="3">
+            <a:schemeClr val="accent1"/>
+          </a:fillRef>
+          <a:effectRef idx="2">
+            <a:schemeClr val="accent1"/>
+          </a:effectRef>
+          <a:fontRef idx="minor">
+            <a:schemeClr val="lt1"/>
+          </a:fontRef>
+        </p:style>
+        <p:txBody>
+          <a:bodyPr rtlCol="0" anchor="ctr"/>
+          <a:lstStyle/>
+          <a:p>
+            <a:pPr algn="ctr"/>
+          </a:p>
+        </p:txBody>
+      </p:sp>
+      <p:sp>
+        <p:nvSpPr>
+          <p:cNvPr id="16" name="Rounded Rectangle 15"/>
+          <p:cNvSpPr/>
+          <p:nvPr/>
+        </p:nvSpPr>
+        <p:spPr>
+          <a:xfrm>
+            <a:off x="868680" y="4901183"/>
+            <a:ext cx="128016" cy="841248"/>
+          </a:xfrm>
+          <a:prstGeom prst="roundRect">
             <a:avLst/>
           </a:prstGeom>
           <a:solidFill>
@@ -8608,32 +8065,77 @@
           </a:fontRef>
         </p:style>
         <p:txBody>
-          <a:bodyPr rtlCol="0" anchor="ctr" wrap="none" lIns="0" rIns="0" tIns="0" bIns="0"/>
+          <a:bodyPr rtlCol="0" anchor="ctr"/>
           <a:lstStyle/>
           <a:p>
             <a:pPr algn="ctr"/>
-            <a:r>
-              <a:rPr sz="1700" b="1">
-                <a:solidFill>
-                  <a:srgbClr val="FFFFFF"/>
+          </a:p>
+        </p:txBody>
+      </p:sp>
+      <p:sp>
+        <p:nvSpPr>
+          <p:cNvPr id="17" name="TextBox 16"/>
+          <p:cNvSpPr txBox="1"/>
+          <p:nvPr/>
+        </p:nvSpPr>
+        <p:spPr>
+          <a:xfrm>
+            <a:off x="1234440" y="4901183"/>
+            <a:ext cx="9875520" cy="841248"/>
+          </a:xfrm>
+          <a:prstGeom prst="rect">
+            <a:avLst/>
+          </a:prstGeom>
+          <a:noFill/>
+        </p:spPr>
+        <p:txBody>
+          <a:bodyPr wrap="square" anchor="ctr" lIns="0" rIns="0" tIns="0" bIns="0">
+            <a:spAutoFit/>
+          </a:bodyPr>
+          <a:lstStyle/>
+          <a:p>
+            <a:pPr algn="l">
+              <a:lnSpc>
+                <a:spcPct val="105000"/>
+              </a:lnSpc>
+              <a:spcBef>
+                <a:spcPts val="0"/>
+              </a:spcBef>
+              <a:spcAft>
+                <a:spcPts val="400"/>
+              </a:spcAft>
+            </a:pPr>
+            <a:r>
+              <a:rPr sz="1500" b="1" i="0">
+                <a:solidFill>
+                  <a:srgbClr val="202B31"/>
                 </a:solidFill>
                 <a:latin typeface="Georgia"/>
               </a:rPr>
-              <a:t>4</a:t>
-            </a:r>
-          </a:p>
-        </p:txBody>
-      </p:sp>
-      <p:sp>
-        <p:nvSpPr>
-          <p:cNvPr id="13" name="TextBox 12"/>
+              <a:t>Couverture thermique : </a:t>
+            </a:r>
+            <a:r>
+              <a:rPr sz="1350" b="0" i="0">
+                <a:solidFill>
+                  <a:srgbClr val="202B31"/>
+                </a:solidFill>
+                <a:latin typeface="Calibri"/>
+              </a:rPr>
+              <a:t>une seule plage (~30 °C) répétée ; ~32 °C encore représentée par un seul essai.</a:t>
+            </a:r>
+          </a:p>
+        </p:txBody>
+      </p:sp>
+      <p:sp>
+        <p:nvSpPr>
+          <p:cNvPr id="18" name="TextBox 17"/>
           <p:cNvSpPr txBox="1"/>
           <p:nvPr/>
         </p:nvSpPr>
         <p:spPr>
           <a:xfrm>
-            <a:off x="1645920" y="4261104"/>
-            <a:ext cx="9692640" cy="548640"/>
+            <a:off x="868680" y="5943600"/>
+            <a:ext cx="10424160" cy="411480"/>
           </a:xfrm>
           <a:prstGeom prst="rect">
             <a:avLst/>
@@ -8648,7 +8150,7 @@
           <a:p>
             <a:pPr algn="l">
               <a:lnSpc>
-                <a:spcPct val="105000"/>
+                <a:spcPct val="100000"/>
               </a:lnSpc>
               <a:spcBef>
                 <a:spcPts val="0"/>
@@ -8658,36 +8160,27 @@
               </a:spcAft>
             </a:pPr>
             <a:r>
-              <a:rPr sz="1500" b="1" i="0">
-                <a:solidFill>
-                  <a:srgbClr val="C9601A"/>
-                </a:solidFill>
-                <a:latin typeface="Georgia"/>
-              </a:rPr>
-              <a:t>OS4 : </a:t>
-            </a:r>
-            <a:r>
-              <a:rPr sz="1400" b="0" i="0">
-                <a:solidFill>
-                  <a:srgbClr val="CADDDC"/>
-                </a:solidFill>
-                <a:latin typeface="Calibri"/>
-              </a:rPr>
-              <a:t>boucle décision → action démontrée par un module GMAO maison, à coût nul.</a:t>
-            </a:r>
-          </a:p>
-        </p:txBody>
-      </p:sp>
-      <p:sp>
-        <p:nvSpPr>
-          <p:cNvPr id="14" name="TextBox 13"/>
+              <a:rPr sz="1350" b="1" i="1">
+                <a:solidFill>
+                  <a:srgbClr val="2C7A7B"/>
+                </a:solidFill>
+                <a:latin typeface="Calibri"/>
+              </a:rPr>
+              <a:t>Ces limites ne sont pas intrinsèques à la méthode : elles définissent les conditions du passage à l'échelle.</a:t>
+            </a:r>
+          </a:p>
+        </p:txBody>
+      </p:sp>
+      <p:sp>
+        <p:nvSpPr>
+          <p:cNvPr id="19" name="TextBox 18"/>
           <p:cNvSpPr txBox="1"/>
           <p:nvPr/>
         </p:nvSpPr>
         <p:spPr>
           <a:xfrm>
-            <a:off x="868680" y="5212080"/>
-            <a:ext cx="10424160" cy="914400"/>
+            <a:off x="457200" y="6437376"/>
+            <a:ext cx="8229600" cy="320040"/>
           </a:xfrm>
           <a:prstGeom prst="rect">
             <a:avLst/>
@@ -8702,7 +8195,7 @@
           <a:p>
             <a:pPr algn="l">
               <a:lnSpc>
-                <a:spcPct val="115000"/>
+                <a:spcPct val="100000"/>
               </a:lnSpc>
               <a:spcBef>
                 <a:spcPts val="0"/>
@@ -8712,36 +8205,27 @@
               </a:spcAft>
             </a:pPr>
             <a:r>
-              <a:rPr sz="1450" b="1" i="0">
-                <a:solidFill>
-                  <a:srgbClr val="FFFFFF"/>
-                </a:solidFill>
-                <a:latin typeface="Calibri"/>
-              </a:rPr>
-              <a:t>Objectifs partiellement atteints, en cours de consolidation. </a:t>
-            </a:r>
-            <a:r>
-              <a:rPr sz="1450" b="0" i="1">
-                <a:solidFill>
-                  <a:srgbClr val="CADDDC"/>
-                </a:solidFill>
-                <a:latin typeface="Calibri"/>
-              </a:rPr>
-              <a:t>Mais un prototype qui va de la mesure à la décision, transposable des deux côtés.</a:t>
-            </a:r>
-          </a:p>
-        </p:txBody>
-      </p:sp>
-      <p:sp>
-        <p:nvSpPr>
-          <p:cNvPr id="15" name="TextBox 14"/>
+              <a:rPr sz="900" b="0" i="0">
+                <a:solidFill>
+                  <a:srgbClr val="6B7A82"/>
+                </a:solidFill>
+                <a:latin typeface="Calibri"/>
+              </a:rPr>
+              <a:t>Maintenance prédictive de la corrosion  ·  ESTL La Salle  ·  2025–2026</a:t>
+            </a:r>
+          </a:p>
+        </p:txBody>
+      </p:sp>
+      <p:sp>
+        <p:nvSpPr>
+          <p:cNvPr id="20" name="TextBox 19"/>
           <p:cNvSpPr txBox="1"/>
           <p:nvPr/>
         </p:nvSpPr>
         <p:spPr>
           <a:xfrm>
-            <a:off x="457200" y="6437376"/>
-            <a:ext cx="8229600" cy="320040"/>
+            <a:off x="10424160" y="6437376"/>
+            <a:ext cx="1325880" cy="320040"/>
           </a:xfrm>
           <a:prstGeom prst="rect">
             <a:avLst/>
@@ -8754,7 +8238,7 @@
           </a:bodyPr>
           <a:lstStyle/>
           <a:p>
-            <a:pPr algn="l">
+            <a:pPr algn="r">
               <a:lnSpc>
                 <a:spcPct val="100000"/>
               </a:lnSpc>
@@ -8766,58 +8250,13 @@
               </a:spcAft>
             </a:pPr>
             <a:r>
-              <a:rPr sz="900" b="0" i="0">
-                <a:solidFill>
-                  <a:srgbClr val="CADDDC"/>
-                </a:solidFill>
-                <a:latin typeface="Calibri"/>
-              </a:rPr>
-              <a:t>Maintenance prédictive de la corrosion  ·  ESTL La Salle  ·  2025–2026</a:t>
-            </a:r>
-          </a:p>
-        </p:txBody>
-      </p:sp>
-      <p:sp>
-        <p:nvSpPr>
-          <p:cNvPr id="16" name="TextBox 15"/>
-          <p:cNvSpPr txBox="1"/>
-          <p:nvPr/>
-        </p:nvSpPr>
-        <p:spPr>
-          <a:xfrm>
-            <a:off x="10424160" y="6437376"/>
-            <a:ext cx="1325880" cy="320040"/>
-          </a:xfrm>
-          <a:prstGeom prst="rect">
-            <a:avLst/>
-          </a:prstGeom>
-          <a:noFill/>
-        </p:spPr>
-        <p:txBody>
-          <a:bodyPr wrap="square" anchor="t" lIns="0" rIns="0" tIns="0" bIns="0">
-            <a:spAutoFit/>
-          </a:bodyPr>
-          <a:lstStyle/>
-          <a:p>
-            <a:pPr algn="r">
-              <a:lnSpc>
-                <a:spcPct val="100000"/>
-              </a:lnSpc>
-              <a:spcBef>
-                <a:spcPts val="0"/>
-              </a:spcBef>
-              <a:spcAft>
-                <a:spcPts val="400"/>
-              </a:spcAft>
-            </a:pPr>
-            <a:r>
               <a:rPr sz="1000" b="1" i="0">
                 <a:solidFill>
                   <a:srgbClr val="C9601A"/>
                 </a:solidFill>
                 <a:latin typeface="Calibri"/>
               </a:rPr>
-              <a:t>16 / 17</a:t>
+              <a:t>16 / 19</a:t>
             </a:r>
           </a:p>
         </p:txBody>
@@ -8855,6 +8294,1540 @@
             <a:avLst/>
           </a:prstGeom>
           <a:solidFill>
+            <a:srgbClr val="F5F3EF"/>
+          </a:solidFill>
+          <a:ln>
+            <a:noFill/>
+          </a:ln>
+          <a:effectLst/>
+        </p:spPr>
+        <p:style>
+          <a:lnRef idx="1">
+            <a:schemeClr val="accent1"/>
+          </a:lnRef>
+          <a:fillRef idx="3">
+            <a:schemeClr val="accent1"/>
+          </a:fillRef>
+          <a:effectRef idx="2">
+            <a:schemeClr val="accent1"/>
+          </a:effectRef>
+          <a:fontRef idx="minor">
+            <a:schemeClr val="lt1"/>
+          </a:fontRef>
+        </p:style>
+        <p:txBody>
+          <a:bodyPr rtlCol="0" anchor="ctr"/>
+          <a:lstStyle/>
+          <a:p>
+            <a:pPr algn="ctr"/>
+          </a:p>
+        </p:txBody>
+      </p:sp>
+      <p:sp>
+        <p:nvSpPr>
+          <p:cNvPr id="3" name="Rectangle 2"/>
+          <p:cNvSpPr/>
+          <p:nvPr/>
+        </p:nvSpPr>
+        <p:spPr>
+          <a:xfrm>
+            <a:off x="0" y="0"/>
+            <a:ext cx="155448" cy="6858000"/>
+          </a:xfrm>
+          <a:prstGeom prst="rect">
+            <a:avLst/>
+          </a:prstGeom>
+          <a:solidFill>
+            <a:srgbClr val="C9601A"/>
+          </a:solidFill>
+          <a:ln>
+            <a:noFill/>
+          </a:ln>
+          <a:effectLst/>
+        </p:spPr>
+        <p:style>
+          <a:lnRef idx="1">
+            <a:schemeClr val="accent1"/>
+          </a:lnRef>
+          <a:fillRef idx="3">
+            <a:schemeClr val="accent1"/>
+          </a:fillRef>
+          <a:effectRef idx="2">
+            <a:schemeClr val="accent1"/>
+          </a:effectRef>
+          <a:fontRef idx="minor">
+            <a:schemeClr val="lt1"/>
+          </a:fontRef>
+        </p:style>
+        <p:txBody>
+          <a:bodyPr rtlCol="0" anchor="ctr"/>
+          <a:lstStyle/>
+          <a:p>
+            <a:pPr algn="ctr"/>
+          </a:p>
+        </p:txBody>
+      </p:sp>
+      <p:sp>
+        <p:nvSpPr>
+          <p:cNvPr id="4" name="TextBox 3"/>
+          <p:cNvSpPr txBox="1"/>
+          <p:nvPr/>
+        </p:nvSpPr>
+        <p:spPr>
+          <a:xfrm>
+            <a:off x="841248" y="475488"/>
+            <a:ext cx="10515600" cy="320040"/>
+          </a:xfrm>
+          <a:prstGeom prst="rect">
+            <a:avLst/>
+          </a:prstGeom>
+          <a:noFill/>
+        </p:spPr>
+        <p:txBody>
+          <a:bodyPr wrap="square" anchor="t" lIns="0" rIns="0" tIns="0" bIns="0">
+            <a:spAutoFit/>
+          </a:bodyPr>
+          <a:lstStyle/>
+          <a:p>
+            <a:pPr algn="l">
+              <a:lnSpc>
+                <a:spcPct val="100000"/>
+              </a:lnSpc>
+              <a:spcBef>
+                <a:spcPts val="0"/>
+              </a:spcBef>
+              <a:spcAft>
+                <a:spcPts val="400"/>
+              </a:spcAft>
+            </a:pPr>
+            <a:r>
+              <a:rPr sz="1250" b="1" i="0">
+                <a:solidFill>
+                  <a:srgbClr val="C9601A"/>
+                </a:solidFill>
+                <a:latin typeface="Calibri"/>
+              </a:rPr>
+              <a:t>APPORTS DU TRAVAIL</a:t>
+            </a:r>
+          </a:p>
+        </p:txBody>
+      </p:sp>
+      <p:sp>
+        <p:nvSpPr>
+          <p:cNvPr id="5" name="TextBox 4"/>
+          <p:cNvSpPr txBox="1"/>
+          <p:nvPr/>
+        </p:nvSpPr>
+        <p:spPr>
+          <a:xfrm>
+            <a:off x="822960" y="786384"/>
+            <a:ext cx="10698480" cy="1188720"/>
+          </a:xfrm>
+          <a:prstGeom prst="rect">
+            <a:avLst/>
+          </a:prstGeom>
+          <a:noFill/>
+        </p:spPr>
+        <p:txBody>
+          <a:bodyPr wrap="square" anchor="t" lIns="0" rIns="0" tIns="0" bIns="0">
+            <a:spAutoFit/>
+          </a:bodyPr>
+          <a:lstStyle/>
+          <a:p>
+            <a:pPr algn="l">
+              <a:lnSpc>
+                <a:spcPct val="100000"/>
+              </a:lnSpc>
+              <a:spcBef>
+                <a:spcPts val="0"/>
+              </a:spcBef>
+              <a:spcAft>
+                <a:spcPts val="400"/>
+              </a:spcAft>
+            </a:pPr>
+            <a:r>
+              <a:rPr sz="3100" b="1" i="0">
+                <a:solidFill>
+                  <a:srgbClr val="202B31"/>
+                </a:solidFill>
+                <a:latin typeface="Georgia"/>
+              </a:rPr>
+              <a:t>Ce que cette étude apporte</a:t>
+            </a:r>
+          </a:p>
+        </p:txBody>
+      </p:sp>
+      <p:sp>
+        <p:nvSpPr>
+          <p:cNvPr id="6" name="Oval 5"/>
+          <p:cNvSpPr/>
+          <p:nvPr/>
+        </p:nvSpPr>
+        <p:spPr>
+          <a:xfrm>
+            <a:off x="868680" y="2221992"/>
+            <a:ext cx="502920" cy="502920"/>
+          </a:xfrm>
+          <a:prstGeom prst="ellipse">
+            <a:avLst/>
+          </a:prstGeom>
+          <a:solidFill>
+            <a:srgbClr val="2C7A7B"/>
+          </a:solidFill>
+          <a:ln>
+            <a:noFill/>
+          </a:ln>
+          <a:effectLst/>
+        </p:spPr>
+        <p:style>
+          <a:lnRef idx="1">
+            <a:schemeClr val="accent1"/>
+          </a:lnRef>
+          <a:fillRef idx="3">
+            <a:schemeClr val="accent1"/>
+          </a:fillRef>
+          <a:effectRef idx="2">
+            <a:schemeClr val="accent1"/>
+          </a:effectRef>
+          <a:fontRef idx="minor">
+            <a:schemeClr val="lt1"/>
+          </a:fontRef>
+        </p:style>
+        <p:txBody>
+          <a:bodyPr rtlCol="0" anchor="ctr" wrap="none" lIns="0" rIns="0" tIns="0" bIns="0"/>
+          <a:lstStyle/>
+          <a:p>
+            <a:pPr algn="ctr"/>
+            <a:r>
+              <a:rPr sz="1600" b="1">
+                <a:solidFill>
+                  <a:srgbClr val="FFFFFF"/>
+                </a:solidFill>
+                <a:latin typeface="Georgia"/>
+              </a:rPr>
+              <a:t>1</a:t>
+            </a:r>
+          </a:p>
+        </p:txBody>
+      </p:sp>
+      <p:sp>
+        <p:nvSpPr>
+          <p:cNvPr id="7" name="TextBox 6"/>
+          <p:cNvSpPr txBox="1"/>
+          <p:nvPr/>
+        </p:nvSpPr>
+        <p:spPr>
+          <a:xfrm>
+            <a:off x="1554480" y="2148840"/>
+            <a:ext cx="9784080" cy="914400"/>
+          </a:xfrm>
+          <a:prstGeom prst="rect">
+            <a:avLst/>
+          </a:prstGeom>
+          <a:noFill/>
+        </p:spPr>
+        <p:txBody>
+          <a:bodyPr wrap="square" anchor="t" lIns="0" rIns="0" tIns="0" bIns="0">
+            <a:spAutoFit/>
+          </a:bodyPr>
+          <a:lstStyle/>
+          <a:p>
+            <a:pPr algn="l">
+              <a:lnSpc>
+                <a:spcPct val="108000"/>
+              </a:lnSpc>
+              <a:spcBef>
+                <a:spcPts val="0"/>
+              </a:spcBef>
+              <a:spcAft>
+                <a:spcPts val="300"/>
+              </a:spcAft>
+            </a:pPr>
+            <a:r>
+              <a:rPr sz="1600" b="1" i="0">
+                <a:solidFill>
+                  <a:srgbClr val="202B31"/>
+                </a:solidFill>
+                <a:latin typeface="Georgia"/>
+              </a:rPr>
+              <a:t>Apport méthodologique</a:t>
+            </a:r>
+          </a:p>
+          <a:p>
+            <a:pPr algn="l">
+              <a:lnSpc>
+                <a:spcPct val="108000"/>
+              </a:lnSpc>
+              <a:spcBef>
+                <a:spcPts val="0"/>
+              </a:spcBef>
+              <a:spcAft>
+                <a:spcPts val="300"/>
+              </a:spcAft>
+            </a:pPr>
+            <a:r>
+              <a:rPr sz="1300" b="0" i="0">
+                <a:solidFill>
+                  <a:srgbClr val="202B31"/>
+                </a:solidFill>
+                <a:latin typeface="Calibri"/>
+              </a:rPr>
+              <a:t>La fiabilité du ML se lit dans la STRUCTURE du R² (positif si conditions couvertes et répétées), rarement explicité dans la littérature.</a:t>
+            </a:r>
+          </a:p>
+        </p:txBody>
+      </p:sp>
+      <p:sp>
+        <p:nvSpPr>
+          <p:cNvPr id="8" name="Oval 7"/>
+          <p:cNvSpPr/>
+          <p:nvPr/>
+        </p:nvSpPr>
+        <p:spPr>
+          <a:xfrm>
+            <a:off x="868680" y="3209544"/>
+            <a:ext cx="502920" cy="502920"/>
+          </a:xfrm>
+          <a:prstGeom prst="ellipse">
+            <a:avLst/>
+          </a:prstGeom>
+          <a:solidFill>
+            <a:srgbClr val="2C7A7B"/>
+          </a:solidFill>
+          <a:ln>
+            <a:noFill/>
+          </a:ln>
+          <a:effectLst/>
+        </p:spPr>
+        <p:style>
+          <a:lnRef idx="1">
+            <a:schemeClr val="accent1"/>
+          </a:lnRef>
+          <a:fillRef idx="3">
+            <a:schemeClr val="accent1"/>
+          </a:fillRef>
+          <a:effectRef idx="2">
+            <a:schemeClr val="accent1"/>
+          </a:effectRef>
+          <a:fontRef idx="minor">
+            <a:schemeClr val="lt1"/>
+          </a:fontRef>
+        </p:style>
+        <p:txBody>
+          <a:bodyPr rtlCol="0" anchor="ctr" wrap="none" lIns="0" rIns="0" tIns="0" bIns="0"/>
+          <a:lstStyle/>
+          <a:p>
+            <a:pPr algn="ctr"/>
+            <a:r>
+              <a:rPr sz="1600" b="1">
+                <a:solidFill>
+                  <a:srgbClr val="FFFFFF"/>
+                </a:solidFill>
+                <a:latin typeface="Georgia"/>
+              </a:rPr>
+              <a:t>2</a:t>
+            </a:r>
+          </a:p>
+        </p:txBody>
+      </p:sp>
+      <p:sp>
+        <p:nvSpPr>
+          <p:cNvPr id="9" name="TextBox 8"/>
+          <p:cNvSpPr txBox="1"/>
+          <p:nvPr/>
+        </p:nvSpPr>
+        <p:spPr>
+          <a:xfrm>
+            <a:off x="1554480" y="3136392"/>
+            <a:ext cx="9784080" cy="914400"/>
+          </a:xfrm>
+          <a:prstGeom prst="rect">
+            <a:avLst/>
+          </a:prstGeom>
+          <a:noFill/>
+        </p:spPr>
+        <p:txBody>
+          <a:bodyPr wrap="square" anchor="t" lIns="0" rIns="0" tIns="0" bIns="0">
+            <a:spAutoFit/>
+          </a:bodyPr>
+          <a:lstStyle/>
+          <a:p>
+            <a:pPr algn="l">
+              <a:lnSpc>
+                <a:spcPct val="108000"/>
+              </a:lnSpc>
+              <a:spcBef>
+                <a:spcPts val="0"/>
+              </a:spcBef>
+              <a:spcAft>
+                <a:spcPts val="300"/>
+              </a:spcAft>
+            </a:pPr>
+            <a:r>
+              <a:rPr sz="1600" b="1" i="0">
+                <a:solidFill>
+                  <a:srgbClr val="202B31"/>
+                </a:solidFill>
+                <a:latin typeface="Georgia"/>
+              </a:rPr>
+              <a:t>Chaîne complète low-cost</a:t>
+            </a:r>
+          </a:p>
+          <a:p>
+            <a:pPr algn="l">
+              <a:lnSpc>
+                <a:spcPct val="108000"/>
+              </a:lnSpc>
+              <a:spcBef>
+                <a:spcPts val="0"/>
+              </a:spcBef>
+              <a:spcAft>
+                <a:spcPts val="300"/>
+              </a:spcAft>
+            </a:pPr>
+            <a:r>
+              <a:rPr sz="1300" b="0" i="0">
+                <a:solidFill>
+                  <a:srgbClr val="202B31"/>
+                </a:solidFill>
+                <a:latin typeface="Calibri"/>
+              </a:rPr>
+              <a:t>De la mesure à l'ordre de travail, en matériel accessible localement (~50 000 FCFA) et logiciels open-source.</a:t>
+            </a:r>
+          </a:p>
+        </p:txBody>
+      </p:sp>
+      <p:sp>
+        <p:nvSpPr>
+          <p:cNvPr id="10" name="Oval 9"/>
+          <p:cNvSpPr/>
+          <p:nvPr/>
+        </p:nvSpPr>
+        <p:spPr>
+          <a:xfrm>
+            <a:off x="868680" y="4197096"/>
+            <a:ext cx="502920" cy="502920"/>
+          </a:xfrm>
+          <a:prstGeom prst="ellipse">
+            <a:avLst/>
+          </a:prstGeom>
+          <a:solidFill>
+            <a:srgbClr val="2C7A7B"/>
+          </a:solidFill>
+          <a:ln>
+            <a:noFill/>
+          </a:ln>
+          <a:effectLst/>
+        </p:spPr>
+        <p:style>
+          <a:lnRef idx="1">
+            <a:schemeClr val="accent1"/>
+          </a:lnRef>
+          <a:fillRef idx="3">
+            <a:schemeClr val="accent1"/>
+          </a:fillRef>
+          <a:effectRef idx="2">
+            <a:schemeClr val="accent1"/>
+          </a:effectRef>
+          <a:fontRef idx="minor">
+            <a:schemeClr val="lt1"/>
+          </a:fontRef>
+        </p:style>
+        <p:txBody>
+          <a:bodyPr rtlCol="0" anchor="ctr" wrap="none" lIns="0" rIns="0" tIns="0" bIns="0"/>
+          <a:lstStyle/>
+          <a:p>
+            <a:pPr algn="ctr"/>
+            <a:r>
+              <a:rPr sz="1600" b="1">
+                <a:solidFill>
+                  <a:srgbClr val="FFFFFF"/>
+                </a:solidFill>
+                <a:latin typeface="Georgia"/>
+              </a:rPr>
+              <a:t>3</a:t>
+            </a:r>
+          </a:p>
+        </p:txBody>
+      </p:sp>
+      <p:sp>
+        <p:nvSpPr>
+          <p:cNvPr id="11" name="TextBox 10"/>
+          <p:cNvSpPr txBox="1"/>
+          <p:nvPr/>
+        </p:nvSpPr>
+        <p:spPr>
+          <a:xfrm>
+            <a:off x="1554480" y="4123944"/>
+            <a:ext cx="9784080" cy="914400"/>
+          </a:xfrm>
+          <a:prstGeom prst="rect">
+            <a:avLst/>
+          </a:prstGeom>
+          <a:noFill/>
+        </p:spPr>
+        <p:txBody>
+          <a:bodyPr wrap="square" anchor="t" lIns="0" rIns="0" tIns="0" bIns="0">
+            <a:spAutoFit/>
+          </a:bodyPr>
+          <a:lstStyle/>
+          <a:p>
+            <a:pPr algn="l">
+              <a:lnSpc>
+                <a:spcPct val="108000"/>
+              </a:lnSpc>
+              <a:spcBef>
+                <a:spcPts val="0"/>
+              </a:spcBef>
+              <a:spcAft>
+                <a:spcPts val="300"/>
+              </a:spcAft>
+            </a:pPr>
+            <a:r>
+              <a:rPr sz="1600" b="1" i="0">
+                <a:solidFill>
+                  <a:srgbClr val="202B31"/>
+                </a:solidFill>
+                <a:latin typeface="Georgia"/>
+              </a:rPr>
+              <a:t>Double transposabilité</a:t>
+            </a:r>
+          </a:p>
+          <a:p>
+            <a:pPr algn="l">
+              <a:lnSpc>
+                <a:spcPct val="108000"/>
+              </a:lnSpc>
+              <a:spcBef>
+                <a:spcPts val="0"/>
+              </a:spcBef>
+              <a:spcAft>
+                <a:spcPts val="300"/>
+              </a:spcAft>
+            </a:pPr>
+            <a:r>
+              <a:rPr sz="1300" b="0" i="0">
+                <a:solidFill>
+                  <a:srgbClr val="202B31"/>
+                </a:solidFill>
+                <a:latin typeface="Calibri"/>
+              </a:rPr>
+              <a:t>Saut I3.0 → 4.0 essentiellement logiciel chez COTCO ; déploiement autonome pour les PME africaines.</a:t>
+            </a:r>
+          </a:p>
+        </p:txBody>
+      </p:sp>
+      <p:sp>
+        <p:nvSpPr>
+          <p:cNvPr id="12" name="Oval 11"/>
+          <p:cNvSpPr/>
+          <p:nvPr/>
+        </p:nvSpPr>
+        <p:spPr>
+          <a:xfrm>
+            <a:off x="868680" y="5184648"/>
+            <a:ext cx="502920" cy="502920"/>
+          </a:xfrm>
+          <a:prstGeom prst="ellipse">
+            <a:avLst/>
+          </a:prstGeom>
+          <a:solidFill>
+            <a:srgbClr val="2C7A7B"/>
+          </a:solidFill>
+          <a:ln>
+            <a:noFill/>
+          </a:ln>
+          <a:effectLst/>
+        </p:spPr>
+        <p:style>
+          <a:lnRef idx="1">
+            <a:schemeClr val="accent1"/>
+          </a:lnRef>
+          <a:fillRef idx="3">
+            <a:schemeClr val="accent1"/>
+          </a:fillRef>
+          <a:effectRef idx="2">
+            <a:schemeClr val="accent1"/>
+          </a:effectRef>
+          <a:fontRef idx="minor">
+            <a:schemeClr val="lt1"/>
+          </a:fontRef>
+        </p:style>
+        <p:txBody>
+          <a:bodyPr rtlCol="0" anchor="ctr" wrap="none" lIns="0" rIns="0" tIns="0" bIns="0"/>
+          <a:lstStyle/>
+          <a:p>
+            <a:pPr algn="ctr"/>
+            <a:r>
+              <a:rPr sz="1600" b="1">
+                <a:solidFill>
+                  <a:srgbClr val="FFFFFF"/>
+                </a:solidFill>
+                <a:latin typeface="Georgia"/>
+              </a:rPr>
+              <a:t>4</a:t>
+            </a:r>
+          </a:p>
+        </p:txBody>
+      </p:sp>
+      <p:sp>
+        <p:nvSpPr>
+          <p:cNvPr id="13" name="TextBox 12"/>
+          <p:cNvSpPr txBox="1"/>
+          <p:nvPr/>
+        </p:nvSpPr>
+        <p:spPr>
+          <a:xfrm>
+            <a:off x="1554480" y="5111496"/>
+            <a:ext cx="9784080" cy="914400"/>
+          </a:xfrm>
+          <a:prstGeom prst="rect">
+            <a:avLst/>
+          </a:prstGeom>
+          <a:noFill/>
+        </p:spPr>
+        <p:txBody>
+          <a:bodyPr wrap="square" anchor="t" lIns="0" rIns="0" tIns="0" bIns="0">
+            <a:spAutoFit/>
+          </a:bodyPr>
+          <a:lstStyle/>
+          <a:p>
+            <a:pPr algn="l">
+              <a:lnSpc>
+                <a:spcPct val="108000"/>
+              </a:lnSpc>
+              <a:spcBef>
+                <a:spcPts val="0"/>
+              </a:spcBef>
+              <a:spcAft>
+                <a:spcPts val="300"/>
+              </a:spcAft>
+            </a:pPr>
+            <a:r>
+              <a:rPr sz="1600" b="1" i="0">
+                <a:solidFill>
+                  <a:srgbClr val="202B31"/>
+                </a:solidFill>
+                <a:latin typeface="Georgia"/>
+              </a:rPr>
+              <a:t>Rigueur &amp; traçabilité</a:t>
+            </a:r>
+          </a:p>
+          <a:p>
+            <a:pPr algn="l">
+              <a:lnSpc>
+                <a:spcPct val="108000"/>
+              </a:lnSpc>
+              <a:spcBef>
+                <a:spcPts val="0"/>
+              </a:spcBef>
+              <a:spcAft>
+                <a:spcPts val="300"/>
+              </a:spcAft>
+            </a:pPr>
+            <a:r>
+              <a:rPr sz="1300" b="0" i="0">
+                <a:solidFill>
+                  <a:srgbClr val="202B31"/>
+                </a:solidFill>
+                <a:latin typeface="Calibri"/>
+              </a:rPr>
+              <a:t>Chaque donnée, seuil et décision adossé à une source (norme, référence, loi physique).</a:t>
+            </a:r>
+          </a:p>
+        </p:txBody>
+      </p:sp>
+      <p:sp>
+        <p:nvSpPr>
+          <p:cNvPr id="14" name="TextBox 13"/>
+          <p:cNvSpPr txBox="1"/>
+          <p:nvPr/>
+        </p:nvSpPr>
+        <p:spPr>
+          <a:xfrm>
+            <a:off x="457200" y="6437376"/>
+            <a:ext cx="8229600" cy="320040"/>
+          </a:xfrm>
+          <a:prstGeom prst="rect">
+            <a:avLst/>
+          </a:prstGeom>
+          <a:noFill/>
+        </p:spPr>
+        <p:txBody>
+          <a:bodyPr wrap="square" anchor="t" lIns="0" rIns="0" tIns="0" bIns="0">
+            <a:spAutoFit/>
+          </a:bodyPr>
+          <a:lstStyle/>
+          <a:p>
+            <a:pPr algn="l">
+              <a:lnSpc>
+                <a:spcPct val="100000"/>
+              </a:lnSpc>
+              <a:spcBef>
+                <a:spcPts val="0"/>
+              </a:spcBef>
+              <a:spcAft>
+                <a:spcPts val="400"/>
+              </a:spcAft>
+            </a:pPr>
+            <a:r>
+              <a:rPr sz="900" b="0" i="0">
+                <a:solidFill>
+                  <a:srgbClr val="6B7A82"/>
+                </a:solidFill>
+                <a:latin typeface="Calibri"/>
+              </a:rPr>
+              <a:t>Maintenance prédictive de la corrosion  ·  ESTL La Salle  ·  2025–2026</a:t>
+            </a:r>
+          </a:p>
+        </p:txBody>
+      </p:sp>
+      <p:sp>
+        <p:nvSpPr>
+          <p:cNvPr id="15" name="TextBox 14"/>
+          <p:cNvSpPr txBox="1"/>
+          <p:nvPr/>
+        </p:nvSpPr>
+        <p:spPr>
+          <a:xfrm>
+            <a:off x="10424160" y="6437376"/>
+            <a:ext cx="1325880" cy="320040"/>
+          </a:xfrm>
+          <a:prstGeom prst="rect">
+            <a:avLst/>
+          </a:prstGeom>
+          <a:noFill/>
+        </p:spPr>
+        <p:txBody>
+          <a:bodyPr wrap="square" anchor="t" lIns="0" rIns="0" tIns="0" bIns="0">
+            <a:spAutoFit/>
+          </a:bodyPr>
+          <a:lstStyle/>
+          <a:p>
+            <a:pPr algn="r">
+              <a:lnSpc>
+                <a:spcPct val="100000"/>
+              </a:lnSpc>
+              <a:spcBef>
+                <a:spcPts val="0"/>
+              </a:spcBef>
+              <a:spcAft>
+                <a:spcPts val="400"/>
+              </a:spcAft>
+            </a:pPr>
+            <a:r>
+              <a:rPr sz="1000" b="1" i="0">
+                <a:solidFill>
+                  <a:srgbClr val="C9601A"/>
+                </a:solidFill>
+                <a:latin typeface="Calibri"/>
+              </a:rPr>
+              <a:t>17 / 19</a:t>
+            </a:r>
+          </a:p>
+        </p:txBody>
+      </p:sp>
+    </p:spTree>
+  </p:cSld>
+  <p:clrMapOvr>
+    <a:masterClrMapping/>
+  </p:clrMapOvr>
+</p:sld>
+</file>
+
+<file path=ppt/slides/slide18.xml><?xml version="1.0" encoding="utf-8"?>
+<p:sld xmlns:a="http://schemas.openxmlformats.org/drawingml/2006/main" xmlns:p="http://schemas.openxmlformats.org/presentationml/2006/main" xmlns:r="http://schemas.openxmlformats.org/officeDocument/2006/relationships">
+  <p:cSld>
+    <p:spTree>
+      <p:nvGrpSpPr>
+        <p:cNvPr id="1" name=""/>
+        <p:cNvGrpSpPr/>
+        <p:nvPr/>
+      </p:nvGrpSpPr>
+      <p:grpSpPr/>
+      <p:sp>
+        <p:nvSpPr>
+          <p:cNvPr id="2" name="Rectangle 1"/>
+          <p:cNvSpPr/>
+          <p:nvPr/>
+        </p:nvSpPr>
+        <p:spPr>
+          <a:xfrm>
+            <a:off x="-54864" y="-54864"/>
+            <a:ext cx="12301423" cy="6967728"/>
+          </a:xfrm>
+          <a:prstGeom prst="rect">
+            <a:avLst/>
+          </a:prstGeom>
+          <a:solidFill>
+            <a:srgbClr val="16252E"/>
+          </a:solidFill>
+          <a:ln>
+            <a:noFill/>
+          </a:ln>
+          <a:effectLst/>
+        </p:spPr>
+        <p:style>
+          <a:lnRef idx="1">
+            <a:schemeClr val="accent1"/>
+          </a:lnRef>
+          <a:fillRef idx="3">
+            <a:schemeClr val="accent1"/>
+          </a:fillRef>
+          <a:effectRef idx="2">
+            <a:schemeClr val="accent1"/>
+          </a:effectRef>
+          <a:fontRef idx="minor">
+            <a:schemeClr val="lt1"/>
+          </a:fontRef>
+        </p:style>
+        <p:txBody>
+          <a:bodyPr rtlCol="0" anchor="ctr"/>
+          <a:lstStyle/>
+          <a:p>
+            <a:pPr algn="ctr"/>
+          </a:p>
+        </p:txBody>
+      </p:sp>
+      <p:sp>
+        <p:nvSpPr>
+          <p:cNvPr id="3" name="Rectangle 2"/>
+          <p:cNvSpPr/>
+          <p:nvPr/>
+        </p:nvSpPr>
+        <p:spPr>
+          <a:xfrm>
+            <a:off x="0" y="0"/>
+            <a:ext cx="256032" cy="6858000"/>
+          </a:xfrm>
+          <a:prstGeom prst="rect">
+            <a:avLst/>
+          </a:prstGeom>
+          <a:solidFill>
+            <a:srgbClr val="C9601A"/>
+          </a:solidFill>
+          <a:ln>
+            <a:noFill/>
+          </a:ln>
+          <a:effectLst/>
+        </p:spPr>
+        <p:style>
+          <a:lnRef idx="1">
+            <a:schemeClr val="accent1"/>
+          </a:lnRef>
+          <a:fillRef idx="3">
+            <a:schemeClr val="accent1"/>
+          </a:fillRef>
+          <a:effectRef idx="2">
+            <a:schemeClr val="accent1"/>
+          </a:effectRef>
+          <a:fontRef idx="minor">
+            <a:schemeClr val="lt1"/>
+          </a:fontRef>
+        </p:style>
+        <p:txBody>
+          <a:bodyPr rtlCol="0" anchor="ctr"/>
+          <a:lstStyle/>
+          <a:p>
+            <a:pPr algn="ctr"/>
+          </a:p>
+        </p:txBody>
+      </p:sp>
+      <p:sp>
+        <p:nvSpPr>
+          <p:cNvPr id="4" name="TextBox 3"/>
+          <p:cNvSpPr txBox="1"/>
+          <p:nvPr/>
+        </p:nvSpPr>
+        <p:spPr>
+          <a:xfrm>
+            <a:off x="868680" y="603504"/>
+            <a:ext cx="10058400" cy="365760"/>
+          </a:xfrm>
+          <a:prstGeom prst="rect">
+            <a:avLst/>
+          </a:prstGeom>
+          <a:noFill/>
+        </p:spPr>
+        <p:txBody>
+          <a:bodyPr wrap="square" anchor="t" lIns="0" rIns="0" tIns="0" bIns="0">
+            <a:spAutoFit/>
+          </a:bodyPr>
+          <a:lstStyle/>
+          <a:p>
+            <a:pPr algn="l">
+              <a:lnSpc>
+                <a:spcPct val="100000"/>
+              </a:lnSpc>
+              <a:spcBef>
+                <a:spcPts val="0"/>
+              </a:spcBef>
+              <a:spcAft>
+                <a:spcPts val="400"/>
+              </a:spcAft>
+            </a:pPr>
+            <a:r>
+              <a:rPr sz="1300" b="1" i="0">
+                <a:solidFill>
+                  <a:srgbClr val="C9601A"/>
+                </a:solidFill>
+                <a:latin typeface="Calibri"/>
+              </a:rPr>
+              <a:t>CONCLUSION</a:t>
+            </a:r>
+          </a:p>
+        </p:txBody>
+      </p:sp>
+      <p:sp>
+        <p:nvSpPr>
+          <p:cNvPr id="5" name="TextBox 4"/>
+          <p:cNvSpPr txBox="1"/>
+          <p:nvPr/>
+        </p:nvSpPr>
+        <p:spPr>
+          <a:xfrm>
+            <a:off x="841248" y="1024128"/>
+            <a:ext cx="10607040" cy="914400"/>
+          </a:xfrm>
+          <a:prstGeom prst="rect">
+            <a:avLst/>
+          </a:prstGeom>
+          <a:noFill/>
+        </p:spPr>
+        <p:txBody>
+          <a:bodyPr wrap="square" anchor="t" lIns="0" rIns="0" tIns="0" bIns="0">
+            <a:spAutoFit/>
+          </a:bodyPr>
+          <a:lstStyle/>
+          <a:p>
+            <a:pPr algn="l">
+              <a:lnSpc>
+                <a:spcPct val="100000"/>
+              </a:lnSpc>
+              <a:spcBef>
+                <a:spcPts val="0"/>
+              </a:spcBef>
+              <a:spcAft>
+                <a:spcPts val="400"/>
+              </a:spcAft>
+            </a:pPr>
+            <a:r>
+              <a:rPr sz="3100" b="1" i="0">
+                <a:solidFill>
+                  <a:srgbClr val="FFFFFF"/>
+                </a:solidFill>
+                <a:latin typeface="Georgia"/>
+              </a:rPr>
+              <a:t>Une brique fondatrice, validée et reproductible</a:t>
+            </a:r>
+          </a:p>
+        </p:txBody>
+      </p:sp>
+      <p:sp>
+        <p:nvSpPr>
+          <p:cNvPr id="6" name="Oval 5"/>
+          <p:cNvSpPr/>
+          <p:nvPr/>
+        </p:nvSpPr>
+        <p:spPr>
+          <a:xfrm>
+            <a:off x="886968" y="2103120"/>
+            <a:ext cx="548640" cy="548640"/>
+          </a:xfrm>
+          <a:prstGeom prst="ellipse">
+            <a:avLst/>
+          </a:prstGeom>
+          <a:solidFill>
+            <a:srgbClr val="C9601A"/>
+          </a:solidFill>
+          <a:ln>
+            <a:noFill/>
+          </a:ln>
+          <a:effectLst/>
+        </p:spPr>
+        <p:style>
+          <a:lnRef idx="1">
+            <a:schemeClr val="accent1"/>
+          </a:lnRef>
+          <a:fillRef idx="3">
+            <a:schemeClr val="accent1"/>
+          </a:fillRef>
+          <a:effectRef idx="2">
+            <a:schemeClr val="accent1"/>
+          </a:effectRef>
+          <a:fontRef idx="minor">
+            <a:schemeClr val="lt1"/>
+          </a:fontRef>
+        </p:style>
+        <p:txBody>
+          <a:bodyPr rtlCol="0" anchor="ctr" wrap="none" lIns="0" rIns="0" tIns="0" bIns="0"/>
+          <a:lstStyle/>
+          <a:p>
+            <a:pPr algn="ctr"/>
+            <a:r>
+              <a:rPr sz="1700" b="1">
+                <a:solidFill>
+                  <a:srgbClr val="FFFFFF"/>
+                </a:solidFill>
+                <a:latin typeface="Georgia"/>
+              </a:rPr>
+              <a:t>1</a:t>
+            </a:r>
+          </a:p>
+        </p:txBody>
+      </p:sp>
+      <p:sp>
+        <p:nvSpPr>
+          <p:cNvPr id="7" name="TextBox 6"/>
+          <p:cNvSpPr txBox="1"/>
+          <p:nvPr/>
+        </p:nvSpPr>
+        <p:spPr>
+          <a:xfrm>
+            <a:off x="1645920" y="2121408"/>
+            <a:ext cx="9692640" cy="548640"/>
+          </a:xfrm>
+          <a:prstGeom prst="rect">
+            <a:avLst/>
+          </a:prstGeom>
+          <a:noFill/>
+        </p:spPr>
+        <p:txBody>
+          <a:bodyPr wrap="square" anchor="t" lIns="0" rIns="0" tIns="0" bIns="0">
+            <a:spAutoFit/>
+          </a:bodyPr>
+          <a:lstStyle/>
+          <a:p>
+            <a:pPr algn="l">
+              <a:lnSpc>
+                <a:spcPct val="105000"/>
+              </a:lnSpc>
+              <a:spcBef>
+                <a:spcPts val="0"/>
+              </a:spcBef>
+              <a:spcAft>
+                <a:spcPts val="400"/>
+              </a:spcAft>
+            </a:pPr>
+            <a:r>
+              <a:rPr sz="1500" b="1" i="0">
+                <a:solidFill>
+                  <a:srgbClr val="C9601A"/>
+                </a:solidFill>
+                <a:latin typeface="Georgia"/>
+              </a:rPr>
+              <a:t>OS1 : </a:t>
+            </a:r>
+            <a:r>
+              <a:rPr sz="1400" b="0" i="0">
+                <a:solidFill>
+                  <a:srgbClr val="CADDDC"/>
+                </a:solidFill>
+                <a:latin typeface="Calibri"/>
+              </a:rPr>
+              <a:t>chaîne d'acquisition ER fonctionnelle, suivi d'essais run-to-failure complets.</a:t>
+            </a:r>
+          </a:p>
+        </p:txBody>
+      </p:sp>
+      <p:sp>
+        <p:nvSpPr>
+          <p:cNvPr id="8" name="Oval 7"/>
+          <p:cNvSpPr/>
+          <p:nvPr/>
+        </p:nvSpPr>
+        <p:spPr>
+          <a:xfrm>
+            <a:off x="886968" y="2816352"/>
+            <a:ext cx="548640" cy="548640"/>
+          </a:xfrm>
+          <a:prstGeom prst="ellipse">
+            <a:avLst/>
+          </a:prstGeom>
+          <a:solidFill>
+            <a:srgbClr val="C9601A"/>
+          </a:solidFill>
+          <a:ln>
+            <a:noFill/>
+          </a:ln>
+          <a:effectLst/>
+        </p:spPr>
+        <p:style>
+          <a:lnRef idx="1">
+            <a:schemeClr val="accent1"/>
+          </a:lnRef>
+          <a:fillRef idx="3">
+            <a:schemeClr val="accent1"/>
+          </a:fillRef>
+          <a:effectRef idx="2">
+            <a:schemeClr val="accent1"/>
+          </a:effectRef>
+          <a:fontRef idx="minor">
+            <a:schemeClr val="lt1"/>
+          </a:fontRef>
+        </p:style>
+        <p:txBody>
+          <a:bodyPr rtlCol="0" anchor="ctr" wrap="none" lIns="0" rIns="0" tIns="0" bIns="0"/>
+          <a:lstStyle/>
+          <a:p>
+            <a:pPr algn="ctr"/>
+            <a:r>
+              <a:rPr sz="1700" b="1">
+                <a:solidFill>
+                  <a:srgbClr val="FFFFFF"/>
+                </a:solidFill>
+                <a:latin typeface="Georgia"/>
+              </a:rPr>
+              <a:t>2</a:t>
+            </a:r>
+          </a:p>
+        </p:txBody>
+      </p:sp>
+      <p:sp>
+        <p:nvSpPr>
+          <p:cNvPr id="9" name="TextBox 8"/>
+          <p:cNvSpPr txBox="1"/>
+          <p:nvPr/>
+        </p:nvSpPr>
+        <p:spPr>
+          <a:xfrm>
+            <a:off x="1645920" y="2834640"/>
+            <a:ext cx="9692640" cy="548640"/>
+          </a:xfrm>
+          <a:prstGeom prst="rect">
+            <a:avLst/>
+          </a:prstGeom>
+          <a:noFill/>
+        </p:spPr>
+        <p:txBody>
+          <a:bodyPr wrap="square" anchor="t" lIns="0" rIns="0" tIns="0" bIns="0">
+            <a:spAutoFit/>
+          </a:bodyPr>
+          <a:lstStyle/>
+          <a:p>
+            <a:pPr algn="l">
+              <a:lnSpc>
+                <a:spcPct val="105000"/>
+              </a:lnSpc>
+              <a:spcBef>
+                <a:spcPts val="0"/>
+              </a:spcBef>
+              <a:spcAft>
+                <a:spcPts val="400"/>
+              </a:spcAft>
+            </a:pPr>
+            <a:r>
+              <a:rPr sz="1500" b="1" i="0">
+                <a:solidFill>
+                  <a:srgbClr val="C9601A"/>
+                </a:solidFill>
+                <a:latin typeface="Georgia"/>
+              </a:rPr>
+              <a:t>OS2 : </a:t>
+            </a:r>
+            <a:r>
+              <a:rPr sz="1400" b="0" i="0">
+                <a:solidFill>
+                  <a:srgbClr val="CADDDC"/>
+                </a:solidFill>
+                <a:latin typeface="Calibri"/>
+              </a:rPr>
+              <a:t>XGBoost prédit le CR et surpasse les baselines, sous condition de couverture.</a:t>
+            </a:r>
+          </a:p>
+        </p:txBody>
+      </p:sp>
+      <p:sp>
+        <p:nvSpPr>
+          <p:cNvPr id="10" name="Oval 9"/>
+          <p:cNvSpPr/>
+          <p:nvPr/>
+        </p:nvSpPr>
+        <p:spPr>
+          <a:xfrm>
+            <a:off x="886968" y="3529584"/>
+            <a:ext cx="548640" cy="548640"/>
+          </a:xfrm>
+          <a:prstGeom prst="ellipse">
+            <a:avLst/>
+          </a:prstGeom>
+          <a:solidFill>
+            <a:srgbClr val="C9601A"/>
+          </a:solidFill>
+          <a:ln>
+            <a:noFill/>
+          </a:ln>
+          <a:effectLst/>
+        </p:spPr>
+        <p:style>
+          <a:lnRef idx="1">
+            <a:schemeClr val="accent1"/>
+          </a:lnRef>
+          <a:fillRef idx="3">
+            <a:schemeClr val="accent1"/>
+          </a:fillRef>
+          <a:effectRef idx="2">
+            <a:schemeClr val="accent1"/>
+          </a:effectRef>
+          <a:fontRef idx="minor">
+            <a:schemeClr val="lt1"/>
+          </a:fontRef>
+        </p:style>
+        <p:txBody>
+          <a:bodyPr rtlCol="0" anchor="ctr" wrap="none" lIns="0" rIns="0" tIns="0" bIns="0"/>
+          <a:lstStyle/>
+          <a:p>
+            <a:pPr algn="ctr"/>
+            <a:r>
+              <a:rPr sz="1700" b="1">
+                <a:solidFill>
+                  <a:srgbClr val="FFFFFF"/>
+                </a:solidFill>
+                <a:latin typeface="Georgia"/>
+              </a:rPr>
+              <a:t>3</a:t>
+            </a:r>
+          </a:p>
+        </p:txBody>
+      </p:sp>
+      <p:sp>
+        <p:nvSpPr>
+          <p:cNvPr id="11" name="TextBox 10"/>
+          <p:cNvSpPr txBox="1"/>
+          <p:nvPr/>
+        </p:nvSpPr>
+        <p:spPr>
+          <a:xfrm>
+            <a:off x="1645920" y="3547872"/>
+            <a:ext cx="9692640" cy="548640"/>
+          </a:xfrm>
+          <a:prstGeom prst="rect">
+            <a:avLst/>
+          </a:prstGeom>
+          <a:noFill/>
+        </p:spPr>
+        <p:txBody>
+          <a:bodyPr wrap="square" anchor="t" lIns="0" rIns="0" tIns="0" bIns="0">
+            <a:spAutoFit/>
+          </a:bodyPr>
+          <a:lstStyle/>
+          <a:p>
+            <a:pPr algn="l">
+              <a:lnSpc>
+                <a:spcPct val="105000"/>
+              </a:lnSpc>
+              <a:spcBef>
+                <a:spcPts val="0"/>
+              </a:spcBef>
+              <a:spcAft>
+                <a:spcPts val="400"/>
+              </a:spcAft>
+            </a:pPr>
+            <a:r>
+              <a:rPr sz="1500" b="1" i="0">
+                <a:solidFill>
+                  <a:srgbClr val="C9601A"/>
+                </a:solidFill>
+                <a:latin typeface="Georgia"/>
+              </a:rPr>
+              <a:t>OS3 : </a:t>
+            </a:r>
+            <a:r>
+              <a:rPr sz="1400" b="0" i="0">
+                <a:solidFill>
+                  <a:srgbClr val="CADDDC"/>
+                </a:solidFill>
+                <a:latin typeface="Calibri"/>
+              </a:rPr>
+              <a:t>température dominante ; la répétabilité des conditions fait la fiabilité.</a:t>
+            </a:r>
+          </a:p>
+        </p:txBody>
+      </p:sp>
+      <p:sp>
+        <p:nvSpPr>
+          <p:cNvPr id="12" name="Oval 11"/>
+          <p:cNvSpPr/>
+          <p:nvPr/>
+        </p:nvSpPr>
+        <p:spPr>
+          <a:xfrm>
+            <a:off x="886968" y="4242816"/>
+            <a:ext cx="548640" cy="548640"/>
+          </a:xfrm>
+          <a:prstGeom prst="ellipse">
+            <a:avLst/>
+          </a:prstGeom>
+          <a:solidFill>
+            <a:srgbClr val="C9601A"/>
+          </a:solidFill>
+          <a:ln>
+            <a:noFill/>
+          </a:ln>
+          <a:effectLst/>
+        </p:spPr>
+        <p:style>
+          <a:lnRef idx="1">
+            <a:schemeClr val="accent1"/>
+          </a:lnRef>
+          <a:fillRef idx="3">
+            <a:schemeClr val="accent1"/>
+          </a:fillRef>
+          <a:effectRef idx="2">
+            <a:schemeClr val="accent1"/>
+          </a:effectRef>
+          <a:fontRef idx="minor">
+            <a:schemeClr val="lt1"/>
+          </a:fontRef>
+        </p:style>
+        <p:txBody>
+          <a:bodyPr rtlCol="0" anchor="ctr" wrap="none" lIns="0" rIns="0" tIns="0" bIns="0"/>
+          <a:lstStyle/>
+          <a:p>
+            <a:pPr algn="ctr"/>
+            <a:r>
+              <a:rPr sz="1700" b="1">
+                <a:solidFill>
+                  <a:srgbClr val="FFFFFF"/>
+                </a:solidFill>
+                <a:latin typeface="Georgia"/>
+              </a:rPr>
+              <a:t>4</a:t>
+            </a:r>
+          </a:p>
+        </p:txBody>
+      </p:sp>
+      <p:sp>
+        <p:nvSpPr>
+          <p:cNvPr id="13" name="TextBox 12"/>
+          <p:cNvSpPr txBox="1"/>
+          <p:nvPr/>
+        </p:nvSpPr>
+        <p:spPr>
+          <a:xfrm>
+            <a:off x="1645920" y="4261104"/>
+            <a:ext cx="9692640" cy="548640"/>
+          </a:xfrm>
+          <a:prstGeom prst="rect">
+            <a:avLst/>
+          </a:prstGeom>
+          <a:noFill/>
+        </p:spPr>
+        <p:txBody>
+          <a:bodyPr wrap="square" anchor="t" lIns="0" rIns="0" tIns="0" bIns="0">
+            <a:spAutoFit/>
+          </a:bodyPr>
+          <a:lstStyle/>
+          <a:p>
+            <a:pPr algn="l">
+              <a:lnSpc>
+                <a:spcPct val="105000"/>
+              </a:lnSpc>
+              <a:spcBef>
+                <a:spcPts val="0"/>
+              </a:spcBef>
+              <a:spcAft>
+                <a:spcPts val="400"/>
+              </a:spcAft>
+            </a:pPr>
+            <a:r>
+              <a:rPr sz="1500" b="1" i="0">
+                <a:solidFill>
+                  <a:srgbClr val="C9601A"/>
+                </a:solidFill>
+                <a:latin typeface="Georgia"/>
+              </a:rPr>
+              <a:t>OS4 : </a:t>
+            </a:r>
+            <a:r>
+              <a:rPr sz="1400" b="0" i="0">
+                <a:solidFill>
+                  <a:srgbClr val="CADDDC"/>
+                </a:solidFill>
+                <a:latin typeface="Calibri"/>
+              </a:rPr>
+              <a:t>boucle décision → action démontrée par un module GMAO maison, à coût nul.</a:t>
+            </a:r>
+          </a:p>
+        </p:txBody>
+      </p:sp>
+      <p:sp>
+        <p:nvSpPr>
+          <p:cNvPr id="14" name="TextBox 13"/>
+          <p:cNvSpPr txBox="1"/>
+          <p:nvPr/>
+        </p:nvSpPr>
+        <p:spPr>
+          <a:xfrm>
+            <a:off x="868680" y="5212080"/>
+            <a:ext cx="10424160" cy="914400"/>
+          </a:xfrm>
+          <a:prstGeom prst="rect">
+            <a:avLst/>
+          </a:prstGeom>
+          <a:noFill/>
+        </p:spPr>
+        <p:txBody>
+          <a:bodyPr wrap="square" anchor="t" lIns="0" rIns="0" tIns="0" bIns="0">
+            <a:spAutoFit/>
+          </a:bodyPr>
+          <a:lstStyle/>
+          <a:p>
+            <a:pPr algn="l">
+              <a:lnSpc>
+                <a:spcPct val="115000"/>
+              </a:lnSpc>
+              <a:spcBef>
+                <a:spcPts val="0"/>
+              </a:spcBef>
+              <a:spcAft>
+                <a:spcPts val="400"/>
+              </a:spcAft>
+            </a:pPr>
+            <a:r>
+              <a:rPr sz="1450" b="1" i="0">
+                <a:solidFill>
+                  <a:srgbClr val="FFFFFF"/>
+                </a:solidFill>
+                <a:latin typeface="Calibri"/>
+              </a:rPr>
+              <a:t>Objectifs partiellement atteints, en cours de consolidation. </a:t>
+            </a:r>
+            <a:r>
+              <a:rPr sz="1450" b="0" i="1">
+                <a:solidFill>
+                  <a:srgbClr val="CADDDC"/>
+                </a:solidFill>
+                <a:latin typeface="Calibri"/>
+              </a:rPr>
+              <a:t>Mais un prototype qui va de la mesure à la décision, transposable des deux côtés.</a:t>
+            </a:r>
+          </a:p>
+        </p:txBody>
+      </p:sp>
+      <p:sp>
+        <p:nvSpPr>
+          <p:cNvPr id="15" name="TextBox 14"/>
+          <p:cNvSpPr txBox="1"/>
+          <p:nvPr/>
+        </p:nvSpPr>
+        <p:spPr>
+          <a:xfrm>
+            <a:off x="457200" y="6437376"/>
+            <a:ext cx="8229600" cy="320040"/>
+          </a:xfrm>
+          <a:prstGeom prst="rect">
+            <a:avLst/>
+          </a:prstGeom>
+          <a:noFill/>
+        </p:spPr>
+        <p:txBody>
+          <a:bodyPr wrap="square" anchor="t" lIns="0" rIns="0" tIns="0" bIns="0">
+            <a:spAutoFit/>
+          </a:bodyPr>
+          <a:lstStyle/>
+          <a:p>
+            <a:pPr algn="l">
+              <a:lnSpc>
+                <a:spcPct val="100000"/>
+              </a:lnSpc>
+              <a:spcBef>
+                <a:spcPts val="0"/>
+              </a:spcBef>
+              <a:spcAft>
+                <a:spcPts val="400"/>
+              </a:spcAft>
+            </a:pPr>
+            <a:r>
+              <a:rPr sz="900" b="0" i="0">
+                <a:solidFill>
+                  <a:srgbClr val="CADDDC"/>
+                </a:solidFill>
+                <a:latin typeface="Calibri"/>
+              </a:rPr>
+              <a:t>Maintenance prédictive de la corrosion  ·  ESTL La Salle  ·  2025–2026</a:t>
+            </a:r>
+          </a:p>
+        </p:txBody>
+      </p:sp>
+      <p:sp>
+        <p:nvSpPr>
+          <p:cNvPr id="16" name="TextBox 15"/>
+          <p:cNvSpPr txBox="1"/>
+          <p:nvPr/>
+        </p:nvSpPr>
+        <p:spPr>
+          <a:xfrm>
+            <a:off x="10424160" y="6437376"/>
+            <a:ext cx="1325880" cy="320040"/>
+          </a:xfrm>
+          <a:prstGeom prst="rect">
+            <a:avLst/>
+          </a:prstGeom>
+          <a:noFill/>
+        </p:spPr>
+        <p:txBody>
+          <a:bodyPr wrap="square" anchor="t" lIns="0" rIns="0" tIns="0" bIns="0">
+            <a:spAutoFit/>
+          </a:bodyPr>
+          <a:lstStyle/>
+          <a:p>
+            <a:pPr algn="r">
+              <a:lnSpc>
+                <a:spcPct val="100000"/>
+              </a:lnSpc>
+              <a:spcBef>
+                <a:spcPts val="0"/>
+              </a:spcBef>
+              <a:spcAft>
+                <a:spcPts val="400"/>
+              </a:spcAft>
+            </a:pPr>
+            <a:r>
+              <a:rPr sz="1000" b="1" i="0">
+                <a:solidFill>
+                  <a:srgbClr val="C9601A"/>
+                </a:solidFill>
+                <a:latin typeface="Calibri"/>
+              </a:rPr>
+              <a:t>18 / 19</a:t>
+            </a:r>
+          </a:p>
+        </p:txBody>
+      </p:sp>
+    </p:spTree>
+  </p:cSld>
+  <p:clrMapOvr>
+    <a:masterClrMapping/>
+  </p:clrMapOvr>
+</p:sld>
+</file>
+
+<file path=ppt/slides/slide19.xml><?xml version="1.0" encoding="utf-8"?>
+<p:sld xmlns:a="http://schemas.openxmlformats.org/drawingml/2006/main" xmlns:p="http://schemas.openxmlformats.org/presentationml/2006/main" xmlns:r="http://schemas.openxmlformats.org/officeDocument/2006/relationships">
+  <p:cSld>
+    <p:spTree>
+      <p:nvGrpSpPr>
+        <p:cNvPr id="1" name=""/>
+        <p:cNvGrpSpPr/>
+        <p:nvPr/>
+      </p:nvGrpSpPr>
+      <p:grpSpPr/>
+      <p:sp>
+        <p:nvSpPr>
+          <p:cNvPr id="2" name="Rectangle 1"/>
+          <p:cNvSpPr/>
+          <p:nvPr/>
+        </p:nvSpPr>
+        <p:spPr>
+          <a:xfrm>
+            <a:off x="-54864" y="-54864"/>
+            <a:ext cx="12301423" cy="6967728"/>
+          </a:xfrm>
+          <a:prstGeom prst="rect">
+            <a:avLst/>
+          </a:prstGeom>
+          <a:solidFill>
             <a:srgbClr val="16252E"/>
           </a:solidFill>
           <a:ln>
@@ -10130,7 +11103,7 @@
                 </a:solidFill>
                 <a:latin typeface="Calibri"/>
               </a:rPr>
-              <a:t>02 / 17</a:t>
+              <a:t>02 / 19</a:t>
             </a:r>
           </a:p>
         </p:txBody>
@@ -11147,7 +12120,7 @@
                 </a:solidFill>
                 <a:latin typeface="Calibri"/>
               </a:rPr>
-              <a:t>03 / 17</a:t>
+              <a:t>03 / 19</a:t>
             </a:r>
           </a:p>
         </p:txBody>
@@ -11925,7 +12898,7 @@
                 </a:solidFill>
                 <a:latin typeface="Calibri"/>
               </a:rPr>
-              <a:t>04 / 17</a:t>
+              <a:t>04 / 19</a:t>
             </a:r>
           </a:p>
         </p:txBody>
@@ -13689,7 +14662,7 @@
                 </a:solidFill>
                 <a:latin typeface="Calibri"/>
               </a:rPr>
-              <a:t>05 / 17</a:t>
+              <a:t>05 / 19</a:t>
             </a:r>
           </a:p>
         </p:txBody>
@@ -14599,7 +15572,7 @@
                 </a:solidFill>
                 <a:latin typeface="Calibri"/>
               </a:rPr>
-              <a:t>06 / 17</a:t>
+              <a:t>06 / 19</a:t>
             </a:r>
           </a:p>
         </p:txBody>
@@ -15127,7 +16100,7 @@
                 </a:solidFill>
                 <a:latin typeface="Calibri"/>
               </a:rPr>
-              <a:t>07 / 17</a:t>
+              <a:t>07 / 19</a:t>
             </a:r>
           </a:p>
         </p:txBody>
@@ -15833,7 +16806,7 @@
                 </a:solidFill>
                 <a:latin typeface="Calibri"/>
               </a:rPr>
-              <a:t>08 / 17</a:t>
+              <a:t>08 / 19</a:t>
             </a:r>
           </a:p>
         </p:txBody>
@@ -15980,11 +16953,11 @@
             <a:r>
               <a:rPr sz="1250" b="1" i="0">
                 <a:solidFill>
-                  <a:srgbClr val="C9601A"/>
-                </a:solidFill>
-                <a:latin typeface="Calibri"/>
-              </a:rPr>
-              <a:t>RÉSULTATS · OS2</a:t>
+                  <a:srgbClr val="2C7A7B"/>
+                </a:solidFill>
+                <a:latin typeface="Calibri"/>
+              </a:rPr>
+              <a:t>OS2 · PRONOSTIC</a:t>
             </a:r>
           </a:p>
         </p:txBody>
@@ -16029,14 +17002,14 @@
                 </a:solidFill>
                 <a:latin typeface="Georgia"/>
               </a:rPr>
-              <a:t>Le modèle généralise, là où les conditions sont couvertes</a:t>
+              <a:t>Comment XGBoost apprend : corriger ses erreurs, 500 fois</a:t>
             </a:r>
           </a:p>
         </p:txBody>
       </p:sp>
       <p:pic>
         <p:nvPicPr>
-          <p:cNvPr id="6" name="Picture 5" descr="fig_iii3_loro_evolution.png"/>
+          <p:cNvPr id="6" name="Picture 5" descr="fig_xgb_principe.png"/>
           <p:cNvPicPr>
             <a:picLocks noChangeAspect="1"/>
           </p:cNvPicPr>
@@ -16050,8 +17023,8 @@
         </p:blipFill>
         <p:spPr>
           <a:xfrm>
-            <a:off x="6446520" y="2464736"/>
-            <a:ext cx="5166360" cy="3162966"/>
+            <a:off x="708042" y="1965960"/>
+            <a:ext cx="10791155" cy="3246120"/>
           </a:xfrm>
           <a:prstGeom prst="rect">
             <a:avLst/>
@@ -16060,60 +17033,14 @@
       </p:pic>
       <p:sp>
         <p:nvSpPr>
-          <p:cNvPr id="7" name="Rounded Rectangle 6"/>
-          <p:cNvSpPr/>
-          <p:nvPr/>
-        </p:nvSpPr>
-        <p:spPr>
-          <a:xfrm>
-            <a:off x="868680" y="2148840"/>
-            <a:ext cx="5303520" cy="1371600"/>
-          </a:xfrm>
-          <a:prstGeom prst="roundRect">
-            <a:avLst/>
-          </a:prstGeom>
-          <a:solidFill>
-            <a:srgbClr val="FFFFFF"/>
-          </a:solidFill>
-          <a:ln w="12700">
-            <a:solidFill>
-              <a:srgbClr val="E3DED4"/>
-            </a:solidFill>
-          </a:ln>
-          <a:effectLst/>
-        </p:spPr>
-        <p:style>
-          <a:lnRef idx="1">
-            <a:schemeClr val="accent1"/>
-          </a:lnRef>
-          <a:fillRef idx="3">
-            <a:schemeClr val="accent1"/>
-          </a:fillRef>
-          <a:effectRef idx="2">
-            <a:schemeClr val="accent1"/>
-          </a:effectRef>
-          <a:fontRef idx="minor">
-            <a:schemeClr val="lt1"/>
-          </a:fontRef>
-        </p:style>
-        <p:txBody>
-          <a:bodyPr rtlCol="0" anchor="ctr"/>
-          <a:lstStyle/>
-          <a:p>
-            <a:pPr algn="ctr"/>
-          </a:p>
-        </p:txBody>
-      </p:sp>
-      <p:sp>
-        <p:nvSpPr>
-          <p:cNvPr id="8" name="TextBox 7"/>
+          <p:cNvPr id="7" name="TextBox 6"/>
           <p:cNvSpPr txBox="1"/>
           <p:nvPr/>
         </p:nvSpPr>
         <p:spPr>
           <a:xfrm>
-            <a:off x="1097280" y="2286000"/>
-            <a:ext cx="4937760" cy="457200"/>
+            <a:off x="868680" y="5440680"/>
+            <a:ext cx="10424160" cy="914400"/>
           </a:xfrm>
           <a:prstGeom prst="rect">
             <a:avLst/>
@@ -16128,7 +17055,7 @@
           <a:p>
             <a:pPr algn="l">
               <a:lnSpc>
-                <a:spcPct val="100000"/>
+                <a:spcPct val="112000"/>
               </a:lnSpc>
               <a:spcBef>
                 <a:spcPts val="0"/>
@@ -16138,36 +17065,54 @@
               </a:spcAft>
             </a:pPr>
             <a:r>
-              <a:rPr sz="3800" b="1" i="0">
-                <a:solidFill>
-                  <a:srgbClr val="16252E"/>
+              <a:rPr sz="1450" b="1" i="0">
+                <a:solidFill>
+                  <a:srgbClr val="202B31"/>
                 </a:solidFill>
                 <a:latin typeface="Georgia"/>
               </a:rPr>
-              <a:t>R² = +0,29</a:t>
-            </a:r>
-            <a:r>
-              <a:rPr sz="1300" b="0" i="0">
-                <a:solidFill>
-                  <a:srgbClr val="6B7A82"/>
-                </a:solidFill>
-                <a:latin typeface="Calibri"/>
-              </a:rPr>
-              <a:t>  (LORO actuel)</a:t>
-            </a:r>
-          </a:p>
-        </p:txBody>
-      </p:sp>
-      <p:sp>
-        <p:nvSpPr>
-          <p:cNvPr id="9" name="TextBox 8"/>
+              <a:t>Un arbre seul prédit mal. </a:t>
+            </a:r>
+            <a:r>
+              <a:rPr sz="1400" b="0" i="0">
+                <a:solidFill>
+                  <a:srgbClr val="202B31"/>
+                </a:solidFill>
+                <a:latin typeface="Calibri"/>
+              </a:rPr>
+              <a:t>Mais chaque arbre suivant apprend les erreurs du précédent, et la </a:t>
+            </a:r>
+            <a:r>
+              <a:rPr sz="1400" b="1" i="0">
+                <a:solidFill>
+                  <a:srgbClr val="C9601A"/>
+                </a:solidFill>
+                <a:latin typeface="Calibri"/>
+              </a:rPr>
+              <a:t>somme des petites corrections</a:t>
+            </a:r>
+            <a:r>
+              <a:rPr sz="1400" b="0" i="0">
+                <a:solidFill>
+                  <a:srgbClr val="202B31"/>
+                </a:solidFill>
+                <a:latin typeface="Calibri"/>
+              </a:rPr>
+              <a:t> donne la prédiction du taux de corrosion. C'est le gradient boosting.</a:t>
+            </a:r>
+          </a:p>
+        </p:txBody>
+      </p:sp>
+      <p:sp>
+        <p:nvSpPr>
+          <p:cNvPr id="8" name="TextBox 7"/>
           <p:cNvSpPr txBox="1"/>
           <p:nvPr/>
         </p:nvSpPr>
         <p:spPr>
           <a:xfrm>
-            <a:off x="1097280" y="3154680"/>
-            <a:ext cx="4937760" cy="365760"/>
+            <a:off x="457200" y="6437376"/>
+            <a:ext cx="8229600" cy="320040"/>
           </a:xfrm>
           <a:prstGeom prst="rect">
             <a:avLst/>
@@ -16192,27 +17137,27 @@
               </a:spcAft>
             </a:pPr>
             <a:r>
-              <a:rPr sz="1250" b="1" i="0">
-                <a:solidFill>
-                  <a:srgbClr val="C9601A"/>
-                </a:solidFill>
-                <a:latin typeface="Calibri"/>
-              </a:rPr>
-              <a:t>depuis −1,77 (couverture nulle) · bat les références</a:t>
-            </a:r>
-          </a:p>
-        </p:txBody>
-      </p:sp>
-      <p:sp>
-        <p:nvSpPr>
-          <p:cNvPr id="10" name="TextBox 9"/>
+              <a:rPr sz="900" b="0" i="0">
+                <a:solidFill>
+                  <a:srgbClr val="6B7A82"/>
+                </a:solidFill>
+                <a:latin typeface="Calibri"/>
+              </a:rPr>
+              <a:t>Maintenance prédictive de la corrosion  ·  ESTL La Salle  ·  2025–2026</a:t>
+            </a:r>
+          </a:p>
+        </p:txBody>
+      </p:sp>
+      <p:sp>
+        <p:nvSpPr>
+          <p:cNvPr id="9" name="TextBox 8"/>
           <p:cNvSpPr txBox="1"/>
           <p:nvPr/>
         </p:nvSpPr>
         <p:spPr>
           <a:xfrm>
-            <a:off x="868680" y="3794760"/>
-            <a:ext cx="5349240" cy="2194560"/>
+            <a:off x="10424160" y="6437376"/>
+            <a:ext cx="1325880" cy="320040"/>
           </a:xfrm>
           <a:prstGeom prst="rect">
             <a:avLst/>
@@ -16225,213 +17170,25 @@
           </a:bodyPr>
           <a:lstStyle/>
           <a:p>
-            <a:pPr algn="l">
-              <a:lnSpc>
-                <a:spcPct val="110000"/>
-              </a:lnSpc>
-              <a:spcBef>
-                <a:spcPts val="0"/>
-              </a:spcBef>
-              <a:spcAft>
-                <a:spcPts val="700"/>
-              </a:spcAft>
-            </a:pPr>
-            <a:r>
-              <a:rPr sz="1350" b="0" i="0">
-                <a:solidFill>
-                  <a:srgbClr val="202B31"/>
-                </a:solidFill>
-                <a:latin typeface="Calibri"/>
-              </a:rPr>
-              <a:t>Une trajectoire, pas un point : couvrir et </a:t>
-            </a:r>
-            <a:r>
-              <a:rPr sz="1350" b="1" i="0">
-                <a:solidFill>
-                  <a:srgbClr val="2C7A7B"/>
-                </a:solidFill>
-                <a:latin typeface="Calibri"/>
-              </a:rPr>
-              <a:t>répéter</a:t>
-            </a:r>
-            <a:r>
-              <a:rPr sz="1350" b="0" i="0">
-                <a:solidFill>
-                  <a:srgbClr val="202B31"/>
-                </a:solidFill>
-                <a:latin typeface="Calibri"/>
-              </a:rPr>
-              <a:t> les conditions 30 °C a fait passer le LORO de −1,77 à +0,29.</a:t>
-            </a:r>
-          </a:p>
-          <a:p>
-            <a:pPr algn="l">
-              <a:lnSpc>
-                <a:spcPct val="110000"/>
-              </a:lnSpc>
-              <a:spcBef>
-                <a:spcPts val="0"/>
-              </a:spcBef>
-              <a:spcAft>
-                <a:spcPts val="700"/>
-              </a:spcAft>
-            </a:pPr>
-            <a:r>
-              <a:rPr sz="1350" b="0" i="0">
-                <a:solidFill>
-                  <a:srgbClr val="202B31"/>
-                </a:solidFill>
-                <a:latin typeface="Calibri"/>
-              </a:rPr>
-              <a:t>L'apport n'est pas la valeur mais la </a:t>
-            </a:r>
-            <a:r>
-              <a:rPr sz="1400" b="1" i="0">
+            <a:pPr algn="r">
+              <a:lnSpc>
+                <a:spcPct val="100000"/>
+              </a:lnSpc>
+              <a:spcBef>
+                <a:spcPts val="0"/>
+              </a:spcBef>
+              <a:spcAft>
+                <a:spcPts val="400"/>
+              </a:spcAft>
+            </a:pPr>
+            <a:r>
+              <a:rPr sz="1000" b="1" i="0">
                 <a:solidFill>
                   <a:srgbClr val="C9601A"/>
                 </a:solidFill>
-                <a:latin typeface="Georgia"/>
-              </a:rPr>
-              <a:t>structure</a:t>
-            </a:r>
-            <a:r>
-              <a:rPr sz="1350" b="0" i="0">
-                <a:solidFill>
-                  <a:srgbClr val="202B31"/>
-                </a:solidFill>
-                <a:latin typeface="Calibri"/>
-              </a:rPr>
-              <a:t> du R² : positif si conditions couvertes et répétées, négatif sinon.</a:t>
-            </a:r>
-          </a:p>
-          <a:p>
-            <a:pPr algn="l">
-              <a:lnSpc>
-                <a:spcPct val="110000"/>
-              </a:lnSpc>
-              <a:spcBef>
-                <a:spcPts val="0"/>
-              </a:spcBef>
-              <a:spcAft>
-                <a:spcPts val="700"/>
-              </a:spcAft>
-            </a:pPr>
-            <a:r>
-              <a:rPr sz="1250" b="0" i="0">
-                <a:solidFill>
-                  <a:srgbClr val="202B31"/>
-                </a:solidFill>
-                <a:latin typeface="Calibri"/>
-              </a:rPr>
-              <a:t>Ajouter une morphologie non appariée le ramène à ≈ +0,20, métrique encore </a:t>
-            </a:r>
-            <a:r>
-              <a:rPr sz="1250" b="1" i="0">
-                <a:solidFill>
-                  <a:srgbClr val="C9601A"/>
-                </a:solidFill>
-                <a:latin typeface="Calibri"/>
-              </a:rPr>
-              <a:t>bruitée</a:t>
-            </a:r>
-            <a:r>
-              <a:rPr sz="1250" b="0" i="0">
-                <a:solidFill>
-                  <a:srgbClr val="202B31"/>
-                </a:solidFill>
-                <a:latin typeface="Calibri"/>
-              </a:rPr>
-              <a:t> (peu d'essais).</a:t>
-            </a:r>
-          </a:p>
-        </p:txBody>
-      </p:sp>
-      <p:sp>
-        <p:nvSpPr>
-          <p:cNvPr id="11" name="TextBox 10"/>
-          <p:cNvSpPr txBox="1"/>
-          <p:nvPr/>
-        </p:nvSpPr>
-        <p:spPr>
-          <a:xfrm>
-            <a:off x="457200" y="6437376"/>
-            <a:ext cx="8229600" cy="320040"/>
-          </a:xfrm>
-          <a:prstGeom prst="rect">
-            <a:avLst/>
-          </a:prstGeom>
-          <a:noFill/>
-        </p:spPr>
-        <p:txBody>
-          <a:bodyPr wrap="square" anchor="t" lIns="0" rIns="0" tIns="0" bIns="0">
-            <a:spAutoFit/>
-          </a:bodyPr>
-          <a:lstStyle/>
-          <a:p>
-            <a:pPr algn="l">
-              <a:lnSpc>
-                <a:spcPct val="100000"/>
-              </a:lnSpc>
-              <a:spcBef>
-                <a:spcPts val="0"/>
-              </a:spcBef>
-              <a:spcAft>
-                <a:spcPts val="400"/>
-              </a:spcAft>
-            </a:pPr>
-            <a:r>
-              <a:rPr sz="900" b="0" i="0">
-                <a:solidFill>
-                  <a:srgbClr val="6B7A82"/>
-                </a:solidFill>
-                <a:latin typeface="Calibri"/>
-              </a:rPr>
-              <a:t>Maintenance prédictive de la corrosion  ·  ESTL La Salle  ·  2025–2026</a:t>
-            </a:r>
-          </a:p>
-        </p:txBody>
-      </p:sp>
-      <p:sp>
-        <p:nvSpPr>
-          <p:cNvPr id="12" name="TextBox 11"/>
-          <p:cNvSpPr txBox="1"/>
-          <p:nvPr/>
-        </p:nvSpPr>
-        <p:spPr>
-          <a:xfrm>
-            <a:off x="10424160" y="6437376"/>
-            <a:ext cx="1325880" cy="320040"/>
-          </a:xfrm>
-          <a:prstGeom prst="rect">
-            <a:avLst/>
-          </a:prstGeom>
-          <a:noFill/>
-        </p:spPr>
-        <p:txBody>
-          <a:bodyPr wrap="square" anchor="t" lIns="0" rIns="0" tIns="0" bIns="0">
-            <a:spAutoFit/>
-          </a:bodyPr>
-          <a:lstStyle/>
-          <a:p>
-            <a:pPr algn="r">
-              <a:lnSpc>
-                <a:spcPct val="100000"/>
-              </a:lnSpc>
-              <a:spcBef>
-                <a:spcPts val="0"/>
-              </a:spcBef>
-              <a:spcAft>
-                <a:spcPts val="400"/>
-              </a:spcAft>
-            </a:pPr>
-            <a:r>
-              <a:rPr sz="1000" b="1" i="0">
-                <a:solidFill>
-                  <a:srgbClr val="C9601A"/>
-                </a:solidFill>
-                <a:latin typeface="Calibri"/>
-              </a:rPr>
-              <a:t>09 / 17</a:t>
+                <a:latin typeface="Calibri"/>
+              </a:rPr>
+              <a:t>09 / 19</a:t>
             </a:r>
           </a:p>
         </p:txBody>

--- a/soutenance/Soutenance_Corrosion_BATOUMBI.pptx
+++ b/soutenance/Soutenance_Corrosion_BATOUMBI.pptx
@@ -24,6 +24,7 @@
     <p:sldId id="272" r:id="rId23"/>
     <p:sldId id="273" r:id="rId24"/>
     <p:sldId id="274" r:id="rId25"/>
+    <p:sldId id="275" r:id="rId26"/>
   </p:sldIdLst>
   <p:sldSz cx="12191695" cy="6858000" type="screen4x3"/>
   <p:notesSz cx="6858000" cy="9144000"/>
@@ -3765,7 +3766,7 @@
                 </a:solidFill>
                 <a:latin typeface="Calibri"/>
               </a:rPr>
-              <a:t>OS2 · VALIDATION</a:t>
+              <a:t>OS2 · RÉGLAGES</a:t>
             </a:r>
           </a:p>
         </p:txBody>
@@ -3810,45 +3811,21 @@
                 </a:solidFill>
                 <a:latin typeface="Georgia"/>
               </a:rPr>
-              <a:t>D'où vient le R² moyen de +0,29 ?</a:t>
-            </a:r>
-          </a:p>
-        </p:txBody>
-      </p:sp>
-      <p:pic>
-        <p:nvPicPr>
-          <p:cNvPr id="6" name="Picture 5" descr="fig_loro_mecanique.png"/>
-          <p:cNvPicPr>
-            <a:picLocks noChangeAspect="1"/>
-          </p:cNvPicPr>
-          <p:nvPr/>
-        </p:nvPicPr>
-        <p:blipFill>
-          <a:blip r:embed="rId2"/>
-          <a:stretch>
-            <a:fillRect/>
-          </a:stretch>
-        </p:blipFill>
-        <p:spPr>
-          <a:xfrm>
-            <a:off x="747848" y="1920240"/>
-            <a:ext cx="10711542" cy="3566160"/>
-          </a:xfrm>
-          <a:prstGeom prst="rect">
-            <a:avLst/>
-          </a:prstGeom>
-        </p:spPr>
-      </p:pic>
-      <p:sp>
-        <p:nvSpPr>
-          <p:cNvPr id="7" name="TextBox 6"/>
+              <a:t>Les hyperparamètres : trois réglages fixés avant l'apprentissage</a:t>
+            </a:r>
+          </a:p>
+        </p:txBody>
+      </p:sp>
+      <p:sp>
+        <p:nvSpPr>
+          <p:cNvPr id="6" name="TextBox 5"/>
           <p:cNvSpPr txBox="1"/>
           <p:nvPr/>
         </p:nvSpPr>
         <p:spPr>
           <a:xfrm>
-            <a:off x="868680" y="5623560"/>
-            <a:ext cx="10424160" cy="731520"/>
+            <a:off x="868680" y="1965960"/>
+            <a:ext cx="10469880" cy="685800"/>
           </a:xfrm>
           <a:prstGeom prst="rect">
             <a:avLst/>
@@ -3873,45 +3850,126 @@
               </a:spcAft>
             </a:pPr>
             <a:r>
+              <a:rPr sz="1450" b="1" i="0">
+                <a:solidFill>
+                  <a:srgbClr val="202B31"/>
+                </a:solidFill>
+                <a:latin typeface="Georgia"/>
+              </a:rPr>
+              <a:t>Le modèle apprend ses arbres ; il n'apprend pas ses réglages. </a:t>
+            </a:r>
+            <a:r>
               <a:rPr sz="1400" b="0" i="0">
                 <a:solidFill>
                   <a:srgbClr val="202B31"/>
                 </a:solidFill>
                 <a:latin typeface="Calibri"/>
               </a:rPr>
-              <a:t>Un pli par essai de la série 30 °C, et </a:t>
-            </a:r>
-            <a:r>
-              <a:rPr sz="1400" b="1" i="0">
-                <a:solidFill>
-                  <a:srgbClr val="C9601A"/>
-                </a:solidFill>
-                <a:latin typeface="Calibri"/>
-              </a:rPr>
-              <a:t>le modèle ne voit jamais l'essai qu'il doit prédire</a:t>
-            </a:r>
-            <a:r>
-              <a:rPr sz="1400" b="0" i="0">
-                <a:solidFill>
-                  <a:srgbClr val="202B31"/>
-                </a:solidFill>
-                <a:latin typeface="Calibri"/>
-              </a:rPr>
-              <a:t>. Le +0,29 est simplement la moyenne des deux R² obtenus.</a:t>
-            </a:r>
-          </a:p>
-        </p:txBody>
-      </p:sp>
-      <p:sp>
-        <p:nvSpPr>
-          <p:cNvPr id="8" name="TextBox 7"/>
+              <a:t>Ceux-là sont choisis par le concepteur, avant l'entraînement : ce sont les hyperparamètres.</a:t>
+            </a:r>
+          </a:p>
+        </p:txBody>
+      </p:sp>
+      <p:sp>
+        <p:nvSpPr>
+          <p:cNvPr id="7" name="Rounded Rectangle 6"/>
+          <p:cNvSpPr/>
+          <p:nvPr/>
+        </p:nvSpPr>
+        <p:spPr>
+          <a:xfrm>
+            <a:off x="868680" y="2788920"/>
+            <a:ext cx="3419856" cy="2286000"/>
+          </a:xfrm>
+          <a:prstGeom prst="roundRect">
+            <a:avLst/>
+          </a:prstGeom>
+          <a:solidFill>
+            <a:srgbClr val="FFFFFF"/>
+          </a:solidFill>
+          <a:ln w="12700">
+            <a:solidFill>
+              <a:srgbClr val="E3DED4"/>
+            </a:solidFill>
+          </a:ln>
+          <a:effectLst/>
+        </p:spPr>
+        <p:style>
+          <a:lnRef idx="1">
+            <a:schemeClr val="accent1"/>
+          </a:lnRef>
+          <a:fillRef idx="3">
+            <a:schemeClr val="accent1"/>
+          </a:fillRef>
+          <a:effectRef idx="2">
+            <a:schemeClr val="accent1"/>
+          </a:effectRef>
+          <a:fontRef idx="minor">
+            <a:schemeClr val="lt1"/>
+          </a:fontRef>
+        </p:style>
+        <p:txBody>
+          <a:bodyPr rtlCol="0" anchor="ctr"/>
+          <a:lstStyle/>
+          <a:p>
+            <a:pPr algn="ctr"/>
+          </a:p>
+        </p:txBody>
+      </p:sp>
+      <p:sp>
+        <p:nvSpPr>
+          <p:cNvPr id="8" name="Rounded Rectangle 7"/>
+          <p:cNvSpPr/>
+          <p:nvPr/>
+        </p:nvSpPr>
+        <p:spPr>
+          <a:xfrm>
+            <a:off x="868680" y="2788920"/>
+            <a:ext cx="3419856" cy="109728"/>
+          </a:xfrm>
+          <a:prstGeom prst="roundRect">
+            <a:avLst/>
+          </a:prstGeom>
+          <a:solidFill>
+            <a:srgbClr val="2C7A7B"/>
+          </a:solidFill>
+          <a:ln>
+            <a:noFill/>
+          </a:ln>
+          <a:effectLst/>
+        </p:spPr>
+        <p:style>
+          <a:lnRef idx="1">
+            <a:schemeClr val="accent1"/>
+          </a:lnRef>
+          <a:fillRef idx="3">
+            <a:schemeClr val="accent1"/>
+          </a:fillRef>
+          <a:effectRef idx="2">
+            <a:schemeClr val="accent1"/>
+          </a:effectRef>
+          <a:fontRef idx="minor">
+            <a:schemeClr val="lt1"/>
+          </a:fontRef>
+        </p:style>
+        <p:txBody>
+          <a:bodyPr rtlCol="0" anchor="ctr"/>
+          <a:lstStyle/>
+          <a:p>
+            <a:pPr algn="ctr"/>
+          </a:p>
+        </p:txBody>
+      </p:sp>
+      <p:sp>
+        <p:nvSpPr>
+          <p:cNvPr id="9" name="TextBox 8"/>
           <p:cNvSpPr txBox="1"/>
           <p:nvPr/>
         </p:nvSpPr>
         <p:spPr>
           <a:xfrm>
-            <a:off x="457200" y="6437376"/>
-            <a:ext cx="8229600" cy="320040"/>
+            <a:off x="1097280" y="3035808"/>
+            <a:ext cx="3017520" cy="731520"/>
           </a:xfrm>
           <a:prstGeom prst="rect">
             <a:avLst/>
@@ -3932,31 +3990,53 @@
                 <a:spcPts val="0"/>
               </a:spcBef>
               <a:spcAft>
-                <a:spcPts val="400"/>
-              </a:spcAft>
-            </a:pPr>
-            <a:r>
-              <a:rPr sz="900" b="0" i="0">
-                <a:solidFill>
-                  <a:srgbClr val="6B7A82"/>
-                </a:solidFill>
-                <a:latin typeface="Calibri"/>
-              </a:rPr>
-              <a:t>Maintenance prédictive de la corrosion  ·  ESTL La Salle  ·  2025–2026</a:t>
-            </a:r>
-          </a:p>
-        </p:txBody>
-      </p:sp>
-      <p:sp>
-        <p:nvSpPr>
-          <p:cNvPr id="9" name="TextBox 8"/>
+                <a:spcPts val="200"/>
+              </a:spcAft>
+            </a:pPr>
+            <a:r>
+              <a:rPr sz="3400" b="1" i="0">
+                <a:solidFill>
+                  <a:srgbClr val="16252E"/>
+                </a:solidFill>
+                <a:latin typeface="Georgia"/>
+              </a:rPr>
+              <a:t>500</a:t>
+            </a:r>
+          </a:p>
+          <a:p>
+            <a:pPr algn="l">
+              <a:lnSpc>
+                <a:spcPct val="100000"/>
+              </a:lnSpc>
+              <a:spcBef>
+                <a:spcPts val="0"/>
+              </a:spcBef>
+              <a:spcAft>
+                <a:spcPts val="200"/>
+              </a:spcAft>
+            </a:pPr>
+            <a:r>
+              <a:rPr sz="1250" b="1" i="0">
+                <a:solidFill>
+                  <a:srgbClr val="C9601A"/>
+                </a:solidFill>
+                <a:latin typeface="Calibri"/>
+              </a:rPr>
+              <a:t>arbres (n_estimators)</a:t>
+            </a:r>
+          </a:p>
+        </p:txBody>
+      </p:sp>
+      <p:sp>
+        <p:nvSpPr>
+          <p:cNvPr id="10" name="TextBox 9"/>
           <p:cNvSpPr txBox="1"/>
           <p:nvPr/>
         </p:nvSpPr>
         <p:spPr>
           <a:xfrm>
-            <a:off x="10424160" y="6437376"/>
-            <a:ext cx="1325880" cy="320040"/>
+            <a:off x="1097280" y="4041648"/>
+            <a:ext cx="2999232" cy="914400"/>
           </a:xfrm>
           <a:prstGeom prst="rect">
             <a:avLst/>
@@ -3969,6 +4049,554 @@
           </a:bodyPr>
           <a:lstStyle/>
           <a:p>
+            <a:pPr algn="l">
+              <a:lnSpc>
+                <a:spcPct val="110000"/>
+              </a:lnSpc>
+              <a:spcBef>
+                <a:spcPts val="0"/>
+              </a:spcBef>
+              <a:spcAft>
+                <a:spcPts val="400"/>
+              </a:spcAft>
+            </a:pPr>
+            <a:r>
+              <a:rPr sz="1150" b="0" i="0">
+                <a:solidFill>
+                  <a:srgbClr val="202B31"/>
+                </a:solidFill>
+                <a:latin typeface="Calibri"/>
+              </a:rPr>
+              <a:t>le nombre de petites corrections successives ; assez pour converger avec des pas de 5 %</a:t>
+            </a:r>
+          </a:p>
+        </p:txBody>
+      </p:sp>
+      <p:sp>
+        <p:nvSpPr>
+          <p:cNvPr id="11" name="Rounded Rectangle 10"/>
+          <p:cNvSpPr/>
+          <p:nvPr/>
+        </p:nvSpPr>
+        <p:spPr>
+          <a:xfrm>
+            <a:off x="4462272" y="2788920"/>
+            <a:ext cx="3419856" cy="2286000"/>
+          </a:xfrm>
+          <a:prstGeom prst="roundRect">
+            <a:avLst/>
+          </a:prstGeom>
+          <a:solidFill>
+            <a:srgbClr val="FFFFFF"/>
+          </a:solidFill>
+          <a:ln w="12700">
+            <a:solidFill>
+              <a:srgbClr val="E3DED4"/>
+            </a:solidFill>
+          </a:ln>
+          <a:effectLst/>
+        </p:spPr>
+        <p:style>
+          <a:lnRef idx="1">
+            <a:schemeClr val="accent1"/>
+          </a:lnRef>
+          <a:fillRef idx="3">
+            <a:schemeClr val="accent1"/>
+          </a:fillRef>
+          <a:effectRef idx="2">
+            <a:schemeClr val="accent1"/>
+          </a:effectRef>
+          <a:fontRef idx="minor">
+            <a:schemeClr val="lt1"/>
+          </a:fontRef>
+        </p:style>
+        <p:txBody>
+          <a:bodyPr rtlCol="0" anchor="ctr"/>
+          <a:lstStyle/>
+          <a:p>
+            <a:pPr algn="ctr"/>
+          </a:p>
+        </p:txBody>
+      </p:sp>
+      <p:sp>
+        <p:nvSpPr>
+          <p:cNvPr id="12" name="Rounded Rectangle 11"/>
+          <p:cNvSpPr/>
+          <p:nvPr/>
+        </p:nvSpPr>
+        <p:spPr>
+          <a:xfrm>
+            <a:off x="4462272" y="2788920"/>
+            <a:ext cx="3419856" cy="109728"/>
+          </a:xfrm>
+          <a:prstGeom prst="roundRect">
+            <a:avLst/>
+          </a:prstGeom>
+          <a:solidFill>
+            <a:srgbClr val="2C7A7B"/>
+          </a:solidFill>
+          <a:ln>
+            <a:noFill/>
+          </a:ln>
+          <a:effectLst/>
+        </p:spPr>
+        <p:style>
+          <a:lnRef idx="1">
+            <a:schemeClr val="accent1"/>
+          </a:lnRef>
+          <a:fillRef idx="3">
+            <a:schemeClr val="accent1"/>
+          </a:fillRef>
+          <a:effectRef idx="2">
+            <a:schemeClr val="accent1"/>
+          </a:effectRef>
+          <a:fontRef idx="minor">
+            <a:schemeClr val="lt1"/>
+          </a:fontRef>
+        </p:style>
+        <p:txBody>
+          <a:bodyPr rtlCol="0" anchor="ctr"/>
+          <a:lstStyle/>
+          <a:p>
+            <a:pPr algn="ctr"/>
+          </a:p>
+        </p:txBody>
+      </p:sp>
+      <p:sp>
+        <p:nvSpPr>
+          <p:cNvPr id="13" name="TextBox 12"/>
+          <p:cNvSpPr txBox="1"/>
+          <p:nvPr/>
+        </p:nvSpPr>
+        <p:spPr>
+          <a:xfrm>
+            <a:off x="4690872" y="3035808"/>
+            <a:ext cx="3017520" cy="731520"/>
+          </a:xfrm>
+          <a:prstGeom prst="rect">
+            <a:avLst/>
+          </a:prstGeom>
+          <a:noFill/>
+        </p:spPr>
+        <p:txBody>
+          <a:bodyPr wrap="square" anchor="t" lIns="0" rIns="0" tIns="0" bIns="0">
+            <a:spAutoFit/>
+          </a:bodyPr>
+          <a:lstStyle/>
+          <a:p>
+            <a:pPr algn="l">
+              <a:lnSpc>
+                <a:spcPct val="100000"/>
+              </a:lnSpc>
+              <a:spcBef>
+                <a:spcPts val="0"/>
+              </a:spcBef>
+              <a:spcAft>
+                <a:spcPts val="200"/>
+              </a:spcAft>
+            </a:pPr>
+            <a:r>
+              <a:rPr sz="3400" b="1" i="0">
+                <a:solidFill>
+                  <a:srgbClr val="16252E"/>
+                </a:solidFill>
+                <a:latin typeface="Georgia"/>
+              </a:rPr>
+              <a:t>4</a:t>
+            </a:r>
+          </a:p>
+          <a:p>
+            <a:pPr algn="l">
+              <a:lnSpc>
+                <a:spcPct val="100000"/>
+              </a:lnSpc>
+              <a:spcBef>
+                <a:spcPts val="0"/>
+              </a:spcBef>
+              <a:spcAft>
+                <a:spcPts val="200"/>
+              </a:spcAft>
+            </a:pPr>
+            <a:r>
+              <a:rPr sz="1250" b="1" i="0">
+                <a:solidFill>
+                  <a:srgbClr val="C9601A"/>
+                </a:solidFill>
+                <a:latin typeface="Calibri"/>
+              </a:rPr>
+              <a:t>profondeur max (max_depth)</a:t>
+            </a:r>
+          </a:p>
+        </p:txBody>
+      </p:sp>
+      <p:sp>
+        <p:nvSpPr>
+          <p:cNvPr id="14" name="TextBox 13"/>
+          <p:cNvSpPr txBox="1"/>
+          <p:nvPr/>
+        </p:nvSpPr>
+        <p:spPr>
+          <a:xfrm>
+            <a:off x="4690872" y="4041648"/>
+            <a:ext cx="2999232" cy="914400"/>
+          </a:xfrm>
+          <a:prstGeom prst="rect">
+            <a:avLst/>
+          </a:prstGeom>
+          <a:noFill/>
+        </p:spPr>
+        <p:txBody>
+          <a:bodyPr wrap="square" anchor="t" lIns="0" rIns="0" tIns="0" bIns="0">
+            <a:spAutoFit/>
+          </a:bodyPr>
+          <a:lstStyle/>
+          <a:p>
+            <a:pPr algn="l">
+              <a:lnSpc>
+                <a:spcPct val="110000"/>
+              </a:lnSpc>
+              <a:spcBef>
+                <a:spcPts val="0"/>
+              </a:spcBef>
+              <a:spcAft>
+                <a:spcPts val="400"/>
+              </a:spcAft>
+            </a:pPr>
+            <a:r>
+              <a:rPr sz="1150" b="0" i="0">
+                <a:solidFill>
+                  <a:srgbClr val="202B31"/>
+                </a:solidFill>
+                <a:latin typeface="Calibri"/>
+              </a:rPr>
+              <a:t>au plus 4 questions par arbre : des arbres simples, pas de « par-cœur » sur un petit jeu d'essais</a:t>
+            </a:r>
+          </a:p>
+        </p:txBody>
+      </p:sp>
+      <p:sp>
+        <p:nvSpPr>
+          <p:cNvPr id="15" name="Rounded Rectangle 14"/>
+          <p:cNvSpPr/>
+          <p:nvPr/>
+        </p:nvSpPr>
+        <p:spPr>
+          <a:xfrm>
+            <a:off x="8055864" y="2788920"/>
+            <a:ext cx="3419856" cy="2286000"/>
+          </a:xfrm>
+          <a:prstGeom prst="roundRect">
+            <a:avLst/>
+          </a:prstGeom>
+          <a:solidFill>
+            <a:srgbClr val="FFFFFF"/>
+          </a:solidFill>
+          <a:ln w="12700">
+            <a:solidFill>
+              <a:srgbClr val="E3DED4"/>
+            </a:solidFill>
+          </a:ln>
+          <a:effectLst/>
+        </p:spPr>
+        <p:style>
+          <a:lnRef idx="1">
+            <a:schemeClr val="accent1"/>
+          </a:lnRef>
+          <a:fillRef idx="3">
+            <a:schemeClr val="accent1"/>
+          </a:fillRef>
+          <a:effectRef idx="2">
+            <a:schemeClr val="accent1"/>
+          </a:effectRef>
+          <a:fontRef idx="minor">
+            <a:schemeClr val="lt1"/>
+          </a:fontRef>
+        </p:style>
+        <p:txBody>
+          <a:bodyPr rtlCol="0" anchor="ctr"/>
+          <a:lstStyle/>
+          <a:p>
+            <a:pPr algn="ctr"/>
+          </a:p>
+        </p:txBody>
+      </p:sp>
+      <p:sp>
+        <p:nvSpPr>
+          <p:cNvPr id="16" name="Rounded Rectangle 15"/>
+          <p:cNvSpPr/>
+          <p:nvPr/>
+        </p:nvSpPr>
+        <p:spPr>
+          <a:xfrm>
+            <a:off x="8055864" y="2788920"/>
+            <a:ext cx="3419856" cy="109728"/>
+          </a:xfrm>
+          <a:prstGeom prst="roundRect">
+            <a:avLst/>
+          </a:prstGeom>
+          <a:solidFill>
+            <a:srgbClr val="2C7A7B"/>
+          </a:solidFill>
+          <a:ln>
+            <a:noFill/>
+          </a:ln>
+          <a:effectLst/>
+        </p:spPr>
+        <p:style>
+          <a:lnRef idx="1">
+            <a:schemeClr val="accent1"/>
+          </a:lnRef>
+          <a:fillRef idx="3">
+            <a:schemeClr val="accent1"/>
+          </a:fillRef>
+          <a:effectRef idx="2">
+            <a:schemeClr val="accent1"/>
+          </a:effectRef>
+          <a:fontRef idx="minor">
+            <a:schemeClr val="lt1"/>
+          </a:fontRef>
+        </p:style>
+        <p:txBody>
+          <a:bodyPr rtlCol="0" anchor="ctr"/>
+          <a:lstStyle/>
+          <a:p>
+            <a:pPr algn="ctr"/>
+          </a:p>
+        </p:txBody>
+      </p:sp>
+      <p:sp>
+        <p:nvSpPr>
+          <p:cNvPr id="17" name="TextBox 16"/>
+          <p:cNvSpPr txBox="1"/>
+          <p:nvPr/>
+        </p:nvSpPr>
+        <p:spPr>
+          <a:xfrm>
+            <a:off x="8284464" y="3035808"/>
+            <a:ext cx="3017520" cy="731520"/>
+          </a:xfrm>
+          <a:prstGeom prst="rect">
+            <a:avLst/>
+          </a:prstGeom>
+          <a:noFill/>
+        </p:spPr>
+        <p:txBody>
+          <a:bodyPr wrap="square" anchor="t" lIns="0" rIns="0" tIns="0" bIns="0">
+            <a:spAutoFit/>
+          </a:bodyPr>
+          <a:lstStyle/>
+          <a:p>
+            <a:pPr algn="l">
+              <a:lnSpc>
+                <a:spcPct val="100000"/>
+              </a:lnSpc>
+              <a:spcBef>
+                <a:spcPts val="0"/>
+              </a:spcBef>
+              <a:spcAft>
+                <a:spcPts val="200"/>
+              </a:spcAft>
+            </a:pPr>
+            <a:r>
+              <a:rPr sz="3400" b="1" i="0">
+                <a:solidFill>
+                  <a:srgbClr val="16252E"/>
+                </a:solidFill>
+                <a:latin typeface="Georgia"/>
+              </a:rPr>
+              <a:t>0,05</a:t>
+            </a:r>
+          </a:p>
+          <a:p>
+            <a:pPr algn="l">
+              <a:lnSpc>
+                <a:spcPct val="100000"/>
+              </a:lnSpc>
+              <a:spcBef>
+                <a:spcPts val="0"/>
+              </a:spcBef>
+              <a:spcAft>
+                <a:spcPts val="200"/>
+              </a:spcAft>
+            </a:pPr>
+            <a:r>
+              <a:rPr sz="1250" b="1" i="0">
+                <a:solidFill>
+                  <a:srgbClr val="C9601A"/>
+                </a:solidFill>
+                <a:latin typeface="Calibri"/>
+              </a:rPr>
+              <a:t>pas d'apprentissage (learning_rate)</a:t>
+            </a:r>
+          </a:p>
+        </p:txBody>
+      </p:sp>
+      <p:sp>
+        <p:nvSpPr>
+          <p:cNvPr id="18" name="TextBox 17"/>
+          <p:cNvSpPr txBox="1"/>
+          <p:nvPr/>
+        </p:nvSpPr>
+        <p:spPr>
+          <a:xfrm>
+            <a:off x="8284464" y="4041648"/>
+            <a:ext cx="2999232" cy="914400"/>
+          </a:xfrm>
+          <a:prstGeom prst="rect">
+            <a:avLst/>
+          </a:prstGeom>
+          <a:noFill/>
+        </p:spPr>
+        <p:txBody>
+          <a:bodyPr wrap="square" anchor="t" lIns="0" rIns="0" tIns="0" bIns="0">
+            <a:spAutoFit/>
+          </a:bodyPr>
+          <a:lstStyle/>
+          <a:p>
+            <a:pPr algn="l">
+              <a:lnSpc>
+                <a:spcPct val="110000"/>
+              </a:lnSpc>
+              <a:spcBef>
+                <a:spcPts val="0"/>
+              </a:spcBef>
+              <a:spcAft>
+                <a:spcPts val="400"/>
+              </a:spcAft>
+            </a:pPr>
+            <a:r>
+              <a:rPr sz="1150" b="0" i="0">
+                <a:solidFill>
+                  <a:srgbClr val="202B31"/>
+                </a:solidFill>
+                <a:latin typeface="Calibri"/>
+              </a:rPr>
+              <a:t>chaque correction ne compte qu'à 5 % : 500 petits pas prudents plutôt que quelques grands</a:t>
+            </a:r>
+          </a:p>
+        </p:txBody>
+      </p:sp>
+      <p:sp>
+        <p:nvSpPr>
+          <p:cNvPr id="19" name="TextBox 18"/>
+          <p:cNvSpPr txBox="1"/>
+          <p:nvPr/>
+        </p:nvSpPr>
+        <p:spPr>
+          <a:xfrm>
+            <a:off x="868680" y="5349240"/>
+            <a:ext cx="10469880" cy="914400"/>
+          </a:xfrm>
+          <a:prstGeom prst="rect">
+            <a:avLst/>
+          </a:prstGeom>
+          <a:noFill/>
+        </p:spPr>
+        <p:txBody>
+          <a:bodyPr wrap="square" anchor="t" lIns="0" rIns="0" tIns="0" bIns="0">
+            <a:spAutoFit/>
+          </a:bodyPr>
+          <a:lstStyle/>
+          <a:p>
+            <a:pPr algn="l">
+              <a:lnSpc>
+                <a:spcPct val="112000"/>
+              </a:lnSpc>
+              <a:spcBef>
+                <a:spcPts val="0"/>
+              </a:spcBef>
+              <a:spcAft>
+                <a:spcPts val="400"/>
+              </a:spcAft>
+            </a:pPr>
+            <a:r>
+              <a:rPr sz="1350" b="1" i="0">
+                <a:solidFill>
+                  <a:srgbClr val="202B31"/>
+                </a:solidFill>
+                <a:latin typeface="Calibri"/>
+              </a:rPr>
+              <a:t>D'où viennent ces valeurs ? </a:t>
+            </a:r>
+            <a:r>
+              <a:rPr sz="1250" b="0" i="0">
+                <a:solidFill>
+                  <a:srgbClr val="202B31"/>
+                </a:solidFill>
+                <a:latin typeface="Calibri"/>
+              </a:rPr>
+              <a:t>Des pratiques établies de XGBoost (Chen &amp; Guestrin, 2016), adaptées au faible volume d'essais : compromis biais-variance, contrôle de la complexité, convergence stable (Tableau II.6 du mémoire). S'y ajoutent des garde-fous anti-surapprentissage (régularisation L1/L2, sous-échantillonnage 0,8).</a:t>
+            </a:r>
+          </a:p>
+        </p:txBody>
+      </p:sp>
+      <p:sp>
+        <p:nvSpPr>
+          <p:cNvPr id="20" name="TextBox 19"/>
+          <p:cNvSpPr txBox="1"/>
+          <p:nvPr/>
+        </p:nvSpPr>
+        <p:spPr>
+          <a:xfrm>
+            <a:off x="457200" y="6437376"/>
+            <a:ext cx="8229600" cy="320040"/>
+          </a:xfrm>
+          <a:prstGeom prst="rect">
+            <a:avLst/>
+          </a:prstGeom>
+          <a:noFill/>
+        </p:spPr>
+        <p:txBody>
+          <a:bodyPr wrap="square" anchor="t" lIns="0" rIns="0" tIns="0" bIns="0">
+            <a:spAutoFit/>
+          </a:bodyPr>
+          <a:lstStyle/>
+          <a:p>
+            <a:pPr algn="l">
+              <a:lnSpc>
+                <a:spcPct val="100000"/>
+              </a:lnSpc>
+              <a:spcBef>
+                <a:spcPts val="0"/>
+              </a:spcBef>
+              <a:spcAft>
+                <a:spcPts val="400"/>
+              </a:spcAft>
+            </a:pPr>
+            <a:r>
+              <a:rPr sz="900" b="0" i="0">
+                <a:solidFill>
+                  <a:srgbClr val="6B7A82"/>
+                </a:solidFill>
+                <a:latin typeface="Calibri"/>
+              </a:rPr>
+              <a:t>Maintenance prédictive de la corrosion  ·  ESTL La Salle  ·  2025–2026</a:t>
+            </a:r>
+          </a:p>
+        </p:txBody>
+      </p:sp>
+      <p:sp>
+        <p:nvSpPr>
+          <p:cNvPr id="21" name="TextBox 20"/>
+          <p:cNvSpPr txBox="1"/>
+          <p:nvPr/>
+        </p:nvSpPr>
+        <p:spPr>
+          <a:xfrm>
+            <a:off x="10424160" y="6437376"/>
+            <a:ext cx="1325880" cy="320040"/>
+          </a:xfrm>
+          <a:prstGeom prst="rect">
+            <a:avLst/>
+          </a:prstGeom>
+          <a:noFill/>
+        </p:spPr>
+        <p:txBody>
+          <a:bodyPr wrap="square" anchor="t" lIns="0" rIns="0" tIns="0" bIns="0">
+            <a:spAutoFit/>
+          </a:bodyPr>
+          <a:lstStyle/>
+          <a:p>
             <a:pPr algn="r">
               <a:lnSpc>
                 <a:spcPct val="100000"/>
@@ -3987,7 +4615,7 @@
                 </a:solidFill>
                 <a:latin typeface="Calibri"/>
               </a:rPr>
-              <a:t>10 / 19</a:t>
+              <a:t>10 / 20</a:t>
             </a:r>
           </a:p>
         </p:txBody>
@@ -4134,11 +4762,11 @@
             <a:r>
               <a:rPr sz="1250" b="1" i="0">
                 <a:solidFill>
-                  <a:srgbClr val="C9601A"/>
-                </a:solidFill>
-                <a:latin typeface="Calibri"/>
-              </a:rPr>
-              <a:t>RÉSULTATS · OS2</a:t>
+                  <a:srgbClr val="2C7A7B"/>
+                </a:solidFill>
+                <a:latin typeface="Calibri"/>
+              </a:rPr>
+              <a:t>OS2 · VALIDATION</a:t>
             </a:r>
           </a:p>
         </p:txBody>
@@ -4183,14 +4811,14 @@
                 </a:solidFill>
                 <a:latin typeface="Georgia"/>
               </a:rPr>
-              <a:t>Le modèle généralise, là où les conditions sont couvertes</a:t>
+              <a:t>D'où vient le R² moyen de +0,29 ?</a:t>
             </a:r>
           </a:p>
         </p:txBody>
       </p:sp>
       <p:pic>
         <p:nvPicPr>
-          <p:cNvPr id="6" name="Picture 5" descr="fig_iii3_loro_evolution.png"/>
+          <p:cNvPr id="6" name="Picture 5" descr="fig_loro_mecanique.png"/>
           <p:cNvPicPr>
             <a:picLocks noChangeAspect="1"/>
           </p:cNvPicPr>
@@ -4204,8 +4832,8 @@
         </p:blipFill>
         <p:spPr>
           <a:xfrm>
-            <a:off x="6446520" y="2464736"/>
-            <a:ext cx="5166360" cy="3162966"/>
+            <a:off x="747848" y="1920240"/>
+            <a:ext cx="10711542" cy="3566160"/>
           </a:xfrm>
           <a:prstGeom prst="rect">
             <a:avLst/>
@@ -4214,60 +4842,14 @@
       </p:pic>
       <p:sp>
         <p:nvSpPr>
-          <p:cNvPr id="7" name="Rounded Rectangle 6"/>
-          <p:cNvSpPr/>
-          <p:nvPr/>
-        </p:nvSpPr>
-        <p:spPr>
-          <a:xfrm>
-            <a:off x="868680" y="2148840"/>
-            <a:ext cx="5303520" cy="1371600"/>
-          </a:xfrm>
-          <a:prstGeom prst="roundRect">
-            <a:avLst/>
-          </a:prstGeom>
-          <a:solidFill>
-            <a:srgbClr val="FFFFFF"/>
-          </a:solidFill>
-          <a:ln w="12700">
-            <a:solidFill>
-              <a:srgbClr val="E3DED4"/>
-            </a:solidFill>
-          </a:ln>
-          <a:effectLst/>
-        </p:spPr>
-        <p:style>
-          <a:lnRef idx="1">
-            <a:schemeClr val="accent1"/>
-          </a:lnRef>
-          <a:fillRef idx="3">
-            <a:schemeClr val="accent1"/>
-          </a:fillRef>
-          <a:effectRef idx="2">
-            <a:schemeClr val="accent1"/>
-          </a:effectRef>
-          <a:fontRef idx="minor">
-            <a:schemeClr val="lt1"/>
-          </a:fontRef>
-        </p:style>
-        <p:txBody>
-          <a:bodyPr rtlCol="0" anchor="ctr"/>
-          <a:lstStyle/>
-          <a:p>
-            <a:pPr algn="ctr"/>
-          </a:p>
-        </p:txBody>
-      </p:sp>
-      <p:sp>
-        <p:nvSpPr>
-          <p:cNvPr id="8" name="TextBox 7"/>
+          <p:cNvPr id="7" name="TextBox 6"/>
           <p:cNvSpPr txBox="1"/>
           <p:nvPr/>
         </p:nvSpPr>
         <p:spPr>
           <a:xfrm>
-            <a:off x="1097280" y="2286000"/>
-            <a:ext cx="4937760" cy="457200"/>
+            <a:off x="868680" y="5623560"/>
+            <a:ext cx="10424160" cy="731520"/>
           </a:xfrm>
           <a:prstGeom prst="rect">
             <a:avLst/>
@@ -4282,7 +4864,7 @@
           <a:p>
             <a:pPr algn="l">
               <a:lnSpc>
-                <a:spcPct val="100000"/>
+                <a:spcPct val="112000"/>
               </a:lnSpc>
               <a:spcBef>
                 <a:spcPts val="0"/>
@@ -4292,36 +4874,45 @@
               </a:spcAft>
             </a:pPr>
             <a:r>
-              <a:rPr sz="3800" b="1" i="0">
-                <a:solidFill>
-                  <a:srgbClr val="16252E"/>
-                </a:solidFill>
-                <a:latin typeface="Georgia"/>
-              </a:rPr>
-              <a:t>R² = +0,29</a:t>
-            </a:r>
-            <a:r>
-              <a:rPr sz="1300" b="0" i="0">
-                <a:solidFill>
-                  <a:srgbClr val="6B7A82"/>
-                </a:solidFill>
-                <a:latin typeface="Calibri"/>
-              </a:rPr>
-              <a:t>  (LORO actuel)</a:t>
-            </a:r>
-          </a:p>
-        </p:txBody>
-      </p:sp>
-      <p:sp>
-        <p:nvSpPr>
-          <p:cNvPr id="9" name="TextBox 8"/>
+              <a:rPr sz="1400" b="0" i="0">
+                <a:solidFill>
+                  <a:srgbClr val="202B31"/>
+                </a:solidFill>
+                <a:latin typeface="Calibri"/>
+              </a:rPr>
+              <a:t>Un pli par essai de la série 30 °C, et </a:t>
+            </a:r>
+            <a:r>
+              <a:rPr sz="1400" b="1" i="0">
+                <a:solidFill>
+                  <a:srgbClr val="C9601A"/>
+                </a:solidFill>
+                <a:latin typeface="Calibri"/>
+              </a:rPr>
+              <a:t>le modèle ne voit jamais l'essai qu'il doit prédire</a:t>
+            </a:r>
+            <a:r>
+              <a:rPr sz="1400" b="0" i="0">
+                <a:solidFill>
+                  <a:srgbClr val="202B31"/>
+                </a:solidFill>
+                <a:latin typeface="Calibri"/>
+              </a:rPr>
+              <a:t>. Le +0,29 est simplement la moyenne des deux R² obtenus.</a:t>
+            </a:r>
+          </a:p>
+        </p:txBody>
+      </p:sp>
+      <p:sp>
+        <p:nvSpPr>
+          <p:cNvPr id="8" name="TextBox 7"/>
           <p:cNvSpPr txBox="1"/>
           <p:nvPr/>
         </p:nvSpPr>
         <p:spPr>
           <a:xfrm>
-            <a:off x="1097280" y="3154680"/>
-            <a:ext cx="4937760" cy="365760"/>
+            <a:off x="457200" y="6437376"/>
+            <a:ext cx="8229600" cy="320040"/>
           </a:xfrm>
           <a:prstGeom prst="rect">
             <a:avLst/>
@@ -4346,27 +4937,27 @@
               </a:spcAft>
             </a:pPr>
             <a:r>
-              <a:rPr sz="1250" b="1" i="0">
-                <a:solidFill>
-                  <a:srgbClr val="C9601A"/>
-                </a:solidFill>
-                <a:latin typeface="Calibri"/>
-              </a:rPr>
-              <a:t>depuis −1,77 (couverture nulle) · bat les références</a:t>
-            </a:r>
-          </a:p>
-        </p:txBody>
-      </p:sp>
-      <p:sp>
-        <p:nvSpPr>
-          <p:cNvPr id="10" name="TextBox 9"/>
+              <a:rPr sz="900" b="0" i="0">
+                <a:solidFill>
+                  <a:srgbClr val="6B7A82"/>
+                </a:solidFill>
+                <a:latin typeface="Calibri"/>
+              </a:rPr>
+              <a:t>Maintenance prédictive de la corrosion  ·  ESTL La Salle  ·  2025–2026</a:t>
+            </a:r>
+          </a:p>
+        </p:txBody>
+      </p:sp>
+      <p:sp>
+        <p:nvSpPr>
+          <p:cNvPr id="9" name="TextBox 8"/>
           <p:cNvSpPr txBox="1"/>
           <p:nvPr/>
         </p:nvSpPr>
         <p:spPr>
           <a:xfrm>
-            <a:off x="868680" y="3794760"/>
-            <a:ext cx="5349240" cy="2194560"/>
+            <a:off x="10424160" y="6437376"/>
+            <a:ext cx="1325880" cy="320040"/>
           </a:xfrm>
           <a:prstGeom prst="rect">
             <a:avLst/>
@@ -4379,213 +4970,25 @@
           </a:bodyPr>
           <a:lstStyle/>
           <a:p>
-            <a:pPr algn="l">
-              <a:lnSpc>
-                <a:spcPct val="110000"/>
-              </a:lnSpc>
-              <a:spcBef>
-                <a:spcPts val="0"/>
-              </a:spcBef>
-              <a:spcAft>
-                <a:spcPts val="700"/>
-              </a:spcAft>
-            </a:pPr>
-            <a:r>
-              <a:rPr sz="1350" b="0" i="0">
-                <a:solidFill>
-                  <a:srgbClr val="202B31"/>
-                </a:solidFill>
-                <a:latin typeface="Calibri"/>
-              </a:rPr>
-              <a:t>Une trajectoire, pas un point : couvrir et </a:t>
-            </a:r>
-            <a:r>
-              <a:rPr sz="1350" b="1" i="0">
-                <a:solidFill>
-                  <a:srgbClr val="2C7A7B"/>
-                </a:solidFill>
-                <a:latin typeface="Calibri"/>
-              </a:rPr>
-              <a:t>répéter</a:t>
-            </a:r>
-            <a:r>
-              <a:rPr sz="1350" b="0" i="0">
-                <a:solidFill>
-                  <a:srgbClr val="202B31"/>
-                </a:solidFill>
-                <a:latin typeface="Calibri"/>
-              </a:rPr>
-              <a:t> les conditions 30 °C a fait passer le LORO de −1,77 à +0,29.</a:t>
-            </a:r>
-          </a:p>
-          <a:p>
-            <a:pPr algn="l">
-              <a:lnSpc>
-                <a:spcPct val="110000"/>
-              </a:lnSpc>
-              <a:spcBef>
-                <a:spcPts val="0"/>
-              </a:spcBef>
-              <a:spcAft>
-                <a:spcPts val="700"/>
-              </a:spcAft>
-            </a:pPr>
-            <a:r>
-              <a:rPr sz="1350" b="0" i="0">
-                <a:solidFill>
-                  <a:srgbClr val="202B31"/>
-                </a:solidFill>
-                <a:latin typeface="Calibri"/>
-              </a:rPr>
-              <a:t>L'apport n'est pas la valeur mais la </a:t>
-            </a:r>
-            <a:r>
-              <a:rPr sz="1400" b="1" i="0">
+            <a:pPr algn="r">
+              <a:lnSpc>
+                <a:spcPct val="100000"/>
+              </a:lnSpc>
+              <a:spcBef>
+                <a:spcPts val="0"/>
+              </a:spcBef>
+              <a:spcAft>
+                <a:spcPts val="400"/>
+              </a:spcAft>
+            </a:pPr>
+            <a:r>
+              <a:rPr sz="1000" b="1" i="0">
                 <a:solidFill>
                   <a:srgbClr val="C9601A"/>
                 </a:solidFill>
-                <a:latin typeface="Georgia"/>
-              </a:rPr>
-              <a:t>structure</a:t>
-            </a:r>
-            <a:r>
-              <a:rPr sz="1350" b="0" i="0">
-                <a:solidFill>
-                  <a:srgbClr val="202B31"/>
-                </a:solidFill>
-                <a:latin typeface="Calibri"/>
-              </a:rPr>
-              <a:t> du R² : positif si conditions couvertes et répétées, négatif sinon.</a:t>
-            </a:r>
-          </a:p>
-          <a:p>
-            <a:pPr algn="l">
-              <a:lnSpc>
-                <a:spcPct val="110000"/>
-              </a:lnSpc>
-              <a:spcBef>
-                <a:spcPts val="0"/>
-              </a:spcBef>
-              <a:spcAft>
-                <a:spcPts val="700"/>
-              </a:spcAft>
-            </a:pPr>
-            <a:r>
-              <a:rPr sz="1250" b="0" i="0">
-                <a:solidFill>
-                  <a:srgbClr val="202B31"/>
-                </a:solidFill>
-                <a:latin typeface="Calibri"/>
-              </a:rPr>
-              <a:t>Ajouter une morphologie non appariée le ramène à ≈ +0,20, métrique encore </a:t>
-            </a:r>
-            <a:r>
-              <a:rPr sz="1250" b="1" i="0">
-                <a:solidFill>
-                  <a:srgbClr val="C9601A"/>
-                </a:solidFill>
-                <a:latin typeface="Calibri"/>
-              </a:rPr>
-              <a:t>bruitée</a:t>
-            </a:r>
-            <a:r>
-              <a:rPr sz="1250" b="0" i="0">
-                <a:solidFill>
-                  <a:srgbClr val="202B31"/>
-                </a:solidFill>
-                <a:latin typeface="Calibri"/>
-              </a:rPr>
-              <a:t> (peu d'essais).</a:t>
-            </a:r>
-          </a:p>
-        </p:txBody>
-      </p:sp>
-      <p:sp>
-        <p:nvSpPr>
-          <p:cNvPr id="11" name="TextBox 10"/>
-          <p:cNvSpPr txBox="1"/>
-          <p:nvPr/>
-        </p:nvSpPr>
-        <p:spPr>
-          <a:xfrm>
-            <a:off x="457200" y="6437376"/>
-            <a:ext cx="8229600" cy="320040"/>
-          </a:xfrm>
-          <a:prstGeom prst="rect">
-            <a:avLst/>
-          </a:prstGeom>
-          <a:noFill/>
-        </p:spPr>
-        <p:txBody>
-          <a:bodyPr wrap="square" anchor="t" lIns="0" rIns="0" tIns="0" bIns="0">
-            <a:spAutoFit/>
-          </a:bodyPr>
-          <a:lstStyle/>
-          <a:p>
-            <a:pPr algn="l">
-              <a:lnSpc>
-                <a:spcPct val="100000"/>
-              </a:lnSpc>
-              <a:spcBef>
-                <a:spcPts val="0"/>
-              </a:spcBef>
-              <a:spcAft>
-                <a:spcPts val="400"/>
-              </a:spcAft>
-            </a:pPr>
-            <a:r>
-              <a:rPr sz="900" b="0" i="0">
-                <a:solidFill>
-                  <a:srgbClr val="6B7A82"/>
-                </a:solidFill>
-                <a:latin typeface="Calibri"/>
-              </a:rPr>
-              <a:t>Maintenance prédictive de la corrosion  ·  ESTL La Salle  ·  2025–2026</a:t>
-            </a:r>
-          </a:p>
-        </p:txBody>
-      </p:sp>
-      <p:sp>
-        <p:nvSpPr>
-          <p:cNvPr id="12" name="TextBox 11"/>
-          <p:cNvSpPr txBox="1"/>
-          <p:nvPr/>
-        </p:nvSpPr>
-        <p:spPr>
-          <a:xfrm>
-            <a:off x="10424160" y="6437376"/>
-            <a:ext cx="1325880" cy="320040"/>
-          </a:xfrm>
-          <a:prstGeom prst="rect">
-            <a:avLst/>
-          </a:prstGeom>
-          <a:noFill/>
-        </p:spPr>
-        <p:txBody>
-          <a:bodyPr wrap="square" anchor="t" lIns="0" rIns="0" tIns="0" bIns="0">
-            <a:spAutoFit/>
-          </a:bodyPr>
-          <a:lstStyle/>
-          <a:p>
-            <a:pPr algn="r">
-              <a:lnSpc>
-                <a:spcPct val="100000"/>
-              </a:lnSpc>
-              <a:spcBef>
-                <a:spcPts val="0"/>
-              </a:spcBef>
-              <a:spcAft>
-                <a:spcPts val="400"/>
-              </a:spcAft>
-            </a:pPr>
-            <a:r>
-              <a:rPr sz="1000" b="1" i="0">
-                <a:solidFill>
-                  <a:srgbClr val="C9601A"/>
-                </a:solidFill>
-                <a:latin typeface="Calibri"/>
-              </a:rPr>
-              <a:t>11 / 19</a:t>
+                <a:latin typeface="Calibri"/>
+              </a:rPr>
+              <a:t>11 / 20</a:t>
             </a:r>
           </a:p>
         </p:txBody>
@@ -4732,11 +5135,11 @@
             <a:r>
               <a:rPr sz="1250" b="1" i="0">
                 <a:solidFill>
-                  <a:srgbClr val="2C7A7B"/>
-                </a:solidFill>
-                <a:latin typeface="Calibri"/>
-              </a:rPr>
-              <a:t>RÉSULTATS · OS3</a:t>
+                  <a:srgbClr val="C9601A"/>
+                </a:solidFill>
+                <a:latin typeface="Calibri"/>
+              </a:rPr>
+              <a:t>RÉSULTATS · OS2</a:t>
             </a:r>
           </a:p>
         </p:txBody>
@@ -4781,14 +5184,14 @@
                 </a:solidFill>
                 <a:latin typeface="Georgia"/>
               </a:rPr>
-              <a:t>Température dominante &amp; deux contre-exemples instructifs</a:t>
+              <a:t>Le modèle généralise, là où les conditions sont couvertes</a:t>
             </a:r>
           </a:p>
         </p:txBody>
       </p:sp>
       <p:pic>
         <p:nvPicPr>
-          <p:cNvPr id="6" name="Picture 5" descr="fig_iii4_contrexemples.png"/>
+          <p:cNvPr id="6" name="Picture 5" descr="fig_iii3_loro_evolution.png"/>
           <p:cNvPicPr>
             <a:picLocks noChangeAspect="1"/>
           </p:cNvPicPr>
@@ -4802,8 +5205,8 @@
         </p:blipFill>
         <p:spPr>
           <a:xfrm>
-            <a:off x="6446520" y="2706863"/>
-            <a:ext cx="5166360" cy="2724432"/>
+            <a:off x="6446520" y="2464736"/>
+            <a:ext cx="5166360" cy="3162966"/>
           </a:xfrm>
           <a:prstGeom prst="rect">
             <a:avLst/>
@@ -4812,135 +5215,25 @@
       </p:pic>
       <p:sp>
         <p:nvSpPr>
-          <p:cNvPr id="7" name="TextBox 6"/>
-          <p:cNvSpPr txBox="1"/>
+          <p:cNvPr id="7" name="Rounded Rectangle 6"/>
+          <p:cNvSpPr/>
           <p:nvPr/>
         </p:nvSpPr>
         <p:spPr>
           <a:xfrm>
             <a:off x="868680" y="2148840"/>
-            <a:ext cx="5349240" cy="1371600"/>
-          </a:xfrm>
-          <a:prstGeom prst="rect">
-            <a:avLst/>
-          </a:prstGeom>
-          <a:noFill/>
-        </p:spPr>
-        <p:txBody>
-          <a:bodyPr wrap="square" anchor="t" lIns="0" rIns="0" tIns="0" bIns="0">
-            <a:spAutoFit/>
-          </a:bodyPr>
-          <a:lstStyle/>
-          <a:p>
-            <a:pPr algn="l">
-              <a:lnSpc>
-                <a:spcPct val="110000"/>
-              </a:lnSpc>
-              <a:spcBef>
-                <a:spcPts val="0"/>
-              </a:spcBef>
-              <a:spcAft>
-                <a:spcPts val="500"/>
-              </a:spcAft>
-            </a:pPr>
-            <a:r>
-              <a:rPr sz="1500" b="1" i="0">
-                <a:solidFill>
-                  <a:srgbClr val="202B31"/>
-                </a:solidFill>
-                <a:latin typeface="Georgia"/>
-              </a:rPr>
-              <a:t>La température est la variable dominante</a:t>
-            </a:r>
-          </a:p>
-          <a:p>
-            <a:pPr algn="l">
-              <a:lnSpc>
-                <a:spcPct val="110000"/>
-              </a:lnSpc>
-              <a:spcBef>
-                <a:spcPts val="0"/>
-              </a:spcBef>
-              <a:spcAft>
-                <a:spcPts val="500"/>
-              </a:spcAft>
-            </a:pPr>
-            <a:r>
-              <a:rPr sz="1300" b="0" i="0">
-                <a:solidFill>
-                  <a:srgbClr val="202B31"/>
-                </a:solidFill>
-                <a:latin typeface="Calibri"/>
-              </a:rPr>
-              <a:t>(Arrhenius : la vitesse de corrosion croît exponentiellement avec T).</a:t>
-            </a:r>
-          </a:p>
-        </p:txBody>
-      </p:sp>
-      <p:sp>
-        <p:nvSpPr>
-          <p:cNvPr id="8" name="TextBox 7"/>
-          <p:cNvSpPr txBox="1"/>
-          <p:nvPr/>
-        </p:nvSpPr>
-        <p:spPr>
-          <a:xfrm>
-            <a:off x="868680" y="3246120"/>
-            <a:ext cx="5349240" cy="365760"/>
-          </a:xfrm>
-          <a:prstGeom prst="rect">
-            <a:avLst/>
-          </a:prstGeom>
-          <a:noFill/>
-        </p:spPr>
-        <p:txBody>
-          <a:bodyPr wrap="square" anchor="t" lIns="0" rIns="0" tIns="0" bIns="0">
-            <a:spAutoFit/>
-          </a:bodyPr>
-          <a:lstStyle/>
-          <a:p>
-            <a:pPr algn="l">
-              <a:lnSpc>
-                <a:spcPct val="100000"/>
-              </a:lnSpc>
-              <a:spcBef>
-                <a:spcPts val="0"/>
-              </a:spcBef>
-              <a:spcAft>
-                <a:spcPts val="400"/>
-              </a:spcAft>
-            </a:pPr>
-            <a:r>
-              <a:rPr sz="1400" b="1" i="0">
-                <a:solidFill>
-                  <a:srgbClr val="202B31"/>
-                </a:solidFill>
-                <a:latin typeface="Calibri"/>
-              </a:rPr>
-              <a:t>Deux essais imprédictibles = deux facteurs isolés :</a:t>
-            </a:r>
-          </a:p>
-        </p:txBody>
-      </p:sp>
-      <p:sp>
-        <p:nvSpPr>
-          <p:cNvPr id="9" name="Oval 8"/>
-          <p:cNvSpPr/>
-          <p:nvPr/>
-        </p:nvSpPr>
-        <p:spPr>
-          <a:xfrm>
-            <a:off x="868680" y="3785615"/>
-            <a:ext cx="182880" cy="182880"/>
-          </a:xfrm>
-          <a:prstGeom prst="ellipse">
+            <a:ext cx="5303520" cy="1371600"/>
+          </a:xfrm>
+          <a:prstGeom prst="roundRect">
             <a:avLst/>
           </a:prstGeom>
           <a:solidFill>
-            <a:srgbClr val="C9601A"/>
+            <a:srgbClr val="FFFFFF"/>
           </a:solidFill>
-          <a:ln>
-            <a:noFill/>
+          <a:ln w="12700">
+            <a:solidFill>
+              <a:srgbClr val="E3DED4"/>
+            </a:solidFill>
           </a:ln>
           <a:effectLst/>
         </p:spPr>
@@ -4968,14 +5261,14 @@
       </p:sp>
       <p:sp>
         <p:nvSpPr>
-          <p:cNvPr id="10" name="TextBox 9"/>
+          <p:cNvPr id="8" name="TextBox 7"/>
           <p:cNvSpPr txBox="1"/>
           <p:nvPr/>
         </p:nvSpPr>
         <p:spPr>
           <a:xfrm>
-            <a:off x="1170432" y="3749039"/>
-            <a:ext cx="5029200" cy="502920"/>
+            <a:off x="1097280" y="2286000"/>
+            <a:ext cx="4937760" cy="457200"/>
           </a:xfrm>
           <a:prstGeom prst="rect">
             <a:avLst/>
@@ -4990,7 +5283,7 @@
           <a:p>
             <a:pPr algn="l">
               <a:lnSpc>
-                <a:spcPct val="105000"/>
+                <a:spcPct val="100000"/>
               </a:lnSpc>
               <a:spcBef>
                 <a:spcPts val="0"/>
@@ -5000,80 +5293,36 @@
               </a:spcAft>
             </a:pPr>
             <a:r>
-              <a:rPr sz="1350" b="1" i="0">
-                <a:solidFill>
-                  <a:srgbClr val="202B31"/>
-                </a:solidFill>
-                <a:latin typeface="Calibri"/>
-              </a:rPr>
-              <a:t>Run #15 : </a:t>
-            </a:r>
-            <a:r>
-              <a:rPr sz="1250" b="0" i="0">
-                <a:solidFill>
-                  <a:srgbClr val="202B31"/>
-                </a:solidFill>
-                <a:latin typeface="Calibri"/>
-              </a:rPr>
-              <a:t>régulation thermique dérivante (31 → 28 °C)</a:t>
-            </a:r>
-          </a:p>
-        </p:txBody>
-      </p:sp>
-      <p:sp>
-        <p:nvSpPr>
-          <p:cNvPr id="11" name="Oval 10"/>
-          <p:cNvSpPr/>
-          <p:nvPr/>
-        </p:nvSpPr>
-        <p:spPr>
-          <a:xfrm>
-            <a:off x="868680" y="4334255"/>
-            <a:ext cx="182880" cy="182880"/>
-          </a:xfrm>
-          <a:prstGeom prst="ellipse">
-            <a:avLst/>
-          </a:prstGeom>
-          <a:solidFill>
-            <a:srgbClr val="C9601A"/>
-          </a:solidFill>
-          <a:ln>
-            <a:noFill/>
-          </a:ln>
-          <a:effectLst/>
-        </p:spPr>
-        <p:style>
-          <a:lnRef idx="1">
-            <a:schemeClr val="accent1"/>
-          </a:lnRef>
-          <a:fillRef idx="3">
-            <a:schemeClr val="accent1"/>
-          </a:fillRef>
-          <a:effectRef idx="2">
-            <a:schemeClr val="accent1"/>
-          </a:effectRef>
-          <a:fontRef idx="minor">
-            <a:schemeClr val="lt1"/>
-          </a:fontRef>
-        </p:style>
-        <p:txBody>
-          <a:bodyPr rtlCol="0" anchor="ctr"/>
-          <a:lstStyle/>
-          <a:p>
-            <a:pPr algn="ctr"/>
-          </a:p>
-        </p:txBody>
-      </p:sp>
-      <p:sp>
-        <p:nvSpPr>
-          <p:cNvPr id="12" name="TextBox 11"/>
+              <a:rPr sz="3800" b="1" i="0">
+                <a:solidFill>
+                  <a:srgbClr val="16252E"/>
+                </a:solidFill>
+                <a:latin typeface="Georgia"/>
+              </a:rPr>
+              <a:t>R² = +0,29</a:t>
+            </a:r>
+            <a:r>
+              <a:rPr sz="1300" b="0" i="0">
+                <a:solidFill>
+                  <a:srgbClr val="6B7A82"/>
+                </a:solidFill>
+                <a:latin typeface="Calibri"/>
+              </a:rPr>
+              <a:t>  (LORO actuel)</a:t>
+            </a:r>
+          </a:p>
+        </p:txBody>
+      </p:sp>
+      <p:sp>
+        <p:nvSpPr>
+          <p:cNvPr id="9" name="TextBox 8"/>
           <p:cNvSpPr txBox="1"/>
           <p:nvPr/>
         </p:nvSpPr>
         <p:spPr>
           <a:xfrm>
-            <a:off x="1170432" y="4297679"/>
-            <a:ext cx="5029200" cy="502920"/>
+            <a:off x="1097280" y="3154680"/>
+            <a:ext cx="4937760" cy="365760"/>
           </a:xfrm>
           <a:prstGeom prst="rect">
             <a:avLst/>
@@ -5088,7 +5337,7 @@
           <a:p>
             <a:pPr algn="l">
               <a:lnSpc>
-                <a:spcPct val="105000"/>
+                <a:spcPct val="100000"/>
               </a:lnSpc>
               <a:spcBef>
                 <a:spcPts val="0"/>
@@ -5098,36 +5347,27 @@
               </a:spcAft>
             </a:pPr>
             <a:r>
-              <a:rPr sz="1350" b="1" i="0">
-                <a:solidFill>
-                  <a:srgbClr val="202B31"/>
-                </a:solidFill>
-                <a:latin typeface="Calibri"/>
-              </a:rPr>
-              <a:t>Run #17 : </a:t>
-            </a:r>
-            <a:r>
-              <a:rPr sz="1250" b="0" i="0">
-                <a:solidFill>
-                  <a:srgbClr val="202B31"/>
-                </a:solidFill>
-                <a:latin typeface="Calibri"/>
-              </a:rPr>
-              <a:t>concentration d'acide (HCl évaporé avant immersion)</a:t>
-            </a:r>
-          </a:p>
-        </p:txBody>
-      </p:sp>
-      <p:sp>
-        <p:nvSpPr>
-          <p:cNvPr id="13" name="TextBox 12"/>
+              <a:rPr sz="1250" b="1" i="0">
+                <a:solidFill>
+                  <a:srgbClr val="C9601A"/>
+                </a:solidFill>
+                <a:latin typeface="Calibri"/>
+              </a:rPr>
+              <a:t>depuis −1,77 (couverture nulle) · bat les références</a:t>
+            </a:r>
+          </a:p>
+        </p:txBody>
+      </p:sp>
+      <p:sp>
+        <p:nvSpPr>
+          <p:cNvPr id="10" name="TextBox 9"/>
           <p:cNvSpPr txBox="1"/>
           <p:nvPr/>
         </p:nvSpPr>
         <p:spPr>
           <a:xfrm>
-            <a:off x="868680" y="4983480"/>
-            <a:ext cx="5349240" cy="914400"/>
+            <a:off x="868680" y="3794760"/>
+            <a:ext cx="5349240" cy="2194560"/>
           </a:xfrm>
           <a:prstGeom prst="rect">
             <a:avLst/>
@@ -5148,42 +5388,122 @@
                 <a:spcPts val="0"/>
               </a:spcBef>
               <a:spcAft>
-                <a:spcPts val="400"/>
-              </a:spcAft>
-            </a:pPr>
+                <a:spcPts val="700"/>
+              </a:spcAft>
+            </a:pPr>
+            <a:r>
+              <a:rPr sz="1350" b="0" i="0">
+                <a:solidFill>
+                  <a:srgbClr val="202B31"/>
+                </a:solidFill>
+                <a:latin typeface="Calibri"/>
+              </a:rPr>
+              <a:t>Une trajectoire, pas un point : couvrir et </a:t>
+            </a:r>
             <a:r>
               <a:rPr sz="1350" b="1" i="0">
                 <a:solidFill>
+                  <a:srgbClr val="2C7A7B"/>
+                </a:solidFill>
+                <a:latin typeface="Calibri"/>
+              </a:rPr>
+              <a:t>répéter</a:t>
+            </a:r>
+            <a:r>
+              <a:rPr sz="1350" b="0" i="0">
+                <a:solidFill>
                   <a:srgbClr val="202B31"/>
                 </a:solidFill>
                 <a:latin typeface="Calibri"/>
               </a:rPr>
-              <a:t>→ La fiabilité exige le contrôle </a:t>
-            </a:r>
-            <a:r>
-              <a:rPr sz="1350" b="1" i="0">
+              <a:t> les conditions 30 °C a fait passer le LORO de −1,77 à +0,29.</a:t>
+            </a:r>
+          </a:p>
+          <a:p>
+            <a:pPr algn="l">
+              <a:lnSpc>
+                <a:spcPct val="110000"/>
+              </a:lnSpc>
+              <a:spcBef>
+                <a:spcPts val="0"/>
+              </a:spcBef>
+              <a:spcAft>
+                <a:spcPts val="700"/>
+              </a:spcAft>
+            </a:pPr>
+            <a:r>
+              <a:rPr sz="1350" b="0" i="0">
+                <a:solidFill>
+                  <a:srgbClr val="202B31"/>
+                </a:solidFill>
+                <a:latin typeface="Calibri"/>
+              </a:rPr>
+              <a:t>L'apport n'est pas la valeur mais la </a:t>
+            </a:r>
+            <a:r>
+              <a:rPr sz="1400" b="1" i="0">
                 <a:solidFill>
                   <a:srgbClr val="C9601A"/>
                 </a:solidFill>
-                <a:latin typeface="Calibri"/>
-              </a:rPr>
-              <a:t>simultané</a:t>
-            </a:r>
-            <a:r>
-              <a:rPr sz="1350" b="1" i="0">
+                <a:latin typeface="Georgia"/>
+              </a:rPr>
+              <a:t>structure</a:t>
+            </a:r>
+            <a:r>
+              <a:rPr sz="1350" b="0" i="0">
                 <a:solidFill>
                   <a:srgbClr val="202B31"/>
                 </a:solidFill>
                 <a:latin typeface="Calibri"/>
               </a:rPr>
-              <a:t> de tous les facteurs, pas seulement la température.</a:t>
-            </a:r>
-          </a:p>
-        </p:txBody>
-      </p:sp>
-      <p:sp>
-        <p:nvSpPr>
-          <p:cNvPr id="14" name="TextBox 13"/>
+              <a:t> du R² : positif si conditions couvertes et répétées, négatif sinon.</a:t>
+            </a:r>
+          </a:p>
+          <a:p>
+            <a:pPr algn="l">
+              <a:lnSpc>
+                <a:spcPct val="110000"/>
+              </a:lnSpc>
+              <a:spcBef>
+                <a:spcPts val="0"/>
+              </a:spcBef>
+              <a:spcAft>
+                <a:spcPts val="700"/>
+              </a:spcAft>
+            </a:pPr>
+            <a:r>
+              <a:rPr sz="1250" b="0" i="0">
+                <a:solidFill>
+                  <a:srgbClr val="202B31"/>
+                </a:solidFill>
+                <a:latin typeface="Calibri"/>
+              </a:rPr>
+              <a:t>Ajouter une morphologie non appariée le ramène à ≈ +0,20, métrique encore </a:t>
+            </a:r>
+            <a:r>
+              <a:rPr sz="1250" b="1" i="0">
+                <a:solidFill>
+                  <a:srgbClr val="C9601A"/>
+                </a:solidFill>
+                <a:latin typeface="Calibri"/>
+              </a:rPr>
+              <a:t>bruitée</a:t>
+            </a:r>
+            <a:r>
+              <a:rPr sz="1250" b="0" i="0">
+                <a:solidFill>
+                  <a:srgbClr val="202B31"/>
+                </a:solidFill>
+                <a:latin typeface="Calibri"/>
+              </a:rPr>
+              <a:t> (peu d'essais).</a:t>
+            </a:r>
+          </a:p>
+        </p:txBody>
+      </p:sp>
+      <p:sp>
+        <p:nvSpPr>
+          <p:cNvPr id="11" name="TextBox 10"/>
           <p:cNvSpPr txBox="1"/>
           <p:nvPr/>
         </p:nvSpPr>
@@ -5228,7 +5548,7 @@
       </p:sp>
       <p:sp>
         <p:nvSpPr>
-          <p:cNvPr id="15" name="TextBox 14"/>
+          <p:cNvPr id="12" name="TextBox 11"/>
           <p:cNvSpPr txBox="1"/>
           <p:nvPr/>
         </p:nvSpPr>
@@ -5266,7 +5586,7 @@
                 </a:solidFill>
                 <a:latin typeface="Calibri"/>
               </a:rPr>
-              <a:t>12 / 19</a:t>
+              <a:t>12 / 20</a:t>
             </a:r>
           </a:p>
         </p:txBody>
@@ -5413,11 +5733,11 @@
             <a:r>
               <a:rPr sz="1250" b="1" i="0">
                 <a:solidFill>
-                  <a:srgbClr val="C9601A"/>
-                </a:solidFill>
-                <a:latin typeface="Calibri"/>
-              </a:rPr>
-              <a:t>COMPRÉHENSION PHYSIQUE</a:t>
+                  <a:srgbClr val="2C7A7B"/>
+                </a:solidFill>
+                <a:latin typeface="Calibri"/>
+              </a:rPr>
+              <a:t>RÉSULTATS · OS3</a:t>
             </a:r>
           </a:p>
         </p:txBody>
@@ -5462,14 +5782,14 @@
                 </a:solidFill>
                 <a:latin typeface="Georgia"/>
               </a:rPr>
-              <a:t>Emballement &amp; rupture : une divergence géométrique</a:t>
+              <a:t>Température dominante &amp; deux contre-exemples instructifs</a:t>
             </a:r>
           </a:p>
         </p:txBody>
       </p:sp>
       <p:pic>
         <p:nvPicPr>
-          <p:cNvPr id="6" name="Picture 5" descr="fig_iii4_emballement.png"/>
+          <p:cNvPr id="6" name="Picture 5" descr="fig_iii4_contrexemples.png"/>
           <p:cNvPicPr>
             <a:picLocks noChangeAspect="1"/>
           </p:cNvPicPr>
@@ -5483,8 +5803,8 @@
         </p:blipFill>
         <p:spPr>
           <a:xfrm>
-            <a:off x="6400800" y="2495887"/>
-            <a:ext cx="5212080" cy="3146385"/>
+            <a:off x="6446520" y="2706863"/>
+            <a:ext cx="5166360" cy="2724432"/>
           </a:xfrm>
           <a:prstGeom prst="rect">
             <a:avLst/>
@@ -5500,7 +5820,7 @@
         <p:spPr>
           <a:xfrm>
             <a:off x="868680" y="2148840"/>
-            <a:ext cx="5349240" cy="4023360"/>
+            <a:ext cx="5349240" cy="1371600"/>
           </a:xfrm>
           <a:prstGeom prst="rect">
             <a:avLst/>
@@ -5515,161 +5835,45 @@
           <a:p>
             <a:pPr algn="l">
               <a:lnSpc>
-                <a:spcPct val="113000"/>
-              </a:lnSpc>
-              <a:spcBef>
-                <a:spcPts val="0"/>
-              </a:spcBef>
-              <a:spcAft>
-                <a:spcPts val="1100"/>
-              </a:spcAft>
-            </a:pPr>
-            <a:r>
-              <a:rPr sz="1400" b="0" i="0">
+                <a:spcPct val="110000"/>
+              </a:lnSpc>
+              <a:spcBef>
+                <a:spcPts val="0"/>
+              </a:spcBef>
+              <a:spcAft>
+                <a:spcPts val="500"/>
+              </a:spcAft>
+            </a:pPr>
+            <a:r>
+              <a:rPr sz="1500" b="1" i="0">
                 <a:solidFill>
                   <a:srgbClr val="202B31"/>
                 </a:solidFill>
-                <a:latin typeface="Calibri"/>
-              </a:rPr>
-              <a:t>La section varie en r², donc </a:t>
-            </a:r>
-            <a:r>
-              <a:rPr sz="1500" b="1" i="1">
-                <a:solidFill>
-                  <a:srgbClr val="C9601A"/>
-                </a:solidFill>
                 <a:latin typeface="Georgia"/>
               </a:rPr>
-              <a:t>R s'emballe en 1/r³</a:t>
-            </a:r>
-            <a:r>
-              <a:rPr sz="1400" b="0" i="0">
+              <a:t>La température est la variable dominante</a:t>
+            </a:r>
+          </a:p>
+          <a:p>
+            <a:pPr algn="l">
+              <a:lnSpc>
+                <a:spcPct val="110000"/>
+              </a:lnSpc>
+              <a:spcBef>
+                <a:spcPts val="0"/>
+              </a:spcBef>
+              <a:spcAft>
+                <a:spcPts val="500"/>
+              </a:spcAft>
+            </a:pPr>
+            <a:r>
+              <a:rPr sz="1300" b="0" i="0">
                 <a:solidFill>
                   <a:srgbClr val="202B31"/>
                 </a:solidFill>
                 <a:latin typeface="Calibri"/>
               </a:rPr>
-              <a:t>.</a:t>
-            </a:r>
-          </a:p>
-          <a:p>
-            <a:pPr algn="l">
-              <a:lnSpc>
-                <a:spcPct val="113000"/>
-              </a:lnSpc>
-              <a:spcBef>
-                <a:spcPts val="0"/>
-              </a:spcBef>
-              <a:spcAft>
-                <a:spcPts val="1100"/>
-              </a:spcAft>
-            </a:pPr>
-            <a:r>
-              <a:rPr sz="1350" b="0" i="0">
-                <a:solidFill>
-                  <a:srgbClr val="202B31"/>
-                </a:solidFill>
-                <a:latin typeface="Calibri"/>
-              </a:rPr>
-              <a:t>La </a:t>
-            </a:r>
-            <a:r>
-              <a:rPr sz="1350" b="1" i="0">
-                <a:solidFill>
-                  <a:srgbClr val="202B31"/>
-                </a:solidFill>
-                <a:latin typeface="Calibri"/>
-              </a:rPr>
-              <a:t>rupture mécanique coïncide avec le début de l'emballement</a:t>
-            </a:r>
-            <a:r>
-              <a:rPr sz="1350" b="0" i="0">
-                <a:solidFill>
-                  <a:srgbClr val="202B31"/>
-                </a:solidFill>
-                <a:latin typeface="Calibri"/>
-              </a:rPr>
-              <a:t> : « section → 0 » = explosion de R ET perte de tenue.</a:t>
-            </a:r>
-          </a:p>
-          <a:p>
-            <a:pPr algn="l">
-              <a:lnSpc>
-                <a:spcPct val="113000"/>
-              </a:lnSpc>
-              <a:spcBef>
-                <a:spcPts val="0"/>
-              </a:spcBef>
-              <a:spcAft>
-                <a:spcPts val="1100"/>
-              </a:spcAft>
-            </a:pPr>
-            <a:r>
-              <a:rPr sz="1350" b="0" i="0">
-                <a:solidFill>
-                  <a:srgbClr val="202B31"/>
-                </a:solidFill>
-                <a:latin typeface="Calibri"/>
-              </a:rPr>
-              <a:t>Après rupture, </a:t>
-            </a:r>
-            <a:r>
-              <a:rPr sz="1350" b="1" i="0">
-                <a:solidFill>
-                  <a:srgbClr val="2C7A7B"/>
-                </a:solidFill>
-                <a:latin typeface="Calibri"/>
-              </a:rPr>
-              <a:t>la conduction résiduelle</a:t>
-            </a:r>
-            <a:r>
-              <a:rPr sz="1350" b="0" i="0">
-                <a:solidFill>
-                  <a:srgbClr val="202B31"/>
-                </a:solidFill>
-                <a:latin typeface="Calibri"/>
-              </a:rPr>
-              <a:t> (électrolyte HCl + dernier filament) maintient une résistance croissante jusqu'au circuit ouvert.</a:t>
-            </a:r>
-          </a:p>
-          <a:p>
-            <a:pPr algn="l">
-              <a:lnSpc>
-                <a:spcPct val="113000"/>
-              </a:lnSpc>
-              <a:spcBef>
-                <a:spcPts val="0"/>
-              </a:spcBef>
-              <a:spcAft>
-                <a:spcPts val="1100"/>
-              </a:spcAft>
-            </a:pPr>
-            <a:r>
-              <a:rPr sz="1350" b="0" i="0">
-                <a:solidFill>
-                  <a:srgbClr val="202B31"/>
-                </a:solidFill>
-                <a:latin typeface="Calibri"/>
-              </a:rPr>
-              <a:t>Cette portion terminale est </a:t>
-            </a:r>
-            <a:r>
-              <a:rPr sz="1350" b="1" i="0">
-                <a:solidFill>
-                  <a:srgbClr val="C9601A"/>
-                </a:solidFill>
-                <a:latin typeface="Calibri"/>
-              </a:rPr>
-              <a:t>électrolytique, non métallique</a:t>
-            </a:r>
-            <a:r>
-              <a:rPr sz="1350" b="0" i="0">
-                <a:solidFill>
-                  <a:srgbClr val="202B31"/>
-                </a:solidFill>
-                <a:latin typeface="Calibri"/>
-              </a:rPr>
-              <a:t> : tronquée et exclue de l'apprentissage.</a:t>
+              <a:t>(Arrhenius : la vitesse de corrosion croît exponentiellement avec T).</a:t>
             </a:r>
           </a:p>
         </p:txBody>
@@ -5682,8 +5886,8 @@
         </p:nvSpPr>
         <p:spPr>
           <a:xfrm>
-            <a:off x="457200" y="6437376"/>
-            <a:ext cx="8229600" cy="320040"/>
+            <a:off x="868680" y="3246120"/>
+            <a:ext cx="5349240" cy="365760"/>
           </a:xfrm>
           <a:prstGeom prst="rect">
             <a:avLst/>
@@ -5708,27 +5912,71 @@
               </a:spcAft>
             </a:pPr>
             <a:r>
-              <a:rPr sz="900" b="0" i="0">
-                <a:solidFill>
-                  <a:srgbClr val="6B7A82"/>
-                </a:solidFill>
-                <a:latin typeface="Calibri"/>
-              </a:rPr>
-              <a:t>Maintenance prédictive de la corrosion  ·  ESTL La Salle  ·  2025–2026</a:t>
-            </a:r>
-          </a:p>
-        </p:txBody>
-      </p:sp>
-      <p:sp>
-        <p:nvSpPr>
-          <p:cNvPr id="9" name="TextBox 8"/>
+              <a:rPr sz="1400" b="1" i="0">
+                <a:solidFill>
+                  <a:srgbClr val="202B31"/>
+                </a:solidFill>
+                <a:latin typeface="Calibri"/>
+              </a:rPr>
+              <a:t>Deux essais imprédictibles = deux facteurs isolés :</a:t>
+            </a:r>
+          </a:p>
+        </p:txBody>
+      </p:sp>
+      <p:sp>
+        <p:nvSpPr>
+          <p:cNvPr id="9" name="Oval 8"/>
+          <p:cNvSpPr/>
+          <p:nvPr/>
+        </p:nvSpPr>
+        <p:spPr>
+          <a:xfrm>
+            <a:off x="868680" y="3785615"/>
+            <a:ext cx="182880" cy="182880"/>
+          </a:xfrm>
+          <a:prstGeom prst="ellipse">
+            <a:avLst/>
+          </a:prstGeom>
+          <a:solidFill>
+            <a:srgbClr val="C9601A"/>
+          </a:solidFill>
+          <a:ln>
+            <a:noFill/>
+          </a:ln>
+          <a:effectLst/>
+        </p:spPr>
+        <p:style>
+          <a:lnRef idx="1">
+            <a:schemeClr val="accent1"/>
+          </a:lnRef>
+          <a:fillRef idx="3">
+            <a:schemeClr val="accent1"/>
+          </a:fillRef>
+          <a:effectRef idx="2">
+            <a:schemeClr val="accent1"/>
+          </a:effectRef>
+          <a:fontRef idx="minor">
+            <a:schemeClr val="lt1"/>
+          </a:fontRef>
+        </p:style>
+        <p:txBody>
+          <a:bodyPr rtlCol="0" anchor="ctr"/>
+          <a:lstStyle/>
+          <a:p>
+            <a:pPr algn="ctr"/>
+          </a:p>
+        </p:txBody>
+      </p:sp>
+      <p:sp>
+        <p:nvSpPr>
+          <p:cNvPr id="10" name="TextBox 9"/>
           <p:cNvSpPr txBox="1"/>
           <p:nvPr/>
         </p:nvSpPr>
         <p:spPr>
           <a:xfrm>
-            <a:off x="10424160" y="6437376"/>
-            <a:ext cx="1325880" cy="320040"/>
+            <a:off x="1170432" y="3749039"/>
+            <a:ext cx="5029200" cy="502920"/>
           </a:xfrm>
           <a:prstGeom prst="rect">
             <a:avLst/>
@@ -5741,6 +5989,266 @@
           </a:bodyPr>
           <a:lstStyle/>
           <a:p>
+            <a:pPr algn="l">
+              <a:lnSpc>
+                <a:spcPct val="105000"/>
+              </a:lnSpc>
+              <a:spcBef>
+                <a:spcPts val="0"/>
+              </a:spcBef>
+              <a:spcAft>
+                <a:spcPts val="400"/>
+              </a:spcAft>
+            </a:pPr>
+            <a:r>
+              <a:rPr sz="1350" b="1" i="0">
+                <a:solidFill>
+                  <a:srgbClr val="202B31"/>
+                </a:solidFill>
+                <a:latin typeface="Calibri"/>
+              </a:rPr>
+              <a:t>Run #15 : </a:t>
+            </a:r>
+            <a:r>
+              <a:rPr sz="1250" b="0" i="0">
+                <a:solidFill>
+                  <a:srgbClr val="202B31"/>
+                </a:solidFill>
+                <a:latin typeface="Calibri"/>
+              </a:rPr>
+              <a:t>régulation thermique dérivante (31 → 28 °C)</a:t>
+            </a:r>
+          </a:p>
+        </p:txBody>
+      </p:sp>
+      <p:sp>
+        <p:nvSpPr>
+          <p:cNvPr id="11" name="Oval 10"/>
+          <p:cNvSpPr/>
+          <p:nvPr/>
+        </p:nvSpPr>
+        <p:spPr>
+          <a:xfrm>
+            <a:off x="868680" y="4334255"/>
+            <a:ext cx="182880" cy="182880"/>
+          </a:xfrm>
+          <a:prstGeom prst="ellipse">
+            <a:avLst/>
+          </a:prstGeom>
+          <a:solidFill>
+            <a:srgbClr val="C9601A"/>
+          </a:solidFill>
+          <a:ln>
+            <a:noFill/>
+          </a:ln>
+          <a:effectLst/>
+        </p:spPr>
+        <p:style>
+          <a:lnRef idx="1">
+            <a:schemeClr val="accent1"/>
+          </a:lnRef>
+          <a:fillRef idx="3">
+            <a:schemeClr val="accent1"/>
+          </a:fillRef>
+          <a:effectRef idx="2">
+            <a:schemeClr val="accent1"/>
+          </a:effectRef>
+          <a:fontRef idx="minor">
+            <a:schemeClr val="lt1"/>
+          </a:fontRef>
+        </p:style>
+        <p:txBody>
+          <a:bodyPr rtlCol="0" anchor="ctr"/>
+          <a:lstStyle/>
+          <a:p>
+            <a:pPr algn="ctr"/>
+          </a:p>
+        </p:txBody>
+      </p:sp>
+      <p:sp>
+        <p:nvSpPr>
+          <p:cNvPr id="12" name="TextBox 11"/>
+          <p:cNvSpPr txBox="1"/>
+          <p:nvPr/>
+        </p:nvSpPr>
+        <p:spPr>
+          <a:xfrm>
+            <a:off x="1170432" y="4297679"/>
+            <a:ext cx="5029200" cy="502920"/>
+          </a:xfrm>
+          <a:prstGeom prst="rect">
+            <a:avLst/>
+          </a:prstGeom>
+          <a:noFill/>
+        </p:spPr>
+        <p:txBody>
+          <a:bodyPr wrap="square" anchor="t" lIns="0" rIns="0" tIns="0" bIns="0">
+            <a:spAutoFit/>
+          </a:bodyPr>
+          <a:lstStyle/>
+          <a:p>
+            <a:pPr algn="l">
+              <a:lnSpc>
+                <a:spcPct val="105000"/>
+              </a:lnSpc>
+              <a:spcBef>
+                <a:spcPts val="0"/>
+              </a:spcBef>
+              <a:spcAft>
+                <a:spcPts val="400"/>
+              </a:spcAft>
+            </a:pPr>
+            <a:r>
+              <a:rPr sz="1350" b="1" i="0">
+                <a:solidFill>
+                  <a:srgbClr val="202B31"/>
+                </a:solidFill>
+                <a:latin typeface="Calibri"/>
+              </a:rPr>
+              <a:t>Run #17 : </a:t>
+            </a:r>
+            <a:r>
+              <a:rPr sz="1250" b="0" i="0">
+                <a:solidFill>
+                  <a:srgbClr val="202B31"/>
+                </a:solidFill>
+                <a:latin typeface="Calibri"/>
+              </a:rPr>
+              <a:t>concentration d'acide (HCl évaporé avant immersion)</a:t>
+            </a:r>
+          </a:p>
+        </p:txBody>
+      </p:sp>
+      <p:sp>
+        <p:nvSpPr>
+          <p:cNvPr id="13" name="TextBox 12"/>
+          <p:cNvSpPr txBox="1"/>
+          <p:nvPr/>
+        </p:nvSpPr>
+        <p:spPr>
+          <a:xfrm>
+            <a:off x="868680" y="4983480"/>
+            <a:ext cx="5349240" cy="914400"/>
+          </a:xfrm>
+          <a:prstGeom prst="rect">
+            <a:avLst/>
+          </a:prstGeom>
+          <a:noFill/>
+        </p:spPr>
+        <p:txBody>
+          <a:bodyPr wrap="square" anchor="t" lIns="0" rIns="0" tIns="0" bIns="0">
+            <a:spAutoFit/>
+          </a:bodyPr>
+          <a:lstStyle/>
+          <a:p>
+            <a:pPr algn="l">
+              <a:lnSpc>
+                <a:spcPct val="110000"/>
+              </a:lnSpc>
+              <a:spcBef>
+                <a:spcPts val="0"/>
+              </a:spcBef>
+              <a:spcAft>
+                <a:spcPts val="400"/>
+              </a:spcAft>
+            </a:pPr>
+            <a:r>
+              <a:rPr sz="1350" b="1" i="0">
+                <a:solidFill>
+                  <a:srgbClr val="202B31"/>
+                </a:solidFill>
+                <a:latin typeface="Calibri"/>
+              </a:rPr>
+              <a:t>→ La fiabilité exige le contrôle </a:t>
+            </a:r>
+            <a:r>
+              <a:rPr sz="1350" b="1" i="0">
+                <a:solidFill>
+                  <a:srgbClr val="C9601A"/>
+                </a:solidFill>
+                <a:latin typeface="Calibri"/>
+              </a:rPr>
+              <a:t>simultané</a:t>
+            </a:r>
+            <a:r>
+              <a:rPr sz="1350" b="1" i="0">
+                <a:solidFill>
+                  <a:srgbClr val="202B31"/>
+                </a:solidFill>
+                <a:latin typeface="Calibri"/>
+              </a:rPr>
+              <a:t> de tous les facteurs, pas seulement la température.</a:t>
+            </a:r>
+          </a:p>
+        </p:txBody>
+      </p:sp>
+      <p:sp>
+        <p:nvSpPr>
+          <p:cNvPr id="14" name="TextBox 13"/>
+          <p:cNvSpPr txBox="1"/>
+          <p:nvPr/>
+        </p:nvSpPr>
+        <p:spPr>
+          <a:xfrm>
+            <a:off x="457200" y="6437376"/>
+            <a:ext cx="8229600" cy="320040"/>
+          </a:xfrm>
+          <a:prstGeom prst="rect">
+            <a:avLst/>
+          </a:prstGeom>
+          <a:noFill/>
+        </p:spPr>
+        <p:txBody>
+          <a:bodyPr wrap="square" anchor="t" lIns="0" rIns="0" tIns="0" bIns="0">
+            <a:spAutoFit/>
+          </a:bodyPr>
+          <a:lstStyle/>
+          <a:p>
+            <a:pPr algn="l">
+              <a:lnSpc>
+                <a:spcPct val="100000"/>
+              </a:lnSpc>
+              <a:spcBef>
+                <a:spcPts val="0"/>
+              </a:spcBef>
+              <a:spcAft>
+                <a:spcPts val="400"/>
+              </a:spcAft>
+            </a:pPr>
+            <a:r>
+              <a:rPr sz="900" b="0" i="0">
+                <a:solidFill>
+                  <a:srgbClr val="6B7A82"/>
+                </a:solidFill>
+                <a:latin typeface="Calibri"/>
+              </a:rPr>
+              <a:t>Maintenance prédictive de la corrosion  ·  ESTL La Salle  ·  2025–2026</a:t>
+            </a:r>
+          </a:p>
+        </p:txBody>
+      </p:sp>
+      <p:sp>
+        <p:nvSpPr>
+          <p:cNvPr id="15" name="TextBox 14"/>
+          <p:cNvSpPr txBox="1"/>
+          <p:nvPr/>
+        </p:nvSpPr>
+        <p:spPr>
+          <a:xfrm>
+            <a:off x="10424160" y="6437376"/>
+            <a:ext cx="1325880" cy="320040"/>
+          </a:xfrm>
+          <a:prstGeom prst="rect">
+            <a:avLst/>
+          </a:prstGeom>
+          <a:noFill/>
+        </p:spPr>
+        <p:txBody>
+          <a:bodyPr wrap="square" anchor="t" lIns="0" rIns="0" tIns="0" bIns="0">
+            <a:spAutoFit/>
+          </a:bodyPr>
+          <a:lstStyle/>
+          <a:p>
             <a:pPr algn="r">
               <a:lnSpc>
                 <a:spcPct val="100000"/>
@@ -5759,7 +6267,7 @@
                 </a:solidFill>
                 <a:latin typeface="Calibri"/>
               </a:rPr>
-              <a:t>13 / 19</a:t>
+              <a:t>13 / 20</a:t>
             </a:r>
           </a:p>
         </p:txBody>
@@ -5906,11 +6414,11 @@
             <a:r>
               <a:rPr sz="1250" b="1" i="0">
                 <a:solidFill>
-                  <a:srgbClr val="2C7A7B"/>
-                </a:solidFill>
-                <a:latin typeface="Calibri"/>
-              </a:rPr>
-              <a:t>RÉSULTATS · OS4</a:t>
+                  <a:srgbClr val="C9601A"/>
+                </a:solidFill>
+                <a:latin typeface="Calibri"/>
+              </a:rPr>
+              <a:t>COMPRÉHENSION PHYSIQUE</a:t>
             </a:r>
           </a:p>
         </p:txBody>
@@ -5955,21 +6463,45 @@
                 </a:solidFill>
                 <a:latin typeface="Georgia"/>
               </a:rPr>
-              <a:t>Boucle décision → action : un module GMAO maison</a:t>
-            </a:r>
-          </a:p>
-        </p:txBody>
-      </p:sp>
-      <p:sp>
-        <p:nvSpPr>
-          <p:cNvPr id="6" name="TextBox 5"/>
+              <a:t>Emballement &amp; rupture : une divergence géométrique</a:t>
+            </a:r>
+          </a:p>
+        </p:txBody>
+      </p:sp>
+      <p:pic>
+        <p:nvPicPr>
+          <p:cNvPr id="6" name="Picture 5" descr="fig_iii4_emballement.png"/>
+          <p:cNvPicPr>
+            <a:picLocks noChangeAspect="1"/>
+          </p:cNvPicPr>
+          <p:nvPr/>
+        </p:nvPicPr>
+        <p:blipFill>
+          <a:blip r:embed="rId2"/>
+          <a:stretch>
+            <a:fillRect/>
+          </a:stretch>
+        </p:blipFill>
+        <p:spPr>
+          <a:xfrm>
+            <a:off x="6400800" y="2495887"/>
+            <a:ext cx="5212080" cy="3146385"/>
+          </a:xfrm>
+          <a:prstGeom prst="rect">
+            <a:avLst/>
+          </a:prstGeom>
+        </p:spPr>
+      </p:pic>
+      <p:sp>
+        <p:nvSpPr>
+          <p:cNvPr id="7" name="TextBox 6"/>
           <p:cNvSpPr txBox="1"/>
           <p:nvPr/>
         </p:nvSpPr>
         <p:spPr>
           <a:xfrm>
             <a:off x="868680" y="2148840"/>
-            <a:ext cx="10424160" cy="1371600"/>
+            <a:ext cx="5349240" cy="4023360"/>
           </a:xfrm>
           <a:prstGeom prst="rect">
             <a:avLst/>
@@ -5984,13 +6516,13 @@
           <a:p>
             <a:pPr algn="l">
               <a:lnSpc>
-                <a:spcPct val="112000"/>
-              </a:lnSpc>
-              <a:spcBef>
-                <a:spcPts val="0"/>
-              </a:spcBef>
-              <a:spcAft>
-                <a:spcPts val="800"/>
+                <a:spcPct val="113000"/>
+              </a:lnSpc>
+              <a:spcBef>
+                <a:spcPts val="0"/>
+              </a:spcBef>
+              <a:spcAft>
+                <a:spcPts val="1100"/>
               </a:spcAft>
             </a:pPr>
             <a:r>
@@ -6000,169 +6532,159 @@
                 </a:solidFill>
                 <a:latin typeface="Calibri"/>
               </a:rPr>
-              <a:t>Aucun CMMS open-source (GLPI, OpenMaint, Snipe-IT…) n'offre d'API exploitable en version gratuite.</a:t>
+              <a:t>La section varie en r², donc </a:t>
+            </a:r>
+            <a:r>
+              <a:rPr sz="1500" b="1" i="1">
+                <a:solidFill>
+                  <a:srgbClr val="C9601A"/>
+                </a:solidFill>
+                <a:latin typeface="Georgia"/>
+              </a:rPr>
+              <a:t>R s'emballe en 1/r³</a:t>
+            </a:r>
+            <a:r>
+              <a:rPr sz="1400" b="0" i="0">
+                <a:solidFill>
+                  <a:srgbClr val="202B31"/>
+                </a:solidFill>
+                <a:latin typeface="Calibri"/>
+              </a:rPr>
+              <a:t>.</a:t>
             </a:r>
           </a:p>
           <a:p>
             <a:pPr algn="l">
               <a:lnSpc>
-                <a:spcPct val="112000"/>
-              </a:lnSpc>
-              <a:spcBef>
-                <a:spcPts val="0"/>
-              </a:spcBef>
-              <a:spcAft>
-                <a:spcPts val="800"/>
-              </a:spcAft>
-            </a:pPr>
-            <a:r>
-              <a:rPr sz="1400" b="1" i="0">
+                <a:spcPct val="113000"/>
+              </a:lnSpc>
+              <a:spcBef>
+                <a:spcPts val="0"/>
+              </a:spcBef>
+              <a:spcAft>
+                <a:spcPts val="1100"/>
+              </a:spcAft>
+            </a:pPr>
+            <a:r>
+              <a:rPr sz="1350" b="0" i="0">
+                <a:solidFill>
+                  <a:srgbClr val="202B31"/>
+                </a:solidFill>
+                <a:latin typeface="Calibri"/>
+              </a:rPr>
+              <a:t>La </a:t>
+            </a:r>
+            <a:r>
+              <a:rPr sz="1350" b="1" i="0">
+                <a:solidFill>
+                  <a:srgbClr val="202B31"/>
+                </a:solidFill>
+                <a:latin typeface="Calibri"/>
+              </a:rPr>
+              <a:t>rupture mécanique coïncide avec le début de l'emballement</a:t>
+            </a:r>
+            <a:r>
+              <a:rPr sz="1350" b="0" i="0">
+                <a:solidFill>
+                  <a:srgbClr val="202B31"/>
+                </a:solidFill>
+                <a:latin typeface="Calibri"/>
+              </a:rPr>
+              <a:t> : « section → 0 » = explosion de R ET perte de tenue.</a:t>
+            </a:r>
+          </a:p>
+          <a:p>
+            <a:pPr algn="l">
+              <a:lnSpc>
+                <a:spcPct val="113000"/>
+              </a:lnSpc>
+              <a:spcBef>
+                <a:spcPts val="0"/>
+              </a:spcBef>
+              <a:spcAft>
+                <a:spcPts val="1100"/>
+              </a:spcAft>
+            </a:pPr>
+            <a:r>
+              <a:rPr sz="1350" b="0" i="0">
+                <a:solidFill>
+                  <a:srgbClr val="202B31"/>
+                </a:solidFill>
+                <a:latin typeface="Calibri"/>
+              </a:rPr>
+              <a:t>Après rupture, </a:t>
+            </a:r>
+            <a:r>
+              <a:rPr sz="1350" b="1" i="0">
+                <a:solidFill>
+                  <a:srgbClr val="2C7A7B"/>
+                </a:solidFill>
+                <a:latin typeface="Calibri"/>
+              </a:rPr>
+              <a:t>la conduction résiduelle</a:t>
+            </a:r>
+            <a:r>
+              <a:rPr sz="1350" b="0" i="0">
+                <a:solidFill>
+                  <a:srgbClr val="202B31"/>
+                </a:solidFill>
+                <a:latin typeface="Calibri"/>
+              </a:rPr>
+              <a:t> (électrolyte HCl + dernier filament) maintient une résistance croissante jusqu'au circuit ouvert.</a:t>
+            </a:r>
+          </a:p>
+          <a:p>
+            <a:pPr algn="l">
+              <a:lnSpc>
+                <a:spcPct val="113000"/>
+              </a:lnSpc>
+              <a:spcBef>
+                <a:spcPts val="0"/>
+              </a:spcBef>
+              <a:spcAft>
+                <a:spcPts val="1100"/>
+              </a:spcAft>
+            </a:pPr>
+            <a:r>
+              <a:rPr sz="1350" b="0" i="0">
+                <a:solidFill>
+                  <a:srgbClr val="202B31"/>
+                </a:solidFill>
+                <a:latin typeface="Calibri"/>
+              </a:rPr>
+              <a:t>Cette portion terminale est </a:t>
+            </a:r>
+            <a:r>
+              <a:rPr sz="1350" b="1" i="0">
                 <a:solidFill>
                   <a:srgbClr val="C9601A"/>
                 </a:solidFill>
                 <a:latin typeface="Calibri"/>
               </a:rPr>
-              <a:t>→ </a:t>
-            </a:r>
-            <a:r>
-              <a:rPr sz="1450" b="1" i="0">
+              <a:t>électrolytique, non métallique</a:t>
+            </a:r>
+            <a:r>
+              <a:rPr sz="1350" b="0" i="0">
                 <a:solidFill>
                   <a:srgbClr val="202B31"/>
                 </a:solidFill>
-                <a:latin typeface="Georgia"/>
-              </a:rPr>
-              <a:t>Module GMAO maison</a:t>
-            </a:r>
-            <a:r>
-              <a:rPr sz="1400" b="0" i="0">
-                <a:solidFill>
-                  <a:srgbClr val="202B31"/>
-                </a:solidFill>
-                <a:latin typeface="Calibri"/>
-              </a:rPr>
-              <a:t> intégré à Streamlit + Supabase : à chaque alerte, un </a:t>
-            </a:r>
-            <a:r>
-              <a:rPr sz="1400" b="1" i="0">
-                <a:solidFill>
-                  <a:srgbClr val="C9601A"/>
-                </a:solidFill>
-                <a:latin typeface="Calibri"/>
-              </a:rPr>
-              <a:t>ordre de travail enrichi</a:t>
-            </a:r>
-            <a:r>
-              <a:rPr sz="1400" b="0" i="0">
-                <a:solidFill>
-                  <a:srgbClr val="202B31"/>
-                </a:solidFill>
-                <a:latin typeface="Calibri"/>
-              </a:rPr>
-              <a:t> (CR, RUL, régime, section) est généré et tracé, sans appel externe.</a:t>
-            </a:r>
-          </a:p>
-        </p:txBody>
-      </p:sp>
-      <p:sp>
-        <p:nvSpPr>
-          <p:cNvPr id="7" name="Rounded Rectangle 6"/>
-          <p:cNvSpPr/>
-          <p:nvPr/>
-        </p:nvSpPr>
-        <p:spPr>
-          <a:xfrm>
-            <a:off x="868680" y="3840480"/>
-            <a:ext cx="3419856" cy="2057400"/>
-          </a:xfrm>
-          <a:prstGeom prst="roundRect">
-            <a:avLst/>
-          </a:prstGeom>
-          <a:solidFill>
-            <a:srgbClr val="FFFFFF"/>
-          </a:solidFill>
-          <a:ln w="12700">
-            <a:solidFill>
-              <a:srgbClr val="E3DED4"/>
-            </a:solidFill>
-          </a:ln>
-          <a:effectLst/>
-        </p:spPr>
-        <p:style>
-          <a:lnRef idx="1">
-            <a:schemeClr val="accent1"/>
-          </a:lnRef>
-          <a:fillRef idx="3">
-            <a:schemeClr val="accent1"/>
-          </a:fillRef>
-          <a:effectRef idx="2">
-            <a:schemeClr val="accent1"/>
-          </a:effectRef>
-          <a:fontRef idx="minor">
-            <a:schemeClr val="lt1"/>
-          </a:fontRef>
-        </p:style>
-        <p:txBody>
-          <a:bodyPr rtlCol="0" anchor="ctr"/>
-          <a:lstStyle/>
-          <a:p>
-            <a:pPr algn="ctr"/>
-          </a:p>
-        </p:txBody>
-      </p:sp>
-      <p:sp>
-        <p:nvSpPr>
-          <p:cNvPr id="8" name="Rounded Rectangle 7"/>
-          <p:cNvSpPr/>
-          <p:nvPr/>
-        </p:nvSpPr>
-        <p:spPr>
-          <a:xfrm>
-            <a:off x="868680" y="3840480"/>
-            <a:ext cx="3419856" cy="109728"/>
-          </a:xfrm>
-          <a:prstGeom prst="roundRect">
-            <a:avLst/>
-          </a:prstGeom>
-          <a:solidFill>
-            <a:srgbClr val="2C7A7B"/>
-          </a:solidFill>
-          <a:ln>
-            <a:noFill/>
-          </a:ln>
-          <a:effectLst/>
-        </p:spPr>
-        <p:style>
-          <a:lnRef idx="1">
-            <a:schemeClr val="accent1"/>
-          </a:lnRef>
-          <a:fillRef idx="3">
-            <a:schemeClr val="accent1"/>
-          </a:fillRef>
-          <a:effectRef idx="2">
-            <a:schemeClr val="accent1"/>
-          </a:effectRef>
-          <a:fontRef idx="minor">
-            <a:schemeClr val="lt1"/>
-          </a:fontRef>
-        </p:style>
-        <p:txBody>
-          <a:bodyPr rtlCol="0" anchor="ctr"/>
-          <a:lstStyle/>
-          <a:p>
-            <a:pPr algn="ctr"/>
-          </a:p>
-        </p:txBody>
-      </p:sp>
-      <p:sp>
-        <p:nvSpPr>
-          <p:cNvPr id="9" name="TextBox 8"/>
+                <a:latin typeface="Calibri"/>
+              </a:rPr>
+              <a:t> : tronquée et exclue de l'apprentissage.</a:t>
+            </a:r>
+          </a:p>
+        </p:txBody>
+      </p:sp>
+      <p:sp>
+        <p:nvSpPr>
+          <p:cNvPr id="8" name="TextBox 7"/>
           <p:cNvSpPr txBox="1"/>
           <p:nvPr/>
         </p:nvSpPr>
         <p:spPr>
           <a:xfrm>
-            <a:off x="1124712" y="4114800"/>
-            <a:ext cx="2926080" cy="640080"/>
+            <a:off x="457200" y="6437376"/>
+            <a:ext cx="8229600" cy="320040"/>
           </a:xfrm>
           <a:prstGeom prst="rect">
             <a:avLst/>
@@ -6187,27 +6709,27 @@
               </a:spcAft>
             </a:pPr>
             <a:r>
-              <a:rPr sz="2300" b="1" i="0">
-                <a:solidFill>
-                  <a:srgbClr val="16252E"/>
-                </a:solidFill>
-                <a:latin typeface="Georgia"/>
-              </a:rPr>
-              <a:t>MTBF · MTTR</a:t>
-            </a:r>
-          </a:p>
-        </p:txBody>
-      </p:sp>
-      <p:sp>
-        <p:nvSpPr>
-          <p:cNvPr id="10" name="TextBox 9"/>
+              <a:rPr sz="900" b="0" i="0">
+                <a:solidFill>
+                  <a:srgbClr val="6B7A82"/>
+                </a:solidFill>
+                <a:latin typeface="Calibri"/>
+              </a:rPr>
+              <a:t>Maintenance prédictive de la corrosion  ·  ESTL La Salle  ·  2025–2026</a:t>
+            </a:r>
+          </a:p>
+        </p:txBody>
+      </p:sp>
+      <p:sp>
+        <p:nvSpPr>
+          <p:cNvPr id="9" name="TextBox 8"/>
           <p:cNvSpPr txBox="1"/>
           <p:nvPr/>
         </p:nvSpPr>
         <p:spPr>
           <a:xfrm>
-            <a:off x="1124712" y="4892040"/>
-            <a:ext cx="2926080" cy="914400"/>
+            <a:off x="10424160" y="6437376"/>
+            <a:ext cx="1325880" cy="320040"/>
           </a:xfrm>
           <a:prstGeom prst="rect">
             <a:avLst/>
@@ -6220,9 +6742,9 @@
           </a:bodyPr>
           <a:lstStyle/>
           <a:p>
-            <a:pPr algn="l">
-              <a:lnSpc>
-                <a:spcPct val="112000"/>
+            <a:pPr algn="r">
+              <a:lnSpc>
+                <a:spcPct val="100000"/>
               </a:lnSpc>
               <a:spcBef>
                 <a:spcPts val="0"/>
@@ -6232,463 +6754,13 @@
               </a:spcAft>
             </a:pPr>
             <a:r>
-              <a:rPr sz="1300" b="0" i="0">
-                <a:solidFill>
-                  <a:srgbClr val="6B7A82"/>
-                </a:solidFill>
-                <a:latin typeface="Calibri"/>
-              </a:rPr>
-              <a:t>indicateurs de maintenance calculés sur l'historique des OT</a:t>
-            </a:r>
-          </a:p>
-        </p:txBody>
-      </p:sp>
-      <p:sp>
-        <p:nvSpPr>
-          <p:cNvPr id="11" name="Rounded Rectangle 10"/>
-          <p:cNvSpPr/>
-          <p:nvPr/>
-        </p:nvSpPr>
-        <p:spPr>
-          <a:xfrm>
-            <a:off x="4462272" y="3840480"/>
-            <a:ext cx="3419856" cy="2057400"/>
-          </a:xfrm>
-          <a:prstGeom prst="roundRect">
-            <a:avLst/>
-          </a:prstGeom>
-          <a:solidFill>
-            <a:srgbClr val="FFFFFF"/>
-          </a:solidFill>
-          <a:ln w="12700">
-            <a:solidFill>
-              <a:srgbClr val="E3DED4"/>
-            </a:solidFill>
-          </a:ln>
-          <a:effectLst/>
-        </p:spPr>
-        <p:style>
-          <a:lnRef idx="1">
-            <a:schemeClr val="accent1"/>
-          </a:lnRef>
-          <a:fillRef idx="3">
-            <a:schemeClr val="accent1"/>
-          </a:fillRef>
-          <a:effectRef idx="2">
-            <a:schemeClr val="accent1"/>
-          </a:effectRef>
-          <a:fontRef idx="minor">
-            <a:schemeClr val="lt1"/>
-          </a:fontRef>
-        </p:style>
-        <p:txBody>
-          <a:bodyPr rtlCol="0" anchor="ctr"/>
-          <a:lstStyle/>
-          <a:p>
-            <a:pPr algn="ctr"/>
-          </a:p>
-        </p:txBody>
-      </p:sp>
-      <p:sp>
-        <p:nvSpPr>
-          <p:cNvPr id="12" name="Rounded Rectangle 11"/>
-          <p:cNvSpPr/>
-          <p:nvPr/>
-        </p:nvSpPr>
-        <p:spPr>
-          <a:xfrm>
-            <a:off x="4462272" y="3840480"/>
-            <a:ext cx="3419856" cy="109728"/>
-          </a:xfrm>
-          <a:prstGeom prst="roundRect">
-            <a:avLst/>
-          </a:prstGeom>
-          <a:solidFill>
-            <a:srgbClr val="2C7A7B"/>
-          </a:solidFill>
-          <a:ln>
-            <a:noFill/>
-          </a:ln>
-          <a:effectLst/>
-        </p:spPr>
-        <p:style>
-          <a:lnRef idx="1">
-            <a:schemeClr val="accent1"/>
-          </a:lnRef>
-          <a:fillRef idx="3">
-            <a:schemeClr val="accent1"/>
-          </a:fillRef>
-          <a:effectRef idx="2">
-            <a:schemeClr val="accent1"/>
-          </a:effectRef>
-          <a:fontRef idx="minor">
-            <a:schemeClr val="lt1"/>
-          </a:fontRef>
-        </p:style>
-        <p:txBody>
-          <a:bodyPr rtlCol="0" anchor="ctr"/>
-          <a:lstStyle/>
-          <a:p>
-            <a:pPr algn="ctr"/>
-          </a:p>
-        </p:txBody>
-      </p:sp>
-      <p:sp>
-        <p:nvSpPr>
-          <p:cNvPr id="13" name="TextBox 12"/>
-          <p:cNvSpPr txBox="1"/>
-          <p:nvPr/>
-        </p:nvSpPr>
-        <p:spPr>
-          <a:xfrm>
-            <a:off x="4718304" y="4114800"/>
-            <a:ext cx="2926080" cy="640080"/>
-          </a:xfrm>
-          <a:prstGeom prst="rect">
-            <a:avLst/>
-          </a:prstGeom>
-          <a:noFill/>
-        </p:spPr>
-        <p:txBody>
-          <a:bodyPr wrap="square" anchor="t" lIns="0" rIns="0" tIns="0" bIns="0">
-            <a:spAutoFit/>
-          </a:bodyPr>
-          <a:lstStyle/>
-          <a:p>
-            <a:pPr algn="l">
-              <a:lnSpc>
-                <a:spcPct val="100000"/>
-              </a:lnSpc>
-              <a:spcBef>
-                <a:spcPts val="0"/>
-              </a:spcBef>
-              <a:spcAft>
-                <a:spcPts val="400"/>
-              </a:spcAft>
-            </a:pPr>
-            <a:r>
-              <a:rPr sz="2300" b="1" i="0">
-                <a:solidFill>
-                  <a:srgbClr val="16252E"/>
-                </a:solidFill>
-                <a:latin typeface="Georgia"/>
-              </a:rPr>
-              <a:t>Gratuit</a:t>
-            </a:r>
-          </a:p>
-        </p:txBody>
-      </p:sp>
-      <p:sp>
-        <p:nvSpPr>
-          <p:cNvPr id="14" name="TextBox 13"/>
-          <p:cNvSpPr txBox="1"/>
-          <p:nvPr/>
-        </p:nvSpPr>
-        <p:spPr>
-          <a:xfrm>
-            <a:off x="4718304" y="4892040"/>
-            <a:ext cx="2926080" cy="914400"/>
-          </a:xfrm>
-          <a:prstGeom prst="rect">
-            <a:avLst/>
-          </a:prstGeom>
-          <a:noFill/>
-        </p:spPr>
-        <p:txBody>
-          <a:bodyPr wrap="square" anchor="t" lIns="0" rIns="0" tIns="0" bIns="0">
-            <a:spAutoFit/>
-          </a:bodyPr>
-          <a:lstStyle/>
-          <a:p>
-            <a:pPr algn="l">
-              <a:lnSpc>
-                <a:spcPct val="112000"/>
-              </a:lnSpc>
-              <a:spcBef>
-                <a:spcPts val="0"/>
-              </a:spcBef>
-              <a:spcAft>
-                <a:spcPts val="400"/>
-              </a:spcAft>
-            </a:pPr>
-            <a:r>
-              <a:rPr sz="1300" b="0" i="0">
-                <a:solidFill>
-                  <a:srgbClr val="6B7A82"/>
-                </a:solidFill>
-                <a:latin typeface="Calibri"/>
-              </a:rPr>
-              <a:t>coût de licence nul, accessible aux PME africaines</a:t>
-            </a:r>
-          </a:p>
-        </p:txBody>
-      </p:sp>
-      <p:sp>
-        <p:nvSpPr>
-          <p:cNvPr id="15" name="Rounded Rectangle 14"/>
-          <p:cNvSpPr/>
-          <p:nvPr/>
-        </p:nvSpPr>
-        <p:spPr>
-          <a:xfrm>
-            <a:off x="8055864" y="3840480"/>
-            <a:ext cx="3419856" cy="2057400"/>
-          </a:xfrm>
-          <a:prstGeom prst="roundRect">
-            <a:avLst/>
-          </a:prstGeom>
-          <a:solidFill>
-            <a:srgbClr val="FFFFFF"/>
-          </a:solidFill>
-          <a:ln w="12700">
-            <a:solidFill>
-              <a:srgbClr val="E3DED4"/>
-            </a:solidFill>
-          </a:ln>
-          <a:effectLst/>
-        </p:spPr>
-        <p:style>
-          <a:lnRef idx="1">
-            <a:schemeClr val="accent1"/>
-          </a:lnRef>
-          <a:fillRef idx="3">
-            <a:schemeClr val="accent1"/>
-          </a:fillRef>
-          <a:effectRef idx="2">
-            <a:schemeClr val="accent1"/>
-          </a:effectRef>
-          <a:fontRef idx="minor">
-            <a:schemeClr val="lt1"/>
-          </a:fontRef>
-        </p:style>
-        <p:txBody>
-          <a:bodyPr rtlCol="0" anchor="ctr"/>
-          <a:lstStyle/>
-          <a:p>
-            <a:pPr algn="ctr"/>
-          </a:p>
-        </p:txBody>
-      </p:sp>
-      <p:sp>
-        <p:nvSpPr>
-          <p:cNvPr id="16" name="Rounded Rectangle 15"/>
-          <p:cNvSpPr/>
-          <p:nvPr/>
-        </p:nvSpPr>
-        <p:spPr>
-          <a:xfrm>
-            <a:off x="8055864" y="3840480"/>
-            <a:ext cx="3419856" cy="109728"/>
-          </a:xfrm>
-          <a:prstGeom prst="roundRect">
-            <a:avLst/>
-          </a:prstGeom>
-          <a:solidFill>
-            <a:srgbClr val="2C7A7B"/>
-          </a:solidFill>
-          <a:ln>
-            <a:noFill/>
-          </a:ln>
-          <a:effectLst/>
-        </p:spPr>
-        <p:style>
-          <a:lnRef idx="1">
-            <a:schemeClr val="accent1"/>
-          </a:lnRef>
-          <a:fillRef idx="3">
-            <a:schemeClr val="accent1"/>
-          </a:fillRef>
-          <a:effectRef idx="2">
-            <a:schemeClr val="accent1"/>
-          </a:effectRef>
-          <a:fontRef idx="minor">
-            <a:schemeClr val="lt1"/>
-          </a:fontRef>
-        </p:style>
-        <p:txBody>
-          <a:bodyPr rtlCol="0" anchor="ctr"/>
-          <a:lstStyle/>
-          <a:p>
-            <a:pPr algn="ctr"/>
-          </a:p>
-        </p:txBody>
-      </p:sp>
-      <p:sp>
-        <p:nvSpPr>
-          <p:cNvPr id="17" name="TextBox 16"/>
-          <p:cNvSpPr txBox="1"/>
-          <p:nvPr/>
-        </p:nvSpPr>
-        <p:spPr>
-          <a:xfrm>
-            <a:off x="8311896" y="4114800"/>
-            <a:ext cx="2926080" cy="640080"/>
-          </a:xfrm>
-          <a:prstGeom prst="rect">
-            <a:avLst/>
-          </a:prstGeom>
-          <a:noFill/>
-        </p:spPr>
-        <p:txBody>
-          <a:bodyPr wrap="square" anchor="t" lIns="0" rIns="0" tIns="0" bIns="0">
-            <a:spAutoFit/>
-          </a:bodyPr>
-          <a:lstStyle/>
-          <a:p>
-            <a:pPr algn="l">
-              <a:lnSpc>
-                <a:spcPct val="100000"/>
-              </a:lnSpc>
-              <a:spcBef>
-                <a:spcPts val="0"/>
-              </a:spcBef>
-              <a:spcAft>
-                <a:spcPts val="400"/>
-              </a:spcAft>
-            </a:pPr>
-            <a:r>
-              <a:rPr sz="2300" b="1" i="0">
-                <a:solidFill>
-                  <a:srgbClr val="16252E"/>
-                </a:solidFill>
-                <a:latin typeface="Georgia"/>
-              </a:rPr>
-              <a:t>Transposable</a:t>
-            </a:r>
-          </a:p>
-        </p:txBody>
-      </p:sp>
-      <p:sp>
-        <p:nvSpPr>
-          <p:cNvPr id="18" name="TextBox 17"/>
-          <p:cNvSpPr txBox="1"/>
-          <p:nvPr/>
-        </p:nvSpPr>
-        <p:spPr>
-          <a:xfrm>
-            <a:off x="8311896" y="4892040"/>
-            <a:ext cx="2926080" cy="914400"/>
-          </a:xfrm>
-          <a:prstGeom prst="rect">
-            <a:avLst/>
-          </a:prstGeom>
-          <a:noFill/>
-        </p:spPr>
-        <p:txBody>
-          <a:bodyPr wrap="square" anchor="t" lIns="0" rIns="0" tIns="0" bIns="0">
-            <a:spAutoFit/>
-          </a:bodyPr>
-          <a:lstStyle/>
-          <a:p>
-            <a:pPr algn="l">
-              <a:lnSpc>
-                <a:spcPct val="112000"/>
-              </a:lnSpc>
-              <a:spcBef>
-                <a:spcPts val="0"/>
-              </a:spcBef>
-              <a:spcAft>
-                <a:spcPts val="400"/>
-              </a:spcAft>
-            </a:pPr>
-            <a:r>
-              <a:rPr sz="1300" b="0" i="0">
-                <a:solidFill>
-                  <a:srgbClr val="6B7A82"/>
-                </a:solidFill>
-                <a:latin typeface="Calibri"/>
-              </a:rPr>
-              <a:t>même mapping reportable sur un CMMS open-source</a:t>
-            </a:r>
-          </a:p>
-        </p:txBody>
-      </p:sp>
-      <p:sp>
-        <p:nvSpPr>
-          <p:cNvPr id="19" name="TextBox 18"/>
-          <p:cNvSpPr txBox="1"/>
-          <p:nvPr/>
-        </p:nvSpPr>
-        <p:spPr>
-          <a:xfrm>
-            <a:off x="457200" y="6437376"/>
-            <a:ext cx="8229600" cy="320040"/>
-          </a:xfrm>
-          <a:prstGeom prst="rect">
-            <a:avLst/>
-          </a:prstGeom>
-          <a:noFill/>
-        </p:spPr>
-        <p:txBody>
-          <a:bodyPr wrap="square" anchor="t" lIns="0" rIns="0" tIns="0" bIns="0">
-            <a:spAutoFit/>
-          </a:bodyPr>
-          <a:lstStyle/>
-          <a:p>
-            <a:pPr algn="l">
-              <a:lnSpc>
-                <a:spcPct val="100000"/>
-              </a:lnSpc>
-              <a:spcBef>
-                <a:spcPts val="0"/>
-              </a:spcBef>
-              <a:spcAft>
-                <a:spcPts val="400"/>
-              </a:spcAft>
-            </a:pPr>
-            <a:r>
-              <a:rPr sz="900" b="0" i="0">
-                <a:solidFill>
-                  <a:srgbClr val="6B7A82"/>
-                </a:solidFill>
-                <a:latin typeface="Calibri"/>
-              </a:rPr>
-              <a:t>Maintenance prédictive de la corrosion  ·  ESTL La Salle  ·  2025–2026</a:t>
-            </a:r>
-          </a:p>
-        </p:txBody>
-      </p:sp>
-      <p:sp>
-        <p:nvSpPr>
-          <p:cNvPr id="20" name="TextBox 19"/>
-          <p:cNvSpPr txBox="1"/>
-          <p:nvPr/>
-        </p:nvSpPr>
-        <p:spPr>
-          <a:xfrm>
-            <a:off x="10424160" y="6437376"/>
-            <a:ext cx="1325880" cy="320040"/>
-          </a:xfrm>
-          <a:prstGeom prst="rect">
-            <a:avLst/>
-          </a:prstGeom>
-          <a:noFill/>
-        </p:spPr>
-        <p:txBody>
-          <a:bodyPr wrap="square" anchor="t" lIns="0" rIns="0" tIns="0" bIns="0">
-            <a:spAutoFit/>
-          </a:bodyPr>
-          <a:lstStyle/>
-          <a:p>
-            <a:pPr algn="r">
-              <a:lnSpc>
-                <a:spcPct val="100000"/>
-              </a:lnSpc>
-              <a:spcBef>
-                <a:spcPts val="0"/>
-              </a:spcBef>
-              <a:spcAft>
-                <a:spcPts val="400"/>
-              </a:spcAft>
-            </a:pPr>
-            <a:r>
               <a:rPr sz="1000" b="1" i="0">
                 <a:solidFill>
                   <a:srgbClr val="C9601A"/>
                 </a:solidFill>
                 <a:latin typeface="Calibri"/>
               </a:rPr>
-              <a:t>14 / 19</a:t>
+              <a:t>14 / 20</a:t>
             </a:r>
           </a:p>
         </p:txBody>
@@ -6835,11 +6907,11 @@
             <a:r>
               <a:rPr sz="1250" b="1" i="0">
                 <a:solidFill>
-                  <a:srgbClr val="C9601A"/>
-                </a:solidFill>
-                <a:latin typeface="Calibri"/>
-              </a:rPr>
-              <a:t>PERSPECTIVE</a:t>
+                  <a:srgbClr val="2C7A7B"/>
+                </a:solidFill>
+                <a:latin typeface="Calibri"/>
+              </a:rPr>
+              <a:t>RÉSULTATS · OS4</a:t>
             </a:r>
           </a:p>
         </p:txBody>
@@ -6884,45 +6956,21 @@
                 </a:solidFill>
                 <a:latin typeface="Georgia"/>
               </a:rPr>
-              <a:t>Jumeau numérique : prédire, confirmer, apprendre des écarts</a:t>
-            </a:r>
-          </a:p>
-        </p:txBody>
-      </p:sp>
-      <p:pic>
-        <p:nvPicPr>
-          <p:cNvPr id="6" name="Picture 5" descr="fig_iii3_band_scorecard.png"/>
-          <p:cNvPicPr>
-            <a:picLocks noChangeAspect="1"/>
-          </p:cNvPicPr>
-          <p:nvPr/>
-        </p:nvPicPr>
-        <p:blipFill>
-          <a:blip r:embed="rId2"/>
-          <a:stretch>
-            <a:fillRect/>
-          </a:stretch>
-        </p:blipFill>
-        <p:spPr>
-          <a:xfrm>
-            <a:off x="6355080" y="2707165"/>
-            <a:ext cx="5257800" cy="2083749"/>
-          </a:xfrm>
-          <a:prstGeom prst="rect">
-            <a:avLst/>
-          </a:prstGeom>
-        </p:spPr>
-      </p:pic>
-      <p:sp>
-        <p:nvSpPr>
-          <p:cNvPr id="7" name="TextBox 6"/>
+              <a:t>Boucle décision → action : un module GMAO maison</a:t>
+            </a:r>
+          </a:p>
+        </p:txBody>
+      </p:sp>
+      <p:sp>
+        <p:nvSpPr>
+          <p:cNvPr id="6" name="TextBox 5"/>
           <p:cNvSpPr txBox="1"/>
           <p:nvPr/>
         </p:nvSpPr>
         <p:spPr>
           <a:xfrm>
-            <a:off x="868680" y="2057400"/>
-            <a:ext cx="5303520" cy="1280160"/>
+            <a:off x="868680" y="2148840"/>
+            <a:ext cx="10424160" cy="1371600"/>
           </a:xfrm>
           <a:prstGeom prst="rect">
             <a:avLst/>
@@ -6943,7 +6991,7 @@
                 <a:spcPts val="0"/>
               </a:spcBef>
               <a:spcAft>
-                <a:spcPts val="600"/>
+                <a:spcPts val="800"/>
               </a:spcAft>
             </a:pPr>
             <a:r>
@@ -6953,16 +7001,38 @@
                 </a:solidFill>
                 <a:latin typeface="Calibri"/>
               </a:rPr>
-              <a:t>Un jumeau calibré sur les essais réels génère une </a:t>
-            </a:r>
+              <a:t>Aucun CMMS open-source (GLPI, OpenMaint, Snipe-IT…) n'offre d'API exploitable en version gratuite.</a:t>
+            </a:r>
+          </a:p>
+          <a:p>
+            <a:pPr algn="l">
+              <a:lnSpc>
+                <a:spcPct val="112000"/>
+              </a:lnSpc>
+              <a:spcBef>
+                <a:spcPts val="0"/>
+              </a:spcBef>
+              <a:spcAft>
+                <a:spcPts val="800"/>
+              </a:spcAft>
+            </a:pPr>
             <a:r>
               <a:rPr sz="1400" b="1" i="0">
                 <a:solidFill>
                   <a:srgbClr val="C9601A"/>
                 </a:solidFill>
+                <a:latin typeface="Calibri"/>
+              </a:rPr>
+              <a:t>→ </a:t>
+            </a:r>
+            <a:r>
+              <a:rPr sz="1450" b="1" i="0">
+                <a:solidFill>
+                  <a:srgbClr val="202B31"/>
+                </a:solidFill>
                 <a:latin typeface="Georgia"/>
               </a:rPr>
-              <a:t>bande prédictive de durée de vie</a:t>
+              <a:t>Module GMAO maison</a:t>
             </a:r>
             <a:r>
               <a:rPr sz="1400" b="0" i="0">
@@ -6971,16 +7041,16 @@
                 </a:solidFill>
                 <a:latin typeface="Calibri"/>
               </a:rPr>
-              <a:t>, l'un des </a:t>
+              <a:t> intégré à Streamlit + Supabase : à chaque alerte, un </a:t>
             </a:r>
             <a:r>
               <a:rPr sz="1400" b="1" i="0">
                 <a:solidFill>
-                  <a:srgbClr val="2C7A7B"/>
-                </a:solidFill>
-                <a:latin typeface="Calibri"/>
-              </a:rPr>
-              <a:t>trois estimateurs</a:t>
+                  <a:srgbClr val="C9601A"/>
+                </a:solidFill>
+                <a:latin typeface="Calibri"/>
+              </a:rPr>
+              <a:t>ordre de travail enrichi</a:t>
             </a:r>
             <a:r>
               <a:rPr sz="1400" b="0" i="0">
@@ -6989,31 +7059,31 @@
                 </a:solidFill>
                 <a:latin typeface="Calibri"/>
               </a:rPr>
-              <a:t> confrontés en live (physique · XGBoost · jumeau).</a:t>
-            </a:r>
-          </a:p>
-        </p:txBody>
-      </p:sp>
-      <p:sp>
-        <p:nvSpPr>
-          <p:cNvPr id="8" name="Rounded Rectangle 7"/>
+              <a:t> (CR, RUL, régime, section) est généré et tracé, sans appel externe.</a:t>
+            </a:r>
+          </a:p>
+        </p:txBody>
+      </p:sp>
+      <p:sp>
+        <p:nvSpPr>
+          <p:cNvPr id="7" name="Rounded Rectangle 6"/>
           <p:cNvSpPr/>
           <p:nvPr/>
         </p:nvSpPr>
         <p:spPr>
           <a:xfrm>
-            <a:off x="868680" y="3383280"/>
-            <a:ext cx="5303520" cy="1463040"/>
+            <a:off x="868680" y="3840480"/>
+            <a:ext cx="3419856" cy="2057400"/>
           </a:xfrm>
           <a:prstGeom prst="roundRect">
             <a:avLst/>
           </a:prstGeom>
           <a:solidFill>
-            <a:srgbClr val="16252E"/>
+            <a:srgbClr val="FFFFFF"/>
           </a:solidFill>
           <a:ln w="12700">
             <a:solidFill>
-              <a:srgbClr val="16252E"/>
+              <a:srgbClr val="E3DED4"/>
             </a:solidFill>
           </a:ln>
           <a:effectLst/>
@@ -7042,14 +7112,58 @@
       </p:sp>
       <p:sp>
         <p:nvSpPr>
+          <p:cNvPr id="8" name="Rounded Rectangle 7"/>
+          <p:cNvSpPr/>
+          <p:nvPr/>
+        </p:nvSpPr>
+        <p:spPr>
+          <a:xfrm>
+            <a:off x="868680" y="3840480"/>
+            <a:ext cx="3419856" cy="109728"/>
+          </a:xfrm>
+          <a:prstGeom prst="roundRect">
+            <a:avLst/>
+          </a:prstGeom>
+          <a:solidFill>
+            <a:srgbClr val="2C7A7B"/>
+          </a:solidFill>
+          <a:ln>
+            <a:noFill/>
+          </a:ln>
+          <a:effectLst/>
+        </p:spPr>
+        <p:style>
+          <a:lnRef idx="1">
+            <a:schemeClr val="accent1"/>
+          </a:lnRef>
+          <a:fillRef idx="3">
+            <a:schemeClr val="accent1"/>
+          </a:fillRef>
+          <a:effectRef idx="2">
+            <a:schemeClr val="accent1"/>
+          </a:effectRef>
+          <a:fontRef idx="minor">
+            <a:schemeClr val="lt1"/>
+          </a:fontRef>
+        </p:style>
+        <p:txBody>
+          <a:bodyPr rtlCol="0" anchor="ctr"/>
+          <a:lstStyle/>
+          <a:p>
+            <a:pPr algn="ctr"/>
+          </a:p>
+        </p:txBody>
+      </p:sp>
+      <p:sp>
+        <p:nvSpPr>
           <p:cNvPr id="9" name="TextBox 8"/>
           <p:cNvSpPr txBox="1"/>
           <p:nvPr/>
         </p:nvSpPr>
         <p:spPr>
           <a:xfrm>
-            <a:off x="1143000" y="3547872"/>
-            <a:ext cx="4892040" cy="1143000"/>
+            <a:off x="1124712" y="4114800"/>
+            <a:ext cx="2926080" cy="640080"/>
           </a:xfrm>
           <a:prstGeom prst="rect">
             <a:avLst/>
@@ -7064,7 +7178,7 @@
           <a:p>
             <a:pPr algn="l">
               <a:lnSpc>
-                <a:spcPct val="112000"/>
+                <a:spcPct val="100000"/>
               </a:lnSpc>
               <a:spcBef>
                 <a:spcPts val="0"/>
@@ -7074,93 +7188,13 @@
               </a:spcAft>
             </a:pPr>
             <a:r>
-              <a:rPr sz="1300" b="1" i="0">
-                <a:solidFill>
-                  <a:srgbClr val="CADDDC"/>
-                </a:solidFill>
-                <a:latin typeface="Calibri"/>
-              </a:rPr>
-              <a:t>Deux tests « prédire-puis-confirmer » :</a:t>
-            </a:r>
-          </a:p>
-          <a:p>
-            <a:pPr algn="l">
-              <a:lnSpc>
-                <a:spcPct val="112000"/>
-              </a:lnSpc>
-              <a:spcBef>
-                <a:spcPts val="0"/>
-              </a:spcBef>
-              <a:spcAft>
-                <a:spcPts val="400"/>
-              </a:spcAft>
-            </a:pPr>
-            <a:r>
-              <a:rPr sz="1350" b="0" i="0">
-                <a:solidFill>
-                  <a:srgbClr val="CADDDC"/>
-                </a:solidFill>
-                <a:latin typeface="Calibri"/>
-              </a:rPr>
-              <a:t>Run #21 : </a:t>
-            </a:r>
-            <a:r>
-              <a:rPr sz="1500" b="1" i="0">
-                <a:solidFill>
-                  <a:srgbClr val="FFFFFF"/>
+              <a:rPr sz="2300" b="1" i="0">
+                <a:solidFill>
+                  <a:srgbClr val="16252E"/>
                 </a:solidFill>
                 <a:latin typeface="Georgia"/>
               </a:rPr>
-              <a:t>13,1 h</a:t>
-            </a:r>
-            <a:r>
-              <a:rPr sz="1250" b="1" i="0">
-                <a:solidFill>
-                  <a:srgbClr val="2C7A7B"/>
-                </a:solidFill>
-                <a:latin typeface="Calibri"/>
-              </a:rPr>
-              <a:t>   ✓ dans la bande</a:t>
-            </a:r>
-          </a:p>
-          <a:p>
-            <a:pPr algn="l">
-              <a:lnSpc>
-                <a:spcPct val="112000"/>
-              </a:lnSpc>
-              <a:spcBef>
-                <a:spcPts val="0"/>
-              </a:spcBef>
-              <a:spcAft>
-                <a:spcPts val="400"/>
-              </a:spcAft>
-            </a:pPr>
-            <a:r>
-              <a:rPr sz="1350" b="0" i="0">
-                <a:solidFill>
-                  <a:srgbClr val="CADDDC"/>
-                </a:solidFill>
-                <a:latin typeface="Calibri"/>
-              </a:rPr>
-              <a:t>Run #22 : </a:t>
-            </a:r>
-            <a:r>
-              <a:rPr sz="1500" b="1" i="0">
-                <a:solidFill>
-                  <a:srgbClr val="C9601A"/>
-                </a:solidFill>
-                <a:latin typeface="Georgia"/>
-              </a:rPr>
-              <a:t>11,95 h</a:t>
-            </a:r>
-            <a:r>
-              <a:rPr sz="1250" b="1" i="0">
-                <a:solidFill>
-                  <a:srgbClr val="C9601A"/>
-                </a:solidFill>
-                <a:latin typeface="Calibri"/>
-              </a:rPr>
-              <a:t>   ✗ en deçà (le plus rapide)</a:t>
+              <a:t>MTBF · MTTR</a:t>
             </a:r>
           </a:p>
         </p:txBody>
@@ -7173,8 +7207,8 @@
         </p:nvSpPr>
         <p:spPr>
           <a:xfrm>
-            <a:off x="868680" y="5029200"/>
-            <a:ext cx="5303520" cy="1005840"/>
+            <a:off x="1124712" y="4892040"/>
+            <a:ext cx="2926080" cy="914400"/>
           </a:xfrm>
           <a:prstGeom prst="rect">
             <a:avLst/>
@@ -7189,7 +7223,7 @@
           <a:p>
             <a:pPr algn="l">
               <a:lnSpc>
-                <a:spcPct val="108000"/>
+                <a:spcPct val="112000"/>
               </a:lnSpc>
               <a:spcBef>
                 <a:spcPts val="0"/>
@@ -7199,81 +7233,117 @@
               </a:spcAft>
             </a:pPr>
             <a:r>
-              <a:rPr sz="1250" b="0" i="0">
-                <a:solidFill>
-                  <a:srgbClr val="202B31"/>
-                </a:solidFill>
-                <a:latin typeface="Calibri"/>
-              </a:rPr>
-              <a:t>Le jumeau </a:t>
-            </a:r>
-            <a:r>
-              <a:rPr sz="1250" b="1" i="0">
-                <a:solidFill>
-                  <a:srgbClr val="C9601A"/>
-                </a:solidFill>
-                <a:latin typeface="Calibri"/>
-              </a:rPr>
-              <a:t>interpole</a:t>
-            </a:r>
-            <a:r>
-              <a:rPr sz="1250" b="0" i="0">
-                <a:solidFill>
-                  <a:srgbClr val="202B31"/>
-                </a:solidFill>
-                <a:latin typeface="Calibri"/>
-              </a:rPr>
-              <a:t> entre morphologies vues, il n'</a:t>
-            </a:r>
-            <a:r>
-              <a:rPr sz="1250" b="1" i="0">
-                <a:solidFill>
-                  <a:srgbClr val="C9601A"/>
-                </a:solidFill>
-                <a:latin typeface="Calibri"/>
-              </a:rPr>
-              <a:t>extrapole</a:t>
-            </a:r>
-            <a:r>
-              <a:rPr sz="1250" b="0" i="0">
-                <a:solidFill>
-                  <a:srgbClr val="202B31"/>
-                </a:solidFill>
-                <a:latin typeface="Calibri"/>
-              </a:rPr>
-              <a:t> pas. La prédictibilité tient à la répétition au sein d'une </a:t>
-            </a:r>
-            <a:r>
-              <a:rPr sz="1250" b="1" i="0">
-                <a:solidFill>
-                  <a:srgbClr val="2C7A7B"/>
-                </a:solidFill>
-                <a:latin typeface="Calibri"/>
-              </a:rPr>
-              <a:t>même morphologie</a:t>
-            </a:r>
-            <a:r>
-              <a:rPr sz="1250" b="0" i="0">
-                <a:solidFill>
-                  <a:srgbClr val="202B31"/>
-                </a:solidFill>
-                <a:latin typeface="Calibri"/>
-              </a:rPr>
-              <a:t>, pas au simple nombre d'essais.</a:t>
-            </a:r>
-          </a:p>
-        </p:txBody>
-      </p:sp>
-      <p:sp>
-        <p:nvSpPr>
-          <p:cNvPr id="11" name="TextBox 10"/>
+              <a:rPr sz="1300" b="0" i="0">
+                <a:solidFill>
+                  <a:srgbClr val="6B7A82"/>
+                </a:solidFill>
+                <a:latin typeface="Calibri"/>
+              </a:rPr>
+              <a:t>indicateurs de maintenance calculés sur l'historique des OT</a:t>
+            </a:r>
+          </a:p>
+        </p:txBody>
+      </p:sp>
+      <p:sp>
+        <p:nvSpPr>
+          <p:cNvPr id="11" name="Rounded Rectangle 10"/>
+          <p:cNvSpPr/>
+          <p:nvPr/>
+        </p:nvSpPr>
+        <p:spPr>
+          <a:xfrm>
+            <a:off x="4462272" y="3840480"/>
+            <a:ext cx="3419856" cy="2057400"/>
+          </a:xfrm>
+          <a:prstGeom prst="roundRect">
+            <a:avLst/>
+          </a:prstGeom>
+          <a:solidFill>
+            <a:srgbClr val="FFFFFF"/>
+          </a:solidFill>
+          <a:ln w="12700">
+            <a:solidFill>
+              <a:srgbClr val="E3DED4"/>
+            </a:solidFill>
+          </a:ln>
+          <a:effectLst/>
+        </p:spPr>
+        <p:style>
+          <a:lnRef idx="1">
+            <a:schemeClr val="accent1"/>
+          </a:lnRef>
+          <a:fillRef idx="3">
+            <a:schemeClr val="accent1"/>
+          </a:fillRef>
+          <a:effectRef idx="2">
+            <a:schemeClr val="accent1"/>
+          </a:effectRef>
+          <a:fontRef idx="minor">
+            <a:schemeClr val="lt1"/>
+          </a:fontRef>
+        </p:style>
+        <p:txBody>
+          <a:bodyPr rtlCol="0" anchor="ctr"/>
+          <a:lstStyle/>
+          <a:p>
+            <a:pPr algn="ctr"/>
+          </a:p>
+        </p:txBody>
+      </p:sp>
+      <p:sp>
+        <p:nvSpPr>
+          <p:cNvPr id="12" name="Rounded Rectangle 11"/>
+          <p:cNvSpPr/>
+          <p:nvPr/>
+        </p:nvSpPr>
+        <p:spPr>
+          <a:xfrm>
+            <a:off x="4462272" y="3840480"/>
+            <a:ext cx="3419856" cy="109728"/>
+          </a:xfrm>
+          <a:prstGeom prst="roundRect">
+            <a:avLst/>
+          </a:prstGeom>
+          <a:solidFill>
+            <a:srgbClr val="2C7A7B"/>
+          </a:solidFill>
+          <a:ln>
+            <a:noFill/>
+          </a:ln>
+          <a:effectLst/>
+        </p:spPr>
+        <p:style>
+          <a:lnRef idx="1">
+            <a:schemeClr val="accent1"/>
+          </a:lnRef>
+          <a:fillRef idx="3">
+            <a:schemeClr val="accent1"/>
+          </a:fillRef>
+          <a:effectRef idx="2">
+            <a:schemeClr val="accent1"/>
+          </a:effectRef>
+          <a:fontRef idx="minor">
+            <a:schemeClr val="lt1"/>
+          </a:fontRef>
+        </p:style>
+        <p:txBody>
+          <a:bodyPr rtlCol="0" anchor="ctr"/>
+          <a:lstStyle/>
+          <a:p>
+            <a:pPr algn="ctr"/>
+          </a:p>
+        </p:txBody>
+      </p:sp>
+      <p:sp>
+        <p:nvSpPr>
+          <p:cNvPr id="13" name="TextBox 12"/>
           <p:cNvSpPr txBox="1"/>
           <p:nvPr/>
         </p:nvSpPr>
         <p:spPr>
           <a:xfrm>
-            <a:off x="457200" y="6437376"/>
-            <a:ext cx="8229600" cy="320040"/>
+            <a:off x="4718304" y="4114800"/>
+            <a:ext cx="2926080" cy="640080"/>
           </a:xfrm>
           <a:prstGeom prst="rect">
             <a:avLst/>
@@ -7298,27 +7368,27 @@
               </a:spcAft>
             </a:pPr>
             <a:r>
-              <a:rPr sz="900" b="0" i="0">
-                <a:solidFill>
-                  <a:srgbClr val="6B7A82"/>
-                </a:solidFill>
-                <a:latin typeface="Calibri"/>
-              </a:rPr>
-              <a:t>Maintenance prédictive de la corrosion  ·  ESTL La Salle  ·  2025–2026</a:t>
-            </a:r>
-          </a:p>
-        </p:txBody>
-      </p:sp>
-      <p:sp>
-        <p:nvSpPr>
-          <p:cNvPr id="12" name="TextBox 11"/>
+              <a:rPr sz="2300" b="1" i="0">
+                <a:solidFill>
+                  <a:srgbClr val="16252E"/>
+                </a:solidFill>
+                <a:latin typeface="Georgia"/>
+              </a:rPr>
+              <a:t>Gratuit</a:t>
+            </a:r>
+          </a:p>
+        </p:txBody>
+      </p:sp>
+      <p:sp>
+        <p:nvSpPr>
+          <p:cNvPr id="14" name="TextBox 13"/>
           <p:cNvSpPr txBox="1"/>
           <p:nvPr/>
         </p:nvSpPr>
         <p:spPr>
           <a:xfrm>
-            <a:off x="10424160" y="6437376"/>
-            <a:ext cx="1325880" cy="320040"/>
+            <a:off x="4718304" y="4892040"/>
+            <a:ext cx="2926080" cy="914400"/>
           </a:xfrm>
           <a:prstGeom prst="rect">
             <a:avLst/>
@@ -7331,6 +7401,276 @@
           </a:bodyPr>
           <a:lstStyle/>
           <a:p>
+            <a:pPr algn="l">
+              <a:lnSpc>
+                <a:spcPct val="112000"/>
+              </a:lnSpc>
+              <a:spcBef>
+                <a:spcPts val="0"/>
+              </a:spcBef>
+              <a:spcAft>
+                <a:spcPts val="400"/>
+              </a:spcAft>
+            </a:pPr>
+            <a:r>
+              <a:rPr sz="1300" b="0" i="0">
+                <a:solidFill>
+                  <a:srgbClr val="6B7A82"/>
+                </a:solidFill>
+                <a:latin typeface="Calibri"/>
+              </a:rPr>
+              <a:t>coût de licence nul, accessible aux PME africaines</a:t>
+            </a:r>
+          </a:p>
+        </p:txBody>
+      </p:sp>
+      <p:sp>
+        <p:nvSpPr>
+          <p:cNvPr id="15" name="Rounded Rectangle 14"/>
+          <p:cNvSpPr/>
+          <p:nvPr/>
+        </p:nvSpPr>
+        <p:spPr>
+          <a:xfrm>
+            <a:off x="8055864" y="3840480"/>
+            <a:ext cx="3419856" cy="2057400"/>
+          </a:xfrm>
+          <a:prstGeom prst="roundRect">
+            <a:avLst/>
+          </a:prstGeom>
+          <a:solidFill>
+            <a:srgbClr val="FFFFFF"/>
+          </a:solidFill>
+          <a:ln w="12700">
+            <a:solidFill>
+              <a:srgbClr val="E3DED4"/>
+            </a:solidFill>
+          </a:ln>
+          <a:effectLst/>
+        </p:spPr>
+        <p:style>
+          <a:lnRef idx="1">
+            <a:schemeClr val="accent1"/>
+          </a:lnRef>
+          <a:fillRef idx="3">
+            <a:schemeClr val="accent1"/>
+          </a:fillRef>
+          <a:effectRef idx="2">
+            <a:schemeClr val="accent1"/>
+          </a:effectRef>
+          <a:fontRef idx="minor">
+            <a:schemeClr val="lt1"/>
+          </a:fontRef>
+        </p:style>
+        <p:txBody>
+          <a:bodyPr rtlCol="0" anchor="ctr"/>
+          <a:lstStyle/>
+          <a:p>
+            <a:pPr algn="ctr"/>
+          </a:p>
+        </p:txBody>
+      </p:sp>
+      <p:sp>
+        <p:nvSpPr>
+          <p:cNvPr id="16" name="Rounded Rectangle 15"/>
+          <p:cNvSpPr/>
+          <p:nvPr/>
+        </p:nvSpPr>
+        <p:spPr>
+          <a:xfrm>
+            <a:off x="8055864" y="3840480"/>
+            <a:ext cx="3419856" cy="109728"/>
+          </a:xfrm>
+          <a:prstGeom prst="roundRect">
+            <a:avLst/>
+          </a:prstGeom>
+          <a:solidFill>
+            <a:srgbClr val="2C7A7B"/>
+          </a:solidFill>
+          <a:ln>
+            <a:noFill/>
+          </a:ln>
+          <a:effectLst/>
+        </p:spPr>
+        <p:style>
+          <a:lnRef idx="1">
+            <a:schemeClr val="accent1"/>
+          </a:lnRef>
+          <a:fillRef idx="3">
+            <a:schemeClr val="accent1"/>
+          </a:fillRef>
+          <a:effectRef idx="2">
+            <a:schemeClr val="accent1"/>
+          </a:effectRef>
+          <a:fontRef idx="minor">
+            <a:schemeClr val="lt1"/>
+          </a:fontRef>
+        </p:style>
+        <p:txBody>
+          <a:bodyPr rtlCol="0" anchor="ctr"/>
+          <a:lstStyle/>
+          <a:p>
+            <a:pPr algn="ctr"/>
+          </a:p>
+        </p:txBody>
+      </p:sp>
+      <p:sp>
+        <p:nvSpPr>
+          <p:cNvPr id="17" name="TextBox 16"/>
+          <p:cNvSpPr txBox="1"/>
+          <p:nvPr/>
+        </p:nvSpPr>
+        <p:spPr>
+          <a:xfrm>
+            <a:off x="8311896" y="4114800"/>
+            <a:ext cx="2926080" cy="640080"/>
+          </a:xfrm>
+          <a:prstGeom prst="rect">
+            <a:avLst/>
+          </a:prstGeom>
+          <a:noFill/>
+        </p:spPr>
+        <p:txBody>
+          <a:bodyPr wrap="square" anchor="t" lIns="0" rIns="0" tIns="0" bIns="0">
+            <a:spAutoFit/>
+          </a:bodyPr>
+          <a:lstStyle/>
+          <a:p>
+            <a:pPr algn="l">
+              <a:lnSpc>
+                <a:spcPct val="100000"/>
+              </a:lnSpc>
+              <a:spcBef>
+                <a:spcPts val="0"/>
+              </a:spcBef>
+              <a:spcAft>
+                <a:spcPts val="400"/>
+              </a:spcAft>
+            </a:pPr>
+            <a:r>
+              <a:rPr sz="2300" b="1" i="0">
+                <a:solidFill>
+                  <a:srgbClr val="16252E"/>
+                </a:solidFill>
+                <a:latin typeface="Georgia"/>
+              </a:rPr>
+              <a:t>Transposable</a:t>
+            </a:r>
+          </a:p>
+        </p:txBody>
+      </p:sp>
+      <p:sp>
+        <p:nvSpPr>
+          <p:cNvPr id="18" name="TextBox 17"/>
+          <p:cNvSpPr txBox="1"/>
+          <p:nvPr/>
+        </p:nvSpPr>
+        <p:spPr>
+          <a:xfrm>
+            <a:off x="8311896" y="4892040"/>
+            <a:ext cx="2926080" cy="914400"/>
+          </a:xfrm>
+          <a:prstGeom prst="rect">
+            <a:avLst/>
+          </a:prstGeom>
+          <a:noFill/>
+        </p:spPr>
+        <p:txBody>
+          <a:bodyPr wrap="square" anchor="t" lIns="0" rIns="0" tIns="0" bIns="0">
+            <a:spAutoFit/>
+          </a:bodyPr>
+          <a:lstStyle/>
+          <a:p>
+            <a:pPr algn="l">
+              <a:lnSpc>
+                <a:spcPct val="112000"/>
+              </a:lnSpc>
+              <a:spcBef>
+                <a:spcPts val="0"/>
+              </a:spcBef>
+              <a:spcAft>
+                <a:spcPts val="400"/>
+              </a:spcAft>
+            </a:pPr>
+            <a:r>
+              <a:rPr sz="1300" b="0" i="0">
+                <a:solidFill>
+                  <a:srgbClr val="6B7A82"/>
+                </a:solidFill>
+                <a:latin typeface="Calibri"/>
+              </a:rPr>
+              <a:t>même mapping reportable sur un CMMS open-source</a:t>
+            </a:r>
+          </a:p>
+        </p:txBody>
+      </p:sp>
+      <p:sp>
+        <p:nvSpPr>
+          <p:cNvPr id="19" name="TextBox 18"/>
+          <p:cNvSpPr txBox="1"/>
+          <p:nvPr/>
+        </p:nvSpPr>
+        <p:spPr>
+          <a:xfrm>
+            <a:off x="457200" y="6437376"/>
+            <a:ext cx="8229600" cy="320040"/>
+          </a:xfrm>
+          <a:prstGeom prst="rect">
+            <a:avLst/>
+          </a:prstGeom>
+          <a:noFill/>
+        </p:spPr>
+        <p:txBody>
+          <a:bodyPr wrap="square" anchor="t" lIns="0" rIns="0" tIns="0" bIns="0">
+            <a:spAutoFit/>
+          </a:bodyPr>
+          <a:lstStyle/>
+          <a:p>
+            <a:pPr algn="l">
+              <a:lnSpc>
+                <a:spcPct val="100000"/>
+              </a:lnSpc>
+              <a:spcBef>
+                <a:spcPts val="0"/>
+              </a:spcBef>
+              <a:spcAft>
+                <a:spcPts val="400"/>
+              </a:spcAft>
+            </a:pPr>
+            <a:r>
+              <a:rPr sz="900" b="0" i="0">
+                <a:solidFill>
+                  <a:srgbClr val="6B7A82"/>
+                </a:solidFill>
+                <a:latin typeface="Calibri"/>
+              </a:rPr>
+              <a:t>Maintenance prédictive de la corrosion  ·  ESTL La Salle  ·  2025–2026</a:t>
+            </a:r>
+          </a:p>
+        </p:txBody>
+      </p:sp>
+      <p:sp>
+        <p:nvSpPr>
+          <p:cNvPr id="20" name="TextBox 19"/>
+          <p:cNvSpPr txBox="1"/>
+          <p:nvPr/>
+        </p:nvSpPr>
+        <p:spPr>
+          <a:xfrm>
+            <a:off x="10424160" y="6437376"/>
+            <a:ext cx="1325880" cy="320040"/>
+          </a:xfrm>
+          <a:prstGeom prst="rect">
+            <a:avLst/>
+          </a:prstGeom>
+          <a:noFill/>
+        </p:spPr>
+        <p:txBody>
+          <a:bodyPr wrap="square" anchor="t" lIns="0" rIns="0" tIns="0" bIns="0">
+            <a:spAutoFit/>
+          </a:bodyPr>
+          <a:lstStyle/>
+          <a:p>
             <a:pPr algn="r">
               <a:lnSpc>
                 <a:spcPct val="100000"/>
@@ -7349,7 +7689,7 @@
                 </a:solidFill>
                 <a:latin typeface="Calibri"/>
               </a:rPr>
-              <a:t>15 / 19</a:t>
+              <a:t>15 / 20</a:t>
             </a:r>
           </a:p>
         </p:txBody>
@@ -7500,7 +7840,7 @@
                 </a:solidFill>
                 <a:latin typeface="Calibri"/>
               </a:rPr>
-              <a:t>DISCUSSION</a:t>
+              <a:t>PERSPECTIVE</a:t>
             </a:r>
           </a:p>
         </p:txBody>
@@ -7545,31 +7885,136 @@
                 </a:solidFill>
                 <a:latin typeface="Georgia"/>
               </a:rPr>
-              <a:t>Limites assumées d'une preuve de concept</a:t>
-            </a:r>
-          </a:p>
-        </p:txBody>
-      </p:sp>
-      <p:sp>
-        <p:nvSpPr>
-          <p:cNvPr id="6" name="Rounded Rectangle 5"/>
+              <a:t>Jumeau numérique : prédire, confirmer, apprendre des écarts</a:t>
+            </a:r>
+          </a:p>
+        </p:txBody>
+      </p:sp>
+      <p:pic>
+        <p:nvPicPr>
+          <p:cNvPr id="6" name="Picture 5" descr="fig_iii3_band_scorecard.png"/>
+          <p:cNvPicPr>
+            <a:picLocks noChangeAspect="1"/>
+          </p:cNvPicPr>
+          <p:nvPr/>
+        </p:nvPicPr>
+        <p:blipFill>
+          <a:blip r:embed="rId2"/>
+          <a:stretch>
+            <a:fillRect/>
+          </a:stretch>
+        </p:blipFill>
+        <p:spPr>
+          <a:xfrm>
+            <a:off x="6355080" y="2707165"/>
+            <a:ext cx="5257800" cy="2083749"/>
+          </a:xfrm>
+          <a:prstGeom prst="rect">
+            <a:avLst/>
+          </a:prstGeom>
+        </p:spPr>
+      </p:pic>
+      <p:sp>
+        <p:nvSpPr>
+          <p:cNvPr id="7" name="TextBox 6"/>
+          <p:cNvSpPr txBox="1"/>
+          <p:nvPr/>
+        </p:nvSpPr>
+        <p:spPr>
+          <a:xfrm>
+            <a:off x="868680" y="2057400"/>
+            <a:ext cx="5303520" cy="1280160"/>
+          </a:xfrm>
+          <a:prstGeom prst="rect">
+            <a:avLst/>
+          </a:prstGeom>
+          <a:noFill/>
+        </p:spPr>
+        <p:txBody>
+          <a:bodyPr wrap="square" anchor="t" lIns="0" rIns="0" tIns="0" bIns="0">
+            <a:spAutoFit/>
+          </a:bodyPr>
+          <a:lstStyle/>
+          <a:p>
+            <a:pPr algn="l">
+              <a:lnSpc>
+                <a:spcPct val="112000"/>
+              </a:lnSpc>
+              <a:spcBef>
+                <a:spcPts val="0"/>
+              </a:spcBef>
+              <a:spcAft>
+                <a:spcPts val="600"/>
+              </a:spcAft>
+            </a:pPr>
+            <a:r>
+              <a:rPr sz="1400" b="0" i="0">
+                <a:solidFill>
+                  <a:srgbClr val="202B31"/>
+                </a:solidFill>
+                <a:latin typeface="Calibri"/>
+              </a:rPr>
+              <a:t>Un jumeau calibré sur les essais réels génère une </a:t>
+            </a:r>
+            <a:r>
+              <a:rPr sz="1400" b="1" i="0">
+                <a:solidFill>
+                  <a:srgbClr val="C9601A"/>
+                </a:solidFill>
+                <a:latin typeface="Georgia"/>
+              </a:rPr>
+              <a:t>bande prédictive de durée de vie</a:t>
+            </a:r>
+            <a:r>
+              <a:rPr sz="1400" b="0" i="0">
+                <a:solidFill>
+                  <a:srgbClr val="202B31"/>
+                </a:solidFill>
+                <a:latin typeface="Calibri"/>
+              </a:rPr>
+              <a:t>, l'un des </a:t>
+            </a:r>
+            <a:r>
+              <a:rPr sz="1400" b="1" i="0">
+                <a:solidFill>
+                  <a:srgbClr val="2C7A7B"/>
+                </a:solidFill>
+                <a:latin typeface="Calibri"/>
+              </a:rPr>
+              <a:t>trois estimateurs</a:t>
+            </a:r>
+            <a:r>
+              <a:rPr sz="1400" b="0" i="0">
+                <a:solidFill>
+                  <a:srgbClr val="202B31"/>
+                </a:solidFill>
+                <a:latin typeface="Calibri"/>
+              </a:rPr>
+              <a:t> confrontés en live (physique · XGBoost · jumeau).</a:t>
+            </a:r>
+          </a:p>
+        </p:txBody>
+      </p:sp>
+      <p:sp>
+        <p:nvSpPr>
+          <p:cNvPr id="8" name="Rounded Rectangle 7"/>
           <p:cNvSpPr/>
           <p:nvPr/>
         </p:nvSpPr>
         <p:spPr>
           <a:xfrm>
-            <a:off x="868680" y="2103120"/>
-            <a:ext cx="10469880" cy="841248"/>
+            <a:off x="868680" y="3383280"/>
+            <a:ext cx="5303520" cy="1463040"/>
           </a:xfrm>
           <a:prstGeom prst="roundRect">
             <a:avLst/>
           </a:prstGeom>
           <a:solidFill>
-            <a:srgbClr val="FFFFFF"/>
+            <a:srgbClr val="16252E"/>
           </a:solidFill>
           <a:ln w="12700">
             <a:solidFill>
-              <a:srgbClr val="E3DED4"/>
+              <a:srgbClr val="16252E"/>
             </a:solidFill>
           </a:ln>
           <a:effectLst/>
@@ -7598,544 +8043,14 @@
       </p:sp>
       <p:sp>
         <p:nvSpPr>
-          <p:cNvPr id="7" name="Rounded Rectangle 6"/>
-          <p:cNvSpPr/>
-          <p:nvPr/>
-        </p:nvSpPr>
-        <p:spPr>
-          <a:xfrm>
-            <a:off x="868680" y="2103120"/>
-            <a:ext cx="128016" cy="841248"/>
-          </a:xfrm>
-          <a:prstGeom prst="roundRect">
-            <a:avLst/>
-          </a:prstGeom>
-          <a:solidFill>
-            <a:srgbClr val="C9601A"/>
-          </a:solidFill>
-          <a:ln>
-            <a:noFill/>
-          </a:ln>
-          <a:effectLst/>
-        </p:spPr>
-        <p:style>
-          <a:lnRef idx="1">
-            <a:schemeClr val="accent1"/>
-          </a:lnRef>
-          <a:fillRef idx="3">
-            <a:schemeClr val="accent1"/>
-          </a:fillRef>
-          <a:effectRef idx="2">
-            <a:schemeClr val="accent1"/>
-          </a:effectRef>
-          <a:fontRef idx="minor">
-            <a:schemeClr val="lt1"/>
-          </a:fontRef>
-        </p:style>
-        <p:txBody>
-          <a:bodyPr rtlCol="0" anchor="ctr"/>
-          <a:lstStyle/>
-          <a:p>
-            <a:pPr algn="ctr"/>
-          </a:p>
-        </p:txBody>
-      </p:sp>
-      <p:sp>
-        <p:nvSpPr>
-          <p:cNvPr id="8" name="TextBox 7"/>
+          <p:cNvPr id="9" name="TextBox 8"/>
           <p:cNvSpPr txBox="1"/>
           <p:nvPr/>
         </p:nvSpPr>
         <p:spPr>
           <a:xfrm>
-            <a:off x="1234440" y="2103120"/>
-            <a:ext cx="9875520" cy="841248"/>
-          </a:xfrm>
-          <a:prstGeom prst="rect">
-            <a:avLst/>
-          </a:prstGeom>
-          <a:noFill/>
-        </p:spPr>
-        <p:txBody>
-          <a:bodyPr wrap="square" anchor="ctr" lIns="0" rIns="0" tIns="0" bIns="0">
-            <a:spAutoFit/>
-          </a:bodyPr>
-          <a:lstStyle/>
-          <a:p>
-            <a:pPr algn="l">
-              <a:lnSpc>
-                <a:spcPct val="105000"/>
-              </a:lnSpc>
-              <a:spcBef>
-                <a:spcPts val="0"/>
-              </a:spcBef>
-              <a:spcAft>
-                <a:spcPts val="400"/>
-              </a:spcAft>
-            </a:pPr>
-            <a:r>
-              <a:rPr sz="1500" b="1" i="0">
-                <a:solidFill>
-                  <a:srgbClr val="202B31"/>
-                </a:solidFill>
-                <a:latin typeface="Georgia"/>
-              </a:rPr>
-              <a:t>Matériau : </a:t>
-            </a:r>
-            <a:r>
-              <a:rPr sz="1350" b="0" i="0">
-                <a:solidFill>
-                  <a:srgbClr val="202B31"/>
-                </a:solidFill>
-                <a:latin typeface="Calibri"/>
-              </a:rPr>
-              <a:t>fil de fer ≠ acier API 5L : les valeurs absolues de CR ne sont pas directement transposables.</a:t>
-            </a:r>
-          </a:p>
-        </p:txBody>
-      </p:sp>
-      <p:sp>
-        <p:nvSpPr>
-          <p:cNvPr id="9" name="Rounded Rectangle 8"/>
-          <p:cNvSpPr/>
-          <p:nvPr/>
-        </p:nvSpPr>
-        <p:spPr>
-          <a:xfrm>
-            <a:off x="868680" y="3035808"/>
-            <a:ext cx="10469880" cy="841248"/>
-          </a:xfrm>
-          <a:prstGeom prst="roundRect">
-            <a:avLst/>
-          </a:prstGeom>
-          <a:solidFill>
-            <a:srgbClr val="FFFFFF"/>
-          </a:solidFill>
-          <a:ln w="12700">
-            <a:solidFill>
-              <a:srgbClr val="E3DED4"/>
-            </a:solidFill>
-          </a:ln>
-          <a:effectLst/>
-        </p:spPr>
-        <p:style>
-          <a:lnRef idx="1">
-            <a:schemeClr val="accent1"/>
-          </a:lnRef>
-          <a:fillRef idx="3">
-            <a:schemeClr val="accent1"/>
-          </a:fillRef>
-          <a:effectRef idx="2">
-            <a:schemeClr val="accent1"/>
-          </a:effectRef>
-          <a:fontRef idx="minor">
-            <a:schemeClr val="lt1"/>
-          </a:fontRef>
-        </p:style>
-        <p:txBody>
-          <a:bodyPr rtlCol="0" anchor="ctr"/>
-          <a:lstStyle/>
-          <a:p>
-            <a:pPr algn="ctr"/>
-          </a:p>
-        </p:txBody>
-      </p:sp>
-      <p:sp>
-        <p:nvSpPr>
-          <p:cNvPr id="10" name="Rounded Rectangle 9"/>
-          <p:cNvSpPr/>
-          <p:nvPr/>
-        </p:nvSpPr>
-        <p:spPr>
-          <a:xfrm>
-            <a:off x="868680" y="3035808"/>
-            <a:ext cx="128016" cy="841248"/>
-          </a:xfrm>
-          <a:prstGeom prst="roundRect">
-            <a:avLst/>
-          </a:prstGeom>
-          <a:solidFill>
-            <a:srgbClr val="C9601A"/>
-          </a:solidFill>
-          <a:ln>
-            <a:noFill/>
-          </a:ln>
-          <a:effectLst/>
-        </p:spPr>
-        <p:style>
-          <a:lnRef idx="1">
-            <a:schemeClr val="accent1"/>
-          </a:lnRef>
-          <a:fillRef idx="3">
-            <a:schemeClr val="accent1"/>
-          </a:fillRef>
-          <a:effectRef idx="2">
-            <a:schemeClr val="accent1"/>
-          </a:effectRef>
-          <a:fontRef idx="minor">
-            <a:schemeClr val="lt1"/>
-          </a:fontRef>
-        </p:style>
-        <p:txBody>
-          <a:bodyPr rtlCol="0" anchor="ctr"/>
-          <a:lstStyle/>
-          <a:p>
-            <a:pPr algn="ctr"/>
-          </a:p>
-        </p:txBody>
-      </p:sp>
-      <p:sp>
-        <p:nvSpPr>
-          <p:cNvPr id="11" name="TextBox 10"/>
-          <p:cNvSpPr txBox="1"/>
-          <p:nvPr/>
-        </p:nvSpPr>
-        <p:spPr>
-          <a:xfrm>
-            <a:off x="1234440" y="3035808"/>
-            <a:ext cx="9875520" cy="841248"/>
-          </a:xfrm>
-          <a:prstGeom prst="rect">
-            <a:avLst/>
-          </a:prstGeom>
-          <a:noFill/>
-        </p:spPr>
-        <p:txBody>
-          <a:bodyPr wrap="square" anchor="ctr" lIns="0" rIns="0" tIns="0" bIns="0">
-            <a:spAutoFit/>
-          </a:bodyPr>
-          <a:lstStyle/>
-          <a:p>
-            <a:pPr algn="l">
-              <a:lnSpc>
-                <a:spcPct val="105000"/>
-              </a:lnSpc>
-              <a:spcBef>
-                <a:spcPts val="0"/>
-              </a:spcBef>
-              <a:spcAft>
-                <a:spcPts val="400"/>
-              </a:spcAft>
-            </a:pPr>
-            <a:r>
-              <a:rPr sz="1500" b="1" i="0">
-                <a:solidFill>
-                  <a:srgbClr val="202B31"/>
-                </a:solidFill>
-                <a:latin typeface="Georgia"/>
-              </a:rPr>
-              <a:t>Effet acide-shunt : </a:t>
-            </a:r>
-            <a:r>
-              <a:rPr sz="1350" b="0" i="0">
-                <a:solidFill>
-                  <a:srgbClr val="202B31"/>
-                </a:solidFill>
-                <a:latin typeface="Calibri"/>
-              </a:rPr>
-              <a:t>en HCl concentré, l'électrolyte shunte la mesure, d'où l'emploi d'un fil fin.</a:t>
-            </a:r>
-          </a:p>
-        </p:txBody>
-      </p:sp>
-      <p:sp>
-        <p:nvSpPr>
-          <p:cNvPr id="12" name="Rounded Rectangle 11"/>
-          <p:cNvSpPr/>
-          <p:nvPr/>
-        </p:nvSpPr>
-        <p:spPr>
-          <a:xfrm>
-            <a:off x="868680" y="3968496"/>
-            <a:ext cx="10469880" cy="841248"/>
-          </a:xfrm>
-          <a:prstGeom prst="roundRect">
-            <a:avLst/>
-          </a:prstGeom>
-          <a:solidFill>
-            <a:srgbClr val="FFFFFF"/>
-          </a:solidFill>
-          <a:ln w="12700">
-            <a:solidFill>
-              <a:srgbClr val="E3DED4"/>
-            </a:solidFill>
-          </a:ln>
-          <a:effectLst/>
-        </p:spPr>
-        <p:style>
-          <a:lnRef idx="1">
-            <a:schemeClr val="accent1"/>
-          </a:lnRef>
-          <a:fillRef idx="3">
-            <a:schemeClr val="accent1"/>
-          </a:fillRef>
-          <a:effectRef idx="2">
-            <a:schemeClr val="accent1"/>
-          </a:effectRef>
-          <a:fontRef idx="minor">
-            <a:schemeClr val="lt1"/>
-          </a:fontRef>
-        </p:style>
-        <p:txBody>
-          <a:bodyPr rtlCol="0" anchor="ctr"/>
-          <a:lstStyle/>
-          <a:p>
-            <a:pPr algn="ctr"/>
-          </a:p>
-        </p:txBody>
-      </p:sp>
-      <p:sp>
-        <p:nvSpPr>
-          <p:cNvPr id="13" name="Rounded Rectangle 12"/>
-          <p:cNvSpPr/>
-          <p:nvPr/>
-        </p:nvSpPr>
-        <p:spPr>
-          <a:xfrm>
-            <a:off x="868680" y="3968496"/>
-            <a:ext cx="128016" cy="841248"/>
-          </a:xfrm>
-          <a:prstGeom prst="roundRect">
-            <a:avLst/>
-          </a:prstGeom>
-          <a:solidFill>
-            <a:srgbClr val="C9601A"/>
-          </a:solidFill>
-          <a:ln>
-            <a:noFill/>
-          </a:ln>
-          <a:effectLst/>
-        </p:spPr>
-        <p:style>
-          <a:lnRef idx="1">
-            <a:schemeClr val="accent1"/>
-          </a:lnRef>
-          <a:fillRef idx="3">
-            <a:schemeClr val="accent1"/>
-          </a:fillRef>
-          <a:effectRef idx="2">
-            <a:schemeClr val="accent1"/>
-          </a:effectRef>
-          <a:fontRef idx="minor">
-            <a:schemeClr val="lt1"/>
-          </a:fontRef>
-        </p:style>
-        <p:txBody>
-          <a:bodyPr rtlCol="0" anchor="ctr"/>
-          <a:lstStyle/>
-          <a:p>
-            <a:pPr algn="ctr"/>
-          </a:p>
-        </p:txBody>
-      </p:sp>
-      <p:sp>
-        <p:nvSpPr>
-          <p:cNvPr id="14" name="TextBox 13"/>
-          <p:cNvSpPr txBox="1"/>
-          <p:nvPr/>
-        </p:nvSpPr>
-        <p:spPr>
-          <a:xfrm>
-            <a:off x="1234440" y="3968496"/>
-            <a:ext cx="9875520" cy="841248"/>
-          </a:xfrm>
-          <a:prstGeom prst="rect">
-            <a:avLst/>
-          </a:prstGeom>
-          <a:noFill/>
-        </p:spPr>
-        <p:txBody>
-          <a:bodyPr wrap="square" anchor="ctr" lIns="0" rIns="0" tIns="0" bIns="0">
-            <a:spAutoFit/>
-          </a:bodyPr>
-          <a:lstStyle/>
-          <a:p>
-            <a:pPr algn="l">
-              <a:lnSpc>
-                <a:spcPct val="105000"/>
-              </a:lnSpc>
-              <a:spcBef>
-                <a:spcPts val="0"/>
-              </a:spcBef>
-              <a:spcAft>
-                <a:spcPts val="400"/>
-              </a:spcAft>
-            </a:pPr>
-            <a:r>
-              <a:rPr sz="1500" b="1" i="0">
-                <a:solidFill>
-                  <a:srgbClr val="202B31"/>
-                </a:solidFill>
-                <a:latin typeface="Georgia"/>
-              </a:rPr>
-              <a:t>Jeu de données : </a:t>
-            </a:r>
-            <a:r>
-              <a:rPr sz="1350" b="0" i="0">
-                <a:solidFill>
-                  <a:srgbClr val="202B31"/>
-                </a:solidFill>
-                <a:latin typeface="Calibri"/>
-              </a:rPr>
-              <a:t>peu d'essais : métriques bruitées, en cours de consolidation.</a:t>
-            </a:r>
-          </a:p>
-        </p:txBody>
-      </p:sp>
-      <p:sp>
-        <p:nvSpPr>
-          <p:cNvPr id="15" name="Rounded Rectangle 14"/>
-          <p:cNvSpPr/>
-          <p:nvPr/>
-        </p:nvSpPr>
-        <p:spPr>
-          <a:xfrm>
-            <a:off x="868680" y="4901183"/>
-            <a:ext cx="10469880" cy="841248"/>
-          </a:xfrm>
-          <a:prstGeom prst="roundRect">
-            <a:avLst/>
-          </a:prstGeom>
-          <a:solidFill>
-            <a:srgbClr val="FFFFFF"/>
-          </a:solidFill>
-          <a:ln w="12700">
-            <a:solidFill>
-              <a:srgbClr val="E3DED4"/>
-            </a:solidFill>
-          </a:ln>
-          <a:effectLst/>
-        </p:spPr>
-        <p:style>
-          <a:lnRef idx="1">
-            <a:schemeClr val="accent1"/>
-          </a:lnRef>
-          <a:fillRef idx="3">
-            <a:schemeClr val="accent1"/>
-          </a:fillRef>
-          <a:effectRef idx="2">
-            <a:schemeClr val="accent1"/>
-          </a:effectRef>
-          <a:fontRef idx="minor">
-            <a:schemeClr val="lt1"/>
-          </a:fontRef>
-        </p:style>
-        <p:txBody>
-          <a:bodyPr rtlCol="0" anchor="ctr"/>
-          <a:lstStyle/>
-          <a:p>
-            <a:pPr algn="ctr"/>
-          </a:p>
-        </p:txBody>
-      </p:sp>
-      <p:sp>
-        <p:nvSpPr>
-          <p:cNvPr id="16" name="Rounded Rectangle 15"/>
-          <p:cNvSpPr/>
-          <p:nvPr/>
-        </p:nvSpPr>
-        <p:spPr>
-          <a:xfrm>
-            <a:off x="868680" y="4901183"/>
-            <a:ext cx="128016" cy="841248"/>
-          </a:xfrm>
-          <a:prstGeom prst="roundRect">
-            <a:avLst/>
-          </a:prstGeom>
-          <a:solidFill>
-            <a:srgbClr val="C9601A"/>
-          </a:solidFill>
-          <a:ln>
-            <a:noFill/>
-          </a:ln>
-          <a:effectLst/>
-        </p:spPr>
-        <p:style>
-          <a:lnRef idx="1">
-            <a:schemeClr val="accent1"/>
-          </a:lnRef>
-          <a:fillRef idx="3">
-            <a:schemeClr val="accent1"/>
-          </a:fillRef>
-          <a:effectRef idx="2">
-            <a:schemeClr val="accent1"/>
-          </a:effectRef>
-          <a:fontRef idx="minor">
-            <a:schemeClr val="lt1"/>
-          </a:fontRef>
-        </p:style>
-        <p:txBody>
-          <a:bodyPr rtlCol="0" anchor="ctr"/>
-          <a:lstStyle/>
-          <a:p>
-            <a:pPr algn="ctr"/>
-          </a:p>
-        </p:txBody>
-      </p:sp>
-      <p:sp>
-        <p:nvSpPr>
-          <p:cNvPr id="17" name="TextBox 16"/>
-          <p:cNvSpPr txBox="1"/>
-          <p:nvPr/>
-        </p:nvSpPr>
-        <p:spPr>
-          <a:xfrm>
-            <a:off x="1234440" y="4901183"/>
-            <a:ext cx="9875520" cy="841248"/>
-          </a:xfrm>
-          <a:prstGeom prst="rect">
-            <a:avLst/>
-          </a:prstGeom>
-          <a:noFill/>
-        </p:spPr>
-        <p:txBody>
-          <a:bodyPr wrap="square" anchor="ctr" lIns="0" rIns="0" tIns="0" bIns="0">
-            <a:spAutoFit/>
-          </a:bodyPr>
-          <a:lstStyle/>
-          <a:p>
-            <a:pPr algn="l">
-              <a:lnSpc>
-                <a:spcPct val="105000"/>
-              </a:lnSpc>
-              <a:spcBef>
-                <a:spcPts val="0"/>
-              </a:spcBef>
-              <a:spcAft>
-                <a:spcPts val="400"/>
-              </a:spcAft>
-            </a:pPr>
-            <a:r>
-              <a:rPr sz="1500" b="1" i="0">
-                <a:solidFill>
-                  <a:srgbClr val="202B31"/>
-                </a:solidFill>
-                <a:latin typeface="Georgia"/>
-              </a:rPr>
-              <a:t>Couverture thermique : </a:t>
-            </a:r>
-            <a:r>
-              <a:rPr sz="1350" b="0" i="0">
-                <a:solidFill>
-                  <a:srgbClr val="202B31"/>
-                </a:solidFill>
-                <a:latin typeface="Calibri"/>
-              </a:rPr>
-              <a:t>une seule plage (~30 °C) répétée ; ~32 °C encore représentée par un seul essai.</a:t>
-            </a:r>
-          </a:p>
-        </p:txBody>
-      </p:sp>
-      <p:sp>
-        <p:nvSpPr>
-          <p:cNvPr id="18" name="TextBox 17"/>
-          <p:cNvSpPr txBox="1"/>
-          <p:nvPr/>
-        </p:nvSpPr>
-        <p:spPr>
-          <a:xfrm>
-            <a:off x="868680" y="5943600"/>
-            <a:ext cx="10424160" cy="411480"/>
+            <a:off x="1143000" y="3547872"/>
+            <a:ext cx="4892040" cy="1143000"/>
           </a:xfrm>
           <a:prstGeom prst="rect">
             <a:avLst/>
@@ -8150,7 +8065,7 @@
           <a:p>
             <a:pPr algn="l">
               <a:lnSpc>
-                <a:spcPct val="100000"/>
+                <a:spcPct val="112000"/>
               </a:lnSpc>
               <a:spcBef>
                 <a:spcPts val="0"/>
@@ -8160,27 +8075,107 @@
               </a:spcAft>
             </a:pPr>
             <a:r>
-              <a:rPr sz="1350" b="1" i="1">
+              <a:rPr sz="1300" b="1" i="0">
+                <a:solidFill>
+                  <a:srgbClr val="CADDDC"/>
+                </a:solidFill>
+                <a:latin typeface="Calibri"/>
+              </a:rPr>
+              <a:t>Deux tests « prédire-puis-confirmer » :</a:t>
+            </a:r>
+          </a:p>
+          <a:p>
+            <a:pPr algn="l">
+              <a:lnSpc>
+                <a:spcPct val="112000"/>
+              </a:lnSpc>
+              <a:spcBef>
+                <a:spcPts val="0"/>
+              </a:spcBef>
+              <a:spcAft>
+                <a:spcPts val="400"/>
+              </a:spcAft>
+            </a:pPr>
+            <a:r>
+              <a:rPr sz="1350" b="0" i="0">
+                <a:solidFill>
+                  <a:srgbClr val="CADDDC"/>
+                </a:solidFill>
+                <a:latin typeface="Calibri"/>
+              </a:rPr>
+              <a:t>Run #21 : </a:t>
+            </a:r>
+            <a:r>
+              <a:rPr sz="1500" b="1" i="0">
+                <a:solidFill>
+                  <a:srgbClr val="FFFFFF"/>
+                </a:solidFill>
+                <a:latin typeface="Georgia"/>
+              </a:rPr>
+              <a:t>13,1 h</a:t>
+            </a:r>
+            <a:r>
+              <a:rPr sz="1250" b="1" i="0">
                 <a:solidFill>
                   <a:srgbClr val="2C7A7B"/>
                 </a:solidFill>
                 <a:latin typeface="Calibri"/>
               </a:rPr>
-              <a:t>Ces limites ne sont pas intrinsèques à la méthode : elles définissent les conditions du passage à l'échelle.</a:t>
-            </a:r>
-          </a:p>
-        </p:txBody>
-      </p:sp>
-      <p:sp>
-        <p:nvSpPr>
-          <p:cNvPr id="19" name="TextBox 18"/>
+              <a:t>   ✓ dans la bande</a:t>
+            </a:r>
+          </a:p>
+          <a:p>
+            <a:pPr algn="l">
+              <a:lnSpc>
+                <a:spcPct val="112000"/>
+              </a:lnSpc>
+              <a:spcBef>
+                <a:spcPts val="0"/>
+              </a:spcBef>
+              <a:spcAft>
+                <a:spcPts val="400"/>
+              </a:spcAft>
+            </a:pPr>
+            <a:r>
+              <a:rPr sz="1350" b="0" i="0">
+                <a:solidFill>
+                  <a:srgbClr val="CADDDC"/>
+                </a:solidFill>
+                <a:latin typeface="Calibri"/>
+              </a:rPr>
+              <a:t>Run #22 : </a:t>
+            </a:r>
+            <a:r>
+              <a:rPr sz="1500" b="1" i="0">
+                <a:solidFill>
+                  <a:srgbClr val="C9601A"/>
+                </a:solidFill>
+                <a:latin typeface="Georgia"/>
+              </a:rPr>
+              <a:t>11,95 h</a:t>
+            </a:r>
+            <a:r>
+              <a:rPr sz="1250" b="1" i="0">
+                <a:solidFill>
+                  <a:srgbClr val="C9601A"/>
+                </a:solidFill>
+                <a:latin typeface="Calibri"/>
+              </a:rPr>
+              <a:t>   ✗ en deçà (le plus rapide)</a:t>
+            </a:r>
+          </a:p>
+        </p:txBody>
+      </p:sp>
+      <p:sp>
+        <p:nvSpPr>
+          <p:cNvPr id="10" name="TextBox 9"/>
           <p:cNvSpPr txBox="1"/>
           <p:nvPr/>
         </p:nvSpPr>
         <p:spPr>
           <a:xfrm>
-            <a:off x="457200" y="6437376"/>
-            <a:ext cx="8229600" cy="320040"/>
+            <a:off x="868680" y="5029200"/>
+            <a:ext cx="5303520" cy="1005840"/>
           </a:xfrm>
           <a:prstGeom prst="rect">
             <a:avLst/>
@@ -8195,7 +8190,7 @@
           <a:p>
             <a:pPr algn="l">
               <a:lnSpc>
-                <a:spcPct val="100000"/>
+                <a:spcPct val="108000"/>
               </a:lnSpc>
               <a:spcBef>
                 <a:spcPts val="0"/>
@@ -8205,27 +8200,81 @@
               </a:spcAft>
             </a:pPr>
             <a:r>
-              <a:rPr sz="900" b="0" i="0">
-                <a:solidFill>
-                  <a:srgbClr val="6B7A82"/>
-                </a:solidFill>
-                <a:latin typeface="Calibri"/>
-              </a:rPr>
-              <a:t>Maintenance prédictive de la corrosion  ·  ESTL La Salle  ·  2025–2026</a:t>
-            </a:r>
-          </a:p>
-        </p:txBody>
-      </p:sp>
-      <p:sp>
-        <p:nvSpPr>
-          <p:cNvPr id="20" name="TextBox 19"/>
+              <a:rPr sz="1250" b="0" i="0">
+                <a:solidFill>
+                  <a:srgbClr val="202B31"/>
+                </a:solidFill>
+                <a:latin typeface="Calibri"/>
+              </a:rPr>
+              <a:t>Le jumeau </a:t>
+            </a:r>
+            <a:r>
+              <a:rPr sz="1250" b="1" i="0">
+                <a:solidFill>
+                  <a:srgbClr val="C9601A"/>
+                </a:solidFill>
+                <a:latin typeface="Calibri"/>
+              </a:rPr>
+              <a:t>interpole</a:t>
+            </a:r>
+            <a:r>
+              <a:rPr sz="1250" b="0" i="0">
+                <a:solidFill>
+                  <a:srgbClr val="202B31"/>
+                </a:solidFill>
+                <a:latin typeface="Calibri"/>
+              </a:rPr>
+              <a:t> entre morphologies vues, il n'</a:t>
+            </a:r>
+            <a:r>
+              <a:rPr sz="1250" b="1" i="0">
+                <a:solidFill>
+                  <a:srgbClr val="C9601A"/>
+                </a:solidFill>
+                <a:latin typeface="Calibri"/>
+              </a:rPr>
+              <a:t>extrapole</a:t>
+            </a:r>
+            <a:r>
+              <a:rPr sz="1250" b="0" i="0">
+                <a:solidFill>
+                  <a:srgbClr val="202B31"/>
+                </a:solidFill>
+                <a:latin typeface="Calibri"/>
+              </a:rPr>
+              <a:t> pas. La prédictibilité tient à la répétition au sein d'une </a:t>
+            </a:r>
+            <a:r>
+              <a:rPr sz="1250" b="1" i="0">
+                <a:solidFill>
+                  <a:srgbClr val="2C7A7B"/>
+                </a:solidFill>
+                <a:latin typeface="Calibri"/>
+              </a:rPr>
+              <a:t>même morphologie</a:t>
+            </a:r>
+            <a:r>
+              <a:rPr sz="1250" b="0" i="0">
+                <a:solidFill>
+                  <a:srgbClr val="202B31"/>
+                </a:solidFill>
+                <a:latin typeface="Calibri"/>
+              </a:rPr>
+              <a:t>, pas au simple nombre d'essais.</a:t>
+            </a:r>
+          </a:p>
+        </p:txBody>
+      </p:sp>
+      <p:sp>
+        <p:nvSpPr>
+          <p:cNvPr id="11" name="TextBox 10"/>
           <p:cNvSpPr txBox="1"/>
           <p:nvPr/>
         </p:nvSpPr>
         <p:spPr>
           <a:xfrm>
-            <a:off x="10424160" y="6437376"/>
-            <a:ext cx="1325880" cy="320040"/>
+            <a:off x="457200" y="6437376"/>
+            <a:ext cx="8229600" cy="320040"/>
           </a:xfrm>
           <a:prstGeom prst="rect">
             <a:avLst/>
@@ -8238,6 +8287,51 @@
           </a:bodyPr>
           <a:lstStyle/>
           <a:p>
+            <a:pPr algn="l">
+              <a:lnSpc>
+                <a:spcPct val="100000"/>
+              </a:lnSpc>
+              <a:spcBef>
+                <a:spcPts val="0"/>
+              </a:spcBef>
+              <a:spcAft>
+                <a:spcPts val="400"/>
+              </a:spcAft>
+            </a:pPr>
+            <a:r>
+              <a:rPr sz="900" b="0" i="0">
+                <a:solidFill>
+                  <a:srgbClr val="6B7A82"/>
+                </a:solidFill>
+                <a:latin typeface="Calibri"/>
+              </a:rPr>
+              <a:t>Maintenance prédictive de la corrosion  ·  ESTL La Salle  ·  2025–2026</a:t>
+            </a:r>
+          </a:p>
+        </p:txBody>
+      </p:sp>
+      <p:sp>
+        <p:nvSpPr>
+          <p:cNvPr id="12" name="TextBox 11"/>
+          <p:cNvSpPr txBox="1"/>
+          <p:nvPr/>
+        </p:nvSpPr>
+        <p:spPr>
+          <a:xfrm>
+            <a:off x="10424160" y="6437376"/>
+            <a:ext cx="1325880" cy="320040"/>
+          </a:xfrm>
+          <a:prstGeom prst="rect">
+            <a:avLst/>
+          </a:prstGeom>
+          <a:noFill/>
+        </p:spPr>
+        <p:txBody>
+          <a:bodyPr wrap="square" anchor="t" lIns="0" rIns="0" tIns="0" bIns="0">
+            <a:spAutoFit/>
+          </a:bodyPr>
+          <a:lstStyle/>
+          <a:p>
             <a:pPr algn="r">
               <a:lnSpc>
                 <a:spcPct val="100000"/>
@@ -8256,7 +8350,7 @@
                 </a:solidFill>
                 <a:latin typeface="Calibri"/>
               </a:rPr>
-              <a:t>16 / 19</a:t>
+              <a:t>16 / 20</a:t>
             </a:r>
           </a:p>
         </p:txBody>
@@ -8407,7 +8501,7 @@
                 </a:solidFill>
                 <a:latin typeface="Calibri"/>
               </a:rPr>
-              <a:t>APPORTS DU TRAVAIL</a:t>
+              <a:t>DISCUSSION</a:t>
             </a:r>
           </a:p>
         </p:txBody>
@@ -8452,27 +8546,73 @@
                 </a:solidFill>
                 <a:latin typeface="Georgia"/>
               </a:rPr>
-              <a:t>Ce que cette étude apporte</a:t>
-            </a:r>
-          </a:p>
-        </p:txBody>
-      </p:sp>
-      <p:sp>
-        <p:nvSpPr>
-          <p:cNvPr id="6" name="Oval 5"/>
+              <a:t>Limites assumées d'une preuve de concept</a:t>
+            </a:r>
+          </a:p>
+        </p:txBody>
+      </p:sp>
+      <p:sp>
+        <p:nvSpPr>
+          <p:cNvPr id="6" name="Rounded Rectangle 5"/>
           <p:cNvSpPr/>
           <p:nvPr/>
         </p:nvSpPr>
         <p:spPr>
           <a:xfrm>
-            <a:off x="868680" y="2221992"/>
-            <a:ext cx="502920" cy="502920"/>
-          </a:xfrm>
-          <a:prstGeom prst="ellipse">
+            <a:off x="868680" y="2103120"/>
+            <a:ext cx="10469880" cy="841248"/>
+          </a:xfrm>
+          <a:prstGeom prst="roundRect">
             <a:avLst/>
           </a:prstGeom>
           <a:solidFill>
-            <a:srgbClr val="2C7A7B"/>
+            <a:srgbClr val="FFFFFF"/>
+          </a:solidFill>
+          <a:ln w="12700">
+            <a:solidFill>
+              <a:srgbClr val="E3DED4"/>
+            </a:solidFill>
+          </a:ln>
+          <a:effectLst/>
+        </p:spPr>
+        <p:style>
+          <a:lnRef idx="1">
+            <a:schemeClr val="accent1"/>
+          </a:lnRef>
+          <a:fillRef idx="3">
+            <a:schemeClr val="accent1"/>
+          </a:fillRef>
+          <a:effectRef idx="2">
+            <a:schemeClr val="accent1"/>
+          </a:effectRef>
+          <a:fontRef idx="minor">
+            <a:schemeClr val="lt1"/>
+          </a:fontRef>
+        </p:style>
+        <p:txBody>
+          <a:bodyPr rtlCol="0" anchor="ctr"/>
+          <a:lstStyle/>
+          <a:p>
+            <a:pPr algn="ctr"/>
+          </a:p>
+        </p:txBody>
+      </p:sp>
+      <p:sp>
+        <p:nvSpPr>
+          <p:cNvPr id="7" name="Rounded Rectangle 6"/>
+          <p:cNvSpPr/>
+          <p:nvPr/>
+        </p:nvSpPr>
+        <p:spPr>
+          <a:xfrm>
+            <a:off x="868680" y="2103120"/>
+            <a:ext cx="128016" cy="841248"/>
+          </a:xfrm>
+          <a:prstGeom prst="roundRect">
+            <a:avLst/>
+          </a:prstGeom>
+          <a:solidFill>
+            <a:srgbClr val="C9601A"/>
           </a:solidFill>
           <a:ln>
             <a:noFill/>
@@ -8494,32 +8634,23 @@
           </a:fontRef>
         </p:style>
         <p:txBody>
-          <a:bodyPr rtlCol="0" anchor="ctr" wrap="none" lIns="0" rIns="0" tIns="0" bIns="0"/>
+          <a:bodyPr rtlCol="0" anchor="ctr"/>
           <a:lstStyle/>
           <a:p>
             <a:pPr algn="ctr"/>
-            <a:r>
-              <a:rPr sz="1600" b="1">
-                <a:solidFill>
-                  <a:srgbClr val="FFFFFF"/>
-                </a:solidFill>
-                <a:latin typeface="Georgia"/>
-              </a:rPr>
-              <a:t>1</a:t>
-            </a:r>
-          </a:p>
-        </p:txBody>
-      </p:sp>
-      <p:sp>
-        <p:nvSpPr>
-          <p:cNvPr id="7" name="TextBox 6"/>
+          </a:p>
+        </p:txBody>
+      </p:sp>
+      <p:sp>
+        <p:nvSpPr>
+          <p:cNvPr id="8" name="TextBox 7"/>
           <p:cNvSpPr txBox="1"/>
           <p:nvPr/>
         </p:nvSpPr>
         <p:spPr>
           <a:xfrm>
-            <a:off x="1554480" y="2148840"/>
-            <a:ext cx="9784080" cy="914400"/>
+            <a:off x="1234440" y="2103120"/>
+            <a:ext cx="9875520" cy="841248"/>
           </a:xfrm>
           <a:prstGeom prst="rect">
             <a:avLst/>
@@ -8527,72 +8658,105 @@
           <a:noFill/>
         </p:spPr>
         <p:txBody>
-          <a:bodyPr wrap="square" anchor="t" lIns="0" rIns="0" tIns="0" bIns="0">
+          <a:bodyPr wrap="square" anchor="ctr" lIns="0" rIns="0" tIns="0" bIns="0">
             <a:spAutoFit/>
           </a:bodyPr>
           <a:lstStyle/>
           <a:p>
             <a:pPr algn="l">
               <a:lnSpc>
-                <a:spcPct val="108000"/>
-              </a:lnSpc>
-              <a:spcBef>
-                <a:spcPts val="0"/>
-              </a:spcBef>
-              <a:spcAft>
-                <a:spcPts val="300"/>
-              </a:spcAft>
-            </a:pPr>
-            <a:r>
-              <a:rPr sz="1600" b="1" i="0">
+                <a:spcPct val="105000"/>
+              </a:lnSpc>
+              <a:spcBef>
+                <a:spcPts val="0"/>
+              </a:spcBef>
+              <a:spcAft>
+                <a:spcPts val="400"/>
+              </a:spcAft>
+            </a:pPr>
+            <a:r>
+              <a:rPr sz="1500" b="1" i="0">
                 <a:solidFill>
                   <a:srgbClr val="202B31"/>
                 </a:solidFill>
                 <a:latin typeface="Georgia"/>
               </a:rPr>
-              <a:t>Apport méthodologique</a:t>
-            </a:r>
-          </a:p>
-          <a:p>
-            <a:pPr algn="l">
-              <a:lnSpc>
-                <a:spcPct val="108000"/>
-              </a:lnSpc>
-              <a:spcBef>
-                <a:spcPts val="0"/>
-              </a:spcBef>
-              <a:spcAft>
-                <a:spcPts val="300"/>
-              </a:spcAft>
-            </a:pPr>
-            <a:r>
-              <a:rPr sz="1300" b="0" i="0">
+              <a:t>Matériau : </a:t>
+            </a:r>
+            <a:r>
+              <a:rPr sz="1350" b="0" i="0">
                 <a:solidFill>
                   <a:srgbClr val="202B31"/>
                 </a:solidFill>
                 <a:latin typeface="Calibri"/>
               </a:rPr>
-              <a:t>La fiabilité du ML se lit dans la STRUCTURE du R² (positif si conditions couvertes et répétées), rarement explicité dans la littérature.</a:t>
-            </a:r>
-          </a:p>
-        </p:txBody>
-      </p:sp>
-      <p:sp>
-        <p:nvSpPr>
-          <p:cNvPr id="8" name="Oval 7"/>
+              <a:t>fil de fer ≠ acier API 5L : les valeurs absolues de CR ne sont pas directement transposables.</a:t>
+            </a:r>
+          </a:p>
+        </p:txBody>
+      </p:sp>
+      <p:sp>
+        <p:nvSpPr>
+          <p:cNvPr id="9" name="Rounded Rectangle 8"/>
           <p:cNvSpPr/>
           <p:nvPr/>
         </p:nvSpPr>
         <p:spPr>
           <a:xfrm>
-            <a:off x="868680" y="3209544"/>
-            <a:ext cx="502920" cy="502920"/>
-          </a:xfrm>
-          <a:prstGeom prst="ellipse">
+            <a:off x="868680" y="3035808"/>
+            <a:ext cx="10469880" cy="841248"/>
+          </a:xfrm>
+          <a:prstGeom prst="roundRect">
             <a:avLst/>
           </a:prstGeom>
           <a:solidFill>
-            <a:srgbClr val="2C7A7B"/>
+            <a:srgbClr val="FFFFFF"/>
+          </a:solidFill>
+          <a:ln w="12700">
+            <a:solidFill>
+              <a:srgbClr val="E3DED4"/>
+            </a:solidFill>
+          </a:ln>
+          <a:effectLst/>
+        </p:spPr>
+        <p:style>
+          <a:lnRef idx="1">
+            <a:schemeClr val="accent1"/>
+          </a:lnRef>
+          <a:fillRef idx="3">
+            <a:schemeClr val="accent1"/>
+          </a:fillRef>
+          <a:effectRef idx="2">
+            <a:schemeClr val="accent1"/>
+          </a:effectRef>
+          <a:fontRef idx="minor">
+            <a:schemeClr val="lt1"/>
+          </a:fontRef>
+        </p:style>
+        <p:txBody>
+          <a:bodyPr rtlCol="0" anchor="ctr"/>
+          <a:lstStyle/>
+          <a:p>
+            <a:pPr algn="ctr"/>
+          </a:p>
+        </p:txBody>
+      </p:sp>
+      <p:sp>
+        <p:nvSpPr>
+          <p:cNvPr id="10" name="Rounded Rectangle 9"/>
+          <p:cNvSpPr/>
+          <p:nvPr/>
+        </p:nvSpPr>
+        <p:spPr>
+          <a:xfrm>
+            <a:off x="868680" y="3035808"/>
+            <a:ext cx="128016" cy="841248"/>
+          </a:xfrm>
+          <a:prstGeom prst="roundRect">
+            <a:avLst/>
+          </a:prstGeom>
+          <a:solidFill>
+            <a:srgbClr val="C9601A"/>
           </a:solidFill>
           <a:ln>
             <a:noFill/>
@@ -8614,32 +8778,23 @@
           </a:fontRef>
         </p:style>
         <p:txBody>
-          <a:bodyPr rtlCol="0" anchor="ctr" wrap="none" lIns="0" rIns="0" tIns="0" bIns="0"/>
+          <a:bodyPr rtlCol="0" anchor="ctr"/>
           <a:lstStyle/>
           <a:p>
             <a:pPr algn="ctr"/>
-            <a:r>
-              <a:rPr sz="1600" b="1">
-                <a:solidFill>
-                  <a:srgbClr val="FFFFFF"/>
-                </a:solidFill>
-                <a:latin typeface="Georgia"/>
-              </a:rPr>
-              <a:t>2</a:t>
-            </a:r>
-          </a:p>
-        </p:txBody>
-      </p:sp>
-      <p:sp>
-        <p:nvSpPr>
-          <p:cNvPr id="9" name="TextBox 8"/>
+          </a:p>
+        </p:txBody>
+      </p:sp>
+      <p:sp>
+        <p:nvSpPr>
+          <p:cNvPr id="11" name="TextBox 10"/>
           <p:cNvSpPr txBox="1"/>
           <p:nvPr/>
         </p:nvSpPr>
         <p:spPr>
           <a:xfrm>
-            <a:off x="1554480" y="3136392"/>
-            <a:ext cx="9784080" cy="914400"/>
+            <a:off x="1234440" y="3035808"/>
+            <a:ext cx="9875520" cy="841248"/>
           </a:xfrm>
           <a:prstGeom prst="rect">
             <a:avLst/>
@@ -8647,72 +8802,105 @@
           <a:noFill/>
         </p:spPr>
         <p:txBody>
-          <a:bodyPr wrap="square" anchor="t" lIns="0" rIns="0" tIns="0" bIns="0">
+          <a:bodyPr wrap="square" anchor="ctr" lIns="0" rIns="0" tIns="0" bIns="0">
             <a:spAutoFit/>
           </a:bodyPr>
           <a:lstStyle/>
           <a:p>
             <a:pPr algn="l">
               <a:lnSpc>
-                <a:spcPct val="108000"/>
-              </a:lnSpc>
-              <a:spcBef>
-                <a:spcPts val="0"/>
-              </a:spcBef>
-              <a:spcAft>
-                <a:spcPts val="300"/>
-              </a:spcAft>
-            </a:pPr>
-            <a:r>
-              <a:rPr sz="1600" b="1" i="0">
+                <a:spcPct val="105000"/>
+              </a:lnSpc>
+              <a:spcBef>
+                <a:spcPts val="0"/>
+              </a:spcBef>
+              <a:spcAft>
+                <a:spcPts val="400"/>
+              </a:spcAft>
+            </a:pPr>
+            <a:r>
+              <a:rPr sz="1500" b="1" i="0">
                 <a:solidFill>
                   <a:srgbClr val="202B31"/>
                 </a:solidFill>
                 <a:latin typeface="Georgia"/>
               </a:rPr>
-              <a:t>Chaîne complète low-cost</a:t>
-            </a:r>
-          </a:p>
-          <a:p>
-            <a:pPr algn="l">
-              <a:lnSpc>
-                <a:spcPct val="108000"/>
-              </a:lnSpc>
-              <a:spcBef>
-                <a:spcPts val="0"/>
-              </a:spcBef>
-              <a:spcAft>
-                <a:spcPts val="300"/>
-              </a:spcAft>
-            </a:pPr>
-            <a:r>
-              <a:rPr sz="1300" b="0" i="0">
+              <a:t>Effet acide-shunt : </a:t>
+            </a:r>
+            <a:r>
+              <a:rPr sz="1350" b="0" i="0">
                 <a:solidFill>
                   <a:srgbClr val="202B31"/>
                 </a:solidFill>
                 <a:latin typeface="Calibri"/>
               </a:rPr>
-              <a:t>De la mesure à l'ordre de travail, en matériel accessible localement (~50 000 FCFA) et logiciels open-source.</a:t>
-            </a:r>
-          </a:p>
-        </p:txBody>
-      </p:sp>
-      <p:sp>
-        <p:nvSpPr>
-          <p:cNvPr id="10" name="Oval 9"/>
+              <a:t>en HCl concentré, l'électrolyte shunte la mesure, d'où l'emploi d'un fil fin.</a:t>
+            </a:r>
+          </a:p>
+        </p:txBody>
+      </p:sp>
+      <p:sp>
+        <p:nvSpPr>
+          <p:cNvPr id="12" name="Rounded Rectangle 11"/>
           <p:cNvSpPr/>
           <p:nvPr/>
         </p:nvSpPr>
         <p:spPr>
           <a:xfrm>
-            <a:off x="868680" y="4197096"/>
-            <a:ext cx="502920" cy="502920"/>
-          </a:xfrm>
-          <a:prstGeom prst="ellipse">
+            <a:off x="868680" y="3968496"/>
+            <a:ext cx="10469880" cy="841248"/>
+          </a:xfrm>
+          <a:prstGeom prst="roundRect">
             <a:avLst/>
           </a:prstGeom>
           <a:solidFill>
-            <a:srgbClr val="2C7A7B"/>
+            <a:srgbClr val="FFFFFF"/>
+          </a:solidFill>
+          <a:ln w="12700">
+            <a:solidFill>
+              <a:srgbClr val="E3DED4"/>
+            </a:solidFill>
+          </a:ln>
+          <a:effectLst/>
+        </p:spPr>
+        <p:style>
+          <a:lnRef idx="1">
+            <a:schemeClr val="accent1"/>
+          </a:lnRef>
+          <a:fillRef idx="3">
+            <a:schemeClr val="accent1"/>
+          </a:fillRef>
+          <a:effectRef idx="2">
+            <a:schemeClr val="accent1"/>
+          </a:effectRef>
+          <a:fontRef idx="minor">
+            <a:schemeClr val="lt1"/>
+          </a:fontRef>
+        </p:style>
+        <p:txBody>
+          <a:bodyPr rtlCol="0" anchor="ctr"/>
+          <a:lstStyle/>
+          <a:p>
+            <a:pPr algn="ctr"/>
+          </a:p>
+        </p:txBody>
+      </p:sp>
+      <p:sp>
+        <p:nvSpPr>
+          <p:cNvPr id="13" name="Rounded Rectangle 12"/>
+          <p:cNvSpPr/>
+          <p:nvPr/>
+        </p:nvSpPr>
+        <p:spPr>
+          <a:xfrm>
+            <a:off x="868680" y="3968496"/>
+            <a:ext cx="128016" cy="841248"/>
+          </a:xfrm>
+          <a:prstGeom prst="roundRect">
+            <a:avLst/>
+          </a:prstGeom>
+          <a:solidFill>
+            <a:srgbClr val="C9601A"/>
           </a:solidFill>
           <a:ln>
             <a:noFill/>
@@ -8734,32 +8922,23 @@
           </a:fontRef>
         </p:style>
         <p:txBody>
-          <a:bodyPr rtlCol="0" anchor="ctr" wrap="none" lIns="0" rIns="0" tIns="0" bIns="0"/>
+          <a:bodyPr rtlCol="0" anchor="ctr"/>
           <a:lstStyle/>
           <a:p>
             <a:pPr algn="ctr"/>
-            <a:r>
-              <a:rPr sz="1600" b="1">
-                <a:solidFill>
-                  <a:srgbClr val="FFFFFF"/>
-                </a:solidFill>
-                <a:latin typeface="Georgia"/>
-              </a:rPr>
-              <a:t>3</a:t>
-            </a:r>
-          </a:p>
-        </p:txBody>
-      </p:sp>
-      <p:sp>
-        <p:nvSpPr>
-          <p:cNvPr id="11" name="TextBox 10"/>
+          </a:p>
+        </p:txBody>
+      </p:sp>
+      <p:sp>
+        <p:nvSpPr>
+          <p:cNvPr id="14" name="TextBox 13"/>
           <p:cNvSpPr txBox="1"/>
           <p:nvPr/>
         </p:nvSpPr>
         <p:spPr>
           <a:xfrm>
-            <a:off x="1554480" y="4123944"/>
-            <a:ext cx="9784080" cy="914400"/>
+            <a:off x="1234440" y="3968496"/>
+            <a:ext cx="9875520" cy="841248"/>
           </a:xfrm>
           <a:prstGeom prst="rect">
             <a:avLst/>
@@ -8767,72 +8946,105 @@
           <a:noFill/>
         </p:spPr>
         <p:txBody>
-          <a:bodyPr wrap="square" anchor="t" lIns="0" rIns="0" tIns="0" bIns="0">
+          <a:bodyPr wrap="square" anchor="ctr" lIns="0" rIns="0" tIns="0" bIns="0">
             <a:spAutoFit/>
           </a:bodyPr>
           <a:lstStyle/>
           <a:p>
             <a:pPr algn="l">
               <a:lnSpc>
-                <a:spcPct val="108000"/>
-              </a:lnSpc>
-              <a:spcBef>
-                <a:spcPts val="0"/>
-              </a:spcBef>
-              <a:spcAft>
-                <a:spcPts val="300"/>
-              </a:spcAft>
-            </a:pPr>
-            <a:r>
-              <a:rPr sz="1600" b="1" i="0">
+                <a:spcPct val="105000"/>
+              </a:lnSpc>
+              <a:spcBef>
+                <a:spcPts val="0"/>
+              </a:spcBef>
+              <a:spcAft>
+                <a:spcPts val="400"/>
+              </a:spcAft>
+            </a:pPr>
+            <a:r>
+              <a:rPr sz="1500" b="1" i="0">
                 <a:solidFill>
                   <a:srgbClr val="202B31"/>
                 </a:solidFill>
                 <a:latin typeface="Georgia"/>
               </a:rPr>
-              <a:t>Double transposabilité</a:t>
-            </a:r>
-          </a:p>
-          <a:p>
-            <a:pPr algn="l">
-              <a:lnSpc>
-                <a:spcPct val="108000"/>
-              </a:lnSpc>
-              <a:spcBef>
-                <a:spcPts val="0"/>
-              </a:spcBef>
-              <a:spcAft>
-                <a:spcPts val="300"/>
-              </a:spcAft>
-            </a:pPr>
-            <a:r>
-              <a:rPr sz="1300" b="0" i="0">
+              <a:t>Jeu de données : </a:t>
+            </a:r>
+            <a:r>
+              <a:rPr sz="1350" b="0" i="0">
                 <a:solidFill>
                   <a:srgbClr val="202B31"/>
                 </a:solidFill>
                 <a:latin typeface="Calibri"/>
               </a:rPr>
-              <a:t>Saut I3.0 → 4.0 essentiellement logiciel chez COTCO ; déploiement autonome pour les PME africaines.</a:t>
-            </a:r>
-          </a:p>
-        </p:txBody>
-      </p:sp>
-      <p:sp>
-        <p:nvSpPr>
-          <p:cNvPr id="12" name="Oval 11"/>
+              <a:t>peu d'essais : métriques bruitées, en cours de consolidation.</a:t>
+            </a:r>
+          </a:p>
+        </p:txBody>
+      </p:sp>
+      <p:sp>
+        <p:nvSpPr>
+          <p:cNvPr id="15" name="Rounded Rectangle 14"/>
           <p:cNvSpPr/>
           <p:nvPr/>
         </p:nvSpPr>
         <p:spPr>
           <a:xfrm>
-            <a:off x="868680" y="5184648"/>
-            <a:ext cx="502920" cy="502920"/>
-          </a:xfrm>
-          <a:prstGeom prst="ellipse">
+            <a:off x="868680" y="4901183"/>
+            <a:ext cx="10469880" cy="841248"/>
+          </a:xfrm>
+          <a:prstGeom prst="roundRect">
             <a:avLst/>
           </a:prstGeom>
           <a:solidFill>
-            <a:srgbClr val="2C7A7B"/>
+            <a:srgbClr val="FFFFFF"/>
+          </a:solidFill>
+          <a:ln w="12700">
+            <a:solidFill>
+              <a:srgbClr val="E3DED4"/>
+            </a:solidFill>
+          </a:ln>
+          <a:effectLst/>
+        </p:spPr>
+        <p:style>
+          <a:lnRef idx="1">
+            <a:schemeClr val="accent1"/>
+          </a:lnRef>
+          <a:fillRef idx="3">
+            <a:schemeClr val="accent1"/>
+          </a:fillRef>
+          <a:effectRef idx="2">
+            <a:schemeClr val="accent1"/>
+          </a:effectRef>
+          <a:fontRef idx="minor">
+            <a:schemeClr val="lt1"/>
+          </a:fontRef>
+        </p:style>
+        <p:txBody>
+          <a:bodyPr rtlCol="0" anchor="ctr"/>
+          <a:lstStyle/>
+          <a:p>
+            <a:pPr algn="ctr"/>
+          </a:p>
+        </p:txBody>
+      </p:sp>
+      <p:sp>
+        <p:nvSpPr>
+          <p:cNvPr id="16" name="Rounded Rectangle 15"/>
+          <p:cNvSpPr/>
+          <p:nvPr/>
+        </p:nvSpPr>
+        <p:spPr>
+          <a:xfrm>
+            <a:off x="868680" y="4901183"/>
+            <a:ext cx="128016" cy="841248"/>
+          </a:xfrm>
+          <a:prstGeom prst="roundRect">
+            <a:avLst/>
+          </a:prstGeom>
+          <a:solidFill>
+            <a:srgbClr val="C9601A"/>
           </a:solidFill>
           <a:ln>
             <a:noFill/>
@@ -8854,32 +9066,77 @@
           </a:fontRef>
         </p:style>
         <p:txBody>
-          <a:bodyPr rtlCol="0" anchor="ctr" wrap="none" lIns="0" rIns="0" tIns="0" bIns="0"/>
+          <a:bodyPr rtlCol="0" anchor="ctr"/>
           <a:lstStyle/>
           <a:p>
             <a:pPr algn="ctr"/>
-            <a:r>
-              <a:rPr sz="1600" b="1">
-                <a:solidFill>
-                  <a:srgbClr val="FFFFFF"/>
+          </a:p>
+        </p:txBody>
+      </p:sp>
+      <p:sp>
+        <p:nvSpPr>
+          <p:cNvPr id="17" name="TextBox 16"/>
+          <p:cNvSpPr txBox="1"/>
+          <p:nvPr/>
+        </p:nvSpPr>
+        <p:spPr>
+          <a:xfrm>
+            <a:off x="1234440" y="4901183"/>
+            <a:ext cx="9875520" cy="841248"/>
+          </a:xfrm>
+          <a:prstGeom prst="rect">
+            <a:avLst/>
+          </a:prstGeom>
+          <a:noFill/>
+        </p:spPr>
+        <p:txBody>
+          <a:bodyPr wrap="square" anchor="ctr" lIns="0" rIns="0" tIns="0" bIns="0">
+            <a:spAutoFit/>
+          </a:bodyPr>
+          <a:lstStyle/>
+          <a:p>
+            <a:pPr algn="l">
+              <a:lnSpc>
+                <a:spcPct val="105000"/>
+              </a:lnSpc>
+              <a:spcBef>
+                <a:spcPts val="0"/>
+              </a:spcBef>
+              <a:spcAft>
+                <a:spcPts val="400"/>
+              </a:spcAft>
+            </a:pPr>
+            <a:r>
+              <a:rPr sz="1500" b="1" i="0">
+                <a:solidFill>
+                  <a:srgbClr val="202B31"/>
                 </a:solidFill>
                 <a:latin typeface="Georgia"/>
               </a:rPr>
-              <a:t>4</a:t>
-            </a:r>
-          </a:p>
-        </p:txBody>
-      </p:sp>
-      <p:sp>
-        <p:nvSpPr>
-          <p:cNvPr id="13" name="TextBox 12"/>
+              <a:t>Couverture thermique : </a:t>
+            </a:r>
+            <a:r>
+              <a:rPr sz="1350" b="0" i="0">
+                <a:solidFill>
+                  <a:srgbClr val="202B31"/>
+                </a:solidFill>
+                <a:latin typeface="Calibri"/>
+              </a:rPr>
+              <a:t>une seule plage (~30 °C) répétée ; ~32 °C encore représentée par un seul essai.</a:t>
+            </a:r>
+          </a:p>
+        </p:txBody>
+      </p:sp>
+      <p:sp>
+        <p:nvSpPr>
+          <p:cNvPr id="18" name="TextBox 17"/>
           <p:cNvSpPr txBox="1"/>
           <p:nvPr/>
         </p:nvSpPr>
         <p:spPr>
           <a:xfrm>
-            <a:off x="1554480" y="5111496"/>
-            <a:ext cx="9784080" cy="914400"/>
+            <a:off x="868680" y="5943600"/>
+            <a:ext cx="10424160" cy="411480"/>
           </a:xfrm>
           <a:prstGeom prst="rect">
             <a:avLst/>
@@ -8894,52 +9151,30 @@
           <a:p>
             <a:pPr algn="l">
               <a:lnSpc>
-                <a:spcPct val="108000"/>
-              </a:lnSpc>
-              <a:spcBef>
-                <a:spcPts val="0"/>
-              </a:spcBef>
-              <a:spcAft>
-                <a:spcPts val="300"/>
-              </a:spcAft>
-            </a:pPr>
-            <a:r>
-              <a:rPr sz="1600" b="1" i="0">
-                <a:solidFill>
-                  <a:srgbClr val="202B31"/>
-                </a:solidFill>
-                <a:latin typeface="Georgia"/>
-              </a:rPr>
-              <a:t>Rigueur &amp; traçabilité</a:t>
-            </a:r>
-          </a:p>
-          <a:p>
-            <a:pPr algn="l">
-              <a:lnSpc>
-                <a:spcPct val="108000"/>
-              </a:lnSpc>
-              <a:spcBef>
-                <a:spcPts val="0"/>
-              </a:spcBef>
-              <a:spcAft>
-                <a:spcPts val="300"/>
-              </a:spcAft>
-            </a:pPr>
-            <a:r>
-              <a:rPr sz="1300" b="0" i="0">
-                <a:solidFill>
-                  <a:srgbClr val="202B31"/>
-                </a:solidFill>
-                <a:latin typeface="Calibri"/>
-              </a:rPr>
-              <a:t>Chaque donnée, seuil et décision adossé à une source (norme, référence, loi physique).</a:t>
-            </a:r>
-          </a:p>
-        </p:txBody>
-      </p:sp>
-      <p:sp>
-        <p:nvSpPr>
-          <p:cNvPr id="14" name="TextBox 13"/>
+                <a:spcPct val="100000"/>
+              </a:lnSpc>
+              <a:spcBef>
+                <a:spcPts val="0"/>
+              </a:spcBef>
+              <a:spcAft>
+                <a:spcPts val="400"/>
+              </a:spcAft>
+            </a:pPr>
+            <a:r>
+              <a:rPr sz="1350" b="1" i="1">
+                <a:solidFill>
+                  <a:srgbClr val="2C7A7B"/>
+                </a:solidFill>
+                <a:latin typeface="Calibri"/>
+              </a:rPr>
+              <a:t>Ces limites ne sont pas intrinsèques à la méthode : elles définissent les conditions du passage à l'échelle.</a:t>
+            </a:r>
+          </a:p>
+        </p:txBody>
+      </p:sp>
+      <p:sp>
+        <p:nvSpPr>
+          <p:cNvPr id="19" name="TextBox 18"/>
           <p:cNvSpPr txBox="1"/>
           <p:nvPr/>
         </p:nvSpPr>
@@ -8984,7 +9219,7 @@
       </p:sp>
       <p:sp>
         <p:nvSpPr>
-          <p:cNvPr id="15" name="TextBox 14"/>
+          <p:cNvPr id="20" name="TextBox 19"/>
           <p:cNvSpPr txBox="1"/>
           <p:nvPr/>
         </p:nvSpPr>
@@ -9022,7 +9257,7 @@
                 </a:solidFill>
                 <a:latin typeface="Calibri"/>
               </a:rPr>
-              <a:t>17 / 19</a:t>
+              <a:t>17 / 20</a:t>
             </a:r>
           </a:p>
         </p:txBody>
@@ -9060,7 +9295,7 @@
             <a:avLst/>
           </a:prstGeom>
           <a:solidFill>
-            <a:srgbClr val="16252E"/>
+            <a:srgbClr val="F5F3EF"/>
           </a:solidFill>
           <a:ln>
             <a:noFill/>
@@ -9098,7 +9333,7 @@
         <p:spPr>
           <a:xfrm>
             <a:off x="0" y="0"/>
-            <a:ext cx="256032" cy="6858000"/>
+            <a:ext cx="155448" cy="6858000"/>
           </a:xfrm>
           <a:prstGeom prst="rect">
             <a:avLst/>
@@ -9141,8 +9376,8 @@
         </p:nvSpPr>
         <p:spPr>
           <a:xfrm>
-            <a:off x="868680" y="603504"/>
-            <a:ext cx="10058400" cy="365760"/>
+            <a:off x="841248" y="475488"/>
+            <a:ext cx="10515600" cy="320040"/>
           </a:xfrm>
           <a:prstGeom prst="rect">
             <a:avLst/>
@@ -9167,13 +9402,13 @@
               </a:spcAft>
             </a:pPr>
             <a:r>
-              <a:rPr sz="1300" b="1" i="0">
+              <a:rPr sz="1250" b="1" i="0">
                 <a:solidFill>
                   <a:srgbClr val="C9601A"/>
                 </a:solidFill>
                 <a:latin typeface="Calibri"/>
               </a:rPr>
-              <a:t>CONCLUSION</a:t>
+              <a:t>APPORTS DU TRAVAIL</a:t>
             </a:r>
           </a:p>
         </p:txBody>
@@ -9186,8 +9421,8 @@
         </p:nvSpPr>
         <p:spPr>
           <a:xfrm>
-            <a:off x="841248" y="1024128"/>
-            <a:ext cx="10607040" cy="914400"/>
+            <a:off x="822960" y="786384"/>
+            <a:ext cx="10698480" cy="1188720"/>
           </a:xfrm>
           <a:prstGeom prst="rect">
             <a:avLst/>
@@ -9214,11 +9449,11 @@
             <a:r>
               <a:rPr sz="3100" b="1" i="0">
                 <a:solidFill>
-                  <a:srgbClr val="FFFFFF"/>
+                  <a:srgbClr val="202B31"/>
                 </a:solidFill>
                 <a:latin typeface="Georgia"/>
               </a:rPr>
-              <a:t>Une brique fondatrice, validée et reproductible</a:t>
+              <a:t>Ce que cette étude apporte</a:t>
             </a:r>
           </a:p>
         </p:txBody>
@@ -9231,14 +9466,14 @@
         </p:nvSpPr>
         <p:spPr>
           <a:xfrm>
-            <a:off x="886968" y="2103120"/>
-            <a:ext cx="548640" cy="548640"/>
+            <a:off x="868680" y="2221992"/>
+            <a:ext cx="502920" cy="502920"/>
           </a:xfrm>
           <a:prstGeom prst="ellipse">
             <a:avLst/>
           </a:prstGeom>
           <a:solidFill>
-            <a:srgbClr val="C9601A"/>
+            <a:srgbClr val="2C7A7B"/>
           </a:solidFill>
           <a:ln>
             <a:noFill/>
@@ -9265,7 +9500,7 @@
           <a:p>
             <a:pPr algn="ctr"/>
             <a:r>
-              <a:rPr sz="1700" b="1">
+              <a:rPr sz="1600" b="1">
                 <a:solidFill>
                   <a:srgbClr val="FFFFFF"/>
                 </a:solidFill>
@@ -9284,8 +9519,8 @@
         </p:nvSpPr>
         <p:spPr>
           <a:xfrm>
-            <a:off x="1645920" y="2121408"/>
-            <a:ext cx="9692640" cy="548640"/>
+            <a:off x="1554480" y="2148840"/>
+            <a:ext cx="9784080" cy="914400"/>
           </a:xfrm>
           <a:prstGeom prst="rect">
             <a:avLst/>
@@ -9300,32 +9535,45 @@
           <a:p>
             <a:pPr algn="l">
               <a:lnSpc>
-                <a:spcPct val="105000"/>
-              </a:lnSpc>
-              <a:spcBef>
-                <a:spcPts val="0"/>
-              </a:spcBef>
-              <a:spcAft>
-                <a:spcPts val="400"/>
-              </a:spcAft>
-            </a:pPr>
-            <a:r>
-              <a:rPr sz="1500" b="1" i="0">
-                <a:solidFill>
-                  <a:srgbClr val="C9601A"/>
+                <a:spcPct val="108000"/>
+              </a:lnSpc>
+              <a:spcBef>
+                <a:spcPts val="0"/>
+              </a:spcBef>
+              <a:spcAft>
+                <a:spcPts val="300"/>
+              </a:spcAft>
+            </a:pPr>
+            <a:r>
+              <a:rPr sz="1600" b="1" i="0">
+                <a:solidFill>
+                  <a:srgbClr val="202B31"/>
                 </a:solidFill>
                 <a:latin typeface="Georgia"/>
               </a:rPr>
-              <a:t>OS1 : </a:t>
-            </a:r>
-            <a:r>
-              <a:rPr sz="1400" b="0" i="0">
-                <a:solidFill>
-                  <a:srgbClr val="CADDDC"/>
-                </a:solidFill>
-                <a:latin typeface="Calibri"/>
-              </a:rPr>
-              <a:t>chaîne d'acquisition ER fonctionnelle, suivi d'essais run-to-failure complets.</a:t>
+              <a:t>Apport méthodologique</a:t>
+            </a:r>
+          </a:p>
+          <a:p>
+            <a:pPr algn="l">
+              <a:lnSpc>
+                <a:spcPct val="108000"/>
+              </a:lnSpc>
+              <a:spcBef>
+                <a:spcPts val="0"/>
+              </a:spcBef>
+              <a:spcAft>
+                <a:spcPts val="300"/>
+              </a:spcAft>
+            </a:pPr>
+            <a:r>
+              <a:rPr sz="1300" b="0" i="0">
+                <a:solidFill>
+                  <a:srgbClr val="202B31"/>
+                </a:solidFill>
+                <a:latin typeface="Calibri"/>
+              </a:rPr>
+              <a:t>La fiabilité du ML se lit dans la STRUCTURE du R² (positif si conditions couvertes et répétées), rarement explicité dans la littérature.</a:t>
             </a:r>
           </a:p>
         </p:txBody>
@@ -9338,14 +9586,14 @@
         </p:nvSpPr>
         <p:spPr>
           <a:xfrm>
-            <a:off x="886968" y="2816352"/>
-            <a:ext cx="548640" cy="548640"/>
+            <a:off x="868680" y="3209544"/>
+            <a:ext cx="502920" cy="502920"/>
           </a:xfrm>
           <a:prstGeom prst="ellipse">
             <a:avLst/>
           </a:prstGeom>
           <a:solidFill>
-            <a:srgbClr val="C9601A"/>
+            <a:srgbClr val="2C7A7B"/>
           </a:solidFill>
           <a:ln>
             <a:noFill/>
@@ -9372,7 +9620,7 @@
           <a:p>
             <a:pPr algn="ctr"/>
             <a:r>
-              <a:rPr sz="1700" b="1">
+              <a:rPr sz="1600" b="1">
                 <a:solidFill>
                   <a:srgbClr val="FFFFFF"/>
                 </a:solidFill>
@@ -9391,8 +9639,8 @@
         </p:nvSpPr>
         <p:spPr>
           <a:xfrm>
-            <a:off x="1645920" y="2834640"/>
-            <a:ext cx="9692640" cy="548640"/>
+            <a:off x="1554480" y="3136392"/>
+            <a:ext cx="9784080" cy="914400"/>
           </a:xfrm>
           <a:prstGeom prst="rect">
             <a:avLst/>
@@ -9407,32 +9655,45 @@
           <a:p>
             <a:pPr algn="l">
               <a:lnSpc>
-                <a:spcPct val="105000"/>
-              </a:lnSpc>
-              <a:spcBef>
-                <a:spcPts val="0"/>
-              </a:spcBef>
-              <a:spcAft>
-                <a:spcPts val="400"/>
-              </a:spcAft>
-            </a:pPr>
-            <a:r>
-              <a:rPr sz="1500" b="1" i="0">
-                <a:solidFill>
-                  <a:srgbClr val="C9601A"/>
+                <a:spcPct val="108000"/>
+              </a:lnSpc>
+              <a:spcBef>
+                <a:spcPts val="0"/>
+              </a:spcBef>
+              <a:spcAft>
+                <a:spcPts val="300"/>
+              </a:spcAft>
+            </a:pPr>
+            <a:r>
+              <a:rPr sz="1600" b="1" i="0">
+                <a:solidFill>
+                  <a:srgbClr val="202B31"/>
                 </a:solidFill>
                 <a:latin typeface="Georgia"/>
               </a:rPr>
-              <a:t>OS2 : </a:t>
-            </a:r>
-            <a:r>
-              <a:rPr sz="1400" b="0" i="0">
-                <a:solidFill>
-                  <a:srgbClr val="CADDDC"/>
-                </a:solidFill>
-                <a:latin typeface="Calibri"/>
-              </a:rPr>
-              <a:t>XGBoost prédit le CR et surpasse les baselines, sous condition de couverture.</a:t>
+              <a:t>Chaîne complète low-cost</a:t>
+            </a:r>
+          </a:p>
+          <a:p>
+            <a:pPr algn="l">
+              <a:lnSpc>
+                <a:spcPct val="108000"/>
+              </a:lnSpc>
+              <a:spcBef>
+                <a:spcPts val="0"/>
+              </a:spcBef>
+              <a:spcAft>
+                <a:spcPts val="300"/>
+              </a:spcAft>
+            </a:pPr>
+            <a:r>
+              <a:rPr sz="1300" b="0" i="0">
+                <a:solidFill>
+                  <a:srgbClr val="202B31"/>
+                </a:solidFill>
+                <a:latin typeface="Calibri"/>
+              </a:rPr>
+              <a:t>De la mesure à l'ordre de travail, en matériel accessible localement (~50 000 FCFA) et logiciels open-source.</a:t>
             </a:r>
           </a:p>
         </p:txBody>
@@ -9445,14 +9706,14 @@
         </p:nvSpPr>
         <p:spPr>
           <a:xfrm>
-            <a:off x="886968" y="3529584"/>
-            <a:ext cx="548640" cy="548640"/>
+            <a:off x="868680" y="4197096"/>
+            <a:ext cx="502920" cy="502920"/>
           </a:xfrm>
           <a:prstGeom prst="ellipse">
             <a:avLst/>
           </a:prstGeom>
           <a:solidFill>
-            <a:srgbClr val="C9601A"/>
+            <a:srgbClr val="2C7A7B"/>
           </a:solidFill>
           <a:ln>
             <a:noFill/>
@@ -9479,7 +9740,7 @@
           <a:p>
             <a:pPr algn="ctr"/>
             <a:r>
-              <a:rPr sz="1700" b="1">
+              <a:rPr sz="1600" b="1">
                 <a:solidFill>
                   <a:srgbClr val="FFFFFF"/>
                 </a:solidFill>
@@ -9498,8 +9759,8 @@
         </p:nvSpPr>
         <p:spPr>
           <a:xfrm>
-            <a:off x="1645920" y="3547872"/>
-            <a:ext cx="9692640" cy="548640"/>
+            <a:off x="1554480" y="4123944"/>
+            <a:ext cx="9784080" cy="914400"/>
           </a:xfrm>
           <a:prstGeom prst="rect">
             <a:avLst/>
@@ -9514,32 +9775,45 @@
           <a:p>
             <a:pPr algn="l">
               <a:lnSpc>
-                <a:spcPct val="105000"/>
-              </a:lnSpc>
-              <a:spcBef>
-                <a:spcPts val="0"/>
-              </a:spcBef>
-              <a:spcAft>
-                <a:spcPts val="400"/>
-              </a:spcAft>
-            </a:pPr>
-            <a:r>
-              <a:rPr sz="1500" b="1" i="0">
-                <a:solidFill>
-                  <a:srgbClr val="C9601A"/>
+                <a:spcPct val="108000"/>
+              </a:lnSpc>
+              <a:spcBef>
+                <a:spcPts val="0"/>
+              </a:spcBef>
+              <a:spcAft>
+                <a:spcPts val="300"/>
+              </a:spcAft>
+            </a:pPr>
+            <a:r>
+              <a:rPr sz="1600" b="1" i="0">
+                <a:solidFill>
+                  <a:srgbClr val="202B31"/>
                 </a:solidFill>
                 <a:latin typeface="Georgia"/>
               </a:rPr>
-              <a:t>OS3 : </a:t>
-            </a:r>
-            <a:r>
-              <a:rPr sz="1400" b="0" i="0">
-                <a:solidFill>
-                  <a:srgbClr val="CADDDC"/>
-                </a:solidFill>
-                <a:latin typeface="Calibri"/>
-              </a:rPr>
-              <a:t>température dominante ; la répétabilité des conditions fait la fiabilité.</a:t>
+              <a:t>Double transposabilité</a:t>
+            </a:r>
+          </a:p>
+          <a:p>
+            <a:pPr algn="l">
+              <a:lnSpc>
+                <a:spcPct val="108000"/>
+              </a:lnSpc>
+              <a:spcBef>
+                <a:spcPts val="0"/>
+              </a:spcBef>
+              <a:spcAft>
+                <a:spcPts val="300"/>
+              </a:spcAft>
+            </a:pPr>
+            <a:r>
+              <a:rPr sz="1300" b="0" i="0">
+                <a:solidFill>
+                  <a:srgbClr val="202B31"/>
+                </a:solidFill>
+                <a:latin typeface="Calibri"/>
+              </a:rPr>
+              <a:t>Saut I3.0 → 4.0 essentiellement logiciel chez COTCO ; déploiement autonome pour les PME africaines.</a:t>
             </a:r>
           </a:p>
         </p:txBody>
@@ -9552,14 +9826,14 @@
         </p:nvSpPr>
         <p:spPr>
           <a:xfrm>
-            <a:off x="886968" y="4242816"/>
-            <a:ext cx="548640" cy="548640"/>
+            <a:off x="868680" y="5184648"/>
+            <a:ext cx="502920" cy="502920"/>
           </a:xfrm>
           <a:prstGeom prst="ellipse">
             <a:avLst/>
           </a:prstGeom>
           <a:solidFill>
-            <a:srgbClr val="C9601A"/>
+            <a:srgbClr val="2C7A7B"/>
           </a:solidFill>
           <a:ln>
             <a:noFill/>
@@ -9586,7 +9860,7 @@
           <a:p>
             <a:pPr algn="ctr"/>
             <a:r>
-              <a:rPr sz="1700" b="1">
+              <a:rPr sz="1600" b="1">
                 <a:solidFill>
                   <a:srgbClr val="FFFFFF"/>
                 </a:solidFill>
@@ -9605,8 +9879,8 @@
         </p:nvSpPr>
         <p:spPr>
           <a:xfrm>
-            <a:off x="1645920" y="4261104"/>
-            <a:ext cx="9692640" cy="548640"/>
+            <a:off x="1554480" y="5111496"/>
+            <a:ext cx="9784080" cy="914400"/>
           </a:xfrm>
           <a:prstGeom prst="rect">
             <a:avLst/>
@@ -9621,32 +9895,45 @@
           <a:p>
             <a:pPr algn="l">
               <a:lnSpc>
-                <a:spcPct val="105000"/>
-              </a:lnSpc>
-              <a:spcBef>
-                <a:spcPts val="0"/>
-              </a:spcBef>
-              <a:spcAft>
-                <a:spcPts val="400"/>
-              </a:spcAft>
-            </a:pPr>
-            <a:r>
-              <a:rPr sz="1500" b="1" i="0">
-                <a:solidFill>
-                  <a:srgbClr val="C9601A"/>
+                <a:spcPct val="108000"/>
+              </a:lnSpc>
+              <a:spcBef>
+                <a:spcPts val="0"/>
+              </a:spcBef>
+              <a:spcAft>
+                <a:spcPts val="300"/>
+              </a:spcAft>
+            </a:pPr>
+            <a:r>
+              <a:rPr sz="1600" b="1" i="0">
+                <a:solidFill>
+                  <a:srgbClr val="202B31"/>
                 </a:solidFill>
                 <a:latin typeface="Georgia"/>
               </a:rPr>
-              <a:t>OS4 : </a:t>
-            </a:r>
-            <a:r>
-              <a:rPr sz="1400" b="0" i="0">
-                <a:solidFill>
-                  <a:srgbClr val="CADDDC"/>
-                </a:solidFill>
-                <a:latin typeface="Calibri"/>
-              </a:rPr>
-              <a:t>boucle décision → action démontrée par un module GMAO maison, à coût nul.</a:t>
+              <a:t>Rigueur &amp; traçabilité</a:t>
+            </a:r>
+          </a:p>
+          <a:p>
+            <a:pPr algn="l">
+              <a:lnSpc>
+                <a:spcPct val="108000"/>
+              </a:lnSpc>
+              <a:spcBef>
+                <a:spcPts val="0"/>
+              </a:spcBef>
+              <a:spcAft>
+                <a:spcPts val="300"/>
+              </a:spcAft>
+            </a:pPr>
+            <a:r>
+              <a:rPr sz="1300" b="0" i="0">
+                <a:solidFill>
+                  <a:srgbClr val="202B31"/>
+                </a:solidFill>
+                <a:latin typeface="Calibri"/>
+              </a:rPr>
+              <a:t>Chaque donnée, seuil et décision adossé à une source (norme, référence, loi physique).</a:t>
             </a:r>
           </a:p>
         </p:txBody>
@@ -9659,8 +9946,8 @@
         </p:nvSpPr>
         <p:spPr>
           <a:xfrm>
-            <a:off x="868680" y="5212080"/>
-            <a:ext cx="10424160" cy="914400"/>
+            <a:off x="457200" y="6437376"/>
+            <a:ext cx="8229600" cy="320040"/>
           </a:xfrm>
           <a:prstGeom prst="rect">
             <a:avLst/>
@@ -9675,7 +9962,7 @@
           <a:p>
             <a:pPr algn="l">
               <a:lnSpc>
-                <a:spcPct val="115000"/>
+                <a:spcPct val="100000"/>
               </a:lnSpc>
               <a:spcBef>
                 <a:spcPts val="0"/>
@@ -9685,22 +9972,13 @@
               </a:spcAft>
             </a:pPr>
             <a:r>
-              <a:rPr sz="1450" b="1" i="0">
-                <a:solidFill>
-                  <a:srgbClr val="FFFFFF"/>
-                </a:solidFill>
-                <a:latin typeface="Calibri"/>
-              </a:rPr>
-              <a:t>Objectifs partiellement atteints, en cours de consolidation. </a:t>
-            </a:r>
-            <a:r>
-              <a:rPr sz="1450" b="0" i="1">
-                <a:solidFill>
-                  <a:srgbClr val="CADDDC"/>
-                </a:solidFill>
-                <a:latin typeface="Calibri"/>
-              </a:rPr>
-              <a:t>Mais un prototype qui va de la mesure à la décision, transposable des deux côtés.</a:t>
+              <a:rPr sz="900" b="0" i="0">
+                <a:solidFill>
+                  <a:srgbClr val="6B7A82"/>
+                </a:solidFill>
+                <a:latin typeface="Calibri"/>
+              </a:rPr>
+              <a:t>Maintenance prédictive de la corrosion  ·  ESTL La Salle  ·  2025–2026</a:t>
             </a:r>
           </a:p>
         </p:txBody>
@@ -9713,8 +9991,8 @@
         </p:nvSpPr>
         <p:spPr>
           <a:xfrm>
-            <a:off x="457200" y="6437376"/>
-            <a:ext cx="8229600" cy="320040"/>
+            <a:off x="10424160" y="6437376"/>
+            <a:ext cx="1325880" cy="320040"/>
           </a:xfrm>
           <a:prstGeom prst="rect">
             <a:avLst/>
@@ -9727,7 +10005,7 @@
           </a:bodyPr>
           <a:lstStyle/>
           <a:p>
-            <a:pPr algn="l">
+            <a:pPr algn="r">
               <a:lnSpc>
                 <a:spcPct val="100000"/>
               </a:lnSpc>
@@ -9739,58 +10017,13 @@
               </a:spcAft>
             </a:pPr>
             <a:r>
-              <a:rPr sz="900" b="0" i="0">
-                <a:solidFill>
-                  <a:srgbClr val="CADDDC"/>
-                </a:solidFill>
-                <a:latin typeface="Calibri"/>
-              </a:rPr>
-              <a:t>Maintenance prédictive de la corrosion  ·  ESTL La Salle  ·  2025–2026</a:t>
-            </a:r>
-          </a:p>
-        </p:txBody>
-      </p:sp>
-      <p:sp>
-        <p:nvSpPr>
-          <p:cNvPr id="16" name="TextBox 15"/>
-          <p:cNvSpPr txBox="1"/>
-          <p:nvPr/>
-        </p:nvSpPr>
-        <p:spPr>
-          <a:xfrm>
-            <a:off x="10424160" y="6437376"/>
-            <a:ext cx="1325880" cy="320040"/>
-          </a:xfrm>
-          <a:prstGeom prst="rect">
-            <a:avLst/>
-          </a:prstGeom>
-          <a:noFill/>
-        </p:spPr>
-        <p:txBody>
-          <a:bodyPr wrap="square" anchor="t" lIns="0" rIns="0" tIns="0" bIns="0">
-            <a:spAutoFit/>
-          </a:bodyPr>
-          <a:lstStyle/>
-          <a:p>
-            <a:pPr algn="r">
-              <a:lnSpc>
-                <a:spcPct val="100000"/>
-              </a:lnSpc>
-              <a:spcBef>
-                <a:spcPts val="0"/>
-              </a:spcBef>
-              <a:spcAft>
-                <a:spcPts val="400"/>
-              </a:spcAft>
-            </a:pPr>
-            <a:r>
               <a:rPr sz="1000" b="1" i="0">
                 <a:solidFill>
                   <a:srgbClr val="C9601A"/>
                 </a:solidFill>
                 <a:latin typeface="Calibri"/>
               </a:rPr>
-              <a:t>18 / 19</a:t>
+              <a:t>18 / 20</a:t>
             </a:r>
           </a:p>
         </p:txBody>
@@ -9866,7 +10099,7 @@
         <p:spPr>
           <a:xfrm>
             <a:off x="0" y="0"/>
-            <a:ext cx="12191695" cy="256032"/>
+            <a:ext cx="256032" cy="6858000"/>
           </a:xfrm>
           <a:prstGeom prst="rect">
             <a:avLst/>
@@ -9903,16 +10136,106 @@
       </p:sp>
       <p:sp>
         <p:nvSpPr>
-          <p:cNvPr id="4" name="Rectangle 3"/>
+          <p:cNvPr id="4" name="TextBox 3"/>
+          <p:cNvSpPr txBox="1"/>
+          <p:nvPr/>
+        </p:nvSpPr>
+        <p:spPr>
+          <a:xfrm>
+            <a:off x="868680" y="603504"/>
+            <a:ext cx="10058400" cy="365760"/>
+          </a:xfrm>
+          <a:prstGeom prst="rect">
+            <a:avLst/>
+          </a:prstGeom>
+          <a:noFill/>
+        </p:spPr>
+        <p:txBody>
+          <a:bodyPr wrap="square" anchor="t" lIns="0" rIns="0" tIns="0" bIns="0">
+            <a:spAutoFit/>
+          </a:bodyPr>
+          <a:lstStyle/>
+          <a:p>
+            <a:pPr algn="l">
+              <a:lnSpc>
+                <a:spcPct val="100000"/>
+              </a:lnSpc>
+              <a:spcBef>
+                <a:spcPts val="0"/>
+              </a:spcBef>
+              <a:spcAft>
+                <a:spcPts val="400"/>
+              </a:spcAft>
+            </a:pPr>
+            <a:r>
+              <a:rPr sz="1300" b="1" i="0">
+                <a:solidFill>
+                  <a:srgbClr val="C9601A"/>
+                </a:solidFill>
+                <a:latin typeface="Calibri"/>
+              </a:rPr>
+              <a:t>CONCLUSION</a:t>
+            </a:r>
+          </a:p>
+        </p:txBody>
+      </p:sp>
+      <p:sp>
+        <p:nvSpPr>
+          <p:cNvPr id="5" name="TextBox 4"/>
+          <p:cNvSpPr txBox="1"/>
+          <p:nvPr/>
+        </p:nvSpPr>
+        <p:spPr>
+          <a:xfrm>
+            <a:off x="841248" y="1024128"/>
+            <a:ext cx="10607040" cy="914400"/>
+          </a:xfrm>
+          <a:prstGeom prst="rect">
+            <a:avLst/>
+          </a:prstGeom>
+          <a:noFill/>
+        </p:spPr>
+        <p:txBody>
+          <a:bodyPr wrap="square" anchor="t" lIns="0" rIns="0" tIns="0" bIns="0">
+            <a:spAutoFit/>
+          </a:bodyPr>
+          <a:lstStyle/>
+          <a:p>
+            <a:pPr algn="l">
+              <a:lnSpc>
+                <a:spcPct val="100000"/>
+              </a:lnSpc>
+              <a:spcBef>
+                <a:spcPts val="0"/>
+              </a:spcBef>
+              <a:spcAft>
+                <a:spcPts val="400"/>
+              </a:spcAft>
+            </a:pPr>
+            <a:r>
+              <a:rPr sz="3100" b="1" i="0">
+                <a:solidFill>
+                  <a:srgbClr val="FFFFFF"/>
+                </a:solidFill>
+                <a:latin typeface="Georgia"/>
+              </a:rPr>
+              <a:t>Une brique fondatrice, validée et reproductible</a:t>
+            </a:r>
+          </a:p>
+        </p:txBody>
+      </p:sp>
+      <p:sp>
+        <p:nvSpPr>
+          <p:cNvPr id="6" name="Oval 5"/>
           <p:cNvSpPr/>
           <p:nvPr/>
         </p:nvSpPr>
         <p:spPr>
           <a:xfrm>
-            <a:off x="0" y="6601968"/>
-            <a:ext cx="12191695" cy="256032"/>
-          </a:xfrm>
-          <a:prstGeom prst="rect">
+            <a:off x="886968" y="2103120"/>
+            <a:ext cx="548640" cy="548640"/>
+          </a:xfrm>
+          <a:prstGeom prst="ellipse">
             <a:avLst/>
           </a:prstGeom>
           <a:solidFill>
@@ -9938,23 +10261,32 @@
           </a:fontRef>
         </p:style>
         <p:txBody>
-          <a:bodyPr rtlCol="0" anchor="ctr"/>
+          <a:bodyPr rtlCol="0" anchor="ctr" wrap="none" lIns="0" rIns="0" tIns="0" bIns="0"/>
           <a:lstStyle/>
           <a:p>
             <a:pPr algn="ctr"/>
-          </a:p>
-        </p:txBody>
-      </p:sp>
-      <p:sp>
-        <p:nvSpPr>
-          <p:cNvPr id="5" name="TextBox 4"/>
+            <a:r>
+              <a:rPr sz="1700" b="1">
+                <a:solidFill>
+                  <a:srgbClr val="FFFFFF"/>
+                </a:solidFill>
+                <a:latin typeface="Georgia"/>
+              </a:rPr>
+              <a:t>1</a:t>
+            </a:r>
+          </a:p>
+        </p:txBody>
+      </p:sp>
+      <p:sp>
+        <p:nvSpPr>
+          <p:cNvPr id="7" name="TextBox 6"/>
           <p:cNvSpPr txBox="1"/>
           <p:nvPr/>
         </p:nvSpPr>
         <p:spPr>
           <a:xfrm>
-            <a:off x="914400" y="2286000"/>
-            <a:ext cx="10332720" cy="1097280"/>
+            <a:off x="1645920" y="2121408"/>
+            <a:ext cx="9692640" cy="548640"/>
           </a:xfrm>
           <a:prstGeom prst="rect">
             <a:avLst/>
@@ -9967,9 +10299,9 @@
           </a:bodyPr>
           <a:lstStyle/>
           <a:p>
-            <a:pPr algn="ctr">
-              <a:lnSpc>
-                <a:spcPct val="100000"/>
+            <a:pPr algn="l">
+              <a:lnSpc>
+                <a:spcPct val="105000"/>
               </a:lnSpc>
               <a:spcBef>
                 <a:spcPts val="0"/>
@@ -9979,27 +10311,89 @@
               </a:spcAft>
             </a:pPr>
             <a:r>
-              <a:rPr sz="4400" b="1" i="0">
+              <a:rPr sz="1500" b="1" i="0">
+                <a:solidFill>
+                  <a:srgbClr val="C9601A"/>
+                </a:solidFill>
+                <a:latin typeface="Georgia"/>
+              </a:rPr>
+              <a:t>OS1 : </a:t>
+            </a:r>
+            <a:r>
+              <a:rPr sz="1400" b="0" i="0">
+                <a:solidFill>
+                  <a:srgbClr val="CADDDC"/>
+                </a:solidFill>
+                <a:latin typeface="Calibri"/>
+              </a:rPr>
+              <a:t>chaîne d'acquisition ER fonctionnelle, suivi d'essais run-to-failure complets.</a:t>
+            </a:r>
+          </a:p>
+        </p:txBody>
+      </p:sp>
+      <p:sp>
+        <p:nvSpPr>
+          <p:cNvPr id="8" name="Oval 7"/>
+          <p:cNvSpPr/>
+          <p:nvPr/>
+        </p:nvSpPr>
+        <p:spPr>
+          <a:xfrm>
+            <a:off x="886968" y="2816352"/>
+            <a:ext cx="548640" cy="548640"/>
+          </a:xfrm>
+          <a:prstGeom prst="ellipse">
+            <a:avLst/>
+          </a:prstGeom>
+          <a:solidFill>
+            <a:srgbClr val="C9601A"/>
+          </a:solidFill>
+          <a:ln>
+            <a:noFill/>
+          </a:ln>
+          <a:effectLst/>
+        </p:spPr>
+        <p:style>
+          <a:lnRef idx="1">
+            <a:schemeClr val="accent1"/>
+          </a:lnRef>
+          <a:fillRef idx="3">
+            <a:schemeClr val="accent1"/>
+          </a:fillRef>
+          <a:effectRef idx="2">
+            <a:schemeClr val="accent1"/>
+          </a:effectRef>
+          <a:fontRef idx="minor">
+            <a:schemeClr val="lt1"/>
+          </a:fontRef>
+        </p:style>
+        <p:txBody>
+          <a:bodyPr rtlCol="0" anchor="ctr" wrap="none" lIns="0" rIns="0" tIns="0" bIns="0"/>
+          <a:lstStyle/>
+          <a:p>
+            <a:pPr algn="ctr"/>
+            <a:r>
+              <a:rPr sz="1700" b="1">
                 <a:solidFill>
                   <a:srgbClr val="FFFFFF"/>
                 </a:solidFill>
                 <a:latin typeface="Georgia"/>
               </a:rPr>
-              <a:t>Merci de votre attention</a:t>
-            </a:r>
-          </a:p>
-        </p:txBody>
-      </p:sp>
-      <p:sp>
-        <p:nvSpPr>
-          <p:cNvPr id="6" name="TextBox 5"/>
+              <a:t>2</a:t>
+            </a:r>
+          </a:p>
+        </p:txBody>
+      </p:sp>
+      <p:sp>
+        <p:nvSpPr>
+          <p:cNvPr id="9" name="TextBox 8"/>
           <p:cNvSpPr txBox="1"/>
           <p:nvPr/>
         </p:nvSpPr>
         <p:spPr>
           <a:xfrm>
-            <a:off x="914400" y="3429000"/>
-            <a:ext cx="10332720" cy="640080"/>
+            <a:off x="1645920" y="2834640"/>
+            <a:ext cx="9692640" cy="548640"/>
           </a:xfrm>
           <a:prstGeom prst="rect">
             <a:avLst/>
@@ -10012,9 +10406,9 @@
           </a:bodyPr>
           <a:lstStyle/>
           <a:p>
-            <a:pPr algn="ctr">
-              <a:lnSpc>
-                <a:spcPct val="100000"/>
+            <a:pPr algn="l">
+              <a:lnSpc>
+                <a:spcPct val="105000"/>
               </a:lnSpc>
               <a:spcBef>
                 <a:spcPts val="0"/>
@@ -10024,27 +10418,89 @@
               </a:spcAft>
             </a:pPr>
             <a:r>
-              <a:rPr sz="2200" b="1" i="1">
+              <a:rPr sz="1500" b="1" i="0">
                 <a:solidFill>
                   <a:srgbClr val="C9601A"/>
                 </a:solidFill>
-                <a:latin typeface="Calibri"/>
-              </a:rPr>
-              <a:t>Questions &amp; discussion</a:t>
-            </a:r>
-          </a:p>
-        </p:txBody>
-      </p:sp>
-      <p:sp>
-        <p:nvSpPr>
-          <p:cNvPr id="7" name="TextBox 6"/>
+                <a:latin typeface="Georgia"/>
+              </a:rPr>
+              <a:t>OS2 : </a:t>
+            </a:r>
+            <a:r>
+              <a:rPr sz="1400" b="0" i="0">
+                <a:solidFill>
+                  <a:srgbClr val="CADDDC"/>
+                </a:solidFill>
+                <a:latin typeface="Calibri"/>
+              </a:rPr>
+              <a:t>XGBoost prédit le CR et surpasse les baselines, sous condition de couverture.</a:t>
+            </a:r>
+          </a:p>
+        </p:txBody>
+      </p:sp>
+      <p:sp>
+        <p:nvSpPr>
+          <p:cNvPr id="10" name="Oval 9"/>
+          <p:cNvSpPr/>
+          <p:nvPr/>
+        </p:nvSpPr>
+        <p:spPr>
+          <a:xfrm>
+            <a:off x="886968" y="3529584"/>
+            <a:ext cx="548640" cy="548640"/>
+          </a:xfrm>
+          <a:prstGeom prst="ellipse">
+            <a:avLst/>
+          </a:prstGeom>
+          <a:solidFill>
+            <a:srgbClr val="C9601A"/>
+          </a:solidFill>
+          <a:ln>
+            <a:noFill/>
+          </a:ln>
+          <a:effectLst/>
+        </p:spPr>
+        <p:style>
+          <a:lnRef idx="1">
+            <a:schemeClr val="accent1"/>
+          </a:lnRef>
+          <a:fillRef idx="3">
+            <a:schemeClr val="accent1"/>
+          </a:fillRef>
+          <a:effectRef idx="2">
+            <a:schemeClr val="accent1"/>
+          </a:effectRef>
+          <a:fontRef idx="minor">
+            <a:schemeClr val="lt1"/>
+          </a:fontRef>
+        </p:style>
+        <p:txBody>
+          <a:bodyPr rtlCol="0" anchor="ctr" wrap="none" lIns="0" rIns="0" tIns="0" bIns="0"/>
+          <a:lstStyle/>
+          <a:p>
+            <a:pPr algn="ctr"/>
+            <a:r>
+              <a:rPr sz="1700" b="1">
+                <a:solidFill>
+                  <a:srgbClr val="FFFFFF"/>
+                </a:solidFill>
+                <a:latin typeface="Georgia"/>
+              </a:rPr>
+              <a:t>3</a:t>
+            </a:r>
+          </a:p>
+        </p:txBody>
+      </p:sp>
+      <p:sp>
+        <p:nvSpPr>
+          <p:cNvPr id="11" name="TextBox 10"/>
           <p:cNvSpPr txBox="1"/>
           <p:nvPr/>
         </p:nvSpPr>
         <p:spPr>
           <a:xfrm>
-            <a:off x="914400" y="4754880"/>
-            <a:ext cx="10332720" cy="731520"/>
+            <a:off x="1645920" y="3547872"/>
+            <a:ext cx="9692640" cy="548640"/>
           </a:xfrm>
           <a:prstGeom prst="rect">
             <a:avLst/>
@@ -10057,7 +10513,222 @@
           </a:bodyPr>
           <a:lstStyle/>
           <a:p>
-            <a:pPr algn="ctr">
+            <a:pPr algn="l">
+              <a:lnSpc>
+                <a:spcPct val="105000"/>
+              </a:lnSpc>
+              <a:spcBef>
+                <a:spcPts val="0"/>
+              </a:spcBef>
+              <a:spcAft>
+                <a:spcPts val="400"/>
+              </a:spcAft>
+            </a:pPr>
+            <a:r>
+              <a:rPr sz="1500" b="1" i="0">
+                <a:solidFill>
+                  <a:srgbClr val="C9601A"/>
+                </a:solidFill>
+                <a:latin typeface="Georgia"/>
+              </a:rPr>
+              <a:t>OS3 : </a:t>
+            </a:r>
+            <a:r>
+              <a:rPr sz="1400" b="0" i="0">
+                <a:solidFill>
+                  <a:srgbClr val="CADDDC"/>
+                </a:solidFill>
+                <a:latin typeface="Calibri"/>
+              </a:rPr>
+              <a:t>température dominante ; la répétabilité des conditions fait la fiabilité.</a:t>
+            </a:r>
+          </a:p>
+        </p:txBody>
+      </p:sp>
+      <p:sp>
+        <p:nvSpPr>
+          <p:cNvPr id="12" name="Oval 11"/>
+          <p:cNvSpPr/>
+          <p:nvPr/>
+        </p:nvSpPr>
+        <p:spPr>
+          <a:xfrm>
+            <a:off x="886968" y="4242816"/>
+            <a:ext cx="548640" cy="548640"/>
+          </a:xfrm>
+          <a:prstGeom prst="ellipse">
+            <a:avLst/>
+          </a:prstGeom>
+          <a:solidFill>
+            <a:srgbClr val="C9601A"/>
+          </a:solidFill>
+          <a:ln>
+            <a:noFill/>
+          </a:ln>
+          <a:effectLst/>
+        </p:spPr>
+        <p:style>
+          <a:lnRef idx="1">
+            <a:schemeClr val="accent1"/>
+          </a:lnRef>
+          <a:fillRef idx="3">
+            <a:schemeClr val="accent1"/>
+          </a:fillRef>
+          <a:effectRef idx="2">
+            <a:schemeClr val="accent1"/>
+          </a:effectRef>
+          <a:fontRef idx="minor">
+            <a:schemeClr val="lt1"/>
+          </a:fontRef>
+        </p:style>
+        <p:txBody>
+          <a:bodyPr rtlCol="0" anchor="ctr" wrap="none" lIns="0" rIns="0" tIns="0" bIns="0"/>
+          <a:lstStyle/>
+          <a:p>
+            <a:pPr algn="ctr"/>
+            <a:r>
+              <a:rPr sz="1700" b="1">
+                <a:solidFill>
+                  <a:srgbClr val="FFFFFF"/>
+                </a:solidFill>
+                <a:latin typeface="Georgia"/>
+              </a:rPr>
+              <a:t>4</a:t>
+            </a:r>
+          </a:p>
+        </p:txBody>
+      </p:sp>
+      <p:sp>
+        <p:nvSpPr>
+          <p:cNvPr id="13" name="TextBox 12"/>
+          <p:cNvSpPr txBox="1"/>
+          <p:nvPr/>
+        </p:nvSpPr>
+        <p:spPr>
+          <a:xfrm>
+            <a:off x="1645920" y="4261104"/>
+            <a:ext cx="9692640" cy="548640"/>
+          </a:xfrm>
+          <a:prstGeom prst="rect">
+            <a:avLst/>
+          </a:prstGeom>
+          <a:noFill/>
+        </p:spPr>
+        <p:txBody>
+          <a:bodyPr wrap="square" anchor="t" lIns="0" rIns="0" tIns="0" bIns="0">
+            <a:spAutoFit/>
+          </a:bodyPr>
+          <a:lstStyle/>
+          <a:p>
+            <a:pPr algn="l">
+              <a:lnSpc>
+                <a:spcPct val="105000"/>
+              </a:lnSpc>
+              <a:spcBef>
+                <a:spcPts val="0"/>
+              </a:spcBef>
+              <a:spcAft>
+                <a:spcPts val="400"/>
+              </a:spcAft>
+            </a:pPr>
+            <a:r>
+              <a:rPr sz="1500" b="1" i="0">
+                <a:solidFill>
+                  <a:srgbClr val="C9601A"/>
+                </a:solidFill>
+                <a:latin typeface="Georgia"/>
+              </a:rPr>
+              <a:t>OS4 : </a:t>
+            </a:r>
+            <a:r>
+              <a:rPr sz="1400" b="0" i="0">
+                <a:solidFill>
+                  <a:srgbClr val="CADDDC"/>
+                </a:solidFill>
+                <a:latin typeface="Calibri"/>
+              </a:rPr>
+              <a:t>boucle décision → action démontrée par un module GMAO maison, à coût nul.</a:t>
+            </a:r>
+          </a:p>
+        </p:txBody>
+      </p:sp>
+      <p:sp>
+        <p:nvSpPr>
+          <p:cNvPr id="14" name="TextBox 13"/>
+          <p:cNvSpPr txBox="1"/>
+          <p:nvPr/>
+        </p:nvSpPr>
+        <p:spPr>
+          <a:xfrm>
+            <a:off x="868680" y="5212080"/>
+            <a:ext cx="10424160" cy="914400"/>
+          </a:xfrm>
+          <a:prstGeom prst="rect">
+            <a:avLst/>
+          </a:prstGeom>
+          <a:noFill/>
+        </p:spPr>
+        <p:txBody>
+          <a:bodyPr wrap="square" anchor="t" lIns="0" rIns="0" tIns="0" bIns="0">
+            <a:spAutoFit/>
+          </a:bodyPr>
+          <a:lstStyle/>
+          <a:p>
+            <a:pPr algn="l">
+              <a:lnSpc>
+                <a:spcPct val="115000"/>
+              </a:lnSpc>
+              <a:spcBef>
+                <a:spcPts val="0"/>
+              </a:spcBef>
+              <a:spcAft>
+                <a:spcPts val="400"/>
+              </a:spcAft>
+            </a:pPr>
+            <a:r>
+              <a:rPr sz="1450" b="1" i="0">
+                <a:solidFill>
+                  <a:srgbClr val="FFFFFF"/>
+                </a:solidFill>
+                <a:latin typeface="Calibri"/>
+              </a:rPr>
+              <a:t>Objectifs partiellement atteints, en cours de consolidation. </a:t>
+            </a:r>
+            <a:r>
+              <a:rPr sz="1450" b="0" i="1">
+                <a:solidFill>
+                  <a:srgbClr val="CADDDC"/>
+                </a:solidFill>
+                <a:latin typeface="Calibri"/>
+              </a:rPr>
+              <a:t>Mais un prototype qui va de la mesure à la décision, transposable des deux côtés.</a:t>
+            </a:r>
+          </a:p>
+        </p:txBody>
+      </p:sp>
+      <p:sp>
+        <p:nvSpPr>
+          <p:cNvPr id="15" name="TextBox 14"/>
+          <p:cNvSpPr txBox="1"/>
+          <p:nvPr/>
+        </p:nvSpPr>
+        <p:spPr>
+          <a:xfrm>
+            <a:off x="457200" y="6437376"/>
+            <a:ext cx="8229600" cy="320040"/>
+          </a:xfrm>
+          <a:prstGeom prst="rect">
+            <a:avLst/>
+          </a:prstGeom>
+          <a:noFill/>
+        </p:spPr>
+        <p:txBody>
+          <a:bodyPr wrap="square" anchor="t" lIns="0" rIns="0" tIns="0" bIns="0">
+            <a:spAutoFit/>
+          </a:bodyPr>
+          <a:lstStyle/>
+          <a:p>
+            <a:pPr algn="l">
               <a:lnSpc>
                 <a:spcPct val="100000"/>
               </a:lnSpc>
@@ -10069,17 +10740,40 @@
               </a:spcAft>
             </a:pPr>
             <a:r>
-              <a:rPr sz="1500" b="1" i="0">
+              <a:rPr sz="900" b="0" i="0">
                 <a:solidFill>
                   <a:srgbClr val="CADDDC"/>
                 </a:solidFill>
                 <a:latin typeface="Calibri"/>
               </a:rPr>
-              <a:t>BATOUMBI IKOND Ricky Parfait</a:t>
-            </a:r>
-          </a:p>
-          <a:p>
-            <a:pPr algn="ctr">
+              <a:t>Maintenance prédictive de la corrosion  ·  ESTL La Salle  ·  2025–2026</a:t>
+            </a:r>
+          </a:p>
+        </p:txBody>
+      </p:sp>
+      <p:sp>
+        <p:nvSpPr>
+          <p:cNvPr id="16" name="TextBox 15"/>
+          <p:cNvSpPr txBox="1"/>
+          <p:nvPr/>
+        </p:nvSpPr>
+        <p:spPr>
+          <a:xfrm>
+            <a:off x="10424160" y="6437376"/>
+            <a:ext cx="1325880" cy="320040"/>
+          </a:xfrm>
+          <a:prstGeom prst="rect">
+            <a:avLst/>
+          </a:prstGeom>
+          <a:noFill/>
+        </p:spPr>
+        <p:txBody>
+          <a:bodyPr wrap="square" anchor="t" lIns="0" rIns="0" tIns="0" bIns="0">
+            <a:spAutoFit/>
+          </a:bodyPr>
+          <a:lstStyle/>
+          <a:p>
+            <a:pPr algn="r">
               <a:lnSpc>
                 <a:spcPct val="100000"/>
               </a:lnSpc>
@@ -10091,13 +10785,13 @@
               </a:spcAft>
             </a:pPr>
             <a:r>
-              <a:rPr sz="1200" b="0" i="0">
-                <a:solidFill>
-                  <a:srgbClr val="6B7A82"/>
-                </a:solidFill>
-                <a:latin typeface="Calibri"/>
-              </a:rPr>
-              <a:t>Master 2, Maintenance Industrielle et Productique  ·  ESTL La Salle  ·  2025–2026</a:t>
+              <a:rPr sz="1000" b="1" i="0">
+                <a:solidFill>
+                  <a:srgbClr val="C9601A"/>
+                </a:solidFill>
+                <a:latin typeface="Calibri"/>
+              </a:rPr>
+              <a:t>19 / 20</a:t>
             </a:r>
           </a:p>
         </p:txBody>
@@ -11103,7 +11797,314 @@
                 </a:solidFill>
                 <a:latin typeface="Calibri"/>
               </a:rPr>
-              <a:t>02 / 19</a:t>
+              <a:t>02 / 20</a:t>
+            </a:r>
+          </a:p>
+        </p:txBody>
+      </p:sp>
+    </p:spTree>
+  </p:cSld>
+  <p:clrMapOvr>
+    <a:masterClrMapping/>
+  </p:clrMapOvr>
+</p:sld>
+</file>
+
+<file path=ppt/slides/slide20.xml><?xml version="1.0" encoding="utf-8"?>
+<p:sld xmlns:a="http://schemas.openxmlformats.org/drawingml/2006/main" xmlns:p="http://schemas.openxmlformats.org/presentationml/2006/main" xmlns:r="http://schemas.openxmlformats.org/officeDocument/2006/relationships">
+  <p:cSld>
+    <p:spTree>
+      <p:nvGrpSpPr>
+        <p:cNvPr id="1" name=""/>
+        <p:cNvGrpSpPr/>
+        <p:nvPr/>
+      </p:nvGrpSpPr>
+      <p:grpSpPr/>
+      <p:sp>
+        <p:nvSpPr>
+          <p:cNvPr id="2" name="Rectangle 1"/>
+          <p:cNvSpPr/>
+          <p:nvPr/>
+        </p:nvSpPr>
+        <p:spPr>
+          <a:xfrm>
+            <a:off x="-54864" y="-54864"/>
+            <a:ext cx="12301423" cy="6967728"/>
+          </a:xfrm>
+          <a:prstGeom prst="rect">
+            <a:avLst/>
+          </a:prstGeom>
+          <a:solidFill>
+            <a:srgbClr val="16252E"/>
+          </a:solidFill>
+          <a:ln>
+            <a:noFill/>
+          </a:ln>
+          <a:effectLst/>
+        </p:spPr>
+        <p:style>
+          <a:lnRef idx="1">
+            <a:schemeClr val="accent1"/>
+          </a:lnRef>
+          <a:fillRef idx="3">
+            <a:schemeClr val="accent1"/>
+          </a:fillRef>
+          <a:effectRef idx="2">
+            <a:schemeClr val="accent1"/>
+          </a:effectRef>
+          <a:fontRef idx="minor">
+            <a:schemeClr val="lt1"/>
+          </a:fontRef>
+        </p:style>
+        <p:txBody>
+          <a:bodyPr rtlCol="0" anchor="ctr"/>
+          <a:lstStyle/>
+          <a:p>
+            <a:pPr algn="ctr"/>
+          </a:p>
+        </p:txBody>
+      </p:sp>
+      <p:sp>
+        <p:nvSpPr>
+          <p:cNvPr id="3" name="Rectangle 2"/>
+          <p:cNvSpPr/>
+          <p:nvPr/>
+        </p:nvSpPr>
+        <p:spPr>
+          <a:xfrm>
+            <a:off x="0" y="0"/>
+            <a:ext cx="12191695" cy="256032"/>
+          </a:xfrm>
+          <a:prstGeom prst="rect">
+            <a:avLst/>
+          </a:prstGeom>
+          <a:solidFill>
+            <a:srgbClr val="C9601A"/>
+          </a:solidFill>
+          <a:ln>
+            <a:noFill/>
+          </a:ln>
+          <a:effectLst/>
+        </p:spPr>
+        <p:style>
+          <a:lnRef idx="1">
+            <a:schemeClr val="accent1"/>
+          </a:lnRef>
+          <a:fillRef idx="3">
+            <a:schemeClr val="accent1"/>
+          </a:fillRef>
+          <a:effectRef idx="2">
+            <a:schemeClr val="accent1"/>
+          </a:effectRef>
+          <a:fontRef idx="minor">
+            <a:schemeClr val="lt1"/>
+          </a:fontRef>
+        </p:style>
+        <p:txBody>
+          <a:bodyPr rtlCol="0" anchor="ctr"/>
+          <a:lstStyle/>
+          <a:p>
+            <a:pPr algn="ctr"/>
+          </a:p>
+        </p:txBody>
+      </p:sp>
+      <p:sp>
+        <p:nvSpPr>
+          <p:cNvPr id="4" name="Rectangle 3"/>
+          <p:cNvSpPr/>
+          <p:nvPr/>
+        </p:nvSpPr>
+        <p:spPr>
+          <a:xfrm>
+            <a:off x="0" y="6601968"/>
+            <a:ext cx="12191695" cy="256032"/>
+          </a:xfrm>
+          <a:prstGeom prst="rect">
+            <a:avLst/>
+          </a:prstGeom>
+          <a:solidFill>
+            <a:srgbClr val="C9601A"/>
+          </a:solidFill>
+          <a:ln>
+            <a:noFill/>
+          </a:ln>
+          <a:effectLst/>
+        </p:spPr>
+        <p:style>
+          <a:lnRef idx="1">
+            <a:schemeClr val="accent1"/>
+          </a:lnRef>
+          <a:fillRef idx="3">
+            <a:schemeClr val="accent1"/>
+          </a:fillRef>
+          <a:effectRef idx="2">
+            <a:schemeClr val="accent1"/>
+          </a:effectRef>
+          <a:fontRef idx="minor">
+            <a:schemeClr val="lt1"/>
+          </a:fontRef>
+        </p:style>
+        <p:txBody>
+          <a:bodyPr rtlCol="0" anchor="ctr"/>
+          <a:lstStyle/>
+          <a:p>
+            <a:pPr algn="ctr"/>
+          </a:p>
+        </p:txBody>
+      </p:sp>
+      <p:sp>
+        <p:nvSpPr>
+          <p:cNvPr id="5" name="TextBox 4"/>
+          <p:cNvSpPr txBox="1"/>
+          <p:nvPr/>
+        </p:nvSpPr>
+        <p:spPr>
+          <a:xfrm>
+            <a:off x="914400" y="2286000"/>
+            <a:ext cx="10332720" cy="1097280"/>
+          </a:xfrm>
+          <a:prstGeom prst="rect">
+            <a:avLst/>
+          </a:prstGeom>
+          <a:noFill/>
+        </p:spPr>
+        <p:txBody>
+          <a:bodyPr wrap="square" anchor="t" lIns="0" rIns="0" tIns="0" bIns="0">
+            <a:spAutoFit/>
+          </a:bodyPr>
+          <a:lstStyle/>
+          <a:p>
+            <a:pPr algn="ctr">
+              <a:lnSpc>
+                <a:spcPct val="100000"/>
+              </a:lnSpc>
+              <a:spcBef>
+                <a:spcPts val="0"/>
+              </a:spcBef>
+              <a:spcAft>
+                <a:spcPts val="400"/>
+              </a:spcAft>
+            </a:pPr>
+            <a:r>
+              <a:rPr sz="4400" b="1" i="0">
+                <a:solidFill>
+                  <a:srgbClr val="FFFFFF"/>
+                </a:solidFill>
+                <a:latin typeface="Georgia"/>
+              </a:rPr>
+              <a:t>Merci de votre attention</a:t>
+            </a:r>
+          </a:p>
+        </p:txBody>
+      </p:sp>
+      <p:sp>
+        <p:nvSpPr>
+          <p:cNvPr id="6" name="TextBox 5"/>
+          <p:cNvSpPr txBox="1"/>
+          <p:nvPr/>
+        </p:nvSpPr>
+        <p:spPr>
+          <a:xfrm>
+            <a:off x="914400" y="3429000"/>
+            <a:ext cx="10332720" cy="640080"/>
+          </a:xfrm>
+          <a:prstGeom prst="rect">
+            <a:avLst/>
+          </a:prstGeom>
+          <a:noFill/>
+        </p:spPr>
+        <p:txBody>
+          <a:bodyPr wrap="square" anchor="t" lIns="0" rIns="0" tIns="0" bIns="0">
+            <a:spAutoFit/>
+          </a:bodyPr>
+          <a:lstStyle/>
+          <a:p>
+            <a:pPr algn="ctr">
+              <a:lnSpc>
+                <a:spcPct val="100000"/>
+              </a:lnSpc>
+              <a:spcBef>
+                <a:spcPts val="0"/>
+              </a:spcBef>
+              <a:spcAft>
+                <a:spcPts val="400"/>
+              </a:spcAft>
+            </a:pPr>
+            <a:r>
+              <a:rPr sz="2200" b="1" i="1">
+                <a:solidFill>
+                  <a:srgbClr val="C9601A"/>
+                </a:solidFill>
+                <a:latin typeface="Calibri"/>
+              </a:rPr>
+              <a:t>Questions &amp; discussion</a:t>
+            </a:r>
+          </a:p>
+        </p:txBody>
+      </p:sp>
+      <p:sp>
+        <p:nvSpPr>
+          <p:cNvPr id="7" name="TextBox 6"/>
+          <p:cNvSpPr txBox="1"/>
+          <p:nvPr/>
+        </p:nvSpPr>
+        <p:spPr>
+          <a:xfrm>
+            <a:off x="914400" y="4754880"/>
+            <a:ext cx="10332720" cy="731520"/>
+          </a:xfrm>
+          <a:prstGeom prst="rect">
+            <a:avLst/>
+          </a:prstGeom>
+          <a:noFill/>
+        </p:spPr>
+        <p:txBody>
+          <a:bodyPr wrap="square" anchor="t" lIns="0" rIns="0" tIns="0" bIns="0">
+            <a:spAutoFit/>
+          </a:bodyPr>
+          <a:lstStyle/>
+          <a:p>
+            <a:pPr algn="ctr">
+              <a:lnSpc>
+                <a:spcPct val="100000"/>
+              </a:lnSpc>
+              <a:spcBef>
+                <a:spcPts val="0"/>
+              </a:spcBef>
+              <a:spcAft>
+                <a:spcPts val="400"/>
+              </a:spcAft>
+            </a:pPr>
+            <a:r>
+              <a:rPr sz="1500" b="1" i="0">
+                <a:solidFill>
+                  <a:srgbClr val="CADDDC"/>
+                </a:solidFill>
+                <a:latin typeface="Calibri"/>
+              </a:rPr>
+              <a:t>BATOUMBI IKOND Ricky Parfait</a:t>
+            </a:r>
+          </a:p>
+          <a:p>
+            <a:pPr algn="ctr">
+              <a:lnSpc>
+                <a:spcPct val="100000"/>
+              </a:lnSpc>
+              <a:spcBef>
+                <a:spcPts val="0"/>
+              </a:spcBef>
+              <a:spcAft>
+                <a:spcPts val="400"/>
+              </a:spcAft>
+            </a:pPr>
+            <a:r>
+              <a:rPr sz="1200" b="0" i="0">
+                <a:solidFill>
+                  <a:srgbClr val="6B7A82"/>
+                </a:solidFill>
+                <a:latin typeface="Calibri"/>
+              </a:rPr>
+              <a:t>Master 2, Maintenance Industrielle et Productique  ·  ESTL La Salle  ·  2025–2026</a:t>
             </a:r>
           </a:p>
         </p:txBody>
@@ -12120,7 +13121,7 @@
                 </a:solidFill>
                 <a:latin typeface="Calibri"/>
               </a:rPr>
-              <a:t>03 / 19</a:t>
+              <a:t>03 / 20</a:t>
             </a:r>
           </a:p>
         </p:txBody>
@@ -12898,7 +13899,7 @@
                 </a:solidFill>
                 <a:latin typeface="Calibri"/>
               </a:rPr>
-              <a:t>04 / 19</a:t>
+              <a:t>04 / 20</a:t>
             </a:r>
           </a:p>
         </p:txBody>
@@ -14662,7 +15663,7 @@
                 </a:solidFill>
                 <a:latin typeface="Calibri"/>
               </a:rPr>
-              <a:t>05 / 19</a:t>
+              <a:t>05 / 20</a:t>
             </a:r>
           </a:p>
         </p:txBody>
@@ -15572,7 +16573,7 @@
                 </a:solidFill>
                 <a:latin typeface="Calibri"/>
               </a:rPr>
-              <a:t>06 / 19</a:t>
+              <a:t>06 / 20</a:t>
             </a:r>
           </a:p>
         </p:txBody>
@@ -16100,7 +17101,7 @@
                 </a:solidFill>
                 <a:latin typeface="Calibri"/>
               </a:rPr>
-              <a:t>07 / 19</a:t>
+              <a:t>07 / 20</a:t>
             </a:r>
           </a:p>
         </p:txBody>
@@ -16806,7 +17807,7 @@
                 </a:solidFill>
                 <a:latin typeface="Calibri"/>
               </a:rPr>
-              <a:t>08 / 19</a:t>
+              <a:t>08 / 20</a:t>
             </a:r>
           </a:p>
         </p:txBody>
@@ -17023,8 +18024,8 @@
         </p:blipFill>
         <p:spPr>
           <a:xfrm>
-            <a:off x="708042" y="1965960"/>
-            <a:ext cx="10791155" cy="3246120"/>
+            <a:off x="2000210" y="1965960"/>
+            <a:ext cx="8206818" cy="3246120"/>
           </a:xfrm>
           <a:prstGeom prst="rect">
             <a:avLst/>
@@ -17065,13 +18066,40 @@
               </a:spcAft>
             </a:pPr>
             <a:r>
-              <a:rPr sz="1450" b="1" i="0">
+              <a:rPr sz="1400" b="0" i="0">
                 <a:solidFill>
                   <a:srgbClr val="202B31"/>
                 </a:solidFill>
+                <a:latin typeface="Calibri"/>
+              </a:rPr>
+              <a:t>Le 1ᵉʳ arbre prédit 121, près de la moyenne des données : erreur −268. </a:t>
+            </a:r>
+            <a:r>
+              <a:rPr sz="1400" b="1" i="0">
+                <a:solidFill>
+                  <a:srgbClr val="C9601A"/>
+                </a:solidFill>
+                <a:latin typeface="Calibri"/>
+              </a:rPr>
+              <a:t>Chaque arbre suivant apprend l'erreur restante et la corrige un peu</a:t>
+            </a:r>
+            <a:r>
+              <a:rPr sz="1400" b="0" i="0">
+                <a:solidFill>
+                  <a:srgbClr val="202B31"/>
+                </a:solidFill>
+                <a:latin typeface="Calibri"/>
+              </a:rPr>
+              <a:t> : 135, 137, 197, 372… et après 500 arbres, </a:t>
+            </a:r>
+            <a:r>
+              <a:rPr sz="1400" b="1" i="0">
+                <a:solidFill>
+                  <a:srgbClr val="202B31"/>
+                </a:solidFill>
                 <a:latin typeface="Georgia"/>
               </a:rPr>
-              <a:t>Un arbre seul prédit mal. </a:t>
+              <a:t>390 pour 389 mesurés</a:t>
             </a:r>
             <a:r>
               <a:rPr sz="1400" b="0" i="0">
@@ -17080,25 +18108,7 @@
                 </a:solidFill>
                 <a:latin typeface="Calibri"/>
               </a:rPr>
-              <a:t>Mais chaque arbre suivant apprend les erreurs du précédent, et la </a:t>
-            </a:r>
-            <a:r>
-              <a:rPr sz="1400" b="1" i="0">
-                <a:solidFill>
-                  <a:srgbClr val="C9601A"/>
-                </a:solidFill>
-                <a:latin typeface="Calibri"/>
-              </a:rPr>
-              <a:t>somme des petites corrections</a:t>
-            </a:r>
-            <a:r>
-              <a:rPr sz="1400" b="0" i="0">
-                <a:solidFill>
-                  <a:srgbClr val="202B31"/>
-                </a:solidFill>
-                <a:latin typeface="Calibri"/>
-              </a:rPr>
-              <a:t> donne la prédiction du taux de corrosion. C'est le gradient boosting.</a:t>
+              <a:t>. C'est le gradient boosting.</a:t>
             </a:r>
           </a:p>
         </p:txBody>
@@ -17188,7 +18198,7 @@
                 </a:solidFill>
                 <a:latin typeface="Calibri"/>
               </a:rPr>
-              <a:t>09 / 19</a:t>
+              <a:t>09 / 20</a:t>
             </a:r>
           </a:p>
         </p:txBody>

--- a/soutenance/Soutenance_Corrosion_BATOUMBI.pptx
+++ b/soutenance/Soutenance_Corrosion_BATOUMBI.pptx
@@ -6484,8 +6484,8 @@
         </p:blipFill>
         <p:spPr>
           <a:xfrm>
-            <a:off x="6400800" y="2495887"/>
-            <a:ext cx="5212080" cy="3146385"/>
+            <a:off x="6400800" y="2501515"/>
+            <a:ext cx="5212080" cy="3135128"/>
           </a:xfrm>
           <a:prstGeom prst="rect">
             <a:avLst/>
@@ -7906,8 +7906,8 @@
         </p:blipFill>
         <p:spPr>
           <a:xfrm>
-            <a:off x="6355080" y="2707165"/>
-            <a:ext cx="5257800" cy="2083749"/>
+            <a:off x="6355080" y="2701630"/>
+            <a:ext cx="5257800" cy="2094818"/>
           </a:xfrm>
           <a:prstGeom prst="rect">
             <a:avLst/>
@@ -16791,7 +16791,7 @@
         <p:spPr>
           <a:xfrm>
             <a:off x="6583680" y="2148840"/>
-            <a:ext cx="4983480" cy="2782824"/>
+            <a:ext cx="4983480" cy="2788920"/>
           </a:xfrm>
           <a:prstGeom prst="rect">
             <a:avLst/>
